--- a/slides/lt-ear-parallel.pptx
+++ b/slides/lt-ear-parallel.pptx
@@ -18657,7 +18657,7 @@
         <p:spPr>
           <a:xfrm>
             <a:off x="7498079" y="1133856"/>
-            <a:ext cx="4187952" cy="1417320"/>
+            <a:ext cx="4187952" cy="1920240"/>
           </a:xfrm>
           <a:prstGeom prst="rect">
             <a:avLst/>
@@ -18701,7 +18701,7 @@
         <p:spPr>
           <a:xfrm>
             <a:off x="7498079" y="1133856"/>
-            <a:ext cx="4187952" cy="1417320"/>
+            <a:ext cx="4187952" cy="1920240"/>
           </a:xfrm>
           <a:prstGeom prst="rect">
             <a:avLst/>
@@ -18716,11 +18716,11 @@
           <a:p>
             <a:pPr algn="ctr">
               <a:spcAft>
-                <a:spcPts val="400"/>
-              </a:spcAft>
-            </a:pPr>
-            <a:r>
-              <a:rPr sz="1300" b="0" i="0">
+                <a:spcPts val="300"/>
+              </a:spcAft>
+            </a:pPr>
+            <a:r>
+              <a:rPr sz="1200" b="0" i="0">
                 <a:solidFill>
                   <a:srgbClr val="8C8C8C"/>
                 </a:solidFill>
@@ -18728,7 +18728,9 @@
                 <a:ea typeface="Meiryo"/>
                 <a:cs typeface="Meiryo"/>
               </a:rPr>
-              <a:t>[  PineBuds Pro の写真をここに  ]</a:t>
+              <a:t>[  PineBuds Pro の写真をここに  ]
+slides/assets/pinebuds.jpg を置いて
+scripts/make_lt_pptx.py を再実行</a:t>
             </a:r>
           </a:p>
         </p:txBody>
@@ -18741,8 +18743,8 @@
         </p:nvSpPr>
         <p:spPr>
           <a:xfrm>
-            <a:off x="7498079" y="2697480"/>
-            <a:ext cx="4187952" cy="1920240"/>
+            <a:off x="7498079" y="3200400"/>
+            <a:ext cx="4187952" cy="1737360"/>
           </a:xfrm>
           <a:prstGeom prst="rect">
             <a:avLst/>
@@ -18785,7 +18787,7 @@
         </p:nvSpPr>
         <p:spPr>
           <a:xfrm>
-            <a:off x="7498079" y="2697480"/>
+            <a:off x="7498079" y="3200400"/>
             <a:ext cx="4187952" cy="384048"/>
           </a:xfrm>
           <a:prstGeom prst="rect">
@@ -18829,7 +18831,7 @@
         </p:nvSpPr>
         <p:spPr>
           <a:xfrm>
-            <a:off x="7498079" y="2697480"/>
+            <a:off x="7498079" y="3200400"/>
             <a:ext cx="4187952" cy="384048"/>
           </a:xfrm>
           <a:prstGeom prst="rect">
@@ -18870,8 +18872,8 @@
         </p:nvSpPr>
         <p:spPr>
           <a:xfrm>
-            <a:off x="7498079" y="3081528"/>
-            <a:ext cx="4187952" cy="1536192"/>
+            <a:off x="7498079" y="3584448"/>
+            <a:ext cx="4187952" cy="1353312"/>
           </a:xfrm>
           <a:prstGeom prst="rect">
             <a:avLst/>
@@ -18965,8 +18967,8 @@
         </p:nvSpPr>
         <p:spPr>
           <a:xfrm>
-            <a:off x="7498079" y="4773168"/>
-            <a:ext cx="4187952" cy="1298448"/>
+            <a:off x="7498079" y="5084064"/>
+            <a:ext cx="4187952" cy="1170432"/>
           </a:xfrm>
           <a:prstGeom prst="rect">
             <a:avLst/>
@@ -19009,8 +19011,8 @@
         </p:nvSpPr>
         <p:spPr>
           <a:xfrm>
-            <a:off x="7498079" y="4773168"/>
-            <a:ext cx="4187952" cy="1298448"/>
+            <a:off x="7498079" y="5084064"/>
+            <a:ext cx="4187952" cy="1170432"/>
           </a:xfrm>
           <a:prstGeom prst="rect">
             <a:avLst/>

--- a/slides/lt-ear-parallel.pptx
+++ b/slides/lt-ear-parallel.pptx
@@ -5171,7 +5171,7 @@
                 <a:ea typeface="Meiryo"/>
                 <a:cs typeface="Meiryo"/>
               </a:rPr>
-              <a:t>   SPP (RFCOMM) で Windows に流す</a:t>
+              <a:t>   Bluetooth SPP で Windows に流す</a:t>
             </a:r>
           </a:p>
           <a:p>
@@ -5189,7 +5189,7 @@
                 <a:ea typeface="Meiryo"/>
                 <a:cs typeface="Meiryo"/>
               </a:rPr>
-              <a:t>・ PC 側は spp_tail.py COM6 で受けるだけ</a:t>
+              <a:t>・ SPP = Bluetooth 上のシリアルポート。PC 側は</a:t>
             </a:r>
           </a:p>
           <a:p>
@@ -5207,25 +5207,61 @@
                 <a:ea typeface="Meiryo"/>
                 <a:cs typeface="Meiryo"/>
               </a:rPr>
-              <a:t>   #&lt;seq&gt; 番号で欠落・重複を機械検出できる</a:t>
+              <a:t>   spp_tail.py COM6 で受けるだけ</a:t>
             </a:r>
           </a:p>
           <a:p>
             <a:pPr algn="l">
               <a:spcAft>
+                <a:spcPts val="300"/>
+              </a:spcAft>
+            </a:pPr>
+            <a:r>
+              <a:rPr sz="1200" b="0" i="0">
+                <a:solidFill>
+                  <a:srgbClr val="111111"/>
+                </a:solidFill>
+                <a:latin typeface="Meiryo"/>
+                <a:ea typeface="Meiryo"/>
+                <a:cs typeface="Meiryo"/>
+              </a:rPr>
+              <a:t>・ #&lt;seq&gt; 番号で欠落・重複を機械検出できる</a:t>
+            </a:r>
+          </a:p>
+          <a:p>
+            <a:pPr algn="l">
+              <a:spcAft>
+                <a:spcPts val="300"/>
+              </a:spcAft>
+            </a:pPr>
+            <a:r>
+              <a:rPr sz="1200" b="1" i="0">
+                <a:solidFill>
+                  <a:srgbClr val="111111"/>
+                </a:solidFill>
+                <a:latin typeface="Meiryo"/>
+                <a:ea typeface="Meiryo"/>
+                <a:cs typeface="Meiryo"/>
+              </a:rPr>
+              <a:t>・ UART とは独立の経路なので、原理的に USB は要らない</a:t>
+            </a:r>
+          </a:p>
+          <a:p>
+            <a:pPr algn="l">
+              <a:spcAft>
                 <a:spcPts val="0"/>
               </a:spcAft>
             </a:pPr>
             <a:r>
-              <a:rPr sz="1200" b="1" i="0">
-                <a:solidFill>
-                  <a:srgbClr val="111111"/>
-                </a:solidFill>
-                <a:latin typeface="Meiryo"/>
-                <a:ea typeface="Meiryo"/>
-                <a:cs typeface="Meiryo"/>
-              </a:rPr>
-              <a:t>・ 結果: USB を抜いても PASS 行が PC に届く</a:t>
+              <a:rPr sz="1100" b="0" i="0">
+                <a:solidFill>
+                  <a:srgbClr val="5A5A5A"/>
+                </a:solidFill>
+                <a:latin typeface="Meiryo"/>
+                <a:ea typeface="Meiryo"/>
+                <a:cs typeface="Meiryo"/>
+              </a:rPr>
+              <a:t>   (実測はすべて USB 接続下。抜いて動かしたランはまだ無い)</a:t>
             </a:r>
           </a:p>
         </p:txBody>
@@ -5552,7 +5588,7 @@
                 <a:ea typeface="Meiryo"/>
                 <a:cs typeface="Meiryo"/>
               </a:rPr>
-              <a:t>5 連タップ</a:t>
+              <a:t>① 5 連タップ</a:t>
             </a:r>
           </a:p>
         </p:txBody>
@@ -5585,16 +5621,16 @@
               </a:spcAft>
             </a:pPr>
             <a:r>
-              <a:rPr sz="1000" b="0" i="0">
+              <a:rPr sz="1050" b="0" i="0">
                 <a:solidFill>
                   <a:srgbClr val="5A5A5A"/>
                 </a:solidFill>
-                <a:latin typeface="Consolas"/>
-                <a:ea typeface="Consolas"/>
-                <a:cs typeface="Consolas"/>
-              </a:rPr>
-              <a:t>app_key_compute_run
-event 12</a:t>
+                <a:latin typeface="Meiryo"/>
+                <a:ea typeface="Meiryo"/>
+                <a:cs typeface="Meiryo"/>
+              </a:rPr>
+              <a:t>叩かれた側だけが
+キーイベントを受け取る</a:t>
             </a:r>
           </a:p>
         </p:txBody>
@@ -5723,7 +5759,7 @@
                 <a:ea typeface="Meiryo"/>
                 <a:cs typeface="Meiryo"/>
               </a:rPr>
-              <a:t>タップした側</a:t>
+              <a:t>② 相手に START を送る</a:t>
             </a:r>
           </a:p>
         </p:txBody>
@@ -5756,16 +5792,16 @@
               </a:spcAft>
             </a:pPr>
             <a:r>
-              <a:rPr sz="1000" b="0" i="0">
+              <a:rPr sz="1050" b="0" i="0">
                 <a:solidFill>
                   <a:srgbClr val="5A5A5A"/>
                 </a:solidFill>
-                <a:latin typeface="Consolas"/>
-                <a:ea typeface="Consolas"/>
-                <a:cs typeface="Consolas"/>
-              </a:rPr>
-              <a:t>[mpi] run #1
-trigger=local peer_notified=1</a:t>
+                <a:latin typeface="Meiryo"/>
+                <a:ea typeface="Meiryo"/>
+                <a:cs typeface="Meiryo"/>
+              </a:rPr>
+              <a:t>左右間の制御チャネルに
+5 バイトのフレームを 1 本</a:t>
             </a:r>
           </a:p>
         </p:txBody>
@@ -5894,7 +5930,7 @@
                 <a:ea typeface="Meiryo"/>
                 <a:cs typeface="Meiryo"/>
               </a:rPr>
-              <a:t>相手側</a:t>
+              <a:t>③ 相手も起きる</a:t>
             </a:r>
           </a:p>
         </p:txBody>
@@ -5927,16 +5963,16 @@
               </a:spcAft>
             </a:pPr>
             <a:r>
-              <a:rPr sz="1000" b="0" i="0">
+              <a:rPr sz="1050" b="0" i="0">
                 <a:solidFill>
                   <a:srgbClr val="5A5A5A"/>
                 </a:solidFill>
-                <a:latin typeface="Consolas"/>
-                <a:ea typeface="Consolas"/>
-                <a:cs typeface="Consolas"/>
-              </a:rPr>
-              <a:t>[mpi] run #1
-trigger=peer</a:t>
+                <a:latin typeface="Meiryo"/>
+                <a:ea typeface="Meiryo"/>
+                <a:cs typeface="Meiryo"/>
+              </a:rPr>
+              <a:t>受信側は待機セマフォを
+解放して計算に入る</a:t>
             </a:r>
           </a:p>
         </p:txBody>
@@ -6065,7 +6101,7 @@
                 <a:ea typeface="Meiryo"/>
                 <a:cs typeface="Meiryo"/>
               </a:rPr>
-              <a:t>両バッズで GEMM-MPI</a:t>
+              <a:t>④ 両バッズで GEMM</a:t>
             </a:r>
           </a:p>
         </p:txBody>
@@ -6098,15 +6134,15 @@
               </a:spcAft>
             </a:pPr>
             <a:r>
-              <a:rPr sz="1000" b="0" i="0">
+              <a:rPr sz="1050" b="0" i="0">
                 <a:solidFill>
                   <a:srgbClr val="5A5A5A"/>
                 </a:solidFill>
-                <a:latin typeface="Consolas"/>
-                <a:ea typeface="Consolas"/>
-                <a:cs typeface="Consolas"/>
-              </a:rPr>
-              <a:t>rank 0 が checksum 検証
+                <a:latin typeface="Meiryo"/>
+                <a:ea typeface="Meiryo"/>
+                <a:cs typeface="Meiryo"/>
+              </a:rPr>
+              <a:t>rank 0 が checksum を検証
 [mpi] run #1 done rank=0</a:t>
             </a:r>
           </a:p>
@@ -6148,7 +6184,7 @@
                 <a:ea typeface="Meiryo"/>
                 <a:cs typeface="Meiryo"/>
               </a:rPr>
-              <a:t>START フレームは既存の cmdcode 0x8201 に kind 5 を足しただけ ( [kind, seq LE32] の 5 バイト )。実行中の連打は捨てる。</a:t>
+              <a:t>実行中の連打は捨てる。相手の START が落ちたらタップした側だけが走り、5 秒のストール検出を経て縮退で完走する。</a:t>
             </a:r>
           </a:p>
         </p:txBody>
@@ -6338,7 +6374,7 @@
         <p:spPr>
           <a:xfrm>
             <a:off x="502920" y="1115568"/>
-            <a:ext cx="6903720" cy="4846320"/>
+            <a:ext cx="6903720" cy="4023360"/>
           </a:xfrm>
           <a:prstGeom prst="rect">
             <a:avLst/>
@@ -6423,7 +6459,7 @@
         <p:spPr>
           <a:xfrm>
             <a:off x="502920" y="1426464"/>
-            <a:ext cx="6903720" cy="4535424"/>
+            <a:ext cx="6903720" cy="3712464"/>
           </a:xfrm>
           <a:prstGeom prst="rect">
             <a:avLst/>
@@ -6770,7 +6806,7 @@
         <p:spPr>
           <a:xfrm>
             <a:off x="7607808" y="1115568"/>
-            <a:ext cx="4078224" cy="3291840"/>
+            <a:ext cx="4078224" cy="2651760"/>
           </a:xfrm>
           <a:prstGeom prst="rect">
             <a:avLst/>
@@ -6885,7 +6921,7 @@
                 <a:ea typeface="Meiryo"/>
                 <a:cs typeface="Meiryo"/>
               </a:rPr>
-              <a:t>合否条件 6 項目 — すべて充足</a:t>
+              <a:t>合否条件 — すべて充足</a:t>
             </a:r>
           </a:p>
         </p:txBody>
@@ -6898,7 +6934,7 @@
         </p:nvSpPr>
         <p:spPr>
           <a:xfrm>
-            <a:off x="7717536" y="1572768"/>
+            <a:off x="7717536" y="1645920"/>
             <a:ext cx="274320" cy="384048"/>
           </a:xfrm>
           <a:prstGeom prst="rect">
@@ -6918,7 +6954,7 @@
               </a:spcAft>
             </a:pPr>
             <a:r>
-              <a:rPr sz="1500" b="1" i="0">
+              <a:rPr sz="1600" b="1" i="0">
                 <a:solidFill>
                   <a:srgbClr val="1E6B3A"/>
                 </a:solidFill>
@@ -6939,8 +6975,8 @@
         </p:nvSpPr>
         <p:spPr>
           <a:xfrm>
-            <a:off x="8010144" y="1572768"/>
-            <a:ext cx="3602736" cy="420624"/>
+            <a:off x="8046720" y="1627632"/>
+            <a:ext cx="3566160" cy="493776"/>
           </a:xfrm>
           <a:prstGeom prst="rect">
             <a:avLst/>
@@ -6959,7 +6995,7 @@
               </a:spcAft>
             </a:pPr>
             <a:r>
-              <a:rPr sz="1100" b="0" i="0">
+              <a:rPr sz="1150" b="0" i="0">
                 <a:solidFill>
                   <a:srgbClr val="111111"/>
                 </a:solidFill>
@@ -6967,7 +7003,7 @@
                 <a:ea typeface="Meiryo"/>
                 <a:cs typeface="Meiryo"/>
               </a:rPr>
-              <a:t>rank 0 / rank 1 が左右で 1 つずつ (静的 rank が設計どおり)</a:t>
+              <a:t>両側 size=2 — 縮退していない = 本当に 2 ノードで走った</a:t>
             </a:r>
           </a:p>
         </p:txBody>
@@ -6980,7 +7016,7 @@
         </p:nvSpPr>
         <p:spPr>
           <a:xfrm>
-            <a:off x="7717536" y="2029967"/>
+            <a:off x="7717536" y="2176272"/>
             <a:ext cx="274320" cy="384048"/>
           </a:xfrm>
           <a:prstGeom prst="rect">
@@ -7000,7 +7036,7 @@
               </a:spcAft>
             </a:pPr>
             <a:r>
-              <a:rPr sz="1500" b="1" i="0">
+              <a:rPr sz="1600" b="1" i="0">
                 <a:solidFill>
                   <a:srgbClr val="1E6B3A"/>
                 </a:solidFill>
@@ -7021,8 +7057,8 @@
         </p:nvSpPr>
         <p:spPr>
           <a:xfrm>
-            <a:off x="8010144" y="2029967"/>
-            <a:ext cx="3602736" cy="420624"/>
+            <a:off x="8046720" y="2157984"/>
+            <a:ext cx="3566160" cy="493776"/>
           </a:xfrm>
           <a:prstGeom prst="rect">
             <a:avLst/>
@@ -7041,7 +7077,7 @@
               </a:spcAft>
             </a:pPr>
             <a:r>
-              <a:rPr sz="1100" b="0" i="0">
+              <a:rPr sz="1150" b="0" i="0">
                 <a:solidFill>
                   <a:srgbClr val="111111"/>
                 </a:solidFill>
@@ -7049,7 +7085,7 @@
                 <a:ea typeface="Meiryo"/>
                 <a:cs typeface="Meiryo"/>
               </a:rPr>
-              <a:t>両側 size=2 — 縮退していない = 本当に 2 ノードで走った</a:t>
+              <a:t>checksum=32768.000000 の厳密一致 (float32 で誤差ゼロ)</a:t>
             </a:r>
           </a:p>
         </p:txBody>
@@ -7062,7 +7098,7 @@
         </p:nvSpPr>
         <p:spPr>
           <a:xfrm>
-            <a:off x="7717536" y="2487168"/>
+            <a:off x="7717536" y="2706624"/>
             <a:ext cx="274320" cy="384048"/>
           </a:xfrm>
           <a:prstGeom prst="rect">
@@ -7082,7 +7118,7 @@
               </a:spcAft>
             </a:pPr>
             <a:r>
-              <a:rPr sz="1500" b="1" i="0">
+              <a:rPr sz="1600" b="1" i="0">
                 <a:solidFill>
                   <a:srgbClr val="1E6B3A"/>
                 </a:solidFill>
@@ -7103,8 +7139,8 @@
         </p:nvSpPr>
         <p:spPr>
           <a:xfrm>
-            <a:off x="8010144" y="2487168"/>
-            <a:ext cx="3602736" cy="420624"/>
+            <a:off x="8046720" y="2688336"/>
+            <a:ext cx="3566160" cy="493776"/>
           </a:xfrm>
           <a:prstGeom prst="rect">
             <a:avLst/>
@@ -7123,7 +7159,7 @@
               </a:spcAft>
             </a:pPr>
             <a:r>
-              <a:rPr sz="1100" b="0" i="0">
+              <a:rPr sz="1150" b="0" i="0">
                 <a:solidFill>
                   <a:srgbClr val="111111"/>
                 </a:solidFill>
@@ -7131,7 +7167,7 @@
                 <a:ea typeface="Meiryo"/>
                 <a:cs typeface="Meiryo"/>
               </a:rPr>
-              <a:t>checksum=32768.000000 の厳密一致 (float32 で誤差ゼロ)</a:t>
+              <a:t>rank 0 / rank 1 が左右で 1 つずつ (静的 rank が設計どおり)</a:t>
             </a:r>
           </a:p>
         </p:txBody>
@@ -7144,7 +7180,7 @@
         </p:nvSpPr>
         <p:spPr>
           <a:xfrm>
-            <a:off x="7717536" y="2944368"/>
+            <a:off x="7717536" y="3236976"/>
             <a:ext cx="274320" cy="384048"/>
           </a:xfrm>
           <a:prstGeom prst="rect">
@@ -7164,7 +7200,7 @@
               </a:spcAft>
             </a:pPr>
             <a:r>
-              <a:rPr sz="1500" b="1" i="0">
+              <a:rPr sz="1600" b="1" i="0">
                 <a:solidFill>
                   <a:srgbClr val="1E6B3A"/>
                 </a:solidFill>
@@ -7185,8 +7221,8 @@
         </p:nvSpPr>
         <p:spPr>
           <a:xfrm>
-            <a:off x="8010144" y="2944368"/>
-            <a:ext cx="3602736" cy="420624"/>
+            <a:off x="8046720" y="3218688"/>
+            <a:ext cx="3566160" cy="493776"/>
           </a:xfrm>
           <a:prstGeom prst="rect">
             <a:avLst/>
@@ -7205,7 +7241,7 @@
               </a:spcAft>
             </a:pPr>
             <a:r>
-              <a:rPr sz="1100" b="0" i="0">
+              <a:rPr sz="1150" b="0" i="0">
                 <a:solidFill>
                   <a:srgbClr val="111111"/>
                 </a:solidFill>
@@ -7213,185 +7249,21 @@
                 <a:ea typeface="Meiryo"/>
                 <a:cs typeface="Meiryo"/>
               </a:rPr>
-              <a:t>MPI フレーム (cmdcode 0x8201) の送信失敗 0 回</a:t>
-            </a:r>
-          </a:p>
-        </p:txBody>
-      </p:sp>
-      <p:sp>
-        <p:nvSpPr>
-          <p:cNvPr id="19" name="TextBox 18"/>
-          <p:cNvSpPr txBox="1"/>
-          <p:nvPr/>
-        </p:nvSpPr>
-        <p:spPr>
-          <a:xfrm>
-            <a:off x="7717536" y="3401568"/>
-            <a:ext cx="274320" cy="384048"/>
-          </a:xfrm>
-          <a:prstGeom prst="rect">
-            <a:avLst/>
-          </a:prstGeom>
-          <a:noFill/>
-        </p:spPr>
-        <p:txBody>
-          <a:bodyPr wrap="square" lIns="0" rIns="0" tIns="0" bIns="0" anchor="t">
-            <a:spAutoFit/>
-          </a:bodyPr>
-          <a:lstStyle/>
-          <a:p>
-            <a:pPr algn="l">
-              <a:spcAft>
-                <a:spcPts val="400"/>
-              </a:spcAft>
-            </a:pPr>
-            <a:r>
-              <a:rPr sz="1500" b="1" i="0">
-                <a:solidFill>
-                  <a:srgbClr val="1E6B3A"/>
-                </a:solidFill>
-                <a:latin typeface="Meiryo"/>
-                <a:ea typeface="Meiryo"/>
-                <a:cs typeface="Meiryo"/>
-              </a:rPr>
-              <a:t>✓</a:t>
-            </a:r>
-          </a:p>
-        </p:txBody>
-      </p:sp>
-      <p:sp>
-        <p:nvSpPr>
-          <p:cNvPr id="20" name="TextBox 19"/>
-          <p:cNvSpPr txBox="1"/>
-          <p:nvPr/>
-        </p:nvSpPr>
-        <p:spPr>
-          <a:xfrm>
-            <a:off x="8010144" y="3401568"/>
-            <a:ext cx="3602736" cy="420624"/>
-          </a:xfrm>
-          <a:prstGeom prst="rect">
-            <a:avLst/>
-          </a:prstGeom>
-          <a:noFill/>
-        </p:spPr>
-        <p:txBody>
-          <a:bodyPr wrap="square" lIns="0" rIns="0" tIns="0" bIns="0" anchor="t">
-            <a:spAutoFit/>
-          </a:bodyPr>
-          <a:lstStyle/>
-          <a:p>
-            <a:pPr algn="l">
-              <a:spcAft>
-                <a:spcPts val="400"/>
-              </a:spcAft>
-            </a:pPr>
-            <a:r>
-              <a:rPr sz="1100" b="0" i="0">
-                <a:solidFill>
-                  <a:srgbClr val="111111"/>
-                </a:solidFill>
-                <a:latin typeface="Meiryo"/>
-                <a:ea typeface="Meiryo"/>
-                <a:cs typeface="Meiryo"/>
-              </a:rPr>
-              <a:t>### EXCEPTION ###  0 回・リブート無し</a:t>
-            </a:r>
-          </a:p>
-        </p:txBody>
-      </p:sp>
-      <p:sp>
-        <p:nvSpPr>
-          <p:cNvPr id="21" name="TextBox 20"/>
-          <p:cNvSpPr txBox="1"/>
-          <p:nvPr/>
-        </p:nvSpPr>
-        <p:spPr>
-          <a:xfrm>
-            <a:off x="7717536" y="3858768"/>
-            <a:ext cx="274320" cy="384048"/>
-          </a:xfrm>
-          <a:prstGeom prst="rect">
-            <a:avLst/>
-          </a:prstGeom>
-          <a:noFill/>
-        </p:spPr>
-        <p:txBody>
-          <a:bodyPr wrap="square" lIns="0" rIns="0" tIns="0" bIns="0" anchor="t">
-            <a:spAutoFit/>
-          </a:bodyPr>
-          <a:lstStyle/>
-          <a:p>
-            <a:pPr algn="l">
-              <a:spcAft>
-                <a:spcPts val="400"/>
-              </a:spcAft>
-            </a:pPr>
-            <a:r>
-              <a:rPr sz="1500" b="1" i="0">
-                <a:solidFill>
-                  <a:srgbClr val="1E6B3A"/>
-                </a:solidFill>
-                <a:latin typeface="Meiryo"/>
-                <a:ea typeface="Meiryo"/>
-                <a:cs typeface="Meiryo"/>
-              </a:rPr>
-              <a:t>✓</a:t>
-            </a:r>
-          </a:p>
-        </p:txBody>
-      </p:sp>
-      <p:sp>
-        <p:nvSpPr>
-          <p:cNvPr id="22" name="TextBox 21"/>
-          <p:cNvSpPr txBox="1"/>
-          <p:nvPr/>
-        </p:nvSpPr>
-        <p:spPr>
-          <a:xfrm>
-            <a:off x="8010144" y="3858768"/>
-            <a:ext cx="3602736" cy="420624"/>
-          </a:xfrm>
-          <a:prstGeom prst="rect">
-            <a:avLst/>
-          </a:prstGeom>
-          <a:noFill/>
-        </p:spPr>
-        <p:txBody>
-          <a:bodyPr wrap="square" lIns="0" rIns="0" tIns="0" bIns="0" anchor="t">
-            <a:spAutoFit/>
-          </a:bodyPr>
-          <a:lstStyle/>
-          <a:p>
-            <a:pPr algn="l">
-              <a:spcAft>
-                <a:spcPts val="400"/>
-              </a:spcAft>
-            </a:pPr>
-            <a:r>
-              <a:rPr sz="1100" b="0" i="0">
-                <a:solidFill>
-                  <a:srgbClr val="111111"/>
-                </a:solidFill>
-                <a:latin typeface="Meiryo"/>
-                <a:ea typeface="Meiryo"/>
-                <a:cs typeface="Meiryo"/>
-              </a:rPr>
-              <a:t>両側 init_done=1 (BT スタックが本当に上がっている)</a:t>
-            </a:r>
-          </a:p>
-        </p:txBody>
-      </p:sp>
-      <p:sp>
-        <p:nvSpPr>
-          <p:cNvPr id="23" name="Rectangle 22"/>
+              <a:t>EXCEPTION 0 回・MPI フレーム送信失敗 0 回・リブート無し</a:t>
+            </a:r>
+          </a:p>
+        </p:txBody>
+      </p:sp>
+      <p:sp>
+        <p:nvSpPr>
+          <p:cNvPr id="19" name="Rectangle 18"/>
           <p:cNvSpPr/>
           <p:nvPr/>
         </p:nvSpPr>
         <p:spPr>
           <a:xfrm>
-            <a:off x="7607808" y="4553712"/>
-            <a:ext cx="4078224" cy="1591056"/>
+            <a:off x="7607808" y="3913632"/>
+            <a:ext cx="4078224" cy="2231136"/>
           </a:xfrm>
           <a:prstGeom prst="rect">
             <a:avLst/>
@@ -7428,13 +7300,13 @@
       </p:sp>
       <p:sp>
         <p:nvSpPr>
-          <p:cNvPr id="24" name="Rectangle 23"/>
+          <p:cNvPr id="20" name="Rectangle 19"/>
           <p:cNvSpPr/>
           <p:nvPr/>
         </p:nvSpPr>
         <p:spPr>
           <a:xfrm>
-            <a:off x="7607808" y="4553712"/>
+            <a:off x="7607808" y="3913632"/>
             <a:ext cx="4078224" cy="384048"/>
           </a:xfrm>
           <a:prstGeom prst="rect">
@@ -7472,13 +7344,13 @@
       </p:sp>
       <p:sp>
         <p:nvSpPr>
-          <p:cNvPr id="25" name="TextBox 24"/>
+          <p:cNvPr id="21" name="TextBox 20"/>
           <p:cNvSpPr txBox="1"/>
           <p:nvPr/>
         </p:nvSpPr>
         <p:spPr>
           <a:xfrm>
-            <a:off x="7607808" y="4553712"/>
+            <a:off x="7607808" y="3913632"/>
             <a:ext cx="4078224" cy="384048"/>
           </a:xfrm>
           <a:prstGeom prst="rect">
@@ -7513,14 +7385,14 @@
       </p:sp>
       <p:sp>
         <p:nvSpPr>
-          <p:cNvPr id="26" name="TextBox 25"/>
+          <p:cNvPr id="22" name="TextBox 21"/>
           <p:cNvSpPr txBox="1"/>
           <p:nvPr/>
         </p:nvSpPr>
         <p:spPr>
           <a:xfrm>
-            <a:off x="7607808" y="4937760"/>
-            <a:ext cx="4078224" cy="1207008"/>
+            <a:off x="7607808" y="4297680"/>
+            <a:ext cx="4078224" cy="1847088"/>
           </a:xfrm>
           <a:prstGeom prst="rect">
             <a:avLst/>
@@ -7608,7 +7480,7 @@
       </p:sp>
       <p:sp>
         <p:nvSpPr>
-          <p:cNvPr id="27" name="TextBox 26"/>
+          <p:cNvPr id="23" name="TextBox 22"/>
           <p:cNvSpPr txBox="1"/>
           <p:nvPr/>
         </p:nvSpPr>
@@ -7939,7 +7811,25 @@
                 <a:ea typeface="Consolas"/>
                 <a:cs typeface="Consolas"/>
               </a:rPr>
-              <a:t>#2  GEMM float N=32  checksum=32768.000000  PASS</a:t>
+              <a:t>#2  GEMM float N=32  checksum=32768.000000</a:t>
+            </a:r>
+          </a:p>
+          <a:p>
+            <a:pPr algn="l">
+              <a:spcAft>
+                <a:spcPts val="0"/>
+              </a:spcAft>
+            </a:pPr>
+            <a:r>
+              <a:rPr sz="1100" b="0" i="0">
+                <a:solidFill>
+                  <a:srgbClr val="111111"/>
+                </a:solidFill>
+                <a:latin typeface="Consolas"/>
+                <a:ea typeface="Consolas"/>
+                <a:cs typeface="Consolas"/>
+              </a:rPr>
+              <a:t>                       expect=32768.000000  PASS</a:t>
             </a:r>
           </a:p>
           <a:p>
@@ -8760,7 +8650,7 @@
         <p:spPr>
           <a:xfrm>
             <a:off x="6675120" y="3785615"/>
-            <a:ext cx="5010912" cy="1920240"/>
+            <a:ext cx="5010912" cy="2359152"/>
           </a:xfrm>
           <a:prstGeom prst="rect">
             <a:avLst/>
@@ -8875,7 +8765,7 @@
                 <a:ea typeface="Meiryo"/>
                 <a:cs typeface="Meiryo"/>
               </a:rPr>
-              <a:t>elapsed のばらつきの読み方</a:t>
+              <a:t>読み方と、正直な注記</a:t>
             </a:r>
           </a:p>
         </p:txBody>
@@ -8889,7 +8779,7 @@
         <p:spPr>
           <a:xfrm>
             <a:off x="6675120" y="4169663"/>
-            <a:ext cx="5010912" cy="1536192"/>
+            <a:ext cx="5010912" cy="1975104"/>
           </a:xfrm>
           <a:prstGeom prst="rect">
             <a:avLst/>
@@ -8952,12 +8842,30 @@
                 <a:ea typeface="Meiryo"/>
                 <a:cs typeface="Meiryo"/>
               </a:rPr>
-              <a:t>・ 逆に相手からの START で後から合流した #2 は 5 ms</a:t>
+              <a:t>・ このランで COM6 に出たのは左 (rank 1) のログだけ</a:t>
             </a:r>
           </a:p>
           <a:p>
             <a:pPr algn="l">
               <a:spcAft>
+                <a:spcPts val="300"/>
+              </a:spcAft>
+            </a:pPr>
+            <a:r>
+              <a:rPr sz="1150" b="0" i="0">
+                <a:solidFill>
+                  <a:srgbClr val="5A5A5A"/>
+                </a:solidFill>
+                <a:latin typeface="Meiryo"/>
+                <a:ea typeface="Meiryo"/>
+                <a:cs typeface="Meiryo"/>
+              </a:rPr>
+              <a:t>   IBRT の slave 側の SPP 送信は電波に乗らないので、rank 0 の</a:t>
+            </a:r>
+          </a:p>
+          <a:p>
+            <a:pPr algn="l">
+              <a:spcAft>
                 <a:spcPts val="0"/>
               </a:spcAft>
             </a:pPr>
@@ -8970,7 +8878,7 @@
                 <a:ea typeface="Meiryo"/>
                 <a:cs typeface="Meiryo"/>
               </a:rPr>
-              <a:t>   起動時ラン (12 ms) より速い = クロック引き上げが効いている</a:t>
+              <a:t>   GEMM-MPI 行は UART 側にしか出ていない (未解決)</a:t>
             </a:r>
           </a:p>
         </p:txBody>
@@ -9132,7 +9040,25 @@
                 <a:ea typeface="Consolas"/>
                 <a:cs typeface="Consolas"/>
               </a:rPr>
-              <a:t>GEMM-MPI N=32 rank=0 size=2 checksum=32768.000000 PASS</a:t>
+              <a:t>GEMM-MPI N=32 rank=0 size=2 checksum=32768.000000</a:t>
+            </a:r>
+          </a:p>
+          <a:p>
+            <a:pPr algn="l">
+              <a:spcAft>
+                <a:spcPts val="0"/>
+              </a:spcAft>
+            </a:pPr>
+            <a:r>
+              <a:rPr sz="1050" b="0" i="0">
+                <a:solidFill>
+                  <a:srgbClr val="111111"/>
+                </a:solidFill>
+                <a:latin typeface="Consolas"/>
+                <a:ea typeface="Consolas"/>
+                <a:cs typeface="Consolas"/>
+              </a:rPr>
+              <a:t>         expect=32768.000000 PASS</a:t>
             </a:r>
           </a:p>
           <a:p>
@@ -9289,8 +9215,8 @@
                 <a:ea typeface="Meiryo"/>
                 <a:cs typeface="Meiryo"/>
               </a:rPr>
-              <a:t>USB を抜いた状態で、耳を 5 回叩くと
-両バッズで行列積が走り、結果が PC に流れてくる</a:t>
+              <a:t>耳を 5 回叩くと両バッズで行列積が走り、
+実行ログが Bluetooth 経由で PC に流れてくる</a:t>
             </a:r>
           </a:p>
         </p:txBody>
@@ -9481,7 +9407,7 @@
         </p:nvGraphicFramePr>
         <p:xfrm>
           <a:off x="502920" y="1115568"/>
-          <a:ext cx="6903719" cy="3456432"/>
+          <a:ext cx="6903720" cy="1645920"/>
         </p:xfrm>
         <a:graphic>
           <a:graphicData uri="http://schemas.openxmlformats.org/drawingml/2006/table">
@@ -9491,10 +9417,10 @@
               </a:tblPr>
               <a:tblGrid>
                 <a:gridCol w="2243709"/>
-                <a:gridCol w="2157412"/>
-                <a:gridCol w="2502598"/>
+                <a:gridCol w="1725930"/>
+                <a:gridCol w="2934081"/>
               </a:tblGrid>
-              <a:tr h="384048">
+              <a:tr h="329184">
                 <a:tc>
                   <a:txBody>
                     <a:bodyPr wrap="square"/>
@@ -9571,7 +9497,7 @@
                   </a:tcPr>
                 </a:tc>
               </a:tr>
-              <a:tr h="384048">
+              <a:tr h="329184">
                 <a:tc>
                   <a:txBody>
                     <a:bodyPr wrap="square"/>
@@ -9612,7 +9538,7 @@
                           <a:ea typeface="Meiryo"/>
                           <a:cs typeface="Meiryo"/>
                         </a:rPr>
-                        <a:t>5 〜 9 ms</a:t>
+                        <a:t>5 〜 10 ms</a:t>
                       </a:r>
                     </a:p>
                   </a:txBody>
@@ -9648,7 +9574,7 @@
                   </a:tcPr>
                 </a:tc>
               </a:tr>
-              <a:tr h="384048">
+              <a:tr h="329184">
                 <a:tc>
                   <a:txBody>
                     <a:bodyPr wrap="square"/>
@@ -9714,7 +9640,7 @@
                           <a:ea typeface="Meiryo"/>
                           <a:cs typeface="Meiryo"/>
                         </a:rPr>
-                        <a:t>並列化して遅くなっている</a:t>
+                        <a:t>通信込み。並列化して遅くなった</a:t>
                       </a:r>
                     </a:p>
                   </a:txBody>
@@ -9725,84 +9651,7 @@
                   </a:tcPr>
                 </a:tc>
               </a:tr>
-              <a:tr h="384048">
-                <a:tc>
-                  <a:txBody>
-                    <a:bodyPr wrap="square"/>
-                    <a:lstStyle/>
-                    <a:p>
-                      <a:pPr algn="l"/>
-                      <a:r>
-                        <a:rPr sz="1050" b="0" i="0">
-                          <a:solidFill>
-                            <a:srgbClr val="111111"/>
-                          </a:solidFill>
-                          <a:latin typeface="Meiryo"/>
-                          <a:ea typeface="Meiryo"/>
-                          <a:cs typeface="Meiryo"/>
-                        </a:rPr>
-                        <a:t>左右間 RTT (100 回)</a:t>
-                      </a:r>
-                    </a:p>
-                  </a:txBody>
-                  <a:tcPr marL="64008" marR="64008" marT="18288" marB="18288" anchor="ctr">
-                    <a:solidFill>
-                      <a:srgbClr val="FFFFFF"/>
-                    </a:solidFill>
-                  </a:tcPr>
-                </a:tc>
-                <a:tc>
-                  <a:txBody>
-                    <a:bodyPr wrap="square"/>
-                    <a:lstStyle/>
-                    <a:p>
-                      <a:pPr algn="l"/>
-                      <a:r>
-                        <a:rPr sz="1050" b="0" i="0">
-                          <a:solidFill>
-                            <a:srgbClr val="111111"/>
-                          </a:solidFill>
-                          <a:latin typeface="Meiryo"/>
-                          <a:ea typeface="Meiryo"/>
-                          <a:cs typeface="Meiryo"/>
-                        </a:rPr>
-                        <a:t>min 44 / avg 169 / max 407 ms</a:t>
-                      </a:r>
-                    </a:p>
-                  </a:txBody>
-                  <a:tcPr marL="64008" marR="64008" marT="18288" marB="18288" anchor="ctr">
-                    <a:solidFill>
-                      <a:srgbClr val="FFFFFF"/>
-                    </a:solidFill>
-                  </a:tcPr>
-                </a:tc>
-                <a:tc>
-                  <a:txBody>
-                    <a:bodyPr wrap="square"/>
-                    <a:lstStyle/>
-                    <a:p>
-                      <a:pPr algn="l"/>
-                      <a:r>
-                        <a:rPr sz="1050" b="0" i="0">
-                          <a:solidFill>
-                            <a:srgbClr val="111111"/>
-                          </a:solidFill>
-                          <a:latin typeface="Meiryo"/>
-                          <a:ea typeface="Meiryo"/>
-                          <a:cs typeface="Meiryo"/>
-                        </a:rPr>
-                        <a:t>sniff 復帰待ちで大きく揺れる</a:t>
-                      </a:r>
-                    </a:p>
-                  </a:txBody>
-                  <a:tcPr marL="64008" marR="64008" marT="18288" marB="18288" anchor="ctr">
-                    <a:solidFill>
-                      <a:srgbClr val="FFFFFF"/>
-                    </a:solidFill>
-                  </a:tcPr>
-                </a:tc>
-              </a:tr>
-              <a:tr h="384048">
+              <a:tr h="329184">
                 <a:tc>
                   <a:txBody>
                     <a:bodyPr wrap="square"/>
@@ -9879,7 +9728,7 @@
                   </a:tcPr>
                 </a:tc>
               </a:tr>
-              <a:tr h="384048">
+              <a:tr h="329184">
                 <a:tc>
                   <a:txBody>
                     <a:bodyPr wrap="square"/>
@@ -9895,7 +9744,7 @@
                           <a:ea typeface="Meiryo"/>
                           <a:cs typeface="Meiryo"/>
                         </a:rPr>
-                        <a:t>追加 RAM</a:t>
+                        <a:t>アイドルからの往復 RTT</a:t>
                       </a:r>
                     </a:p>
                   </a:txBody>
@@ -9920,7 +9769,7 @@
                           <a:ea typeface="Meiryo"/>
                           <a:cs typeface="Meiryo"/>
                         </a:rPr>
-                        <a:t>5.5 KB (合計 22.7 KB)</a:t>
+                        <a:t>最大 407 ms</a:t>
                       </a:r>
                     </a:p>
                   </a:txBody>
@@ -9945,238 +9794,7 @@
                           <a:ea typeface="Meiryo"/>
                           <a:cs typeface="Meiryo"/>
                         </a:rPr>
-                        <a:t>RAM 残 330 KB に対して余裕</a:t>
-                      </a:r>
-                    </a:p>
-                  </a:txBody>
-                  <a:tcPr marL="64008" marR="64008" marT="18288" marB="18288" anchor="ctr">
-                    <a:solidFill>
-                      <a:srgbClr val="FFFFFF"/>
-                    </a:solidFill>
-                  </a:tcPr>
-                </a:tc>
-              </a:tr>
-              <a:tr h="384048">
-                <a:tc>
-                  <a:txBody>
-                    <a:bodyPr wrap="square"/>
-                    <a:lstStyle/>
-                    <a:p>
-                      <a:pPr algn="l"/>
-                      <a:r>
-                        <a:rPr sz="1050" b="0" i="0">
-                          <a:solidFill>
-                            <a:srgbClr val="111111"/>
-                          </a:solidFill>
-                          <a:latin typeface="Meiryo"/>
-                          <a:ea typeface="Meiryo"/>
-                          <a:cs typeface="Meiryo"/>
-                        </a:rPr>
-                        <a:t>ホストテスト</a:t>
-                      </a:r>
-                    </a:p>
-                  </a:txBody>
-                  <a:tcPr marL="64008" marR="64008" marT="18288" marB="18288" anchor="ctr">
-                    <a:solidFill>
-                      <a:srgbClr val="FFFFFF"/>
-                    </a:solidFill>
-                  </a:tcPr>
-                </a:tc>
-                <a:tc>
-                  <a:txBody>
-                    <a:bodyPr wrap="square"/>
-                    <a:lstStyle/>
-                    <a:p>
-                      <a:pPr algn="l"/>
-                      <a:r>
-                        <a:rPr sz="1050" b="0" i="0">
-                          <a:solidFill>
-                            <a:srgbClr val="111111"/>
-                          </a:solidFill>
-                          <a:latin typeface="Meiryo"/>
-                          <a:ea typeface="Meiryo"/>
-                          <a:cs typeface="Meiryo"/>
-                        </a:rPr>
-                        <a:t>1,788 checks / 8 バイナリ</a:t>
-                      </a:r>
-                    </a:p>
-                  </a:txBody>
-                  <a:tcPr marL="64008" marR="64008" marT="18288" marB="18288" anchor="ctr">
-                    <a:solidFill>
-                      <a:srgbClr val="FFFFFF"/>
-                    </a:solidFill>
-                  </a:tcPr>
-                </a:tc>
-                <a:tc>
-                  <a:txBody>
-                    <a:bodyPr wrap="square"/>
-                    <a:lstStyle/>
-                    <a:p>
-                      <a:pPr algn="l"/>
-                      <a:r>
-                        <a:rPr sz="1050" b="0" i="0">
-                          <a:solidFill>
-                            <a:srgbClr val="111111"/>
-                          </a:solidFill>
-                          <a:latin typeface="Meiryo"/>
-                          <a:ea typeface="Meiryo"/>
-                          <a:cs typeface="Meiryo"/>
-                        </a:rPr>
-                        <a:t>焼く前に全部緑にする</a:t>
-                      </a:r>
-                    </a:p>
-                  </a:txBody>
-                  <a:tcPr marL="64008" marR="64008" marT="18288" marB="18288" anchor="ctr">
-                    <a:solidFill>
-                      <a:srgbClr val="FFFFFF"/>
-                    </a:solidFill>
-                  </a:tcPr>
-                </a:tc>
-              </a:tr>
-              <a:tr h="384048">
-                <a:tc>
-                  <a:txBody>
-                    <a:bodyPr wrap="square"/>
-                    <a:lstStyle/>
-                    <a:p>
-                      <a:pPr algn="l"/>
-                      <a:r>
-                        <a:rPr sz="1050" b="0" i="0">
-                          <a:solidFill>
-                            <a:srgbClr val="111111"/>
-                          </a:solidFill>
-                          <a:latin typeface="Meiryo"/>
-                          <a:ea typeface="Meiryo"/>
-                          <a:cs typeface="Meiryo"/>
-                        </a:rPr>
-                        <a:t>コード規模</a:t>
-                      </a:r>
-                    </a:p>
-                  </a:txBody>
-                  <a:tcPr marL="64008" marR="64008" marT="18288" marB="18288" anchor="ctr">
-                    <a:solidFill>
-                      <a:srgbClr val="FFFFFF"/>
-                    </a:solidFill>
-                  </a:tcPr>
-                </a:tc>
-                <a:tc>
-                  <a:txBody>
-                    <a:bodyPr wrap="square"/>
-                    <a:lstStyle/>
-                    <a:p>
-                      <a:pPr algn="l"/>
-                      <a:r>
-                        <a:rPr sz="1050" b="0" i="0">
-                          <a:solidFill>
-                            <a:srgbClr val="111111"/>
-                          </a:solidFill>
-                          <a:latin typeface="Meiryo"/>
-                          <a:ea typeface="Meiryo"/>
-                          <a:cs typeface="Meiryo"/>
-                        </a:rPr>
-                        <a:t>アダプタ 926 / 統合 1,656 行</a:t>
-                      </a:r>
-                    </a:p>
-                  </a:txBody>
-                  <a:tcPr marL="64008" marR="64008" marT="18288" marB="18288" anchor="ctr">
-                    <a:solidFill>
-                      <a:srgbClr val="FFFFFF"/>
-                    </a:solidFill>
-                  </a:tcPr>
-                </a:tc>
-                <a:tc>
-                  <a:txBody>
-                    <a:bodyPr wrap="square"/>
-                    <a:lstStyle/>
-                    <a:p>
-                      <a:pPr algn="l"/>
-                      <a:r>
-                        <a:rPr sz="1050" b="0" i="0">
-                          <a:solidFill>
-                            <a:srgbClr val="111111"/>
-                          </a:solidFill>
-                          <a:latin typeface="Meiryo"/>
-                          <a:ea typeface="Meiryo"/>
-                          <a:cs typeface="Meiryo"/>
-                        </a:rPr>
-                        <a:t>テスト 1,846 行 — 本体より多い</a:t>
-                      </a:r>
-                    </a:p>
-                  </a:txBody>
-                  <a:tcPr marL="64008" marR="64008" marT="18288" marB="18288" anchor="ctr">
-                    <a:solidFill>
-                      <a:srgbClr val="FFFFFF"/>
-                    </a:solidFill>
-                  </a:tcPr>
-                </a:tc>
-              </a:tr>
-              <a:tr h="384048">
-                <a:tc>
-                  <a:txBody>
-                    <a:bodyPr wrap="square"/>
-                    <a:lstStyle/>
-                    <a:p>
-                      <a:pPr algn="l"/>
-                      <a:r>
-                        <a:rPr sz="1050" b="0" i="0">
-                          <a:solidFill>
-                            <a:srgbClr val="111111"/>
-                          </a:solidFill>
-                          <a:latin typeface="Meiryo"/>
-                          <a:ea typeface="Meiryo"/>
-                          <a:cs typeface="Meiryo"/>
-                        </a:rPr>
-                        <a:t>設計ドキュメント</a:t>
-                      </a:r>
-                    </a:p>
-                  </a:txBody>
-                  <a:tcPr marL="64008" marR="64008" marT="18288" marB="18288" anchor="ctr">
-                    <a:solidFill>
-                      <a:srgbClr val="FFFFFF"/>
-                    </a:solidFill>
-                  </a:tcPr>
-                </a:tc>
-                <a:tc>
-                  <a:txBody>
-                    <a:bodyPr wrap="square"/>
-                    <a:lstStyle/>
-                    <a:p>
-                      <a:pPr algn="l"/>
-                      <a:r>
-                        <a:rPr sz="1050" b="0" i="0">
-                          <a:solidFill>
-                            <a:srgbClr val="111111"/>
-                          </a:solidFill>
-                          <a:latin typeface="Meiryo"/>
-                          <a:ea typeface="Meiryo"/>
-                          <a:cs typeface="Meiryo"/>
-                        </a:rPr>
-                        <a:t>2,601 行</a:t>
-                      </a:r>
-                    </a:p>
-                  </a:txBody>
-                  <a:tcPr marL="64008" marR="64008" marT="18288" marB="18288" anchor="ctr">
-                    <a:solidFill>
-                      <a:srgbClr val="FFFFFF"/>
-                    </a:solidFill>
-                  </a:tcPr>
-                </a:tc>
-                <a:tc>
-                  <a:txBody>
-                    <a:bodyPr wrap="square"/>
-                    <a:lstStyle/>
-                    <a:p>
-                      <a:pPr algn="l"/>
-                      <a:r>
-                        <a:rPr sz="1050" b="0" i="0">
-                          <a:solidFill>
-                            <a:srgbClr val="111111"/>
-                          </a:solidFill>
-                          <a:latin typeface="Meiryo"/>
-                          <a:ea typeface="Meiryo"/>
-                          <a:cs typeface="Meiryo"/>
-                        </a:rPr>
-                        <a:t>大半が逆アセンブル結果の記録</a:t>
+                        <a:t>ランごとに変動 (avg 93 〜 278 ms)</a:t>
                       </a:r>
                     </a:p>
                   </a:txBody>
@@ -10199,8 +9817,134 @@
         </p:nvSpPr>
         <p:spPr>
           <a:xfrm>
-            <a:off x="7607808" y="1115568"/>
-            <a:ext cx="4078224" cy="4160520"/>
+            <a:off x="502920" y="2889504"/>
+            <a:ext cx="6903720" cy="914400"/>
+          </a:xfrm>
+          <a:prstGeom prst="rect">
+            <a:avLst/>
+          </a:prstGeom>
+          <a:solidFill>
+            <a:srgbClr val="E8E8E8"/>
+          </a:solidFill>
+          <a:ln w="9525">
+            <a:solidFill>
+              <a:srgbClr val="9E9E9E"/>
+            </a:solidFill>
+          </a:ln>
+          <a:effectLst/>
+        </p:spPr>
+        <p:style>
+          <a:lnRef idx="1">
+            <a:schemeClr val="accent1"/>
+          </a:lnRef>
+          <a:fillRef idx="3">
+            <a:schemeClr val="accent1"/>
+          </a:fillRef>
+          <a:effectRef idx="2">
+            <a:schemeClr val="accent1"/>
+          </a:effectRef>
+          <a:fontRef idx="minor">
+            <a:schemeClr val="lt1"/>
+          </a:fontRef>
+        </p:style>
+        <p:txBody>
+          <a:bodyPr rtlCol="0" anchor="ctr"/>
+          <a:lstStyle/>
+          <a:p/>
+        </p:txBody>
+      </p:sp>
+      <p:sp>
+        <p:nvSpPr>
+          <p:cNvPr id="7" name="TextBox 6"/>
+          <p:cNvSpPr txBox="1"/>
+          <p:nvPr/>
+        </p:nvSpPr>
+        <p:spPr>
+          <a:xfrm>
+            <a:off x="502920" y="2980944"/>
+            <a:ext cx="6903720" cy="420624"/>
+          </a:xfrm>
+          <a:prstGeom prst="rect">
+            <a:avLst/>
+          </a:prstGeom>
+          <a:noFill/>
+        </p:spPr>
+        <p:txBody>
+          <a:bodyPr wrap="square" lIns="45720" rIns="45720" tIns="27432" bIns="27432" anchor="t">
+            <a:spAutoFit/>
+          </a:bodyPr>
+          <a:lstStyle/>
+          <a:p>
+            <a:pPr algn="ctr">
+              <a:spcAft>
+                <a:spcPts val="400"/>
+              </a:spcAft>
+            </a:pPr>
+            <a:r>
+              <a:rPr sz="1800" b="1" i="0">
+                <a:solidFill>
+                  <a:srgbClr val="111111"/>
+                </a:solidFill>
+                <a:latin typeface="Meiryo"/>
+                <a:ea typeface="Meiryo"/>
+                <a:cs typeface="Meiryo"/>
+              </a:rPr>
+              <a:t>単コア 5〜10 ms   →   2 ノード 12〜13 ms</a:t>
+            </a:r>
+          </a:p>
+        </p:txBody>
+      </p:sp>
+      <p:sp>
+        <p:nvSpPr>
+          <p:cNvPr id="8" name="TextBox 7"/>
+          <p:cNvSpPr txBox="1"/>
+          <p:nvPr/>
+        </p:nvSpPr>
+        <p:spPr>
+          <a:xfrm>
+            <a:off x="502920" y="3419856"/>
+            <a:ext cx="6903720" cy="292608"/>
+          </a:xfrm>
+          <a:prstGeom prst="rect">
+            <a:avLst/>
+          </a:prstGeom>
+          <a:noFill/>
+        </p:spPr>
+        <p:txBody>
+          <a:bodyPr wrap="square" lIns="45720" rIns="45720" tIns="27432" bIns="27432" anchor="t">
+            <a:spAutoFit/>
+          </a:bodyPr>
+          <a:lstStyle/>
+          <a:p>
+            <a:pPr algn="ctr">
+              <a:spcAft>
+                <a:spcPts val="400"/>
+              </a:spcAft>
+            </a:pPr>
+            <a:r>
+              <a:rPr sz="1250" b="0" i="0">
+                <a:solidFill>
+                  <a:srgbClr val="111111"/>
+                </a:solidFill>
+                <a:latin typeface="Meiryo"/>
+                <a:ea typeface="Meiryo"/>
+                <a:cs typeface="Meiryo"/>
+              </a:rPr>
+              <a:t>分散したぶんだけ遅くなった</a:t>
+            </a:r>
+          </a:p>
+        </p:txBody>
+      </p:sp>
+      <p:sp>
+        <p:nvSpPr>
+          <p:cNvPr id="9" name="Rectangle 8"/>
+          <p:cNvSpPr/>
+          <p:nvPr/>
+        </p:nvSpPr>
+        <p:spPr>
+          <a:xfrm>
+            <a:off x="502920" y="3950208"/>
+            <a:ext cx="6903720" cy="1536192"/>
           </a:xfrm>
           <a:prstGeom prst="rect">
             <a:avLst/>
@@ -10237,14 +9981,14 @@
       </p:sp>
       <p:sp>
         <p:nvSpPr>
-          <p:cNvPr id="7" name="Rectangle 6"/>
+          <p:cNvPr id="10" name="Rectangle 9"/>
           <p:cNvSpPr/>
           <p:nvPr/>
         </p:nvSpPr>
         <p:spPr>
           <a:xfrm>
-            <a:off x="7607808" y="1115568"/>
-            <a:ext cx="4078224" cy="384048"/>
+            <a:off x="502920" y="3950208"/>
+            <a:ext cx="6903720" cy="384048"/>
           </a:xfrm>
           <a:prstGeom prst="rect">
             <a:avLst/>
@@ -10281,14 +10025,14 @@
       </p:sp>
       <p:sp>
         <p:nvSpPr>
-          <p:cNvPr id="8" name="TextBox 7"/>
+          <p:cNvPr id="11" name="TextBox 10"/>
           <p:cNvSpPr txBox="1"/>
           <p:nvPr/>
         </p:nvSpPr>
         <p:spPr>
           <a:xfrm>
-            <a:off x="7607808" y="1115568"/>
-            <a:ext cx="4078224" cy="384048"/>
+            <a:off x="502920" y="3950208"/>
+            <a:ext cx="6903720" cy="384048"/>
           </a:xfrm>
           <a:prstGeom prst="rect">
             <a:avLst/>
@@ -10307,6 +10051,230 @@
               </a:spcAft>
             </a:pPr>
             <a:r>
+              <a:rPr sz="1400" b="1" i="0">
+                <a:solidFill>
+                  <a:srgbClr val="111111"/>
+                </a:solidFill>
+                <a:latin typeface="Meiryo"/>
+                <a:ea typeface="Meiryo"/>
+                <a:cs typeface="Meiryo"/>
+              </a:rPr>
+              <a:t>12 〜 13 ms の読み方</a:t>
+            </a:r>
+          </a:p>
+        </p:txBody>
+      </p:sp>
+      <p:sp>
+        <p:nvSpPr>
+          <p:cNvPr id="12" name="TextBox 11"/>
+          <p:cNvSpPr txBox="1"/>
+          <p:nvPr/>
+        </p:nvSpPr>
+        <p:spPr>
+          <a:xfrm>
+            <a:off x="502920" y="4334256"/>
+            <a:ext cx="6903720" cy="1152144"/>
+          </a:xfrm>
+          <a:prstGeom prst="rect">
+            <a:avLst/>
+          </a:prstGeom>
+          <a:noFill/>
+        </p:spPr>
+        <p:txBody>
+          <a:bodyPr wrap="square" lIns="109728" rIns="109728" tIns="65836" bIns="65836" anchor="t">
+            <a:spAutoFit/>
+          </a:bodyPr>
+          <a:lstStyle/>
+          <a:p>
+            <a:pPr algn="l">
+              <a:spcAft>
+                <a:spcPts val="500"/>
+              </a:spcAft>
+            </a:pPr>
+            <a:r>
+              <a:rPr sz="1150" b="0" i="0">
+                <a:solidFill>
+                  <a:srgbClr val="111111"/>
+                </a:solidFill>
+                <a:latin typeface="Meiryo"/>
+                <a:ea typeface="Meiryo"/>
+                <a:cs typeface="Meiryo"/>
+              </a:rPr>
+              <a:t>・ 分割で浮く計算は 数 ms (単コア 5〜10 ms の半分)。リンクが張れている間の往復も 数 ms。</a:t>
+            </a:r>
+          </a:p>
+          <a:p>
+            <a:pPr algn="l">
+              <a:spcAft>
+                <a:spcPts val="900"/>
+              </a:spcAft>
+            </a:pPr>
+            <a:r>
+              <a:rPr sz="1150" b="0" i="0">
+                <a:solidFill>
+                  <a:srgbClr val="111111"/>
+                </a:solidFill>
+                <a:latin typeface="Meiryo"/>
+                <a:ea typeface="Meiryo"/>
+                <a:cs typeface="Meiryo"/>
+              </a:rPr>
+              <a:t>  差し引きで通信のほうが勝つ = N=32 では分散する意味がない</a:t>
+            </a:r>
+          </a:p>
+          <a:p>
+            <a:pPr algn="l">
+              <a:spcAft>
+                <a:spcPts val="500"/>
+              </a:spcAft>
+            </a:pPr>
+            <a:r>
+              <a:rPr sz="1150" b="0" i="0">
+                <a:solidFill>
+                  <a:srgbClr val="5A5A5A"/>
+                </a:solidFill>
+                <a:latin typeface="Meiryo"/>
+                <a:ea typeface="Meiryo"/>
+                <a:cs typeface="Meiryo"/>
+              </a:rPr>
+              <a:t>・ 407 ms の RTT は 100 回連続プローブ中の値で、GEMM 実行中のレイテンシではない。</a:t>
+            </a:r>
+          </a:p>
+          <a:p>
+            <a:pPr algn="l">
+              <a:spcAft>
+                <a:spcPts val="0"/>
+              </a:spcAft>
+            </a:pPr>
+            <a:r>
+              <a:rPr sz="1150" b="0" i="0">
+                <a:solidFill>
+                  <a:srgbClr val="5A5A5A"/>
+                </a:solidFill>
+                <a:latin typeface="Meiryo"/>
+                <a:ea typeface="Meiryo"/>
+                <a:cs typeface="Meiryo"/>
+              </a:rPr>
+              <a:t>  省電力 (sniff) に落ちた状態から叩き起こすとここまで伸びる (タップ再実行の 128 ms)</a:t>
+            </a:r>
+          </a:p>
+        </p:txBody>
+      </p:sp>
+      <p:sp>
+        <p:nvSpPr>
+          <p:cNvPr id="13" name="Rectangle 12"/>
+          <p:cNvSpPr/>
+          <p:nvPr/>
+        </p:nvSpPr>
+        <p:spPr>
+          <a:xfrm>
+            <a:off x="7607808" y="1115568"/>
+            <a:ext cx="4078224" cy="4370832"/>
+          </a:xfrm>
+          <a:prstGeom prst="rect">
+            <a:avLst/>
+          </a:prstGeom>
+          <a:solidFill>
+            <a:srgbClr val="F4F4F4"/>
+          </a:solidFill>
+          <a:ln w="9525">
+            <a:solidFill>
+              <a:srgbClr val="9E9E9E"/>
+            </a:solidFill>
+          </a:ln>
+          <a:effectLst/>
+        </p:spPr>
+        <p:style>
+          <a:lnRef idx="1">
+            <a:schemeClr val="accent1"/>
+          </a:lnRef>
+          <a:fillRef idx="3">
+            <a:schemeClr val="accent1"/>
+          </a:fillRef>
+          <a:effectRef idx="2">
+            <a:schemeClr val="accent1"/>
+          </a:effectRef>
+          <a:fontRef idx="minor">
+            <a:schemeClr val="lt1"/>
+          </a:fontRef>
+        </p:style>
+        <p:txBody>
+          <a:bodyPr rtlCol="0" anchor="ctr"/>
+          <a:lstStyle/>
+          <a:p/>
+        </p:txBody>
+      </p:sp>
+      <p:sp>
+        <p:nvSpPr>
+          <p:cNvPr id="14" name="Rectangle 13"/>
+          <p:cNvSpPr/>
+          <p:nvPr/>
+        </p:nvSpPr>
+        <p:spPr>
+          <a:xfrm>
+            <a:off x="7607808" y="1115568"/>
+            <a:ext cx="4078224" cy="384048"/>
+          </a:xfrm>
+          <a:prstGeom prst="rect">
+            <a:avLst/>
+          </a:prstGeom>
+          <a:solidFill>
+            <a:srgbClr val="E8E8E8"/>
+          </a:solidFill>
+          <a:ln w="9525">
+            <a:solidFill>
+              <a:srgbClr val="9E9E9E"/>
+            </a:solidFill>
+          </a:ln>
+          <a:effectLst/>
+        </p:spPr>
+        <p:style>
+          <a:lnRef idx="1">
+            <a:schemeClr val="accent1"/>
+          </a:lnRef>
+          <a:fillRef idx="3">
+            <a:schemeClr val="accent1"/>
+          </a:fillRef>
+          <a:effectRef idx="2">
+            <a:schemeClr val="accent1"/>
+          </a:effectRef>
+          <a:fontRef idx="minor">
+            <a:schemeClr val="lt1"/>
+          </a:fontRef>
+        </p:style>
+        <p:txBody>
+          <a:bodyPr rtlCol="0" anchor="ctr"/>
+          <a:lstStyle/>
+          <a:p/>
+        </p:txBody>
+      </p:sp>
+      <p:sp>
+        <p:nvSpPr>
+          <p:cNvPr id="15" name="TextBox 14"/>
+          <p:cNvSpPr txBox="1"/>
+          <p:nvPr/>
+        </p:nvSpPr>
+        <p:spPr>
+          <a:xfrm>
+            <a:off x="7607808" y="1115568"/>
+            <a:ext cx="4078224" cy="384048"/>
+          </a:xfrm>
+          <a:prstGeom prst="rect">
+            <a:avLst/>
+          </a:prstGeom>
+          <a:noFill/>
+        </p:spPr>
+        <p:txBody>
+          <a:bodyPr wrap="square" lIns="109728" rIns="109728" tIns="65836" bIns="65836" anchor="ctr">
+            <a:spAutoFit/>
+          </a:bodyPr>
+          <a:lstStyle/>
+          <a:p>
+            <a:pPr algn="l">
+              <a:spcAft>
+                <a:spcPts val="400"/>
+              </a:spcAft>
+            </a:pPr>
+            <a:r>
               <a:rPr sz="1350" b="1" i="0">
                 <a:solidFill>
                   <a:srgbClr val="111111"/>
@@ -10322,14 +10290,14 @@
       </p:sp>
       <p:sp>
         <p:nvSpPr>
-          <p:cNvPr id="9" name="Rectangle 8"/>
+          <p:cNvPr id="16" name="Rectangle 15"/>
           <p:cNvSpPr/>
           <p:nvPr/>
         </p:nvSpPr>
         <p:spPr>
           <a:xfrm>
-            <a:off x="7790688" y="1664208"/>
-            <a:ext cx="3712463" cy="786384"/>
+            <a:off x="7790688" y="1627632"/>
+            <a:ext cx="3712463" cy="841248"/>
           </a:xfrm>
           <a:prstGeom prst="rect">
             <a:avLst/>
@@ -10366,14 +10334,14 @@
       </p:sp>
       <p:sp>
         <p:nvSpPr>
-          <p:cNvPr id="10" name="TextBox 9"/>
+          <p:cNvPr id="17" name="TextBox 16"/>
           <p:cNvSpPr txBox="1"/>
           <p:nvPr/>
         </p:nvSpPr>
         <p:spPr>
           <a:xfrm>
-            <a:off x="7790688" y="1700784"/>
-            <a:ext cx="3712463" cy="731520"/>
+            <a:off x="7790688" y="1664208"/>
+            <a:ext cx="3712463" cy="292608"/>
           </a:xfrm>
           <a:prstGeom prst="rect">
             <a:avLst/>
@@ -10381,18 +10349,18 @@
           <a:noFill/>
         </p:spPr>
         <p:txBody>
-          <a:bodyPr wrap="square" lIns="45720" rIns="45720" tIns="27432" bIns="27432" anchor="t">
+          <a:bodyPr wrap="square" lIns="36576" rIns="36576" tIns="21945" bIns="21945" anchor="t">
             <a:spAutoFit/>
           </a:bodyPr>
           <a:lstStyle/>
           <a:p>
             <a:pPr algn="ctr">
               <a:spcAft>
-                <a:spcPts val="200"/>
-              </a:spcAft>
-            </a:pPr>
-            <a:r>
-              <a:rPr sz="1200" b="0" i="0">
+                <a:spcPts val="400"/>
+              </a:spcAft>
+            </a:pPr>
+            <a:r>
+              <a:rPr sz="1200" b="1" i="0">
                 <a:solidFill>
                   <a:srgbClr val="111111"/>
                 </a:solidFill>
@@ -10400,22 +10368,63 @@
                 <a:ea typeface="Meiryo"/>
                 <a:cs typeface="Meiryo"/>
               </a:rPr>
-              <a:t>N=32 GEMM の計算量
-2 × 32³ ≒ 65,000 flop  →  数 ms</a:t>
-            </a:r>
-          </a:p>
-        </p:txBody>
-      </p:sp>
-      <p:sp>
-        <p:nvSpPr>
-          <p:cNvPr id="11" name="Rectangle 10"/>
+              <a:t>① 分割で浮く計算</a:t>
+            </a:r>
+          </a:p>
+        </p:txBody>
+      </p:sp>
+      <p:sp>
+        <p:nvSpPr>
+          <p:cNvPr id="18" name="TextBox 17"/>
+          <p:cNvSpPr txBox="1"/>
+          <p:nvPr/>
+        </p:nvSpPr>
+        <p:spPr>
+          <a:xfrm>
+            <a:off x="7790688" y="1938528"/>
+            <a:ext cx="3712463" cy="512064"/>
+          </a:xfrm>
+          <a:prstGeom prst="rect">
+            <a:avLst/>
+          </a:prstGeom>
+          <a:noFill/>
+        </p:spPr>
+        <p:txBody>
+          <a:bodyPr wrap="square" lIns="36576" rIns="36576" tIns="21945" bIns="21945" anchor="t">
+            <a:spAutoFit/>
+          </a:bodyPr>
+          <a:lstStyle/>
+          <a:p>
+            <a:pPr algn="ctr">
+              <a:spcAft>
+                <a:spcPts val="100"/>
+              </a:spcAft>
+            </a:pPr>
+            <a:r>
+              <a:rPr sz="1100" b="0" i="0">
+                <a:solidFill>
+                  <a:srgbClr val="5A5A5A"/>
+                </a:solidFill>
+                <a:latin typeface="Meiryo"/>
+                <a:ea typeface="Meiryo"/>
+                <a:cs typeface="Meiryo"/>
+              </a:rPr>
+              <a:t>2 × 32³ ≒ 65,000 flop を半分に
+→  数 ms</a:t>
+            </a:r>
+          </a:p>
+        </p:txBody>
+      </p:sp>
+      <p:sp>
+        <p:nvSpPr>
+          <p:cNvPr id="19" name="Rectangle 18"/>
           <p:cNvSpPr/>
           <p:nvPr/>
         </p:nvSpPr>
         <p:spPr>
           <a:xfrm>
             <a:off x="7790688" y="2560320"/>
-            <a:ext cx="3712463" cy="786384"/>
+            <a:ext cx="3712463" cy="841248"/>
           </a:xfrm>
           <a:prstGeom prst="rect">
             <a:avLst/>
@@ -10452,14 +10461,14 @@
       </p:sp>
       <p:sp>
         <p:nvSpPr>
-          <p:cNvPr id="12" name="TextBox 11"/>
+          <p:cNvPr id="20" name="TextBox 19"/>
           <p:cNvSpPr txBox="1"/>
           <p:nvPr/>
         </p:nvSpPr>
         <p:spPr>
           <a:xfrm>
             <a:off x="7790688" y="2596896"/>
-            <a:ext cx="3712463" cy="731520"/>
+            <a:ext cx="3712463" cy="292608"/>
           </a:xfrm>
           <a:prstGeom prst="rect">
             <a:avLst/>
@@ -10467,14 +10476,14 @@
           <a:noFill/>
         </p:spPr>
         <p:txBody>
-          <a:bodyPr wrap="square" lIns="45720" rIns="45720" tIns="27432" bIns="27432" anchor="t">
+          <a:bodyPr wrap="square" lIns="36576" rIns="36576" tIns="21945" bIns="21945" anchor="t">
             <a:spAutoFit/>
           </a:bodyPr>
           <a:lstStyle/>
           <a:p>
             <a:pPr algn="ctr">
               <a:spcAft>
-                <a:spcPts val="200"/>
+                <a:spcPts val="400"/>
               </a:spcAft>
             </a:pPr>
             <a:r>
@@ -10486,24 +10495,234 @@
                 <a:ea typeface="Meiryo"/>
                 <a:cs typeface="Meiryo"/>
               </a:rPr>
-              <a:t>左右間 1 往復のレイテンシ
-44 〜 407 ms</a:t>
-            </a:r>
-          </a:p>
-        </p:txBody>
-      </p:sp>
-      <p:sp>
-        <p:nvSpPr>
-          <p:cNvPr id="13" name="Down Arrow 12"/>
+              <a:t>② 往復に要る時間</a:t>
+            </a:r>
+          </a:p>
+        </p:txBody>
+      </p:sp>
+      <p:sp>
+        <p:nvSpPr>
+          <p:cNvPr id="21" name="TextBox 20"/>
+          <p:cNvSpPr txBox="1"/>
+          <p:nvPr/>
+        </p:nvSpPr>
+        <p:spPr>
+          <a:xfrm>
+            <a:off x="7790688" y="2871215"/>
+            <a:ext cx="3712463" cy="512064"/>
+          </a:xfrm>
+          <a:prstGeom prst="rect">
+            <a:avLst/>
+          </a:prstGeom>
+          <a:noFill/>
+        </p:spPr>
+        <p:txBody>
+          <a:bodyPr wrap="square" lIns="36576" rIns="36576" tIns="21945" bIns="21945" anchor="t">
+            <a:spAutoFit/>
+          </a:bodyPr>
+          <a:lstStyle/>
+          <a:p>
+            <a:pPr algn="ctr">
+              <a:spcAft>
+                <a:spcPts val="100"/>
+              </a:spcAft>
+            </a:pPr>
+            <a:r>
+              <a:rPr sz="1100" b="0" i="0">
+                <a:solidFill>
+                  <a:srgbClr val="5A5A5A"/>
+                </a:solidFill>
+                <a:latin typeface="Meiryo"/>
+                <a:ea typeface="Meiryo"/>
+                <a:cs typeface="Meiryo"/>
+              </a:rPr>
+              <a:t>リンクが生きていれば 数 ms
+→  ① とほぼ相殺、むしろ負け</a:t>
+            </a:r>
+          </a:p>
+        </p:txBody>
+      </p:sp>
+      <p:sp>
+        <p:nvSpPr>
+          <p:cNvPr id="22" name="Rectangle 21"/>
           <p:cNvSpPr/>
           <p:nvPr/>
         </p:nvSpPr>
         <p:spPr>
           <a:xfrm>
-            <a:off x="9445752" y="3401568"/>
-            <a:ext cx="402336" cy="292608"/>
-          </a:xfrm>
-          <a:prstGeom prst="downArrow">
+            <a:off x="7790688" y="3493008"/>
+            <a:ext cx="3712463" cy="841248"/>
+          </a:xfrm>
+          <a:prstGeom prst="rect">
+            <a:avLst/>
+          </a:prstGeom>
+          <a:solidFill>
+            <a:srgbClr val="FFFFFF"/>
+          </a:solidFill>
+          <a:ln w="9525">
+            <a:solidFill>
+              <a:srgbClr val="9E9E9E"/>
+            </a:solidFill>
+          </a:ln>
+          <a:effectLst/>
+        </p:spPr>
+        <p:style>
+          <a:lnRef idx="1">
+            <a:schemeClr val="accent1"/>
+          </a:lnRef>
+          <a:fillRef idx="3">
+            <a:schemeClr val="accent1"/>
+          </a:fillRef>
+          <a:effectRef idx="2">
+            <a:schemeClr val="accent1"/>
+          </a:effectRef>
+          <a:fontRef idx="minor">
+            <a:schemeClr val="lt1"/>
+          </a:fontRef>
+        </p:style>
+        <p:txBody>
+          <a:bodyPr rtlCol="0" anchor="ctr"/>
+          <a:lstStyle/>
+          <a:p/>
+        </p:txBody>
+      </p:sp>
+      <p:sp>
+        <p:nvSpPr>
+          <p:cNvPr id="23" name="TextBox 22"/>
+          <p:cNvSpPr txBox="1"/>
+          <p:nvPr/>
+        </p:nvSpPr>
+        <p:spPr>
+          <a:xfrm>
+            <a:off x="7790688" y="3529584"/>
+            <a:ext cx="3712463" cy="292608"/>
+          </a:xfrm>
+          <a:prstGeom prst="rect">
+            <a:avLst/>
+          </a:prstGeom>
+          <a:noFill/>
+        </p:spPr>
+        <p:txBody>
+          <a:bodyPr wrap="square" lIns="36576" rIns="36576" tIns="21945" bIns="21945" anchor="t">
+            <a:spAutoFit/>
+          </a:bodyPr>
+          <a:lstStyle/>
+          <a:p>
+            <a:pPr algn="ctr">
+              <a:spcAft>
+                <a:spcPts val="400"/>
+              </a:spcAft>
+            </a:pPr>
+            <a:r>
+              <a:rPr sz="1200" b="1" i="0">
+                <a:solidFill>
+                  <a:srgbClr val="111111"/>
+                </a:solidFill>
+                <a:latin typeface="Meiryo"/>
+                <a:ea typeface="Meiryo"/>
+                <a:cs typeface="Meiryo"/>
+              </a:rPr>
+              <a:t>③ アイドルからの往復</a:t>
+            </a:r>
+          </a:p>
+        </p:txBody>
+      </p:sp>
+      <p:sp>
+        <p:nvSpPr>
+          <p:cNvPr id="24" name="TextBox 23"/>
+          <p:cNvSpPr txBox="1"/>
+          <p:nvPr/>
+        </p:nvSpPr>
+        <p:spPr>
+          <a:xfrm>
+            <a:off x="7790688" y="3803904"/>
+            <a:ext cx="3712463" cy="512064"/>
+          </a:xfrm>
+          <a:prstGeom prst="rect">
+            <a:avLst/>
+          </a:prstGeom>
+          <a:noFill/>
+        </p:spPr>
+        <p:txBody>
+          <a:bodyPr wrap="square" lIns="36576" rIns="36576" tIns="21945" bIns="21945" anchor="t">
+            <a:spAutoFit/>
+          </a:bodyPr>
+          <a:lstStyle/>
+          <a:p>
+            <a:pPr algn="ctr">
+              <a:spcAft>
+                <a:spcPts val="100"/>
+              </a:spcAft>
+            </a:pPr>
+            <a:r>
+              <a:rPr sz="1100" b="0" i="0">
+                <a:solidFill>
+                  <a:srgbClr val="5A5A5A"/>
+                </a:solidFill>
+                <a:latin typeface="Meiryo"/>
+                <a:ea typeface="Meiryo"/>
+                <a:cs typeface="Meiryo"/>
+              </a:rPr>
+              <a:t>最大 407 ms
+=  単コア GEMM 40 〜 80 回ぶん</a:t>
+            </a:r>
+          </a:p>
+        </p:txBody>
+      </p:sp>
+      <p:sp>
+        <p:nvSpPr>
+          <p:cNvPr id="25" name="TextBox 24"/>
+          <p:cNvSpPr txBox="1"/>
+          <p:nvPr/>
+        </p:nvSpPr>
+        <p:spPr>
+          <a:xfrm>
+            <a:off x="7717536" y="4517136"/>
+            <a:ext cx="3858768" cy="877824"/>
+          </a:xfrm>
+          <a:prstGeom prst="rect">
+            <a:avLst/>
+          </a:prstGeom>
+          <a:noFill/>
+        </p:spPr>
+        <p:txBody>
+          <a:bodyPr wrap="square" lIns="54864" rIns="54864" tIns="32918" bIns="32918" anchor="t">
+            <a:spAutoFit/>
+          </a:bodyPr>
+          <a:lstStyle/>
+          <a:p>
+            <a:pPr algn="ctr">
+              <a:spcAft>
+                <a:spcPts val="300"/>
+              </a:spcAft>
+            </a:pPr>
+            <a:r>
+              <a:rPr sz="1500" b="1" i="0">
+                <a:solidFill>
+                  <a:srgbClr val="111111"/>
+                </a:solidFill>
+                <a:latin typeface="Meiryo"/>
+                <a:ea typeface="Meiryo"/>
+                <a:cs typeface="Meiryo"/>
+              </a:rPr>
+              <a:t>「計算量 / 通信量」が小さい問題を
+分散してはいけない</a:t>
+            </a:r>
+          </a:p>
+        </p:txBody>
+      </p:sp>
+      <p:sp>
+        <p:nvSpPr>
+          <p:cNvPr id="26" name="Rectangle 25"/>
+          <p:cNvSpPr/>
+          <p:nvPr/>
+        </p:nvSpPr>
+        <p:spPr>
+          <a:xfrm>
+            <a:off x="502920" y="5614416"/>
+            <a:ext cx="11185855" cy="640080"/>
+          </a:xfrm>
+          <a:prstGeom prst="rect">
             <a:avLst/>
           </a:prstGeom>
           <a:solidFill>
@@ -10538,135 +10757,14 @@
       </p:sp>
       <p:sp>
         <p:nvSpPr>
-          <p:cNvPr id="14" name="TextBox 13"/>
+          <p:cNvPr id="27" name="TextBox 26"/>
           <p:cNvSpPr txBox="1"/>
           <p:nvPr/>
         </p:nvSpPr>
         <p:spPr>
           <a:xfrm>
-            <a:off x="7717536" y="3749039"/>
-            <a:ext cx="3858768" cy="1417320"/>
-          </a:xfrm>
-          <a:prstGeom prst="rect">
-            <a:avLst/>
-          </a:prstGeom>
-          <a:noFill/>
-        </p:spPr>
-        <p:txBody>
-          <a:bodyPr wrap="square" lIns="54864" rIns="54864" tIns="32918" bIns="32918" anchor="t">
-            <a:spAutoFit/>
-          </a:bodyPr>
-          <a:lstStyle/>
-          <a:p>
-            <a:pPr algn="l">
-              <a:spcAft>
-                <a:spcPts val="800"/>
-              </a:spcAft>
-            </a:pPr>
-            <a:r>
-              <a:rPr sz="1300" b="1" i="0">
-                <a:solidFill>
-                  <a:srgbClr val="111111"/>
-                </a:solidFill>
-                <a:latin typeface="Meiryo"/>
-                <a:ea typeface="Meiryo"/>
-                <a:cs typeface="Meiryo"/>
-              </a:rPr>
-              <a:t>通信 1 回で、計算 100 回ぶんの時間が飛ぶ</a:t>
-            </a:r>
-          </a:p>
-          <a:p>
-            <a:pPr algn="l">
-              <a:spcAft>
-                <a:spcPts val="800"/>
-              </a:spcAft>
-            </a:pPr>
-            <a:r>
-              <a:rPr sz="1150" b="0" i="0">
-                <a:solidFill>
-                  <a:srgbClr val="5A5A5A"/>
-                </a:solidFill>
-                <a:latin typeface="Meiryo"/>
-                <a:ea typeface="Meiryo"/>
-                <a:cs typeface="Meiryo"/>
-              </a:rPr>
-              <a:t>「計算量 / 通信量」が小さい問題を分散しては いけない — HPC の教科書どおりの結論を、耳の中で再現してしまった。</a:t>
-            </a:r>
-          </a:p>
-          <a:p>
-            <a:pPr algn="l">
-              <a:spcAft>
-                <a:spcPts val="0"/>
-              </a:spcAft>
-            </a:pPr>
-            <a:r>
-              <a:rPr sz="1150" b="0" i="0">
-                <a:solidFill>
-                  <a:srgbClr val="5A5A5A"/>
-                </a:solidFill>
-                <a:latin typeface="Meiryo"/>
-                <a:ea typeface="Meiryo"/>
-                <a:cs typeface="Meiryo"/>
-              </a:rPr>
-              <a:t>N を大きくすれば逆転するが、今度は RAM (330 KB) が先に尽きる。</a:t>
-            </a:r>
-          </a:p>
-        </p:txBody>
-      </p:sp>
-      <p:sp>
-        <p:nvSpPr>
-          <p:cNvPr id="15" name="Rectangle 14"/>
-          <p:cNvSpPr/>
-          <p:nvPr/>
-        </p:nvSpPr>
-        <p:spPr>
-          <a:xfrm>
-            <a:off x="502920" y="5440680"/>
-            <a:ext cx="6903720" cy="658368"/>
-          </a:xfrm>
-          <a:prstGeom prst="rect">
-            <a:avLst/>
-          </a:prstGeom>
-          <a:solidFill>
-            <a:srgbClr val="E8E8E8"/>
-          </a:solidFill>
-          <a:ln w="9525">
-            <a:solidFill>
-              <a:srgbClr val="9E9E9E"/>
-            </a:solidFill>
-          </a:ln>
-          <a:effectLst/>
-        </p:spPr>
-        <p:style>
-          <a:lnRef idx="1">
-            <a:schemeClr val="accent1"/>
-          </a:lnRef>
-          <a:fillRef idx="3">
-            <a:schemeClr val="accent1"/>
-          </a:fillRef>
-          <a:effectRef idx="2">
-            <a:schemeClr val="accent1"/>
-          </a:effectRef>
-          <a:fontRef idx="minor">
-            <a:schemeClr val="lt1"/>
-          </a:fontRef>
-        </p:style>
-        <p:txBody>
-          <a:bodyPr rtlCol="0" anchor="ctr"/>
-          <a:lstStyle/>
-          <a:p/>
-        </p:txBody>
-      </p:sp>
-      <p:sp>
-        <p:nvSpPr>
-          <p:cNvPr id="16" name="TextBox 15"/>
-          <p:cNvSpPr txBox="1"/>
-          <p:nvPr/>
-        </p:nvSpPr>
-        <p:spPr>
-          <a:xfrm>
-            <a:off x="502920" y="5440680"/>
-            <a:ext cx="6903720" cy="658368"/>
+            <a:off x="502920" y="5614416"/>
+            <a:ext cx="11185855" cy="640080"/>
           </a:xfrm>
           <a:prstGeom prst="rect">
             <a:avLst/>
@@ -10685,7 +10783,7 @@
               </a:spcAft>
             </a:pPr>
             <a:r>
-              <a:rPr sz="1350" b="1" i="0">
+              <a:rPr sz="1450" b="1" i="0">
                 <a:solidFill>
                   <a:srgbClr val="111111"/>
                 </a:solidFill>
@@ -10693,14 +10791,14 @@
                 <a:ea typeface="Meiryo"/>
                 <a:cs typeface="Meiryo"/>
               </a:rPr>
-              <a:t>速くはならなかった。が、なぜ遅いのかを 定量的に説明できる状態にはなった。</a:t>
-            </a:r>
-          </a:p>
-        </p:txBody>
-      </p:sp>
-      <p:sp>
-        <p:nvSpPr>
-          <p:cNvPr id="17" name="TextBox 16"/>
+              <a:t>速くはならなかった。が、HPC の教科書どおりの結論を、耳の中で定量的に再現できた。</a:t>
+            </a:r>
+          </a:p>
+        </p:txBody>
+      </p:sp>
+      <p:sp>
+        <p:nvSpPr>
+          <p:cNvPr id="28" name="TextBox 27"/>
           <p:cNvSpPr txBox="1"/>
           <p:nvPr/>
         </p:nvSpPr>
@@ -11367,7 +11465,7 @@
                 <a:ea typeface="Meiryo"/>
                 <a:cs typeface="Meiryo"/>
               </a:rPr>
-              <a:t>踏んだ 6 個の地雷のうち、計算に起因するものはゼロ。全部が電源・ペアリング・RTOS</a:t>
+              <a:t>踏んだ 6 個の地雷のうち、計算に起因するものはゼロ。全部が電源・接続・RTOS・SDK の仕様</a:t>
             </a:r>
           </a:p>
         </p:txBody>
@@ -12111,7 +12209,7 @@
                 <a:ea typeface="Meiryo"/>
                 <a:cs typeface="Meiryo"/>
               </a:rPr>
-              <a:t>RAM 330 KB が上限で、N=128 程度まで</a:t>
+              <a:t>RAM 330 KB の上限は N≈128。そこまでで通信コストを償却できるかは未検証</a:t>
             </a:r>
           </a:p>
         </p:txBody>
@@ -12454,7 +12552,7 @@
                 <a:ea typeface="Meiryo"/>
                 <a:cs typeface="Meiryo"/>
               </a:rPr>
-              <a:t>標準 MPI + OpenMP で書いたベンチが、無改変で耳の中で PASS した</a:t>
+              <a:t>標準 MPI API で書いたベンチが、無改変で耳の中で PASS した (OpenMP は互換スタブ)</a:t>
             </a:r>
           </a:p>
         </p:txBody>
@@ -12700,7 +12798,7 @@
                 <a:ea typeface="Meiryo"/>
                 <a:cs typeface="Meiryo"/>
               </a:rPr>
-              <a:t>速くはならなかった (通信 407 ms vs 計算 数 ms) — が、その理由は定量的に説明できる</a:t>
+              <a:t>速くはならなかった (単コア 5〜10 ms → 2 ノード 12〜13 ms) — 理由は定量的に説明できる</a:t>
             </a:r>
           </a:p>
         </p:txBody>
@@ -12713,8 +12811,8 @@
         </p:nvSpPr>
         <p:spPr>
           <a:xfrm>
-            <a:off x="502920" y="4133087"/>
-            <a:ext cx="3594506" cy="1298448"/>
+            <a:off x="502920" y="4023360"/>
+            <a:ext cx="3594506" cy="1188720"/>
           </a:xfrm>
           <a:prstGeom prst="rect">
             <a:avLst/>
@@ -12757,7 +12855,7 @@
         </p:nvSpPr>
         <p:spPr>
           <a:xfrm>
-            <a:off x="502920" y="4133087"/>
+            <a:off x="502920" y="4023360"/>
             <a:ext cx="3594506" cy="384048"/>
           </a:xfrm>
           <a:prstGeom prst="rect">
@@ -12801,7 +12899,7 @@
         </p:nvSpPr>
         <p:spPr>
           <a:xfrm>
-            <a:off x="502920" y="4133087"/>
+            <a:off x="502920" y="4023360"/>
             <a:ext cx="3594506" cy="384048"/>
           </a:xfrm>
           <a:prstGeom prst="rect">
@@ -12842,8 +12940,8 @@
         </p:nvSpPr>
         <p:spPr>
           <a:xfrm>
-            <a:off x="502920" y="4517136"/>
-            <a:ext cx="3594506" cy="914400"/>
+            <a:off x="502920" y="4407408"/>
+            <a:ext cx="3594506" cy="804672"/>
           </a:xfrm>
           <a:prstGeom prst="rect">
             <a:avLst/>
@@ -12884,8 +12982,8 @@
         </p:nvSpPr>
         <p:spPr>
           <a:xfrm>
-            <a:off x="4298594" y="4133087"/>
-            <a:ext cx="3594506" cy="1298448"/>
+            <a:off x="4298594" y="4023360"/>
+            <a:ext cx="3594506" cy="1188720"/>
           </a:xfrm>
           <a:prstGeom prst="rect">
             <a:avLst/>
@@ -12928,7 +13026,7 @@
         </p:nvSpPr>
         <p:spPr>
           <a:xfrm>
-            <a:off x="4298594" y="4133087"/>
+            <a:off x="4298594" y="4023360"/>
             <a:ext cx="3594506" cy="384048"/>
           </a:xfrm>
           <a:prstGeom prst="rect">
@@ -12972,7 +13070,7 @@
         </p:nvSpPr>
         <p:spPr>
           <a:xfrm>
-            <a:off x="4298594" y="4133087"/>
+            <a:off x="4298594" y="4023360"/>
             <a:ext cx="3594506" cy="384048"/>
           </a:xfrm>
           <a:prstGeom prst="rect">
@@ -13013,8 +13111,8 @@
         </p:nvSpPr>
         <p:spPr>
           <a:xfrm>
-            <a:off x="4298594" y="4517136"/>
-            <a:ext cx="3594506" cy="914400"/>
+            <a:off x="4298594" y="4407408"/>
+            <a:ext cx="3594506" cy="804672"/>
           </a:xfrm>
           <a:prstGeom prst="rect">
             <a:avLst/>
@@ -13055,8 +13153,8 @@
         </p:nvSpPr>
         <p:spPr>
           <a:xfrm>
-            <a:off x="8094268" y="4133087"/>
-            <a:ext cx="3594506" cy="1298448"/>
+            <a:off x="8094268" y="4023360"/>
+            <a:ext cx="3594506" cy="1188720"/>
           </a:xfrm>
           <a:prstGeom prst="rect">
             <a:avLst/>
@@ -13099,7 +13197,7 @@
         </p:nvSpPr>
         <p:spPr>
           <a:xfrm>
-            <a:off x="8094268" y="4133087"/>
+            <a:off x="8094268" y="4023360"/>
             <a:ext cx="3594506" cy="384048"/>
           </a:xfrm>
           <a:prstGeom prst="rect">
@@ -13143,7 +13241,7 @@
         </p:nvSpPr>
         <p:spPr>
           <a:xfrm>
-            <a:off x="8094268" y="4133087"/>
+            <a:off x="8094268" y="4023360"/>
             <a:ext cx="3594506" cy="384048"/>
           </a:xfrm>
           <a:prstGeom prst="rect">
@@ -13184,8 +13282,8 @@
         </p:nvSpPr>
         <p:spPr>
           <a:xfrm>
-            <a:off x="8094268" y="4517136"/>
-            <a:ext cx="3594506" cy="914400"/>
+            <a:off x="8094268" y="4407408"/>
+            <a:ext cx="3594506" cy="804672"/>
           </a:xfrm>
           <a:prstGeom prst="rect">
             <a:avLst/>
@@ -13218,15 +13316,100 @@
           </a:p>
         </p:txBody>
       </p:sp>
+      <p:sp>
+        <p:nvSpPr>
+          <p:cNvPr id="27" name="Rectangle 26"/>
+          <p:cNvSpPr/>
+          <p:nvPr/>
+        </p:nvSpPr>
+        <p:spPr>
+          <a:xfrm>
+            <a:off x="502920" y="5340096"/>
+            <a:ext cx="11185855" cy="512064"/>
+          </a:xfrm>
+          <a:prstGeom prst="rect">
+            <a:avLst/>
+          </a:prstGeom>
+          <a:solidFill>
+            <a:srgbClr val="E8E8E8"/>
+          </a:solidFill>
+          <a:ln w="9525">
+            <a:solidFill>
+              <a:srgbClr val="9E9E9E"/>
+            </a:solidFill>
+          </a:ln>
+          <a:effectLst/>
+        </p:spPr>
+        <p:style>
+          <a:lnRef idx="1">
+            <a:schemeClr val="accent1"/>
+          </a:lnRef>
+          <a:fillRef idx="3">
+            <a:schemeClr val="accent1"/>
+          </a:fillRef>
+          <a:effectRef idx="2">
+            <a:schemeClr val="accent1"/>
+          </a:effectRef>
+          <a:fontRef idx="minor">
+            <a:schemeClr val="lt1"/>
+          </a:fontRef>
+        </p:style>
+        <p:txBody>
+          <a:bodyPr rtlCol="0" anchor="ctr"/>
+          <a:lstStyle/>
+          <a:p/>
+        </p:txBody>
+      </p:sp>
+      <p:sp>
+        <p:nvSpPr>
+          <p:cNvPr id="28" name="TextBox 27"/>
+          <p:cNvSpPr txBox="1"/>
+          <p:nvPr/>
+        </p:nvSpPr>
+        <p:spPr>
+          <a:xfrm>
+            <a:off x="502920" y="5340096"/>
+            <a:ext cx="11185855" cy="512064"/>
+          </a:xfrm>
+          <a:prstGeom prst="rect">
+            <a:avLst/>
+          </a:prstGeom>
+          <a:noFill/>
+        </p:spPr>
+        <p:txBody>
+          <a:bodyPr wrap="square" tIns="54864" bIns="54864" anchor="ctr">
+            <a:spAutoFit/>
+          </a:bodyPr>
+          <a:lstStyle/>
+          <a:p>
+            <a:pPr algn="ctr">
+              <a:spcAft>
+                <a:spcPts val="400"/>
+              </a:spcAft>
+            </a:pPr>
+            <a:r>
+              <a:rPr sz="1700" b="1" i="0">
+                <a:solidFill>
+                  <a:srgbClr val="111111"/>
+                </a:solidFill>
+                <a:latin typeface="Meiryo"/>
+                <a:ea typeface="Meiryo"/>
+                <a:cs typeface="Meiryo"/>
+              </a:rPr>
+              <a:t>みなさんの耳にも、暇をしている Cortex-M4F が 2 個入っています</a:t>
+            </a:r>
+          </a:p>
+        </p:txBody>
+      </p:sp>
       <p:cxnSp>
         <p:nvCxnSpPr>
-          <p:cNvPr id="27" name="Connector 26"/>
+          <p:cNvPr id="29" name="Connector 28"/>
           <p:cNvCxnSpPr/>
           <p:nvPr/>
         </p:nvCxnSpPr>
         <p:spPr>
           <a:xfrm>
-            <a:off x="502920" y="5742432"/>
+            <a:off x="502920" y="5980176"/>
             <a:ext cx="11185855" cy="0"/>
           </a:xfrm>
           <a:prstGeom prst="line">
@@ -13255,14 +13438,14 @@
       </p:cxnSp>
       <p:sp>
         <p:nvSpPr>
-          <p:cNvPr id="28" name="TextBox 27"/>
+          <p:cNvPr id="30" name="TextBox 29"/>
           <p:cNvSpPr txBox="1"/>
           <p:nvPr/>
         </p:nvSpPr>
         <p:spPr>
           <a:xfrm>
-            <a:off x="502920" y="5870448"/>
-            <a:ext cx="11185855" cy="822960"/>
+            <a:off x="502920" y="6053328"/>
+            <a:ext cx="11185855" cy="731520"/>
           </a:xfrm>
           <a:prstGeom prst="rect">
             <a:avLst/>
@@ -13307,14 +13490,14 @@
                 <a:ea typeface="Meiryo"/>
                 <a:cs typeface="Meiryo"/>
               </a:rPr>
-              <a:t>設計・実機ログ・失敗の記録はすべて docs/design-ibrt-transport.md (2,601 行) にあります</a:t>
-            </a:r>
-          </a:p>
-        </p:txBody>
-      </p:sp>
-      <p:sp>
-        <p:nvSpPr>
-          <p:cNvPr id="29" name="TextBox 28"/>
+              <a:t>設計・実機ログ・失敗の記録はすべて docs/design-ibrt-transport.md (2,643 行) にあります</a:t>
+            </a:r>
+          </a:p>
+        </p:txBody>
+      </p:sp>
+      <p:sp>
+        <p:nvSpPr>
+          <p:cNvPr id="31" name="TextBox 30"/>
           <p:cNvSpPr txBox="1"/>
           <p:nvPr/>
         </p:nvSpPr>
@@ -13901,19 +14084,37 @@
           <a:p>
             <a:pPr algn="l">
               <a:spcAft>
+                <a:spcPts val="400"/>
+              </a:spcAft>
+            </a:pPr>
+            <a:r>
+              <a:rPr sz="1500" b="0" i="0">
+                <a:solidFill>
+                  <a:srgbClr val="111111"/>
+                </a:solidFill>
+                <a:latin typeface="Meiryo"/>
+                <a:ea typeface="Meiryo"/>
+                <a:cs typeface="Meiryo"/>
+              </a:rPr>
+              <a:t>3.  標準 MPI API で書いた GEMM ベンチを、1 行も変えずに実機で PASS させた</a:t>
+            </a:r>
+          </a:p>
+          <a:p>
+            <a:pPr algn="l">
+              <a:spcAft>
                 <a:spcPts val="0"/>
               </a:spcAft>
             </a:pPr>
             <a:r>
-              <a:rPr sz="1500" b="0" i="0">
-                <a:solidFill>
-                  <a:srgbClr val="111111"/>
-                </a:solidFill>
-                <a:latin typeface="Meiryo"/>
-                <a:ea typeface="Meiryo"/>
-                <a:cs typeface="Meiryo"/>
-              </a:rPr>
-              <a:t>3.  標準 MPI + OpenMP で書かれた GEMM ベンチを、1 行も変えずに実機で PASS させた</a:t>
+              <a:rPr sz="1200" b="0" i="0">
+                <a:solidFill>
+                  <a:srgbClr val="5A5A5A"/>
+                </a:solidFill>
+                <a:latin typeface="Meiryo"/>
+                <a:ea typeface="Meiryo"/>
+                <a:cs typeface="Meiryo"/>
+              </a:rPr>
+              <a:t>     (OpenMP は API 互換のスタブ。ノード内 2 コア並列はまだ)</a:t>
             </a:r>
           </a:p>
         </p:txBody>
@@ -14250,7 +14451,7 @@
                 <a:ea typeface="Meiryo"/>
                 <a:cs typeface="Meiryo"/>
               </a:rPr>
-              <a:t>12 – 13 ms</a:t>
+              <a:t>max_payload 512 B</a:t>
             </a:r>
           </a:p>
         </p:txBody>
@@ -14291,7 +14492,7 @@
                 <a:ea typeface="Meiryo"/>
                 <a:cs typeface="Meiryo"/>
               </a:rPr>
-              <a:t>GEMM N=32 を 2 ノードで実行</a:t>
+              <a:t>ヘッダは 300、バイナリは 672、実測は 512</a:t>
             </a:r>
           </a:p>
         </p:txBody>
@@ -14628,7 +14829,7 @@
                 <a:ea typeface="Meiryo"/>
                 <a:cs typeface="Meiryo"/>
               </a:rPr>
-              <a:t>78 commits / 2 週間</a:t>
+              <a:t>80+ commits / 2 週間</a:t>
             </a:r>
           </a:p>
         </p:txBody>
@@ -16203,7 +16404,7 @@
                           <a:ea typeface="Meiryo"/>
                           <a:cs typeface="Meiryo"/>
                         </a:rPr>
-                        <a:t>イヤホン内の 2 コア</a:t>
+                        <a:t>イヤホン内の 2 コア (未達)</a:t>
                       </a:r>
                     </a:p>
                   </a:txBody>
@@ -16923,7 +17124,7 @@
                 <a:ea typeface="Meiryo"/>
                 <a:cs typeface="Meiryo"/>
               </a:rPr>
-              <a:t>BES2300YP   /   IBRT_MASTER
+              <a:t>BES2300YP   /   nv_role = MASTER
 Cortex-M4F ×2  (単精度 FPU)
 SRAM 992 KB  /  Flash 4 MB</a:t>
             </a:r>
@@ -17051,7 +17252,7 @@
                 <a:ea typeface="Meiryo"/>
                 <a:cs typeface="Meiryo"/>
               </a:rPr>
-              <a:t>BES2300YP   /   IBRT_SLAVE
+              <a:t>BES2300YP   /   nv_role = SLAVE
 Cortex-M4F ×2  (単精度 FPU)
 SRAM 992 KB  /  Flash 4 MB</a:t>
             </a:r>
@@ -17151,23 +17352,64 @@
                 <a:ea typeface="Meiryo"/>
                 <a:cs typeface="Meiryo"/>
               </a:rPr>
-              <a:t>TWS 制御チャネル
-cmdcode 0x8201 (自作)
-実効 512 B</a:t>
-            </a:r>
-          </a:p>
-        </p:txBody>
-      </p:sp>
-      <p:sp>
-        <p:nvSpPr>
-          <p:cNvPr id="13" name="Rectangle 12"/>
+              <a:t>左右間の
+TWS 制御チャネル
+(cmdcode 0x8201 を自作)</a:t>
+            </a:r>
+          </a:p>
+        </p:txBody>
+      </p:sp>
+      <p:sp>
+        <p:nvSpPr>
+          <p:cNvPr id="13" name="TextBox 12"/>
+          <p:cNvSpPr txBox="1"/>
+          <p:nvPr/>
+        </p:nvSpPr>
+        <p:spPr>
+          <a:xfrm>
+            <a:off x="502920" y="2834640"/>
+            <a:ext cx="11185855" cy="237744"/>
+          </a:xfrm>
+          <a:prstGeom prst="rect">
+            <a:avLst/>
+          </a:prstGeom>
+          <a:noFill/>
+        </p:spPr>
+        <p:txBody>
+          <a:bodyPr wrap="square" lIns="0" rIns="0" tIns="0" bIns="0" anchor="t">
+            <a:spAutoFit/>
+          </a:bodyPr>
+          <a:lstStyle/>
+          <a:p>
+            <a:pPr algn="ctr">
+              <a:spcAft>
+                <a:spcPts val="400"/>
+              </a:spcAft>
+            </a:pPr>
+            <a:r>
+              <a:rPr sz="1000" b="0" i="0">
+                <a:solidFill>
+                  <a:srgbClr val="5A5A5A"/>
+                </a:solidFill>
+                <a:latin typeface="Meiryo"/>
+                <a:ea typeface="Meiryo"/>
+                <a:cs typeface="Meiryo"/>
+              </a:rPr>
+              <a:t>※ rank は左右ストラップ由来で固定。IBRT のロール (master / slave) は起動ごとに入れ替わる</a:t>
+            </a:r>
+          </a:p>
+        </p:txBody>
+      </p:sp>
+      <p:sp>
+        <p:nvSpPr>
+          <p:cNvPr id="14" name="Rectangle 13"/>
           <p:cNvSpPr/>
           <p:nvPr/>
         </p:nvSpPr>
         <p:spPr>
           <a:xfrm>
-            <a:off x="960120" y="3054096"/>
-            <a:ext cx="10259568" cy="457200"/>
+            <a:off x="960120" y="3108960"/>
+            <a:ext cx="10259568" cy="402336"/>
           </a:xfrm>
           <a:prstGeom prst="rect">
             <a:avLst/>
@@ -17204,14 +17446,14 @@
       </p:sp>
       <p:sp>
         <p:nvSpPr>
-          <p:cNvPr id="14" name="TextBox 13"/>
+          <p:cNvPr id="15" name="TextBox 14"/>
           <p:cNvSpPr txBox="1"/>
           <p:nvPr/>
         </p:nvSpPr>
         <p:spPr>
           <a:xfrm>
-            <a:off x="960120" y="3054096"/>
-            <a:ext cx="10259568" cy="457200"/>
+            <a:off x="960120" y="3108960"/>
+            <a:ext cx="10259568" cy="402336"/>
           </a:xfrm>
           <a:prstGeom prst="rect">
             <a:avLst/>
@@ -17238,21 +17480,21 @@
                 <a:ea typeface="Meiryo"/>
                 <a:cs typeface="Meiryo"/>
               </a:rPr>
-              <a:t>Bluetooth SPP (自作ログチャネル)  —  USB ケーブルを抜いても計算結果が PC に届く</a:t>
-            </a:r>
-          </a:p>
-        </p:txBody>
-      </p:sp>
-      <p:sp>
-        <p:nvSpPr>
-          <p:cNvPr id="15" name="Down Arrow 14"/>
+              <a:t>Bluetooth SPP (自作ログチャネル)  =  Bluetooth 上のシリアルポート。UART とは独立の経路</a:t>
+            </a:r>
+          </a:p>
+        </p:txBody>
+      </p:sp>
+      <p:sp>
+        <p:nvSpPr>
+          <p:cNvPr id="16" name="Down Arrow 15"/>
           <p:cNvSpPr/>
           <p:nvPr/>
         </p:nvSpPr>
         <p:spPr>
           <a:xfrm>
-            <a:off x="5888736" y="3584448"/>
-            <a:ext cx="402336" cy="329184"/>
+            <a:off x="5888736" y="3602736"/>
+            <a:ext cx="402336" cy="310896"/>
           </a:xfrm>
           <a:prstGeom prst="downArrow">
             <a:avLst/>
@@ -17289,7 +17531,7 @@
       </p:sp>
       <p:sp>
         <p:nvSpPr>
-          <p:cNvPr id="16" name="Rectangle 15"/>
+          <p:cNvPr id="17" name="Rectangle 16"/>
           <p:cNvSpPr/>
           <p:nvPr/>
         </p:nvSpPr>
@@ -17333,7 +17575,7 @@
       </p:sp>
       <p:sp>
         <p:nvSpPr>
-          <p:cNvPr id="17" name="TextBox 16"/>
+          <p:cNvPr id="18" name="TextBox 17"/>
           <p:cNvSpPr txBox="1"/>
           <p:nvPr/>
         </p:nvSpPr>
@@ -17374,7 +17616,7 @@
       </p:sp>
       <p:sp>
         <p:nvSpPr>
-          <p:cNvPr id="18" name="TextBox 17"/>
+          <p:cNvPr id="19" name="TextBox 18"/>
           <p:cNvSpPr txBox="1"/>
           <p:nvPr/>
         </p:nvSpPr>
@@ -17415,7 +17657,7 @@
       </p:sp>
       <p:sp>
         <p:nvSpPr>
-          <p:cNvPr id="19" name="Rectangle 18"/>
+          <p:cNvPr id="20" name="Rectangle 19"/>
           <p:cNvSpPr/>
           <p:nvPr/>
         </p:nvSpPr>
@@ -17459,7 +17701,7 @@
       </p:sp>
       <p:sp>
         <p:nvSpPr>
-          <p:cNvPr id="20" name="Rectangle 19"/>
+          <p:cNvPr id="21" name="Rectangle 20"/>
           <p:cNvSpPr/>
           <p:nvPr/>
         </p:nvSpPr>
@@ -17503,7 +17745,7 @@
       </p:sp>
       <p:sp>
         <p:nvSpPr>
-          <p:cNvPr id="21" name="TextBox 20"/>
+          <p:cNvPr id="22" name="TextBox 21"/>
           <p:cNvSpPr txBox="1"/>
           <p:nvPr/>
         </p:nvSpPr>
@@ -17544,7 +17786,7 @@
       </p:sp>
       <p:sp>
         <p:nvSpPr>
-          <p:cNvPr id="22" name="TextBox 21"/>
+          <p:cNvPr id="23" name="TextBox 22"/>
           <p:cNvSpPr txBox="1"/>
           <p:nvPr/>
         </p:nvSpPr>
@@ -17586,7 +17828,7 @@
       </p:sp>
       <p:sp>
         <p:nvSpPr>
-          <p:cNvPr id="23" name="Rectangle 22"/>
+          <p:cNvPr id="24" name="Rectangle 23"/>
           <p:cNvSpPr/>
           <p:nvPr/>
         </p:nvSpPr>
@@ -17630,7 +17872,7 @@
       </p:sp>
       <p:sp>
         <p:nvSpPr>
-          <p:cNvPr id="24" name="Rectangle 23"/>
+          <p:cNvPr id="25" name="Rectangle 24"/>
           <p:cNvSpPr/>
           <p:nvPr/>
         </p:nvSpPr>
@@ -17674,7 +17916,7 @@
       </p:sp>
       <p:sp>
         <p:nvSpPr>
-          <p:cNvPr id="25" name="TextBox 24"/>
+          <p:cNvPr id="26" name="TextBox 25"/>
           <p:cNvSpPr txBox="1"/>
           <p:nvPr/>
         </p:nvSpPr>
@@ -17715,7 +17957,7 @@
       </p:sp>
       <p:sp>
         <p:nvSpPr>
-          <p:cNvPr id="26" name="TextBox 25"/>
+          <p:cNvPr id="27" name="TextBox 26"/>
           <p:cNvSpPr txBox="1"/>
           <p:nvPr/>
         </p:nvSpPr>
@@ -17757,7 +17999,7 @@
       </p:sp>
       <p:sp>
         <p:nvSpPr>
-          <p:cNvPr id="27" name="Rectangle 26"/>
+          <p:cNvPr id="28" name="Rectangle 27"/>
           <p:cNvSpPr/>
           <p:nvPr/>
         </p:nvSpPr>
@@ -17801,7 +18043,7 @@
       </p:sp>
       <p:sp>
         <p:nvSpPr>
-          <p:cNvPr id="28" name="Rectangle 27"/>
+          <p:cNvPr id="29" name="Rectangle 28"/>
           <p:cNvSpPr/>
           <p:nvPr/>
         </p:nvSpPr>
@@ -17845,7 +18087,7 @@
       </p:sp>
       <p:sp>
         <p:nvSpPr>
-          <p:cNvPr id="29" name="TextBox 28"/>
+          <p:cNvPr id="30" name="TextBox 29"/>
           <p:cNvSpPr txBox="1"/>
           <p:nvPr/>
         </p:nvSpPr>
@@ -17886,7 +18128,7 @@
       </p:sp>
       <p:sp>
         <p:nvSpPr>
-          <p:cNvPr id="30" name="TextBox 29"/>
+          <p:cNvPr id="31" name="TextBox 30"/>
           <p:cNvSpPr txBox="1"/>
           <p:nvPr/>
         </p:nvSpPr>
@@ -17928,7 +18170,7 @@
       </p:sp>
       <p:sp>
         <p:nvSpPr>
-          <p:cNvPr id="31" name="TextBox 30"/>
+          <p:cNvPr id="32" name="TextBox 31"/>
           <p:cNvSpPr txBox="1"/>
           <p:nvPr/>
         </p:nvSpPr>
@@ -18425,7 +18667,7 @@
                           <a:ea typeface="Meiryo"/>
                           <a:cs typeface="Meiryo"/>
                         </a:rPr>
-                        <a:t>OpenPineBuds (pine64) — 完全オープンソース</a:t>
+                        <a:t>OpenPineBuds (pine64) — アプリ層は OSS (BT 中核は .a)</a:t>
                       </a:r>
                     </a:p>
                   </a:txBody>
@@ -18581,7 +18823,7 @@
                           <a:ea typeface="Meiryo"/>
                           <a:cs typeface="Meiryo"/>
                         </a:rPr>
-                        <a:t>RAM 約 330 KB 空き / Flash 約 3.2 MB 空き (.map 集計)</a:t>
+                        <a:t>RAM 約 330 KB / Flash 約 3.2 MB (2026-08-30 の .map)</a:t>
                       </a:r>
                     </a:p>
                   </a:txBody>
@@ -19354,7 +19596,7 @@
                 <a:ea typeface="Meiryo"/>
                 <a:cs typeface="Meiryo"/>
               </a:rPr>
-              <a:t>当初は手持ちの一般的な TWS イヤホンでやりたかった。 →  自作コードを載せる手段が「ゼロ」だった。</a:t>
+              <a:t>当初は手持ちの TWS (左右が独立した完全ワイヤレス) でやりたかった。 →  自作コードを載せる手段が見つからなかった。</a:t>
             </a:r>
           </a:p>
         </p:txBody>
@@ -19423,7 +19665,7 @@
                           <a:ea typeface="Meiryo"/>
                           <a:cs typeface="Meiryo"/>
                         </a:rPr>
-                        <a:t>一般的な TWS</a:t>
+                        <a:t>手元で調べた範囲の市販 TWS</a:t>
                       </a:r>
                     </a:p>
                   </a:txBody>
@@ -19577,7 +19819,7 @@
                           <a:ea typeface="Meiryo"/>
                           <a:cs typeface="Meiryo"/>
                         </a:rPr>
-                        <a:t>✗  署名検証で拒否</a:t>
+                        <a:t>✗  書き込み手段が非公開</a:t>
                       </a:r>
                     </a:p>
                   </a:txBody>
@@ -19808,7 +20050,7 @@
                           <a:ea typeface="Meiryo"/>
                           <a:cs typeface="Meiryo"/>
                         </a:rPr>
-                        <a:t>✗  無い ( = 終わり )</a:t>
+                        <a:t>✗  見つからなかった</a:t>
                       </a:r>
                     </a:p>
                   </a:txBody>
@@ -19908,11 +20150,29 @@
           <a:p>
             <a:pPr algn="l">
               <a:spcAft>
+                <a:spcPts val="500"/>
+              </a:spcAft>
+            </a:pPr>
+            <a:r>
+              <a:rPr sz="1250" b="0" i="0">
+                <a:solidFill>
+                  <a:srgbClr val="5A5A5A"/>
+                </a:solidFill>
+                <a:latin typeface="Meiryo"/>
+                <a:ea typeface="Meiryo"/>
+                <a:cs typeface="Meiryo"/>
+              </a:rPr>
+              <a:t>・ 分解して SWD を引き出す道もあるが、左右 2 個を同じ状態に保って何十回も焼き直す用途には向かない</a:t>
+            </a:r>
+          </a:p>
+          <a:p>
+            <a:pPr algn="l">
+              <a:spcAft>
                 <a:spcPts val="0"/>
               </a:spcAft>
             </a:pPr>
             <a:r>
-              <a:rPr sz="1250" b="0" i="0">
+              <a:rPr sz="1150" b="0" i="0">
                 <a:solidFill>
                   <a:srgbClr val="5A5A5A"/>
                 </a:solidFill>
@@ -19920,7 +20180,7 @@
                 <a:ea typeface="Meiryo"/>
                 <a:cs typeface="Meiryo"/>
               </a:rPr>
-              <a:t>・ 分解して SWD を引き出す道もあるが、左右 2 個を同じ状態に保って何十回も焼き直す用途には向かない</a:t>
+              <a:t>・ これは手元の機種と自分が調べられた範囲の話で、すべての TWS がそうだと主張するものではない</a:t>
             </a:r>
           </a:p>
         </p:txBody>
@@ -20005,7 +20265,7 @@
                 <a:ea typeface="Meiryo"/>
                 <a:cs typeface="Meiryo"/>
               </a:rPr>
-              <a:t>→  「オープンソースファーム」と「ケースが UART プログラマ」を両立している TWS が実質ここだけだったので購入</a:t>
+              <a:t>→  「オープンソースファーム」と「ケースが UART プログラマ」を両立している TWS が、探した範囲でここだけだったので購入</a:t>
             </a:r>
           </a:p>
         </p:txBody>
@@ -20433,7 +20693,7 @@
                 <a:ea typeface="Meiryo"/>
                 <a:cs typeface="Meiryo"/>
               </a:rPr>
-              <a:t>自作 MPI サブセット (Init/Send/Recv/Barrier/Allreduce/Isend/Irecv/Wait) と OpenMP スタブ</a:t>
+              <a:t>自作 MPI サブセット (Init/Send/Recv/Barrier/Allreduce/Isend/Irecv/Wait) / OpenMP は API 互換スタブ</a:t>
             </a:r>
           </a:p>
         </p:txBody>
@@ -20852,7 +21112,7 @@
                 <a:ea typeface="Meiryo"/>
                 <a:cs typeface="Meiryo"/>
               </a:rPr>
-              <a:t>規模: adapters 926 行 / firmware 統合 1,656 行 / tests 1,846 行 / 設計ドキュメント 2,601 行</a:t>
+              <a:t>規模: adapters 926 行 / firmware 統合 1,656 行 / tests 1,846 行 / 設計ドキュメント 2,643 行</a:t>
             </a:r>
           </a:p>
         </p:txBody>
@@ -20866,7 +21126,7 @@
         <p:spPr>
           <a:xfrm>
             <a:off x="7607808" y="1115568"/>
-            <a:ext cx="4078224" cy="2103120"/>
+            <a:ext cx="4078224" cy="2505456"/>
           </a:xfrm>
           <a:prstGeom prst="rect">
             <a:avLst/>
@@ -20973,7 +21233,7 @@
               </a:spcAft>
             </a:pPr>
             <a:r>
-              <a:rPr sz="1400" b="1" i="0">
+              <a:rPr sz="1350" b="1" i="0">
                 <a:solidFill>
                   <a:srgbClr val="111111"/>
                 </a:solidFill>
@@ -20981,21 +21241,65 @@
                 <a:ea typeface="Meiryo"/>
                 <a:cs typeface="Meiryo"/>
               </a:rPr>
-              <a:t>SDK に合わせるしかない制約</a:t>
-            </a:r>
-          </a:p>
-        </p:txBody>
-      </p:sp>
-      <p:sp>
-        <p:nvSpPr>
-          <p:cNvPr id="24" name="TextBox 23"/>
+              <a:t>自作アダプタが嘘をついていない証明</a:t>
+            </a:r>
+          </a:p>
+        </p:txBody>
+      </p:sp>
+      <p:sp>
+        <p:nvSpPr>
+          <p:cNvPr id="24" name="Rectangle 23"/>
+          <p:cNvSpPr/>
+          <p:nvPr/>
+        </p:nvSpPr>
+        <p:spPr>
+          <a:xfrm>
+            <a:off x="7790688" y="1591056"/>
+            <a:ext cx="3712463" cy="365760"/>
+          </a:xfrm>
+          <a:prstGeom prst="rect">
+            <a:avLst/>
+          </a:prstGeom>
+          <a:solidFill>
+            <a:srgbClr val="FFFFFF"/>
+          </a:solidFill>
+          <a:ln w="9525">
+            <a:solidFill>
+              <a:srgbClr val="9E9E9E"/>
+            </a:solidFill>
+          </a:ln>
+          <a:effectLst/>
+        </p:spPr>
+        <p:style>
+          <a:lnRef idx="1">
+            <a:schemeClr val="accent1"/>
+          </a:lnRef>
+          <a:fillRef idx="3">
+            <a:schemeClr val="accent1"/>
+          </a:fillRef>
+          <a:effectRef idx="2">
+            <a:schemeClr val="accent1"/>
+          </a:effectRef>
+          <a:fontRef idx="minor">
+            <a:schemeClr val="lt1"/>
+          </a:fontRef>
+        </p:style>
+        <p:txBody>
+          <a:bodyPr rtlCol="0" anchor="ctr"/>
+          <a:lstStyle/>
+          <a:p/>
+        </p:txBody>
+      </p:sp>
+      <p:sp>
+        <p:nvSpPr>
+          <p:cNvPr id="25" name="TextBox 24"/>
           <p:cNvSpPr txBox="1"/>
           <p:nvPr/>
         </p:nvSpPr>
         <p:spPr>
           <a:xfrm>
-            <a:off x="7607808" y="1499616"/>
-            <a:ext cx="4078224" cy="1719072"/>
+            <a:off x="7790688" y="1591056"/>
+            <a:ext cx="3712463" cy="365760"/>
           </a:xfrm>
           <a:prstGeom prst="rect">
             <a:avLst/>
@@ -21003,18 +21307,18 @@
           <a:noFill/>
         </p:spPr>
         <p:txBody>
-          <a:bodyPr wrap="square" lIns="109728" rIns="109728" tIns="65836" bIns="65836" anchor="t">
+          <a:bodyPr wrap="square" lIns="27432" rIns="27432" tIns="16459" bIns="16459" anchor="ctr">
             <a:spAutoFit/>
           </a:bodyPr>
           <a:lstStyle/>
           <a:p>
-            <a:pPr algn="l">
-              <a:spcAft>
-                <a:spcPts val="600"/>
-              </a:spcAft>
-            </a:pPr>
-            <a:r>
-              <a:rPr sz="1200" b="0" i="0">
+            <a:pPr algn="ctr">
+              <a:spcAft>
+                <a:spcPts val="400"/>
+              </a:spcAft>
+            </a:pPr>
+            <a:r>
+              <a:rPr sz="1100" b="1" i="0">
                 <a:solidFill>
                   <a:srgbClr val="111111"/>
                 </a:solidFill>
@@ -21022,17 +21326,386 @@
                 <a:ea typeface="Meiryo"/>
                 <a:cs typeface="Meiryo"/>
               </a:rPr>
-              <a:t>・ -std=gnu++98 / -fno-exceptions / -fno-rtti</a:t>
-            </a:r>
-          </a:p>
-          <a:p>
-            <a:pPr algn="l">
-              <a:spcAft>
-                <a:spcPts val="800"/>
-              </a:spcAft>
-            </a:pPr>
-            <a:r>
-              <a:rPr sz="1100" b="0" i="0">
+              <a:t>bench/gemm_mpi_omp.cpp  (1 ソース・無改変)</a:t>
+            </a:r>
+          </a:p>
+        </p:txBody>
+      </p:sp>
+      <p:sp>
+        <p:nvSpPr>
+          <p:cNvPr id="26" name="Rectangle 25"/>
+          <p:cNvSpPr/>
+          <p:nvPr/>
+        </p:nvSpPr>
+        <p:spPr>
+          <a:xfrm>
+            <a:off x="7790688" y="2084831"/>
+            <a:ext cx="1176527" cy="658368"/>
+          </a:xfrm>
+          <a:prstGeom prst="rect">
+            <a:avLst/>
+          </a:prstGeom>
+          <a:solidFill>
+            <a:srgbClr val="FFFFFF"/>
+          </a:solidFill>
+          <a:ln w="9525">
+            <a:solidFill>
+              <a:srgbClr val="9E9E9E"/>
+            </a:solidFill>
+          </a:ln>
+          <a:effectLst/>
+        </p:spPr>
+        <p:style>
+          <a:lnRef idx="1">
+            <a:schemeClr val="accent1"/>
+          </a:lnRef>
+          <a:fillRef idx="3">
+            <a:schemeClr val="accent1"/>
+          </a:fillRef>
+          <a:effectRef idx="2">
+            <a:schemeClr val="accent1"/>
+          </a:effectRef>
+          <a:fontRef idx="minor">
+            <a:schemeClr val="lt1"/>
+          </a:fontRef>
+        </p:style>
+        <p:txBody>
+          <a:bodyPr rtlCol="0" anchor="ctr"/>
+          <a:lstStyle/>
+          <a:p/>
+        </p:txBody>
+      </p:sp>
+      <p:sp>
+        <p:nvSpPr>
+          <p:cNvPr id="27" name="TextBox 26"/>
+          <p:cNvSpPr txBox="1"/>
+          <p:nvPr/>
+        </p:nvSpPr>
+        <p:spPr>
+          <a:xfrm>
+            <a:off x="7790688" y="2084831"/>
+            <a:ext cx="1176527" cy="658368"/>
+          </a:xfrm>
+          <a:prstGeom prst="rect">
+            <a:avLst/>
+          </a:prstGeom>
+          <a:noFill/>
+        </p:spPr>
+        <p:txBody>
+          <a:bodyPr wrap="square" lIns="18288" rIns="18288" tIns="10972" bIns="10972" anchor="ctr">
+            <a:spAutoFit/>
+          </a:bodyPr>
+          <a:lstStyle/>
+          <a:p>
+            <a:pPr algn="ctr">
+              <a:spcAft>
+                <a:spcPts val="0"/>
+              </a:spcAft>
+            </a:pPr>
+            <a:r>
+              <a:rPr sz="950" b="0" i="0">
+                <a:solidFill>
+                  <a:srgbClr val="111111"/>
+                </a:solidFill>
+                <a:latin typeface="Meiryo"/>
+                <a:ea typeface="Meiryo"/>
+                <a:cs typeface="Meiryo"/>
+              </a:rPr>
+              <a:t>本物の
+OpenMPI
+np=1</a:t>
+            </a:r>
+          </a:p>
+        </p:txBody>
+      </p:sp>
+      <p:sp>
+        <p:nvSpPr>
+          <p:cNvPr id="28" name="Rectangle 27"/>
+          <p:cNvSpPr/>
+          <p:nvPr/>
+        </p:nvSpPr>
+        <p:spPr>
+          <a:xfrm>
+            <a:off x="9058656" y="2084831"/>
+            <a:ext cx="1176527" cy="658368"/>
+          </a:xfrm>
+          <a:prstGeom prst="rect">
+            <a:avLst/>
+          </a:prstGeom>
+          <a:solidFill>
+            <a:srgbClr val="FFFFFF"/>
+          </a:solidFill>
+          <a:ln w="9525">
+            <a:solidFill>
+              <a:srgbClr val="9E9E9E"/>
+            </a:solidFill>
+          </a:ln>
+          <a:effectLst/>
+        </p:spPr>
+        <p:style>
+          <a:lnRef idx="1">
+            <a:schemeClr val="accent1"/>
+          </a:lnRef>
+          <a:fillRef idx="3">
+            <a:schemeClr val="accent1"/>
+          </a:fillRef>
+          <a:effectRef idx="2">
+            <a:schemeClr val="accent1"/>
+          </a:effectRef>
+          <a:fontRef idx="minor">
+            <a:schemeClr val="lt1"/>
+          </a:fontRef>
+        </p:style>
+        <p:txBody>
+          <a:bodyPr rtlCol="0" anchor="ctr"/>
+          <a:lstStyle/>
+          <a:p/>
+        </p:txBody>
+      </p:sp>
+      <p:sp>
+        <p:nvSpPr>
+          <p:cNvPr id="29" name="TextBox 28"/>
+          <p:cNvSpPr txBox="1"/>
+          <p:nvPr/>
+        </p:nvSpPr>
+        <p:spPr>
+          <a:xfrm>
+            <a:off x="9058656" y="2084831"/>
+            <a:ext cx="1176527" cy="658368"/>
+          </a:xfrm>
+          <a:prstGeom prst="rect">
+            <a:avLst/>
+          </a:prstGeom>
+          <a:noFill/>
+        </p:spPr>
+        <p:txBody>
+          <a:bodyPr wrap="square" lIns="18288" rIns="18288" tIns="10972" bIns="10972" anchor="ctr">
+            <a:spAutoFit/>
+          </a:bodyPr>
+          <a:lstStyle/>
+          <a:p>
+            <a:pPr algn="ctr">
+              <a:spcAft>
+                <a:spcPts val="0"/>
+              </a:spcAft>
+            </a:pPr>
+            <a:r>
+              <a:rPr sz="950" b="0" i="0">
+                <a:solidFill>
+                  <a:srgbClr val="111111"/>
+                </a:solidFill>
+                <a:latin typeface="Meiryo"/>
+                <a:ea typeface="Meiryo"/>
+                <a:cs typeface="Meiryo"/>
+              </a:rPr>
+              <a:t>本物の
+OpenMPI
+np=2</a:t>
+            </a:r>
+          </a:p>
+        </p:txBody>
+      </p:sp>
+      <p:sp>
+        <p:nvSpPr>
+          <p:cNvPr id="30" name="Rectangle 29"/>
+          <p:cNvSpPr/>
+          <p:nvPr/>
+        </p:nvSpPr>
+        <p:spPr>
+          <a:xfrm>
+            <a:off x="10326624" y="2084831"/>
+            <a:ext cx="1176527" cy="658368"/>
+          </a:xfrm>
+          <a:prstGeom prst="rect">
+            <a:avLst/>
+          </a:prstGeom>
+          <a:solidFill>
+            <a:srgbClr val="FFFFFF"/>
+          </a:solidFill>
+          <a:ln w="9525">
+            <a:solidFill>
+              <a:srgbClr val="9E9E9E"/>
+            </a:solidFill>
+          </a:ln>
+          <a:effectLst/>
+        </p:spPr>
+        <p:style>
+          <a:lnRef idx="1">
+            <a:schemeClr val="accent1"/>
+          </a:lnRef>
+          <a:fillRef idx="3">
+            <a:schemeClr val="accent1"/>
+          </a:fillRef>
+          <a:effectRef idx="2">
+            <a:schemeClr val="accent1"/>
+          </a:effectRef>
+          <a:fontRef idx="minor">
+            <a:schemeClr val="lt1"/>
+          </a:fontRef>
+        </p:style>
+        <p:txBody>
+          <a:bodyPr rtlCol="0" anchor="ctr"/>
+          <a:lstStyle/>
+          <a:p/>
+        </p:txBody>
+      </p:sp>
+      <p:sp>
+        <p:nvSpPr>
+          <p:cNvPr id="31" name="TextBox 30"/>
+          <p:cNvSpPr txBox="1"/>
+          <p:nvPr/>
+        </p:nvSpPr>
+        <p:spPr>
+          <a:xfrm>
+            <a:off x="10326624" y="2084831"/>
+            <a:ext cx="1176527" cy="658368"/>
+          </a:xfrm>
+          <a:prstGeom prst="rect">
+            <a:avLst/>
+          </a:prstGeom>
+          <a:noFill/>
+        </p:spPr>
+        <p:txBody>
+          <a:bodyPr wrap="square" lIns="18288" rIns="18288" tIns="10972" bIns="10972" anchor="ctr">
+            <a:spAutoFit/>
+          </a:bodyPr>
+          <a:lstStyle/>
+          <a:p>
+            <a:pPr algn="ctr">
+              <a:spcAft>
+                <a:spcPts val="0"/>
+              </a:spcAft>
+            </a:pPr>
+            <a:r>
+              <a:rPr sz="950" b="0" i="0">
+                <a:solidFill>
+                  <a:srgbClr val="111111"/>
+                </a:solidFill>
+                <a:latin typeface="Meiryo"/>
+                <a:ea typeface="Meiryo"/>
+                <a:cs typeface="Meiryo"/>
+              </a:rPr>
+              <a:t>自作
+アダプタ
+(逐次)</a:t>
+            </a:r>
+          </a:p>
+        </p:txBody>
+      </p:sp>
+      <p:sp>
+        <p:nvSpPr>
+          <p:cNvPr id="32" name="Rectangle 31"/>
+          <p:cNvSpPr/>
+          <p:nvPr/>
+        </p:nvSpPr>
+        <p:spPr>
+          <a:xfrm>
+            <a:off x="7790688" y="2834640"/>
+            <a:ext cx="3712463" cy="365760"/>
+          </a:xfrm>
+          <a:prstGeom prst="rect">
+            <a:avLst/>
+          </a:prstGeom>
+          <a:solidFill>
+            <a:srgbClr val="E8E8E8"/>
+          </a:solidFill>
+          <a:ln w="9525">
+            <a:solidFill>
+              <a:srgbClr val="9E9E9E"/>
+            </a:solidFill>
+          </a:ln>
+          <a:effectLst/>
+        </p:spPr>
+        <p:style>
+          <a:lnRef idx="1">
+            <a:schemeClr val="accent1"/>
+          </a:lnRef>
+          <a:fillRef idx="3">
+            <a:schemeClr val="accent1"/>
+          </a:fillRef>
+          <a:effectRef idx="2">
+            <a:schemeClr val="accent1"/>
+          </a:effectRef>
+          <a:fontRef idx="minor">
+            <a:schemeClr val="lt1"/>
+          </a:fontRef>
+        </p:style>
+        <p:txBody>
+          <a:bodyPr rtlCol="0" anchor="ctr"/>
+          <a:lstStyle/>
+          <a:p/>
+        </p:txBody>
+      </p:sp>
+      <p:sp>
+        <p:nvSpPr>
+          <p:cNvPr id="33" name="TextBox 32"/>
+          <p:cNvSpPr txBox="1"/>
+          <p:nvPr/>
+        </p:nvSpPr>
+        <p:spPr>
+          <a:xfrm>
+            <a:off x="7790688" y="2834640"/>
+            <a:ext cx="3712463" cy="365760"/>
+          </a:xfrm>
+          <a:prstGeom prst="rect">
+            <a:avLst/>
+          </a:prstGeom>
+          <a:noFill/>
+        </p:spPr>
+        <p:txBody>
+          <a:bodyPr wrap="square" lIns="27432" rIns="27432" tIns="16459" bIns="16459" anchor="ctr">
+            <a:spAutoFit/>
+          </a:bodyPr>
+          <a:lstStyle/>
+          <a:p>
+            <a:pPr algn="ctr">
+              <a:spcAft>
+                <a:spcPts val="400"/>
+              </a:spcAft>
+            </a:pPr>
+            <a:r>
+              <a:rPr sz="1150" b="1" i="0">
+                <a:solidFill>
+                  <a:srgbClr val="111111"/>
+                </a:solidFill>
+                <a:latin typeface="Meiryo"/>
+                <a:ea typeface="Meiryo"/>
+                <a:cs typeface="Meiryo"/>
+              </a:rPr>
+              <a:t>3 経路とも checksum=32768.000000 PASS</a:t>
+            </a:r>
+          </a:p>
+        </p:txBody>
+      </p:sp>
+      <p:sp>
+        <p:nvSpPr>
+          <p:cNvPr id="34" name="TextBox 33"/>
+          <p:cNvSpPr txBox="1"/>
+          <p:nvPr/>
+        </p:nvSpPr>
+        <p:spPr>
+          <a:xfrm>
+            <a:off x="7735824" y="3236976"/>
+            <a:ext cx="3822191" cy="347472"/>
+          </a:xfrm>
+          <a:prstGeom prst="rect">
+            <a:avLst/>
+          </a:prstGeom>
+          <a:noFill/>
+        </p:spPr>
+        <p:txBody>
+          <a:bodyPr wrap="square" lIns="18288" rIns="18288" tIns="10972" bIns="10972" anchor="t">
+            <a:spAutoFit/>
+          </a:bodyPr>
+          <a:lstStyle/>
+          <a:p>
+            <a:pPr algn="ctr">
+              <a:spcAft>
+                <a:spcPts val="400"/>
+              </a:spcAft>
+            </a:pPr>
+            <a:r>
+              <a:rPr sz="1000" b="0" i="0">
                 <a:solidFill>
                   <a:srgbClr val="5A5A5A"/>
                 </a:solidFill>
@@ -21040,75 +21713,21 @@
                 <a:ea typeface="Meiryo"/>
                 <a:cs typeface="Meiryo"/>
               </a:rPr>
-              <a:t>   → C++11 以降が使えない</a:t>
-            </a:r>
-          </a:p>
-          <a:p>
-            <a:pPr algn="l">
-              <a:spcAft>
-                <a:spcPts val="600"/>
-              </a:spcAft>
-            </a:pPr>
-            <a:r>
-              <a:rPr sz="1200" b="0" i="0">
-                <a:solidFill>
-                  <a:srgbClr val="111111"/>
-                </a:solidFill>
-                <a:latin typeface="Meiryo"/>
-                <a:ea typeface="Meiryo"/>
-                <a:cs typeface="Meiryo"/>
-              </a:rPr>
-              <a:t>・ ヒープ禁止・STL 禁止・静的バッファのみ</a:t>
-            </a:r>
-          </a:p>
-          <a:p>
-            <a:pPr algn="l">
-              <a:spcAft>
-                <a:spcPts val="600"/>
-              </a:spcAft>
-            </a:pPr>
-            <a:r>
-              <a:rPr sz="1200" b="0" i="0">
-                <a:solidFill>
-                  <a:srgbClr val="111111"/>
-                </a:solidFill>
-                <a:latin typeface="Meiryo"/>
-                <a:ea typeface="Meiryo"/>
-                <a:cs typeface="Meiryo"/>
-              </a:rPr>
-              <a:t>・ double 禁止 (単精度 FPU のみ)。リテラルは 1.0f</a:t>
-            </a:r>
-          </a:p>
-          <a:p>
-            <a:pPr algn="l">
-              <a:spcAft>
-                <a:spcPts val="0"/>
-              </a:spcAft>
-            </a:pPr>
-            <a:r>
-              <a:rPr sz="1200" b="0" i="0">
-                <a:solidFill>
-                  <a:srgbClr val="111111"/>
-                </a:solidFill>
-                <a:latin typeface="Meiryo"/>
-                <a:ea typeface="Meiryo"/>
-                <a:cs typeface="Meiryo"/>
-              </a:rPr>
-              <a:t>・ make check98 で機械的に担保</a:t>
-            </a:r>
-          </a:p>
-        </p:txBody>
-      </p:sp>
-      <p:sp>
-        <p:nvSpPr>
-          <p:cNvPr id="25" name="Rectangle 24"/>
+              <a:t>2 ランクのアダプタ経路はホストの pthread ハーネス (1,788 checks) が担保</a:t>
+            </a:r>
+          </a:p>
+        </p:txBody>
+      </p:sp>
+      <p:sp>
+        <p:nvSpPr>
+          <p:cNvPr id="35" name="Rectangle 34"/>
           <p:cNvSpPr/>
           <p:nvPr/>
         </p:nvSpPr>
         <p:spPr>
           <a:xfrm>
-            <a:off x="7607808" y="3346704"/>
-            <a:ext cx="4078224" cy="2395728"/>
+            <a:off x="7607808" y="3767328"/>
+            <a:ext cx="4078224" cy="1975104"/>
           </a:xfrm>
           <a:prstGeom prst="rect">
             <a:avLst/>
@@ -21145,13 +21764,13 @@
       </p:sp>
       <p:sp>
         <p:nvSpPr>
-          <p:cNvPr id="26" name="Rectangle 25"/>
+          <p:cNvPr id="36" name="Rectangle 35"/>
           <p:cNvSpPr/>
           <p:nvPr/>
         </p:nvSpPr>
         <p:spPr>
           <a:xfrm>
-            <a:off x="7607808" y="3346704"/>
+            <a:off x="7607808" y="3767328"/>
             <a:ext cx="4078224" cy="384048"/>
           </a:xfrm>
           <a:prstGeom prst="rect">
@@ -21189,13 +21808,13 @@
       </p:sp>
       <p:sp>
         <p:nvSpPr>
-          <p:cNvPr id="27" name="TextBox 26"/>
+          <p:cNvPr id="37" name="TextBox 36"/>
           <p:cNvSpPr txBox="1"/>
           <p:nvPr/>
         </p:nvSpPr>
         <p:spPr>
           <a:xfrm>
-            <a:off x="7607808" y="3346704"/>
+            <a:off x="7607808" y="3767328"/>
             <a:ext cx="4078224" cy="384048"/>
           </a:xfrm>
           <a:prstGeom prst="rect">
@@ -21223,21 +21842,21 @@
                 <a:ea typeface="Meiryo"/>
                 <a:cs typeface="Meiryo"/>
               </a:rPr>
-              <a:t>検証戦略</a:t>
-            </a:r>
-          </a:p>
-        </p:txBody>
-      </p:sp>
-      <p:sp>
-        <p:nvSpPr>
-          <p:cNvPr id="28" name="TextBox 27"/>
+              <a:t>SDK に合わせるしかない制約</a:t>
+            </a:r>
+          </a:p>
+        </p:txBody>
+      </p:sp>
+      <p:sp>
+        <p:nvSpPr>
+          <p:cNvPr id="38" name="TextBox 37"/>
           <p:cNvSpPr txBox="1"/>
           <p:nvPr/>
         </p:nvSpPr>
         <p:spPr>
           <a:xfrm>
-            <a:off x="7607808" y="3730752"/>
-            <a:ext cx="4078224" cy="2011680"/>
+            <a:off x="7607808" y="4151376"/>
+            <a:ext cx="4078224" cy="1591056"/>
           </a:xfrm>
           <a:prstGeom prst="rect">
             <a:avLst/>
@@ -21256,7 +21875,7 @@
               </a:spcAft>
             </a:pPr>
             <a:r>
-              <a:rPr sz="1200" b="1" i="0">
+              <a:rPr sz="1200" b="0" i="0">
                 <a:solidFill>
                   <a:srgbClr val="111111"/>
                 </a:solidFill>
@@ -21264,13 +21883,13 @@
                 <a:ea typeface="Meiryo"/>
                 <a:cs typeface="Meiryo"/>
               </a:rPr>
-              <a:t>① ホストで 1,788 checks (8 バイナリ)</a:t>
+              <a:t>・ -std=gnu++98 / -fno-exceptions / -fno-rtti</a:t>
             </a:r>
           </a:p>
           <a:p>
             <a:pPr algn="l">
               <a:spcAft>
-                <a:spcPts val="900"/>
+                <a:spcPts val="700"/>
               </a:spcAft>
             </a:pPr>
             <a:r>
@@ -21282,7 +21901,7 @@
                 <a:ea typeface="Meiryo"/>
                 <a:cs typeface="Meiryo"/>
               </a:rPr>
-              <a:t>   実機に焼く前に全部を緑にする運用</a:t>
+              <a:t>   → C++11 以降が使えない</a:t>
             </a:r>
           </a:p>
           <a:p>
@@ -21292,7 +21911,7 @@
               </a:spcAft>
             </a:pPr>
             <a:r>
-              <a:rPr sz="1200" b="1" i="0">
+              <a:rPr sz="1200" b="0" i="0">
                 <a:solidFill>
                   <a:srgbClr val="111111"/>
                 </a:solidFill>
@@ -21300,104 +21919,50 @@
                 <a:ea typeface="Meiryo"/>
                 <a:cs typeface="Meiryo"/>
               </a:rPr>
-              <a:t>② ゴールデンリファレンス照合</a:t>
+              <a:t>・ ヒープ禁止・STL 禁止・静的バッファのみ</a:t>
             </a:r>
           </a:p>
           <a:p>
             <a:pPr algn="l">
               <a:spcAft>
-                <a:spcPts val="300"/>
-              </a:spcAft>
-            </a:pPr>
-            <a:r>
-              <a:rPr sz="1100" b="0" i="0">
-                <a:solidFill>
-                  <a:srgbClr val="5A5A5A"/>
-                </a:solidFill>
-                <a:latin typeface="Meiryo"/>
-                <a:ea typeface="Meiryo"/>
-                <a:cs typeface="Meiryo"/>
-              </a:rPr>
-              <a:t>   bench/ の同一ソースを</a:t>
+                <a:spcPts val="500"/>
+              </a:spcAft>
+            </a:pPr>
+            <a:r>
+              <a:rPr sz="1200" b="0" i="0">
+                <a:solidFill>
+                  <a:srgbClr val="111111"/>
+                </a:solidFill>
+                <a:latin typeface="Meiryo"/>
+                <a:ea typeface="Meiryo"/>
+                <a:cs typeface="Meiryo"/>
+              </a:rPr>
+              <a:t>・ double 禁止 (単精度 FPU のみ)。リテラルは 1.0f</a:t>
             </a:r>
           </a:p>
           <a:p>
             <a:pPr algn="l">
               <a:spcAft>
-                <a:spcPts val="300"/>
-              </a:spcAft>
-            </a:pPr>
-            <a:r>
-              <a:rPr sz="1100" b="0" i="0">
-                <a:solidFill>
-                  <a:srgbClr val="5A5A5A"/>
-                </a:solidFill>
-                <a:latin typeface="Meiryo"/>
-                <a:ea typeface="Meiryo"/>
-                <a:cs typeface="Meiryo"/>
-              </a:rPr>
-              <a:t>   (a) 本物の OpenMPI + libgomp (np=1 / np=2)</a:t>
-            </a:r>
-          </a:p>
-          <a:p>
-            <a:pPr algn="l">
-              <a:spcAft>
-                <a:spcPts val="300"/>
-              </a:spcAft>
-            </a:pPr>
-            <a:r>
-              <a:rPr sz="1100" b="0" i="0">
-                <a:solidFill>
-                  <a:srgbClr val="5A5A5A"/>
-                </a:solidFill>
-                <a:latin typeface="Meiryo"/>
-                <a:ea typeface="Meiryo"/>
-                <a:cs typeface="Meiryo"/>
-              </a:rPr>
-              <a:t>   (b) 自作アダプタ</a:t>
-            </a:r>
-          </a:p>
-          <a:p>
-            <a:pPr algn="l">
-              <a:spcAft>
-                <a:spcPts val="300"/>
-              </a:spcAft>
-            </a:pPr>
-            <a:r>
-              <a:rPr sz="1100" b="0" i="0">
-                <a:solidFill>
-                  <a:srgbClr val="5A5A5A"/>
-                </a:solidFill>
-                <a:latin typeface="Meiryo"/>
-                <a:ea typeface="Meiryo"/>
-                <a:cs typeface="Meiryo"/>
-              </a:rPr>
-              <a:t>   の両方でビルド実行 → 3 経路すべて</a:t>
-            </a:r>
-          </a:p>
-          <a:p>
-            <a:pPr algn="l">
-              <a:spcAft>
                 <a:spcPts val="0"/>
               </a:spcAft>
             </a:pPr>
             <a:r>
-              <a:rPr sz="1100" b="0" i="0">
+              <a:rPr sz="1200" b="0" i="0">
                 <a:solidFill>
                   <a:srgbClr val="111111"/>
                 </a:solidFill>
-                <a:latin typeface="Consolas"/>
-                <a:ea typeface="Consolas"/>
-                <a:cs typeface="Consolas"/>
-              </a:rPr>
-              <a:t>   checksum=32768.000000 一致</a:t>
-            </a:r>
-          </a:p>
-        </p:txBody>
-      </p:sp>
-      <p:sp>
-        <p:nvSpPr>
-          <p:cNvPr id="29" name="TextBox 28"/>
+                <a:latin typeface="Meiryo"/>
+                <a:ea typeface="Meiryo"/>
+                <a:cs typeface="Meiryo"/>
+              </a:rPr>
+              <a:t>・ make check98 で機械的に担保</a:t>
+            </a:r>
+          </a:p>
+        </p:txBody>
+      </p:sp>
+      <p:sp>
+        <p:nvSpPr>
+          <p:cNvPr id="39" name="TextBox 38"/>
           <p:cNvSpPr txBox="1"/>
           <p:nvPr/>
         </p:nvSpPr>
@@ -22584,7 +23149,7 @@
                 <a:ea typeface="Meiryo"/>
                 <a:cs typeface="Meiryo"/>
               </a:rPr>
-              <a:t>・ 512 B 超は断片化 + クレジット制御 (W=2)</a:t>
+              <a:t>・ 256 B 超は 268 B フレームに断片化 (ペイロード 256 B)</a:t>
             </a:r>
           </a:p>
           <a:p>
@@ -22602,13 +23167,13 @@
                 <a:ea typeface="Meiryo"/>
                 <a:cs typeface="Meiryo"/>
               </a:rPr>
-              <a:t>   in-flight を 536 B に抑える</a:t>
+              <a:t>   クレジット制御 W=2 で in-flight を 536 B に抑える</a:t>
             </a:r>
           </a:p>
           <a:p>
             <a:pPr algn="l">
               <a:spcAft>
-                <a:spcPts val="500"/>
+                <a:spcPts val="300"/>
               </a:spcAft>
             </a:pPr>
             <a:r>
@@ -22620,12 +23185,30 @@
                 <a:ea typeface="Meiryo"/>
                 <a:cs typeface="Meiryo"/>
               </a:rPr>
-              <a:t>・ ヘッダの 300 でも blob の 672 でもなかった</a:t>
+              <a:t>・ 実測 512 B はメッセージ上限。ヘッダの 300 でも</a:t>
             </a:r>
           </a:p>
           <a:p>
             <a:pPr algn="l">
               <a:spcAft>
+                <a:spcPts val="800"/>
+              </a:spcAft>
+            </a:pPr>
+            <a:r>
+              <a:rPr sz="1100" b="0" i="0">
+                <a:solidFill>
+                  <a:srgbClr val="5A5A5A"/>
+                </a:solidFill>
+                <a:latin typeface="Meiryo"/>
+                <a:ea typeface="Meiryo"/>
+                <a:cs typeface="Meiryo"/>
+              </a:rPr>
+              <a:t>   blob の 672 でもなかった</a:t>
+            </a:r>
+          </a:p>
+          <a:p>
+            <a:pPr algn="l">
+              <a:spcAft>
                 <a:spcPts val="300"/>
               </a:spcAft>
             </a:pPr>
@@ -22638,7 +23221,7 @@
                 <a:ea typeface="Meiryo"/>
                 <a:cs typeface="Meiryo"/>
               </a:rPr>
-              <a:t>・ 追加 RAM は 5.5 KB (合計 22.7 KB)</a:t>
+              <a:t>・ 追加 RAM: MPI 5.5 KB + SPP ログ 9.3 KB ≒ 15 KB</a:t>
             </a:r>
           </a:p>
           <a:p>
@@ -23588,7 +24171,7 @@
         <p:spPr>
           <a:xfrm>
             <a:off x="7635240" y="1115568"/>
-            <a:ext cx="4050791" cy="3246120"/>
+            <a:ext cx="4050791" cy="2103120"/>
           </a:xfrm>
           <a:prstGeom prst="rect">
             <a:avLst/>
@@ -23659,7 +24242,7 @@
                 <a:ea typeface="Meiryo"/>
                 <a:cs typeface="Meiryo"/>
               </a:rPr>
-              <a:t>Run 2 : 両バッズ・毎ブート再現</a:t>
+              <a:t>Run 2 : 両バッズ・毎ブート・17.5 秒周期</a:t>
             </a:r>
           </a:p>
         </p:txBody>
@@ -23673,7 +24256,7 @@
         <p:spPr>
           <a:xfrm>
             <a:off x="7635240" y="1426464"/>
-            <a:ext cx="4050791" cy="2935224"/>
+            <a:ext cx="4050791" cy="1792223"/>
           </a:xfrm>
           <a:prstGeom prst="rect">
             <a:avLst/>
@@ -23736,7 +24319,7 @@
                 <a:ea typeface="Consolas"/>
                 <a:cs typeface="Consolas"/>
               </a:rPr>
-              <a:t>PC =002AC1BE, ExceptionNumber=-12</a:t>
+              <a:t>CFSR =00000082   ; MMARVALID|DACCVIOL</a:t>
             </a:r>
           </a:p>
           <a:p>
@@ -23746,7 +24329,7 @@
               </a:spcAft>
             </a:pPr>
             <a:r>
-              <a:rPr sz="1050" b="0" i="0">
+              <a:rPr sz="1050" b="1" i="0">
                 <a:solidFill>
                   <a:srgbClr val="111111"/>
                 </a:solidFill>
@@ -23754,7 +24337,7 @@
                 <a:ea typeface="Consolas"/>
                 <a:cs typeface="Consolas"/>
               </a:rPr>
-              <a:t>XPSR=2100000B    ; IPSR=0x0B = SVCall</a:t>
+              <a:t>MMFAR=00000034</a:t>
             </a:r>
           </a:p>
           <a:p>
@@ -23772,7 +24355,7 @@
                 <a:ea typeface="Consolas"/>
                 <a:cs typeface="Consolas"/>
               </a:rPr>
-              <a:t>CFSR =00000082   ; MMARVALID|DACCVIOL</a:t>
+              <a:t>FaultCause: (Data access violation)</a:t>
             </a:r>
           </a:p>
           <a:p>
@@ -23782,7 +24365,7 @@
               </a:spcAft>
             </a:pPr>
             <a:r>
-              <a:rPr sz="1050" b="0" i="0">
+              <a:rPr sz="1050" b="1" i="0">
                 <a:solidFill>
                   <a:srgbClr val="111111"/>
                 </a:solidFill>
@@ -23790,7 +24373,7 @@
                 <a:ea typeface="Consolas"/>
                 <a:cs typeface="Consolas"/>
               </a:rPr>
-              <a:t>FaultInfo : (MemFault)</a:t>
+              <a:t>Current Task    : 0   &lt;- 走るタスクが居ない</a:t>
             </a:r>
           </a:p>
           <a:p>
@@ -23808,43 +24391,7 @@
                 <a:ea typeface="Consolas"/>
                 <a:cs typeface="Consolas"/>
               </a:rPr>
-              <a:t>FaultCause: (Data access violation)</a:t>
-            </a:r>
-          </a:p>
-          <a:p>
-            <a:pPr algn="l">
-              <a:spcAft>
-                <a:spcPts val="0"/>
-              </a:spcAft>
-            </a:pPr>
-            <a:r>
-              <a:rPr sz="1050" b="0" i="0">
-                <a:solidFill>
-                  <a:srgbClr val="111111"/>
-                </a:solidFill>
-                <a:latin typeface="Consolas"/>
-                <a:ea typeface="Consolas"/>
-                <a:cs typeface="Consolas"/>
-              </a:rPr>
-              <a:t>Current Task    : 0</a:t>
-            </a:r>
-          </a:p>
-          <a:p>
-            <a:pPr algn="l">
-              <a:spcAft>
-                <a:spcPts val="0"/>
-              </a:spcAft>
-            </a:pPr>
-            <a:r>
-              <a:rPr sz="1050" b="1" i="0">
-                <a:solidFill>
-                  <a:srgbClr val="111111"/>
-                </a:solidFill>
-                <a:latin typeface="Consolas"/>
-                <a:ea typeface="Consolas"/>
-                <a:cs typeface="Consolas"/>
-              </a:rPr>
-              <a:t>New Running Task: 255   &lt;- 次が居ない</a:t>
+              <a:t>New Running Task: 255  ; idle TCB</a:t>
             </a:r>
           </a:p>
         </p:txBody>
@@ -23857,8 +24404,8 @@
         </p:nvSpPr>
         <p:spPr>
           <a:xfrm>
-            <a:off x="7635240" y="4517136"/>
-            <a:ext cx="4050791" cy="1627632"/>
+            <a:off x="7635240" y="3364992"/>
+            <a:ext cx="4050791" cy="1097280"/>
           </a:xfrm>
           <a:prstGeom prst="rect">
             <a:avLst/>
@@ -23901,7 +24448,7 @@
         </p:nvSpPr>
         <p:spPr>
           <a:xfrm>
-            <a:off x="7635240" y="4517136"/>
+            <a:off x="7635240" y="3364992"/>
             <a:ext cx="4050791" cy="384048"/>
           </a:xfrm>
           <a:prstGeom prst="rect">
@@ -23945,7 +24492,7 @@
         </p:nvSpPr>
         <p:spPr>
           <a:xfrm>
-            <a:off x="7635240" y="4517136"/>
+            <a:off x="7635240" y="3364992"/>
             <a:ext cx="4050791" cy="384048"/>
           </a:xfrm>
           <a:prstGeom prst="rect">
@@ -23973,7 +24520,7 @@
                 <a:ea typeface="Meiryo"/>
                 <a:cs typeface="Meiryo"/>
               </a:rPr>
-              <a:t>効いた運用</a:t>
+              <a:t>MMFAR が犯人を名指しした</a:t>
             </a:r>
           </a:p>
         </p:txBody>
@@ -23986,8 +24533,8 @@
         </p:nvSpPr>
         <p:spPr>
           <a:xfrm>
-            <a:off x="7635240" y="4901184"/>
-            <a:ext cx="4050791" cy="1243584"/>
+            <a:off x="7635240" y="3749040"/>
+            <a:ext cx="4050791" cy="713232"/>
           </a:xfrm>
           <a:prstGeom prst="rect">
             <a:avLst/>
@@ -24002,55 +24549,37 @@
           <a:p>
             <a:pPr algn="l">
               <a:spcAft>
-                <a:spcPts val="600"/>
-              </a:spcAft>
-            </a:pPr>
-            <a:r>
-              <a:rPr sz="1150" b="0" i="0">
-                <a:solidFill>
-                  <a:srgbClr val="5A5A5A"/>
-                </a:solidFill>
-                <a:latin typeface="Meiryo"/>
-                <a:ea typeface="Meiryo"/>
-                <a:cs typeface="Meiryo"/>
-              </a:rPr>
-              <a:t>・ 修正は全部ホストのテストに落としてから直した</a:t>
+                <a:spcPts val="400"/>
+              </a:spcAft>
+            </a:pPr>
+            <a:r>
+              <a:rPr sz="1100" b="0" i="0">
+                <a:solidFill>
+                  <a:srgbClr val="111111"/>
+                </a:solidFill>
+                <a:latin typeface="Meiryo"/>
+                <a:ea typeface="Meiryo"/>
+                <a:cs typeface="Meiryo"/>
+              </a:rPr>
+              <a:t>0x34 = RTX の OS_TCB 構造体の swap_out_time オフセット。</a:t>
             </a:r>
           </a:p>
           <a:p>
             <a:pPr algn="l">
               <a:spcAft>
-                <a:spcPts val="600"/>
-              </a:spcAft>
-            </a:pPr>
-            <a:r>
-              <a:rPr sz="1150" b="0" i="0">
-                <a:solidFill>
-                  <a:srgbClr val="5A5A5A"/>
-                </a:solidFill>
-                <a:latin typeface="Meiryo"/>
-                <a:ea typeface="Meiryo"/>
-                <a:cs typeface="Meiryo"/>
-              </a:rPr>
-              <a:t>・ 実機で試す前に 1,788 checks を緑にする</a:t>
-            </a:r>
-          </a:p>
-          <a:p>
-            <a:pPr algn="l">
-              <a:spcAft>
                 <a:spcPts val="0"/>
               </a:spcAft>
             </a:pPr>
             <a:r>
-              <a:rPr sz="1150" b="0" i="0">
-                <a:solidFill>
-                  <a:srgbClr val="5A5A5A"/>
-                </a:solidFill>
-                <a:latin typeface="Meiryo"/>
-                <a:ea typeface="Meiryo"/>
-                <a:cs typeface="Meiryo"/>
-              </a:rPr>
-              <a:t>・ SPP の重複送信バグも 5 本のテストを先に書いた</a:t>
+              <a:rPr sz="1100" b="1" i="0">
+                <a:solidFill>
+                  <a:srgbClr val="111111"/>
+                </a:solidFill>
+                <a:latin typeface="Meiryo"/>
+                <a:ea typeface="Meiryo"/>
+                <a:cs typeface="Meiryo"/>
+              </a:rPr>
+              <a:t>終了済みスレッドの TCB を NULL 経由で触っていた。</a:t>
             </a:r>
           </a:p>
         </p:txBody>
@@ -24063,8 +24592,52 @@
         </p:nvSpPr>
         <p:spPr>
           <a:xfrm>
-            <a:off x="502920" y="5413248"/>
-            <a:ext cx="6949440" cy="548640"/>
+            <a:off x="7635240" y="4608576"/>
+            <a:ext cx="4050791" cy="1097280"/>
+          </a:xfrm>
+          <a:prstGeom prst="rect">
+            <a:avLst/>
+          </a:prstGeom>
+          <a:solidFill>
+            <a:srgbClr val="F4F4F4"/>
+          </a:solidFill>
+          <a:ln w="9525">
+            <a:solidFill>
+              <a:srgbClr val="9E9E9E"/>
+            </a:solidFill>
+          </a:ln>
+          <a:effectLst/>
+        </p:spPr>
+        <p:style>
+          <a:lnRef idx="1">
+            <a:schemeClr val="accent1"/>
+          </a:lnRef>
+          <a:fillRef idx="3">
+            <a:schemeClr val="accent1"/>
+          </a:fillRef>
+          <a:effectRef idx="2">
+            <a:schemeClr val="accent1"/>
+          </a:effectRef>
+          <a:fontRef idx="minor">
+            <a:schemeClr val="lt1"/>
+          </a:fontRef>
+        </p:style>
+        <p:txBody>
+          <a:bodyPr rtlCol="0" anchor="ctr"/>
+          <a:lstStyle/>
+          <a:p/>
+        </p:txBody>
+      </p:sp>
+      <p:sp>
+        <p:nvSpPr>
+          <p:cNvPr id="14" name="Rectangle 13"/>
+          <p:cNvSpPr/>
+          <p:nvPr/>
+        </p:nvSpPr>
+        <p:spPr>
+          <a:xfrm>
+            <a:off x="7635240" y="4608576"/>
+            <a:ext cx="4050791" cy="384048"/>
           </a:xfrm>
           <a:prstGeom prst="rect">
             <a:avLst/>
@@ -24101,7 +24674,151 @@
       </p:sp>
       <p:sp>
         <p:nvSpPr>
-          <p:cNvPr id="14" name="TextBox 13"/>
+          <p:cNvPr id="15" name="TextBox 14"/>
+          <p:cNvSpPr txBox="1"/>
+          <p:nvPr/>
+        </p:nvSpPr>
+        <p:spPr>
+          <a:xfrm>
+            <a:off x="7635240" y="4608576"/>
+            <a:ext cx="4050791" cy="384048"/>
+          </a:xfrm>
+          <a:prstGeom prst="rect">
+            <a:avLst/>
+          </a:prstGeom>
+          <a:noFill/>
+        </p:spPr>
+        <p:txBody>
+          <a:bodyPr wrap="square" lIns="109728" rIns="109728" tIns="65836" bIns="65836" anchor="ctr">
+            <a:spAutoFit/>
+          </a:bodyPr>
+          <a:lstStyle/>
+          <a:p>
+            <a:pPr algn="l">
+              <a:spcAft>
+                <a:spcPts val="400"/>
+              </a:spcAft>
+            </a:pPr>
+            <a:r>
+              <a:rPr sz="1400" b="1" i="0">
+                <a:solidFill>
+                  <a:srgbClr val="111111"/>
+                </a:solidFill>
+                <a:latin typeface="Meiryo"/>
+                <a:ea typeface="Meiryo"/>
+                <a:cs typeface="Meiryo"/>
+              </a:rPr>
+              <a:t>効いた運用</a:t>
+            </a:r>
+          </a:p>
+        </p:txBody>
+      </p:sp>
+      <p:sp>
+        <p:nvSpPr>
+          <p:cNvPr id="16" name="TextBox 15"/>
+          <p:cNvSpPr txBox="1"/>
+          <p:nvPr/>
+        </p:nvSpPr>
+        <p:spPr>
+          <a:xfrm>
+            <a:off x="7635240" y="4992624"/>
+            <a:ext cx="4050791" cy="713232"/>
+          </a:xfrm>
+          <a:prstGeom prst="rect">
+            <a:avLst/>
+          </a:prstGeom>
+          <a:noFill/>
+        </p:spPr>
+        <p:txBody>
+          <a:bodyPr wrap="square" lIns="109728" rIns="109728" tIns="65836" bIns="65836" anchor="t">
+            <a:spAutoFit/>
+          </a:bodyPr>
+          <a:lstStyle/>
+          <a:p>
+            <a:pPr algn="l">
+              <a:spcAft>
+                <a:spcPts val="400"/>
+              </a:spcAft>
+            </a:pPr>
+            <a:r>
+              <a:rPr sz="1100" b="0" i="0">
+                <a:solidFill>
+                  <a:srgbClr val="111111"/>
+                </a:solidFill>
+                <a:latin typeface="Meiryo"/>
+                <a:ea typeface="Meiryo"/>
+                <a:cs typeface="Meiryo"/>
+              </a:rPr>
+              <a:t>純ロジックは全部ホストのテストを先に書いた。実機で出た</a:t>
+            </a:r>
+          </a:p>
+          <a:p>
+            <a:pPr algn="l">
+              <a:spcAft>
+                <a:spcPts val="0"/>
+              </a:spcAft>
+            </a:pPr>
+            <a:r>
+              <a:rPr sz="1100" b="0" i="0">
+                <a:solidFill>
+                  <a:srgbClr val="111111"/>
+                </a:solidFill>
+                <a:latin typeface="Meiryo"/>
+                <a:ea typeface="Meiryo"/>
+                <a:cs typeface="Meiryo"/>
+              </a:rPr>
+              <a:t>SPP のバグも 5 本テストに落としてから直した。</a:t>
+            </a:r>
+          </a:p>
+        </p:txBody>
+      </p:sp>
+      <p:sp>
+        <p:nvSpPr>
+          <p:cNvPr id="17" name="Rectangle 16"/>
+          <p:cNvSpPr/>
+          <p:nvPr/>
+        </p:nvSpPr>
+        <p:spPr>
+          <a:xfrm>
+            <a:off x="502920" y="5413248"/>
+            <a:ext cx="6949440" cy="548640"/>
+          </a:xfrm>
+          <a:prstGeom prst="rect">
+            <a:avLst/>
+          </a:prstGeom>
+          <a:solidFill>
+            <a:srgbClr val="E8E8E8"/>
+          </a:solidFill>
+          <a:ln w="9525">
+            <a:solidFill>
+              <a:srgbClr val="9E9E9E"/>
+            </a:solidFill>
+          </a:ln>
+          <a:effectLst/>
+        </p:spPr>
+        <p:style>
+          <a:lnRef idx="1">
+            <a:schemeClr val="accent1"/>
+          </a:lnRef>
+          <a:fillRef idx="3">
+            <a:schemeClr val="accent1"/>
+          </a:fillRef>
+          <a:effectRef idx="2">
+            <a:schemeClr val="accent1"/>
+          </a:effectRef>
+          <a:fontRef idx="minor">
+            <a:schemeClr val="lt1"/>
+          </a:fontRef>
+        </p:style>
+        <p:txBody>
+          <a:bodyPr rtlCol="0" anchor="ctr"/>
+          <a:lstStyle/>
+          <a:p/>
+        </p:txBody>
+      </p:sp>
+      <p:sp>
+        <p:nvSpPr>
+          <p:cNvPr id="18" name="TextBox 17"/>
           <p:cNvSpPr txBox="1"/>
           <p:nvPr/>
         </p:nvSpPr>
@@ -24127,7 +24844,7 @@
               </a:spcAft>
             </a:pPr>
             <a:r>
-              <a:rPr sz="1350" b="1" i="0">
+              <a:rPr sz="1250" b="1" i="0">
                 <a:solidFill>
                   <a:srgbClr val="111111"/>
                 </a:solidFill>
@@ -24135,14 +24852,14 @@
                 <a:ea typeface="Meiryo"/>
                 <a:cs typeface="Meiryo"/>
               </a:rPr>
-              <a:t>6 個の地雷のうち、計算に起因するものはゼロ。全部が電源・接続・RTOS。</a:t>
-            </a:r>
-          </a:p>
-        </p:txBody>
-      </p:sp>
-      <p:sp>
-        <p:nvSpPr>
-          <p:cNvPr id="15" name="TextBox 14"/>
+              <a:t>6 個の地雷のうち、計算に起因するものはゼロ。全部が電源・接続・RTOS・SDK 仕様。</a:t>
+            </a:r>
+          </a:p>
+        </p:txBody>
+      </p:sp>
+      <p:sp>
+        <p:nvSpPr>
+          <p:cNvPr id="19" name="TextBox 18"/>
           <p:cNvSpPr txBox="1"/>
           <p:nvPr/>
         </p:nvSpPr>

--- a/slides/lt-ear-parallel.pptx
+++ b/slides/lt-ear-parallel.pptx
@@ -20455,7 +20455,7 @@
         <p:spPr>
           <a:xfrm>
             <a:off x="502920" y="1115568"/>
-            <a:ext cx="6903720" cy="694944"/>
+            <a:ext cx="11185855" cy="713232"/>
           </a:xfrm>
           <a:prstGeom prst="rect">
             <a:avLst/>
@@ -20498,8 +20498,8 @@
         </p:nvSpPr>
         <p:spPr>
           <a:xfrm>
-            <a:off x="594360" y="1161288"/>
-            <a:ext cx="6720840" cy="292608"/>
+            <a:off x="612648" y="1170432"/>
+            <a:ext cx="10966399" cy="310896"/>
           </a:xfrm>
           <a:prstGeom prst="rect">
             <a:avLst/>
@@ -20518,7 +20518,7 @@
               </a:spcAft>
             </a:pPr>
             <a:r>
-              <a:rPr sz="1300" b="1" i="0">
+              <a:rPr sz="1400" b="1" i="0">
                 <a:solidFill>
                   <a:srgbClr val="111111"/>
                 </a:solidFill>
@@ -20539,8 +20539,8 @@
         </p:nvSpPr>
         <p:spPr>
           <a:xfrm>
-            <a:off x="594360" y="1444752"/>
-            <a:ext cx="6720840" cy="329184"/>
+            <a:off x="612648" y="1463040"/>
+            <a:ext cx="10966399" cy="329184"/>
           </a:xfrm>
           <a:prstGeom prst="rect">
             <a:avLst/>
@@ -20559,7 +20559,7 @@
               </a:spcAft>
             </a:pPr>
             <a:r>
-              <a:rPr sz="1050" b="0" i="0">
+              <a:rPr sz="1150" b="0" i="0">
                 <a:solidFill>
                   <a:srgbClr val="5A5A5A"/>
                 </a:solidFill>
@@ -20580,8 +20580,8 @@
         </p:nvSpPr>
         <p:spPr>
           <a:xfrm>
-            <a:off x="502920" y="1883664"/>
-            <a:ext cx="6903720" cy="694944"/>
+            <a:off x="502920" y="1901952"/>
+            <a:ext cx="11185855" cy="713232"/>
           </a:xfrm>
           <a:prstGeom prst="rect">
             <a:avLst/>
@@ -20624,8 +20624,8 @@
         </p:nvSpPr>
         <p:spPr>
           <a:xfrm>
-            <a:off x="594360" y="1929384"/>
-            <a:ext cx="6720840" cy="292608"/>
+            <a:off x="612648" y="1956816"/>
+            <a:ext cx="10966399" cy="310896"/>
           </a:xfrm>
           <a:prstGeom prst="rect">
             <a:avLst/>
@@ -20644,7 +20644,7 @@
               </a:spcAft>
             </a:pPr>
             <a:r>
-              <a:rPr sz="1300" b="1" i="0">
+              <a:rPr sz="1400" b="1" i="0">
                 <a:solidFill>
                   <a:srgbClr val="111111"/>
                 </a:solidFill>
@@ -20665,8 +20665,8 @@
         </p:nvSpPr>
         <p:spPr>
           <a:xfrm>
-            <a:off x="594360" y="2212848"/>
-            <a:ext cx="6720840" cy="329184"/>
+            <a:off x="612648" y="2249424"/>
+            <a:ext cx="10966399" cy="329184"/>
           </a:xfrm>
           <a:prstGeom prst="rect">
             <a:avLst/>
@@ -20685,7 +20685,7 @@
               </a:spcAft>
             </a:pPr>
             <a:r>
-              <a:rPr sz="1050" b="0" i="0">
+              <a:rPr sz="1150" b="0" i="0">
                 <a:solidFill>
                   <a:srgbClr val="5A5A5A"/>
                 </a:solidFill>
@@ -20706,8 +20706,8 @@
         </p:nvSpPr>
         <p:spPr>
           <a:xfrm>
-            <a:off x="502920" y="2651760"/>
-            <a:ext cx="6903720" cy="694944"/>
+            <a:off x="502920" y="2688336"/>
+            <a:ext cx="11185855" cy="713232"/>
           </a:xfrm>
           <a:prstGeom prst="rect">
             <a:avLst/>
@@ -20750,8 +20750,8 @@
         </p:nvSpPr>
         <p:spPr>
           <a:xfrm>
-            <a:off x="594360" y="2697479"/>
-            <a:ext cx="6720840" cy="292608"/>
+            <a:off x="612648" y="2743200"/>
+            <a:ext cx="10966399" cy="310896"/>
           </a:xfrm>
           <a:prstGeom prst="rect">
             <a:avLst/>
@@ -20770,7 +20770,7 @@
               </a:spcAft>
             </a:pPr>
             <a:r>
-              <a:rPr sz="1300" b="1" i="0">
+              <a:rPr sz="1400" b="1" i="0">
                 <a:solidFill>
                   <a:srgbClr val="111111"/>
                 </a:solidFill>
@@ -20791,8 +20791,8 @@
         </p:nvSpPr>
         <p:spPr>
           <a:xfrm>
-            <a:off x="594360" y="2980944"/>
-            <a:ext cx="6720840" cy="329184"/>
+            <a:off x="612648" y="3035808"/>
+            <a:ext cx="10966399" cy="329184"/>
           </a:xfrm>
           <a:prstGeom prst="rect">
             <a:avLst/>
@@ -20811,7 +20811,7 @@
               </a:spcAft>
             </a:pPr>
             <a:r>
-              <a:rPr sz="1050" b="0" i="0">
+              <a:rPr sz="1150" b="0" i="0">
                 <a:solidFill>
                   <a:srgbClr val="5A5A5A"/>
                 </a:solidFill>
@@ -20832,8 +20832,8 @@
         </p:nvSpPr>
         <p:spPr>
           <a:xfrm>
-            <a:off x="502920" y="3419856"/>
-            <a:ext cx="6903720" cy="694944"/>
+            <a:off x="502920" y="3474720"/>
+            <a:ext cx="11185855" cy="713232"/>
           </a:xfrm>
           <a:prstGeom prst="rect">
             <a:avLst/>
@@ -20876,8 +20876,8 @@
         </p:nvSpPr>
         <p:spPr>
           <a:xfrm>
-            <a:off x="594360" y="3465576"/>
-            <a:ext cx="6720840" cy="292608"/>
+            <a:off x="612648" y="3529584"/>
+            <a:ext cx="10966399" cy="310896"/>
           </a:xfrm>
           <a:prstGeom prst="rect">
             <a:avLst/>
@@ -20896,7 +20896,7 @@
               </a:spcAft>
             </a:pPr>
             <a:r>
-              <a:rPr sz="1300" b="1" i="0">
+              <a:rPr sz="1400" b="1" i="0">
                 <a:solidFill>
                   <a:srgbClr val="111111"/>
                 </a:solidFill>
@@ -20917,8 +20917,8 @@
         </p:nvSpPr>
         <p:spPr>
           <a:xfrm>
-            <a:off x="594360" y="3749040"/>
-            <a:ext cx="6720840" cy="329184"/>
+            <a:off x="612648" y="3822191"/>
+            <a:ext cx="10966399" cy="329184"/>
           </a:xfrm>
           <a:prstGeom prst="rect">
             <a:avLst/>
@@ -20937,7 +20937,7 @@
               </a:spcAft>
             </a:pPr>
             <a:r>
-              <a:rPr sz="1050" b="0" i="0">
+              <a:rPr sz="1150" b="0" i="0">
                 <a:solidFill>
                   <a:srgbClr val="5A5A5A"/>
                 </a:solidFill>
@@ -20958,8 +20958,8 @@
         </p:nvSpPr>
         <p:spPr>
           <a:xfrm>
-            <a:off x="502920" y="4187952"/>
-            <a:ext cx="6903720" cy="694944"/>
+            <a:off x="502920" y="4261104"/>
+            <a:ext cx="11185855" cy="713232"/>
           </a:xfrm>
           <a:prstGeom prst="rect">
             <a:avLst/>
@@ -21002,8 +21002,8 @@
         </p:nvSpPr>
         <p:spPr>
           <a:xfrm>
-            <a:off x="594360" y="4233672"/>
-            <a:ext cx="6720840" cy="292608"/>
+            <a:off x="612648" y="4315968"/>
+            <a:ext cx="10966399" cy="310896"/>
           </a:xfrm>
           <a:prstGeom prst="rect">
             <a:avLst/>
@@ -21022,7 +21022,7 @@
               </a:spcAft>
             </a:pPr>
             <a:r>
-              <a:rPr sz="1300" b="1" i="0">
+              <a:rPr sz="1400" b="1" i="0">
                 <a:solidFill>
                   <a:srgbClr val="111111"/>
                 </a:solidFill>
@@ -21043,8 +21043,8 @@
         </p:nvSpPr>
         <p:spPr>
           <a:xfrm>
-            <a:off x="594360" y="4517136"/>
-            <a:ext cx="6720840" cy="329184"/>
+            <a:off x="612648" y="4608576"/>
+            <a:ext cx="10966399" cy="329184"/>
           </a:xfrm>
           <a:prstGeom prst="rect">
             <a:avLst/>
@@ -21063,7 +21063,7 @@
               </a:spcAft>
             </a:pPr>
             <a:r>
-              <a:rPr sz="1050" b="0" i="0">
+              <a:rPr sz="1150" b="0" i="0">
                 <a:solidFill>
                   <a:srgbClr val="5A5A5A"/>
                 </a:solidFill>
@@ -21078,55 +21078,14 @@
       </p:sp>
       <p:sp>
         <p:nvSpPr>
-          <p:cNvPr id="20" name="TextBox 19"/>
-          <p:cNvSpPr txBox="1"/>
-          <p:nvPr/>
-        </p:nvSpPr>
-        <p:spPr>
-          <a:xfrm>
-            <a:off x="502920" y="5010912"/>
-            <a:ext cx="6903720" cy="384048"/>
-          </a:xfrm>
-          <a:prstGeom prst="rect">
-            <a:avLst/>
-          </a:prstGeom>
-          <a:noFill/>
-        </p:spPr>
-        <p:txBody>
-          <a:bodyPr wrap="square" lIns="18288" rIns="18288" tIns="10972" bIns="10972" anchor="t">
-            <a:spAutoFit/>
-          </a:bodyPr>
-          <a:lstStyle/>
-          <a:p>
-            <a:pPr algn="l">
-              <a:spcAft>
-                <a:spcPts val="400"/>
-              </a:spcAft>
-            </a:pPr>
-            <a:r>
-              <a:rPr sz="1150" b="0" i="0">
-                <a:solidFill>
-                  <a:srgbClr val="5A5A5A"/>
-                </a:solidFill>
-                <a:latin typeface="Meiryo"/>
-                <a:ea typeface="Meiryo"/>
-                <a:cs typeface="Meiryo"/>
-              </a:rPr>
-              <a:t>規模: adapters 926 行 / firmware 統合 1,656 行 / tests 1,846 行 / 設計ドキュメント 2,643 行</a:t>
-            </a:r>
-          </a:p>
-        </p:txBody>
-      </p:sp>
-      <p:sp>
-        <p:nvSpPr>
-          <p:cNvPr id="21" name="Rectangle 20"/>
+          <p:cNvPr id="20" name="Rectangle 19"/>
           <p:cNvSpPr/>
           <p:nvPr/>
         </p:nvSpPr>
         <p:spPr>
           <a:xfrm>
-            <a:off x="7607808" y="1115568"/>
-            <a:ext cx="4078224" cy="2505456"/>
+            <a:off x="502920" y="5102352"/>
+            <a:ext cx="11185855" cy="1005840"/>
           </a:xfrm>
           <a:prstGeom prst="rect">
             <a:avLst/>
@@ -21163,14 +21122,14 @@
       </p:sp>
       <p:sp>
         <p:nvSpPr>
-          <p:cNvPr id="22" name="Rectangle 21"/>
+          <p:cNvPr id="21" name="Rectangle 20"/>
           <p:cNvSpPr/>
           <p:nvPr/>
         </p:nvSpPr>
         <p:spPr>
           <a:xfrm>
-            <a:off x="7607808" y="1115568"/>
-            <a:ext cx="4078224" cy="384048"/>
+            <a:off x="502920" y="5102352"/>
+            <a:ext cx="11185855" cy="384048"/>
           </a:xfrm>
           <a:prstGeom prst="rect">
             <a:avLst/>
@@ -21207,14 +21166,14 @@
       </p:sp>
       <p:sp>
         <p:nvSpPr>
-          <p:cNvPr id="23" name="TextBox 22"/>
+          <p:cNvPr id="22" name="TextBox 21"/>
           <p:cNvSpPr txBox="1"/>
           <p:nvPr/>
         </p:nvSpPr>
         <p:spPr>
           <a:xfrm>
-            <a:off x="7607808" y="1115568"/>
-            <a:ext cx="4078224" cy="384048"/>
+            <a:off x="502920" y="5102352"/>
+            <a:ext cx="11185855" cy="384048"/>
           </a:xfrm>
           <a:prstGeom prst="rect">
             <a:avLst/>
@@ -21233,7 +21192,7 @@
               </a:spcAft>
             </a:pPr>
             <a:r>
-              <a:rPr sz="1350" b="1" i="0">
+              <a:rPr sz="1400" b="1" i="0">
                 <a:solidFill>
                   <a:srgbClr val="111111"/>
                 </a:solidFill>
@@ -21241,65 +21200,21 @@
                 <a:ea typeface="Meiryo"/>
                 <a:cs typeface="Meiryo"/>
               </a:rPr>
-              <a:t>自作アダプタが嘘をついていない証明</a:t>
-            </a:r>
-          </a:p>
-        </p:txBody>
-      </p:sp>
-      <p:sp>
-        <p:nvSpPr>
-          <p:cNvPr id="24" name="Rectangle 23"/>
-          <p:cNvSpPr/>
-          <p:nvPr/>
-        </p:nvSpPr>
-        <p:spPr>
-          <a:xfrm>
-            <a:off x="7790688" y="1591056"/>
-            <a:ext cx="3712463" cy="365760"/>
-          </a:xfrm>
-          <a:prstGeom prst="rect">
-            <a:avLst/>
-          </a:prstGeom>
-          <a:solidFill>
-            <a:srgbClr val="FFFFFF"/>
-          </a:solidFill>
-          <a:ln w="9525">
-            <a:solidFill>
-              <a:srgbClr val="9E9E9E"/>
-            </a:solidFill>
-          </a:ln>
-          <a:effectLst/>
-        </p:spPr>
-        <p:style>
-          <a:lnRef idx="1">
-            <a:schemeClr val="accent1"/>
-          </a:lnRef>
-          <a:fillRef idx="3">
-            <a:schemeClr val="accent1"/>
-          </a:fillRef>
-          <a:effectRef idx="2">
-            <a:schemeClr val="accent1"/>
-          </a:effectRef>
-          <a:fontRef idx="minor">
-            <a:schemeClr val="lt1"/>
-          </a:fontRef>
-        </p:style>
-        <p:txBody>
-          <a:bodyPr rtlCol="0" anchor="ctr"/>
-          <a:lstStyle/>
-          <a:p/>
-        </p:txBody>
-      </p:sp>
-      <p:sp>
-        <p:nvSpPr>
-          <p:cNvPr id="25" name="TextBox 24"/>
+              <a:t>SDK に合わせるしかない制約</a:t>
+            </a:r>
+          </a:p>
+        </p:txBody>
+      </p:sp>
+      <p:sp>
+        <p:nvSpPr>
+          <p:cNvPr id="23" name="TextBox 22"/>
           <p:cNvSpPr txBox="1"/>
           <p:nvPr/>
         </p:nvSpPr>
         <p:spPr>
           <a:xfrm>
-            <a:off x="7790688" y="1591056"/>
-            <a:ext cx="3712463" cy="365760"/>
+            <a:off x="502920" y="5486400"/>
+            <a:ext cx="11185855" cy="621792"/>
           </a:xfrm>
           <a:prstGeom prst="rect">
             <a:avLst/>
@@ -21307,18 +21222,18 @@
           <a:noFill/>
         </p:spPr>
         <p:txBody>
-          <a:bodyPr wrap="square" lIns="27432" rIns="27432" tIns="16459" bIns="16459" anchor="ctr">
+          <a:bodyPr wrap="square" lIns="109728" rIns="109728" tIns="65836" bIns="65836" anchor="t">
             <a:spAutoFit/>
           </a:bodyPr>
           <a:lstStyle/>
           <a:p>
-            <a:pPr algn="ctr">
+            <a:pPr algn="l">
               <a:spcAft>
                 <a:spcPts val="400"/>
               </a:spcAft>
             </a:pPr>
             <a:r>
-              <a:rPr sz="1100" b="1" i="0">
+              <a:rPr sz="1200" b="0" i="0">
                 <a:solidFill>
                   <a:srgbClr val="111111"/>
                 </a:solidFill>
@@ -21326,367 +21241,39 @@
                 <a:ea typeface="Meiryo"/>
                 <a:cs typeface="Meiryo"/>
               </a:rPr>
-              <a:t>bench/gemm_mpi_omp.cpp  (1 ソース・無改変)</a:t>
-            </a:r>
-          </a:p>
-        </p:txBody>
-      </p:sp>
-      <p:sp>
-        <p:nvSpPr>
-          <p:cNvPr id="26" name="Rectangle 25"/>
-          <p:cNvSpPr/>
-          <p:nvPr/>
-        </p:nvSpPr>
-        <p:spPr>
-          <a:xfrm>
-            <a:off x="7790688" y="2084831"/>
-            <a:ext cx="1176527" cy="658368"/>
-          </a:xfrm>
-          <a:prstGeom prst="rect">
-            <a:avLst/>
-          </a:prstGeom>
-          <a:solidFill>
-            <a:srgbClr val="FFFFFF"/>
-          </a:solidFill>
-          <a:ln w="9525">
-            <a:solidFill>
-              <a:srgbClr val="9E9E9E"/>
-            </a:solidFill>
-          </a:ln>
-          <a:effectLst/>
-        </p:spPr>
-        <p:style>
-          <a:lnRef idx="1">
-            <a:schemeClr val="accent1"/>
-          </a:lnRef>
-          <a:fillRef idx="3">
-            <a:schemeClr val="accent1"/>
-          </a:fillRef>
-          <a:effectRef idx="2">
-            <a:schemeClr val="accent1"/>
-          </a:effectRef>
-          <a:fontRef idx="minor">
-            <a:schemeClr val="lt1"/>
-          </a:fontRef>
-        </p:style>
-        <p:txBody>
-          <a:bodyPr rtlCol="0" anchor="ctr"/>
-          <a:lstStyle/>
-          <a:p/>
-        </p:txBody>
-      </p:sp>
-      <p:sp>
-        <p:nvSpPr>
-          <p:cNvPr id="27" name="TextBox 26"/>
+              <a:t>・ -std=gnu++98 / -fno-exceptions / -fno-rtti → C++11 以降が使えない     ・ ヒープ禁止・STL 禁止・静的バッファのみ</a:t>
+            </a:r>
+          </a:p>
+          <a:p>
+            <a:pPr algn="l">
+              <a:spcAft>
+                <a:spcPts val="0"/>
+              </a:spcAft>
+            </a:pPr>
+            <a:r>
+              <a:rPr sz="1200" b="0" i="0">
+                <a:solidFill>
+                  <a:srgbClr val="111111"/>
+                </a:solidFill>
+                <a:latin typeface="Meiryo"/>
+                <a:ea typeface="Meiryo"/>
+                <a:cs typeface="Meiryo"/>
+              </a:rPr>
+              <a:t>・ double 禁止 (単精度 FPU のみ、リテラルは 1.0f)     ・ make check98 で機械的に担保</a:t>
+            </a:r>
+          </a:p>
+        </p:txBody>
+      </p:sp>
+      <p:sp>
+        <p:nvSpPr>
+          <p:cNvPr id="24" name="TextBox 23"/>
           <p:cNvSpPr txBox="1"/>
           <p:nvPr/>
         </p:nvSpPr>
         <p:spPr>
           <a:xfrm>
-            <a:off x="7790688" y="2084831"/>
-            <a:ext cx="1176527" cy="658368"/>
-          </a:xfrm>
-          <a:prstGeom prst="rect">
-            <a:avLst/>
-          </a:prstGeom>
-          <a:noFill/>
-        </p:spPr>
-        <p:txBody>
-          <a:bodyPr wrap="square" lIns="18288" rIns="18288" tIns="10972" bIns="10972" anchor="ctr">
-            <a:spAutoFit/>
-          </a:bodyPr>
-          <a:lstStyle/>
-          <a:p>
-            <a:pPr algn="ctr">
-              <a:spcAft>
-                <a:spcPts val="0"/>
-              </a:spcAft>
-            </a:pPr>
-            <a:r>
-              <a:rPr sz="950" b="0" i="0">
-                <a:solidFill>
-                  <a:srgbClr val="111111"/>
-                </a:solidFill>
-                <a:latin typeface="Meiryo"/>
-                <a:ea typeface="Meiryo"/>
-                <a:cs typeface="Meiryo"/>
-              </a:rPr>
-              <a:t>本物の
-OpenMPI
-np=1</a:t>
-            </a:r>
-          </a:p>
-        </p:txBody>
-      </p:sp>
-      <p:sp>
-        <p:nvSpPr>
-          <p:cNvPr id="28" name="Rectangle 27"/>
-          <p:cNvSpPr/>
-          <p:nvPr/>
-        </p:nvSpPr>
-        <p:spPr>
-          <a:xfrm>
-            <a:off x="9058656" y="2084831"/>
-            <a:ext cx="1176527" cy="658368"/>
-          </a:xfrm>
-          <a:prstGeom prst="rect">
-            <a:avLst/>
-          </a:prstGeom>
-          <a:solidFill>
-            <a:srgbClr val="FFFFFF"/>
-          </a:solidFill>
-          <a:ln w="9525">
-            <a:solidFill>
-              <a:srgbClr val="9E9E9E"/>
-            </a:solidFill>
-          </a:ln>
-          <a:effectLst/>
-        </p:spPr>
-        <p:style>
-          <a:lnRef idx="1">
-            <a:schemeClr val="accent1"/>
-          </a:lnRef>
-          <a:fillRef idx="3">
-            <a:schemeClr val="accent1"/>
-          </a:fillRef>
-          <a:effectRef idx="2">
-            <a:schemeClr val="accent1"/>
-          </a:effectRef>
-          <a:fontRef idx="minor">
-            <a:schemeClr val="lt1"/>
-          </a:fontRef>
-        </p:style>
-        <p:txBody>
-          <a:bodyPr rtlCol="0" anchor="ctr"/>
-          <a:lstStyle/>
-          <a:p/>
-        </p:txBody>
-      </p:sp>
-      <p:sp>
-        <p:nvSpPr>
-          <p:cNvPr id="29" name="TextBox 28"/>
-          <p:cNvSpPr txBox="1"/>
-          <p:nvPr/>
-        </p:nvSpPr>
-        <p:spPr>
-          <a:xfrm>
-            <a:off x="9058656" y="2084831"/>
-            <a:ext cx="1176527" cy="658368"/>
-          </a:xfrm>
-          <a:prstGeom prst="rect">
-            <a:avLst/>
-          </a:prstGeom>
-          <a:noFill/>
-        </p:spPr>
-        <p:txBody>
-          <a:bodyPr wrap="square" lIns="18288" rIns="18288" tIns="10972" bIns="10972" anchor="ctr">
-            <a:spAutoFit/>
-          </a:bodyPr>
-          <a:lstStyle/>
-          <a:p>
-            <a:pPr algn="ctr">
-              <a:spcAft>
-                <a:spcPts val="0"/>
-              </a:spcAft>
-            </a:pPr>
-            <a:r>
-              <a:rPr sz="950" b="0" i="0">
-                <a:solidFill>
-                  <a:srgbClr val="111111"/>
-                </a:solidFill>
-                <a:latin typeface="Meiryo"/>
-                <a:ea typeface="Meiryo"/>
-                <a:cs typeface="Meiryo"/>
-              </a:rPr>
-              <a:t>本物の
-OpenMPI
-np=2</a:t>
-            </a:r>
-          </a:p>
-        </p:txBody>
-      </p:sp>
-      <p:sp>
-        <p:nvSpPr>
-          <p:cNvPr id="30" name="Rectangle 29"/>
-          <p:cNvSpPr/>
-          <p:nvPr/>
-        </p:nvSpPr>
-        <p:spPr>
-          <a:xfrm>
-            <a:off x="10326624" y="2084831"/>
-            <a:ext cx="1176527" cy="658368"/>
-          </a:xfrm>
-          <a:prstGeom prst="rect">
-            <a:avLst/>
-          </a:prstGeom>
-          <a:solidFill>
-            <a:srgbClr val="FFFFFF"/>
-          </a:solidFill>
-          <a:ln w="9525">
-            <a:solidFill>
-              <a:srgbClr val="9E9E9E"/>
-            </a:solidFill>
-          </a:ln>
-          <a:effectLst/>
-        </p:spPr>
-        <p:style>
-          <a:lnRef idx="1">
-            <a:schemeClr val="accent1"/>
-          </a:lnRef>
-          <a:fillRef idx="3">
-            <a:schemeClr val="accent1"/>
-          </a:fillRef>
-          <a:effectRef idx="2">
-            <a:schemeClr val="accent1"/>
-          </a:effectRef>
-          <a:fontRef idx="minor">
-            <a:schemeClr val="lt1"/>
-          </a:fontRef>
-        </p:style>
-        <p:txBody>
-          <a:bodyPr rtlCol="0" anchor="ctr"/>
-          <a:lstStyle/>
-          <a:p/>
-        </p:txBody>
-      </p:sp>
-      <p:sp>
-        <p:nvSpPr>
-          <p:cNvPr id="31" name="TextBox 30"/>
-          <p:cNvSpPr txBox="1"/>
-          <p:nvPr/>
-        </p:nvSpPr>
-        <p:spPr>
-          <a:xfrm>
-            <a:off x="10326624" y="2084831"/>
-            <a:ext cx="1176527" cy="658368"/>
-          </a:xfrm>
-          <a:prstGeom prst="rect">
-            <a:avLst/>
-          </a:prstGeom>
-          <a:noFill/>
-        </p:spPr>
-        <p:txBody>
-          <a:bodyPr wrap="square" lIns="18288" rIns="18288" tIns="10972" bIns="10972" anchor="ctr">
-            <a:spAutoFit/>
-          </a:bodyPr>
-          <a:lstStyle/>
-          <a:p>
-            <a:pPr algn="ctr">
-              <a:spcAft>
-                <a:spcPts val="0"/>
-              </a:spcAft>
-            </a:pPr>
-            <a:r>
-              <a:rPr sz="950" b="0" i="0">
-                <a:solidFill>
-                  <a:srgbClr val="111111"/>
-                </a:solidFill>
-                <a:latin typeface="Meiryo"/>
-                <a:ea typeface="Meiryo"/>
-                <a:cs typeface="Meiryo"/>
-              </a:rPr>
-              <a:t>自作
-アダプタ
-(逐次)</a:t>
-            </a:r>
-          </a:p>
-        </p:txBody>
-      </p:sp>
-      <p:sp>
-        <p:nvSpPr>
-          <p:cNvPr id="32" name="Rectangle 31"/>
-          <p:cNvSpPr/>
-          <p:nvPr/>
-        </p:nvSpPr>
-        <p:spPr>
-          <a:xfrm>
-            <a:off x="7790688" y="2834640"/>
-            <a:ext cx="3712463" cy="365760"/>
-          </a:xfrm>
-          <a:prstGeom prst="rect">
-            <a:avLst/>
-          </a:prstGeom>
-          <a:solidFill>
-            <a:srgbClr val="E8E8E8"/>
-          </a:solidFill>
-          <a:ln w="9525">
-            <a:solidFill>
-              <a:srgbClr val="9E9E9E"/>
-            </a:solidFill>
-          </a:ln>
-          <a:effectLst/>
-        </p:spPr>
-        <p:style>
-          <a:lnRef idx="1">
-            <a:schemeClr val="accent1"/>
-          </a:lnRef>
-          <a:fillRef idx="3">
-            <a:schemeClr val="accent1"/>
-          </a:fillRef>
-          <a:effectRef idx="2">
-            <a:schemeClr val="accent1"/>
-          </a:effectRef>
-          <a:fontRef idx="minor">
-            <a:schemeClr val="lt1"/>
-          </a:fontRef>
-        </p:style>
-        <p:txBody>
-          <a:bodyPr rtlCol="0" anchor="ctr"/>
-          <a:lstStyle/>
-          <a:p/>
-        </p:txBody>
-      </p:sp>
-      <p:sp>
-        <p:nvSpPr>
-          <p:cNvPr id="33" name="TextBox 32"/>
-          <p:cNvSpPr txBox="1"/>
-          <p:nvPr/>
-        </p:nvSpPr>
-        <p:spPr>
-          <a:xfrm>
-            <a:off x="7790688" y="2834640"/>
-            <a:ext cx="3712463" cy="365760"/>
-          </a:xfrm>
-          <a:prstGeom prst="rect">
-            <a:avLst/>
-          </a:prstGeom>
-          <a:noFill/>
-        </p:spPr>
-        <p:txBody>
-          <a:bodyPr wrap="square" lIns="27432" rIns="27432" tIns="16459" bIns="16459" anchor="ctr">
-            <a:spAutoFit/>
-          </a:bodyPr>
-          <a:lstStyle/>
-          <a:p>
-            <a:pPr algn="ctr">
-              <a:spcAft>
-                <a:spcPts val="400"/>
-              </a:spcAft>
-            </a:pPr>
-            <a:r>
-              <a:rPr sz="1150" b="1" i="0">
-                <a:solidFill>
-                  <a:srgbClr val="111111"/>
-                </a:solidFill>
-                <a:latin typeface="Meiryo"/>
-                <a:ea typeface="Meiryo"/>
-                <a:cs typeface="Meiryo"/>
-              </a:rPr>
-              <a:t>3 経路とも checksum=32768.000000 PASS</a:t>
-            </a:r>
-          </a:p>
-        </p:txBody>
-      </p:sp>
-      <p:sp>
-        <p:nvSpPr>
-          <p:cNvPr id="34" name="TextBox 33"/>
-          <p:cNvSpPr txBox="1"/>
-          <p:nvPr/>
-        </p:nvSpPr>
-        <p:spPr>
-          <a:xfrm>
-            <a:off x="7735824" y="3236976"/>
-            <a:ext cx="3822191" cy="347472"/>
+            <a:off x="502920" y="6199632"/>
+            <a:ext cx="11185855" cy="292608"/>
           </a:xfrm>
           <a:prstGeom prst="rect">
             <a:avLst/>
@@ -21699,13 +21286,13 @@
           </a:bodyPr>
           <a:lstStyle/>
           <a:p>
-            <a:pPr algn="ctr">
+            <a:pPr algn="l">
               <a:spcAft>
                 <a:spcPts val="400"/>
               </a:spcAft>
             </a:pPr>
             <a:r>
-              <a:rPr sz="1000" b="0" i="0">
+              <a:rPr sz="1150" b="0" i="0">
                 <a:solidFill>
                   <a:srgbClr val="5A5A5A"/>
                 </a:solidFill>
@@ -21713,256 +21300,14 @@
                 <a:ea typeface="Meiryo"/>
                 <a:cs typeface="Meiryo"/>
               </a:rPr>
-              <a:t>2 ランクのアダプタ経路はホストの pthread ハーネス (1,788 checks) が担保</a:t>
-            </a:r>
-          </a:p>
-        </p:txBody>
-      </p:sp>
-      <p:sp>
-        <p:nvSpPr>
-          <p:cNvPr id="35" name="Rectangle 34"/>
-          <p:cNvSpPr/>
-          <p:nvPr/>
-        </p:nvSpPr>
-        <p:spPr>
-          <a:xfrm>
-            <a:off x="7607808" y="3767328"/>
-            <a:ext cx="4078224" cy="1975104"/>
-          </a:xfrm>
-          <a:prstGeom prst="rect">
-            <a:avLst/>
-          </a:prstGeom>
-          <a:solidFill>
-            <a:srgbClr val="F4F4F4"/>
-          </a:solidFill>
-          <a:ln w="9525">
-            <a:solidFill>
-              <a:srgbClr val="9E9E9E"/>
-            </a:solidFill>
-          </a:ln>
-          <a:effectLst/>
-        </p:spPr>
-        <p:style>
-          <a:lnRef idx="1">
-            <a:schemeClr val="accent1"/>
-          </a:lnRef>
-          <a:fillRef idx="3">
-            <a:schemeClr val="accent1"/>
-          </a:fillRef>
-          <a:effectRef idx="2">
-            <a:schemeClr val="accent1"/>
-          </a:effectRef>
-          <a:fontRef idx="minor">
-            <a:schemeClr val="lt1"/>
-          </a:fontRef>
-        </p:style>
-        <p:txBody>
-          <a:bodyPr rtlCol="0" anchor="ctr"/>
-          <a:lstStyle/>
-          <a:p/>
-        </p:txBody>
-      </p:sp>
-      <p:sp>
-        <p:nvSpPr>
-          <p:cNvPr id="36" name="Rectangle 35"/>
-          <p:cNvSpPr/>
-          <p:nvPr/>
-        </p:nvSpPr>
-        <p:spPr>
-          <a:xfrm>
-            <a:off x="7607808" y="3767328"/>
-            <a:ext cx="4078224" cy="384048"/>
-          </a:xfrm>
-          <a:prstGeom prst="rect">
-            <a:avLst/>
-          </a:prstGeom>
-          <a:solidFill>
-            <a:srgbClr val="E8E8E8"/>
-          </a:solidFill>
-          <a:ln w="9525">
-            <a:solidFill>
-              <a:srgbClr val="9E9E9E"/>
-            </a:solidFill>
-          </a:ln>
-          <a:effectLst/>
-        </p:spPr>
-        <p:style>
-          <a:lnRef idx="1">
-            <a:schemeClr val="accent1"/>
-          </a:lnRef>
-          <a:fillRef idx="3">
-            <a:schemeClr val="accent1"/>
-          </a:fillRef>
-          <a:effectRef idx="2">
-            <a:schemeClr val="accent1"/>
-          </a:effectRef>
-          <a:fontRef idx="minor">
-            <a:schemeClr val="lt1"/>
-          </a:fontRef>
-        </p:style>
-        <p:txBody>
-          <a:bodyPr rtlCol="0" anchor="ctr"/>
-          <a:lstStyle/>
-          <a:p/>
-        </p:txBody>
-      </p:sp>
-      <p:sp>
-        <p:nvSpPr>
-          <p:cNvPr id="37" name="TextBox 36"/>
-          <p:cNvSpPr txBox="1"/>
-          <p:nvPr/>
-        </p:nvSpPr>
-        <p:spPr>
-          <a:xfrm>
-            <a:off x="7607808" y="3767328"/>
-            <a:ext cx="4078224" cy="384048"/>
-          </a:xfrm>
-          <a:prstGeom prst="rect">
-            <a:avLst/>
-          </a:prstGeom>
-          <a:noFill/>
-        </p:spPr>
-        <p:txBody>
-          <a:bodyPr wrap="square" lIns="109728" rIns="109728" tIns="65836" bIns="65836" anchor="ctr">
-            <a:spAutoFit/>
-          </a:bodyPr>
-          <a:lstStyle/>
-          <a:p>
-            <a:pPr algn="l">
-              <a:spcAft>
-                <a:spcPts val="400"/>
-              </a:spcAft>
-            </a:pPr>
-            <a:r>
-              <a:rPr sz="1400" b="1" i="0">
-                <a:solidFill>
-                  <a:srgbClr val="111111"/>
-                </a:solidFill>
-                <a:latin typeface="Meiryo"/>
-                <a:ea typeface="Meiryo"/>
-                <a:cs typeface="Meiryo"/>
-              </a:rPr>
-              <a:t>SDK に合わせるしかない制約</a:t>
-            </a:r>
-          </a:p>
-        </p:txBody>
-      </p:sp>
-      <p:sp>
-        <p:nvSpPr>
-          <p:cNvPr id="38" name="TextBox 37"/>
-          <p:cNvSpPr txBox="1"/>
-          <p:nvPr/>
-        </p:nvSpPr>
-        <p:spPr>
-          <a:xfrm>
-            <a:off x="7607808" y="4151376"/>
-            <a:ext cx="4078224" cy="1591056"/>
-          </a:xfrm>
-          <a:prstGeom prst="rect">
-            <a:avLst/>
-          </a:prstGeom>
-          <a:noFill/>
-        </p:spPr>
-        <p:txBody>
-          <a:bodyPr wrap="square" lIns="109728" rIns="109728" tIns="65836" bIns="65836" anchor="t">
-            <a:spAutoFit/>
-          </a:bodyPr>
-          <a:lstStyle/>
-          <a:p>
-            <a:pPr algn="l">
-              <a:spcAft>
-                <a:spcPts val="500"/>
-              </a:spcAft>
-            </a:pPr>
-            <a:r>
-              <a:rPr sz="1200" b="0" i="0">
-                <a:solidFill>
-                  <a:srgbClr val="111111"/>
-                </a:solidFill>
-                <a:latin typeface="Meiryo"/>
-                <a:ea typeface="Meiryo"/>
-                <a:cs typeface="Meiryo"/>
-              </a:rPr>
-              <a:t>・ -std=gnu++98 / -fno-exceptions / -fno-rtti</a:t>
-            </a:r>
-          </a:p>
-          <a:p>
-            <a:pPr algn="l">
-              <a:spcAft>
-                <a:spcPts val="700"/>
-              </a:spcAft>
-            </a:pPr>
-            <a:r>
-              <a:rPr sz="1100" b="0" i="0">
-                <a:solidFill>
-                  <a:srgbClr val="5A5A5A"/>
-                </a:solidFill>
-                <a:latin typeface="Meiryo"/>
-                <a:ea typeface="Meiryo"/>
-                <a:cs typeface="Meiryo"/>
-              </a:rPr>
-              <a:t>   → C++11 以降が使えない</a:t>
-            </a:r>
-          </a:p>
-          <a:p>
-            <a:pPr algn="l">
-              <a:spcAft>
-                <a:spcPts val="500"/>
-              </a:spcAft>
-            </a:pPr>
-            <a:r>
-              <a:rPr sz="1200" b="0" i="0">
-                <a:solidFill>
-                  <a:srgbClr val="111111"/>
-                </a:solidFill>
-                <a:latin typeface="Meiryo"/>
-                <a:ea typeface="Meiryo"/>
-                <a:cs typeface="Meiryo"/>
-              </a:rPr>
-              <a:t>・ ヒープ禁止・STL 禁止・静的バッファのみ</a:t>
-            </a:r>
-          </a:p>
-          <a:p>
-            <a:pPr algn="l">
-              <a:spcAft>
-                <a:spcPts val="500"/>
-              </a:spcAft>
-            </a:pPr>
-            <a:r>
-              <a:rPr sz="1200" b="0" i="0">
-                <a:solidFill>
-                  <a:srgbClr val="111111"/>
-                </a:solidFill>
-                <a:latin typeface="Meiryo"/>
-                <a:ea typeface="Meiryo"/>
-                <a:cs typeface="Meiryo"/>
-              </a:rPr>
-              <a:t>・ double 禁止 (単精度 FPU のみ)。リテラルは 1.0f</a:t>
-            </a:r>
-          </a:p>
-          <a:p>
-            <a:pPr algn="l">
-              <a:spcAft>
-                <a:spcPts val="0"/>
-              </a:spcAft>
-            </a:pPr>
-            <a:r>
-              <a:rPr sz="1200" b="0" i="0">
-                <a:solidFill>
-                  <a:srgbClr val="111111"/>
-                </a:solidFill>
-                <a:latin typeface="Meiryo"/>
-                <a:ea typeface="Meiryo"/>
-                <a:cs typeface="Meiryo"/>
-              </a:rPr>
-              <a:t>・ make check98 で機械的に担保</a:t>
-            </a:r>
-          </a:p>
-        </p:txBody>
-      </p:sp>
-      <p:sp>
-        <p:nvSpPr>
-          <p:cNvPr id="39" name="TextBox 38"/>
+              <a:t>規模: adapters 926 行 / firmware 統合 1,656 行 / tests 1,846 行 / 設計ドキュメント 2,643 行</a:t>
+            </a:r>
+          </a:p>
+        </p:txBody>
+      </p:sp>
+      <p:sp>
+        <p:nvSpPr>
+          <p:cNvPr id="25" name="TextBox 24"/>
           <p:cNvSpPr txBox="1"/>
           <p:nvPr/>
         </p:nvSpPr>

--- a/slides/lt-ear-parallel.pptx
+++ b/slides/lt-ear-parallel.pptx
@@ -23215,7 +23215,7 @@
         <p:spPr>
           <a:xfrm>
             <a:off x="502920" y="1133856"/>
-            <a:ext cx="2659303" cy="2331720"/>
+            <a:ext cx="2659303" cy="2103120"/>
           </a:xfrm>
           <a:prstGeom prst="rect">
             <a:avLst/>
@@ -23385,7 +23385,7 @@
         <p:spPr>
           <a:xfrm>
             <a:off x="576072" y="1719072"/>
-            <a:ext cx="2512999" cy="1691640"/>
+            <a:ext cx="2512999" cy="1481328"/>
           </a:xfrm>
           <a:prstGeom prst="rect">
             <a:avLst/>
@@ -23498,7 +23498,7 @@
         <p:spPr>
           <a:xfrm>
             <a:off x="3345103" y="1133856"/>
-            <a:ext cx="2659303" cy="2331720"/>
+            <a:ext cx="2659303" cy="2103120"/>
           </a:xfrm>
           <a:prstGeom prst="rect">
             <a:avLst/>
@@ -23668,7 +23668,7 @@
         <p:spPr>
           <a:xfrm>
             <a:off x="3418255" y="1719072"/>
-            <a:ext cx="2512999" cy="1691640"/>
+            <a:ext cx="2512999" cy="1481328"/>
           </a:xfrm>
           <a:prstGeom prst="rect">
             <a:avLst/>
@@ -23781,7 +23781,7 @@
         <p:spPr>
           <a:xfrm>
             <a:off x="6187287" y="1133856"/>
-            <a:ext cx="2659303" cy="2331720"/>
+            <a:ext cx="2659303" cy="2103120"/>
           </a:xfrm>
           <a:prstGeom prst="rect">
             <a:avLst/>
@@ -23951,7 +23951,7 @@
         <p:spPr>
           <a:xfrm>
             <a:off x="6260439" y="1719072"/>
-            <a:ext cx="2512999" cy="1691640"/>
+            <a:ext cx="2512999" cy="1481328"/>
           </a:xfrm>
           <a:prstGeom prst="rect">
             <a:avLst/>
@@ -24064,7 +24064,7 @@
         <p:spPr>
           <a:xfrm>
             <a:off x="9029471" y="1133856"/>
-            <a:ext cx="2659303" cy="2331720"/>
+            <a:ext cx="2659303" cy="2103120"/>
           </a:xfrm>
           <a:prstGeom prst="rect">
             <a:avLst/>
@@ -24234,7 +24234,7 @@
         <p:spPr>
           <a:xfrm>
             <a:off x="9102623" y="1719072"/>
-            <a:ext cx="2512999" cy="1691640"/>
+            <a:ext cx="2512999" cy="1481328"/>
           </a:xfrm>
           <a:prstGeom prst="rect">
             <a:avLst/>
@@ -24346,8 +24346,465 @@
         </p:nvSpPr>
         <p:spPr>
           <a:xfrm>
-            <a:off x="502920" y="3675887"/>
-            <a:ext cx="11185855" cy="1883664"/>
+            <a:off x="502920" y="3346704"/>
+            <a:ext cx="11185855" cy="969264"/>
+          </a:xfrm>
+          <a:prstGeom prst="rect">
+            <a:avLst/>
+          </a:prstGeom>
+          <a:solidFill>
+            <a:srgbClr val="F3EFF9"/>
+          </a:solidFill>
+          <a:ln w="9525">
+            <a:solidFill>
+              <a:srgbClr val="9E9E9E"/>
+            </a:solidFill>
+          </a:ln>
+          <a:effectLst/>
+        </p:spPr>
+        <p:style>
+          <a:lnRef idx="1">
+            <a:schemeClr val="accent1"/>
+          </a:lnRef>
+          <a:fillRef idx="3">
+            <a:schemeClr val="accent1"/>
+          </a:fillRef>
+          <a:effectRef idx="2">
+            <a:schemeClr val="accent1"/>
+          </a:effectRef>
+          <a:fontRef idx="minor">
+            <a:schemeClr val="lt1"/>
+          </a:fontRef>
+        </p:style>
+        <p:txBody>
+          <a:bodyPr rtlCol="0" anchor="ctr"/>
+          <a:lstStyle/>
+          <a:p/>
+        </p:txBody>
+      </p:sp>
+      <p:sp>
+        <p:nvSpPr>
+          <p:cNvPr id="27" name="Rectangle 26"/>
+          <p:cNvSpPr/>
+          <p:nvPr/>
+        </p:nvSpPr>
+        <p:spPr>
+          <a:xfrm>
+            <a:off x="502920" y="3346704"/>
+            <a:ext cx="11185855" cy="384048"/>
+          </a:xfrm>
+          <a:prstGeom prst="rect">
+            <a:avLst/>
+          </a:prstGeom>
+          <a:solidFill>
+            <a:srgbClr val="E3DCF2"/>
+          </a:solidFill>
+          <a:ln w="9525">
+            <a:solidFill>
+              <a:srgbClr val="9E9E9E"/>
+            </a:solidFill>
+          </a:ln>
+          <a:effectLst/>
+        </p:spPr>
+        <p:style>
+          <a:lnRef idx="1">
+            <a:schemeClr val="accent1"/>
+          </a:lnRef>
+          <a:fillRef idx="3">
+            <a:schemeClr val="accent1"/>
+          </a:fillRef>
+          <a:effectRef idx="2">
+            <a:schemeClr val="accent1"/>
+          </a:effectRef>
+          <a:fontRef idx="minor">
+            <a:schemeClr val="lt1"/>
+          </a:fontRef>
+        </p:style>
+        <p:txBody>
+          <a:bodyPr rtlCol="0" anchor="ctr"/>
+          <a:lstStyle/>
+          <a:p/>
+        </p:txBody>
+      </p:sp>
+      <p:sp>
+        <p:nvSpPr>
+          <p:cNvPr id="28" name="TextBox 27"/>
+          <p:cNvSpPr txBox="1"/>
+          <p:nvPr/>
+        </p:nvSpPr>
+        <p:spPr>
+          <a:xfrm>
+            <a:off x="594360" y="3364992"/>
+            <a:ext cx="420624" cy="347472"/>
+          </a:xfrm>
+          <a:prstGeom prst="rect">
+            <a:avLst/>
+          </a:prstGeom>
+          <a:noFill/>
+        </p:spPr>
+        <p:txBody>
+          <a:bodyPr wrap="square" lIns="0" rIns="0" tIns="0" bIns="0" anchor="t">
+            <a:spAutoFit/>
+          </a:bodyPr>
+          <a:lstStyle/>
+          <a:p>
+            <a:pPr algn="l">
+              <a:spcAft>
+                <a:spcPts val="400"/>
+              </a:spcAft>
+            </a:pPr>
+            <a:r>
+              <a:rPr sz="1700" b="0" i="0">
+                <a:solidFill>
+                  <a:srgbClr val="111111"/>
+                </a:solidFill>
+                <a:latin typeface="Meiryo"/>
+                <a:ea typeface="Meiryo"/>
+                <a:cs typeface="Meiryo"/>
+              </a:rPr>
+              <a:t>🤖</a:t>
+            </a:r>
+          </a:p>
+        </p:txBody>
+      </p:sp>
+      <p:sp>
+        <p:nvSpPr>
+          <p:cNvPr id="29" name="TextBox 28"/>
+          <p:cNvSpPr txBox="1"/>
+          <p:nvPr/>
+        </p:nvSpPr>
+        <p:spPr>
+          <a:xfrm>
+            <a:off x="1033271" y="3346704"/>
+            <a:ext cx="5486400" cy="384048"/>
+          </a:xfrm>
+          <a:prstGeom prst="rect">
+            <a:avLst/>
+          </a:prstGeom>
+          <a:noFill/>
+        </p:spPr>
+        <p:txBody>
+          <a:bodyPr wrap="square" lIns="0" rIns="0" tIns="0" bIns="0" anchor="ctr">
+            <a:spAutoFit/>
+          </a:bodyPr>
+          <a:lstStyle/>
+          <a:p>
+            <a:pPr algn="l">
+              <a:spcAft>
+                <a:spcPts val="400"/>
+              </a:spcAft>
+            </a:pPr>
+            <a:r>
+              <a:rPr sz="1300" b="1" i="0">
+                <a:solidFill>
+                  <a:srgbClr val="111111"/>
+                </a:solidFill>
+                <a:latin typeface="Meiryo"/>
+                <a:ea typeface="Meiryo"/>
+                <a:cs typeface="Meiryo"/>
+              </a:rPr>
+              <a:t>Claude Code — 4 つの世界を横断して回す</a:t>
+            </a:r>
+          </a:p>
+        </p:txBody>
+      </p:sp>
+      <p:sp>
+        <p:nvSpPr>
+          <p:cNvPr id="30" name="TextBox 29"/>
+          <p:cNvSpPr txBox="1"/>
+          <p:nvPr/>
+        </p:nvSpPr>
+        <p:spPr>
+          <a:xfrm>
+            <a:off x="6933895" y="3346704"/>
+            <a:ext cx="4754880" cy="384048"/>
+          </a:xfrm>
+          <a:prstGeom prst="rect">
+            <a:avLst/>
+          </a:prstGeom>
+          <a:noFill/>
+        </p:spPr>
+        <p:txBody>
+          <a:bodyPr wrap="square" tIns="54864" bIns="54864" anchor="ctr">
+            <a:spAutoFit/>
+          </a:bodyPr>
+          <a:lstStyle/>
+          <a:p>
+            <a:pPr algn="r">
+              <a:spcAft>
+                <a:spcPts val="400"/>
+              </a:spcAft>
+            </a:pPr>
+            <a:r>
+              <a:rPr sz="1050" b="0" i="0">
+                <a:solidFill>
+                  <a:srgbClr val="5A5A5A"/>
+                </a:solidFill>
+                <a:latin typeface="Meiryo"/>
+                <a:ea typeface="Meiryo"/>
+                <a:cs typeface="Meiryo"/>
+              </a:rPr>
+              <a:t>103 コミット中 102 が Co-Authored-By: Claude</a:t>
+            </a:r>
+          </a:p>
+        </p:txBody>
+      </p:sp>
+      <p:sp>
+        <p:nvSpPr>
+          <p:cNvPr id="31" name="TextBox 30"/>
+          <p:cNvSpPr txBox="1"/>
+          <p:nvPr/>
+        </p:nvSpPr>
+        <p:spPr>
+          <a:xfrm>
+            <a:off x="685800" y="3785615"/>
+            <a:ext cx="3484778" cy="237744"/>
+          </a:xfrm>
+          <a:prstGeom prst="rect">
+            <a:avLst/>
+          </a:prstGeom>
+          <a:noFill/>
+        </p:spPr>
+        <p:txBody>
+          <a:bodyPr wrap="square" lIns="0" rIns="0" tIns="0" bIns="0" anchor="t">
+            <a:spAutoFit/>
+          </a:bodyPr>
+          <a:lstStyle/>
+          <a:p>
+            <a:pPr algn="l">
+              <a:spcAft>
+                <a:spcPts val="400"/>
+              </a:spcAft>
+            </a:pPr>
+            <a:r>
+              <a:rPr sz="1050" b="1" i="0">
+                <a:solidFill>
+                  <a:srgbClr val="111111"/>
+                </a:solidFill>
+                <a:latin typeface="Meiryo"/>
+                <a:ea typeface="Meiryo"/>
+                <a:cs typeface="Meiryo"/>
+              </a:rPr>
+              <a:t>・ 設計・SDK 調査</a:t>
+            </a:r>
+          </a:p>
+        </p:txBody>
+      </p:sp>
+      <p:sp>
+        <p:nvSpPr>
+          <p:cNvPr id="32" name="TextBox 31"/>
+          <p:cNvSpPr txBox="1"/>
+          <p:nvPr/>
+        </p:nvSpPr>
+        <p:spPr>
+          <a:xfrm>
+            <a:off x="832104" y="4023360"/>
+            <a:ext cx="3338474" cy="256032"/>
+          </a:xfrm>
+          <a:prstGeom prst="rect">
+            <a:avLst/>
+          </a:prstGeom>
+          <a:noFill/>
+        </p:spPr>
+        <p:txBody>
+          <a:bodyPr wrap="square" lIns="0" rIns="0" tIns="0" bIns="0" anchor="t">
+            <a:spAutoFit/>
+          </a:bodyPr>
+          <a:lstStyle/>
+          <a:p>
+            <a:pPr algn="l">
+              <a:spcAft>
+                <a:spcPts val="400"/>
+              </a:spcAft>
+            </a:pPr>
+            <a:r>
+              <a:rPr sz="950" b="0" i="0">
+                <a:solidFill>
+                  <a:srgbClr val="5A5A5A"/>
+                </a:solidFill>
+                <a:latin typeface="Meiryo"/>
+                <a:ea typeface="Meiryo"/>
+                <a:cs typeface="Meiryo"/>
+              </a:rPr>
+              <a:t>プリビルト .a の逆アセンブルと nm でのシンボル解決</a:t>
+            </a:r>
+          </a:p>
+        </p:txBody>
+      </p:sp>
+      <p:sp>
+        <p:nvSpPr>
+          <p:cNvPr id="33" name="TextBox 32"/>
+          <p:cNvSpPr txBox="1"/>
+          <p:nvPr/>
+        </p:nvSpPr>
+        <p:spPr>
+          <a:xfrm>
+            <a:off x="4353458" y="3785615"/>
+            <a:ext cx="3484778" cy="237744"/>
+          </a:xfrm>
+          <a:prstGeom prst="rect">
+            <a:avLst/>
+          </a:prstGeom>
+          <a:noFill/>
+        </p:spPr>
+        <p:txBody>
+          <a:bodyPr wrap="square" lIns="0" rIns="0" tIns="0" bIns="0" anchor="t">
+            <a:spAutoFit/>
+          </a:bodyPr>
+          <a:lstStyle/>
+          <a:p>
+            <a:pPr algn="l">
+              <a:spcAft>
+                <a:spcPts val="400"/>
+              </a:spcAft>
+            </a:pPr>
+            <a:r>
+              <a:rPr sz="1050" b="1" i="0">
+                <a:solidFill>
+                  <a:srgbClr val="111111"/>
+                </a:solidFill>
+                <a:latin typeface="Meiryo"/>
+                <a:ea typeface="Meiryo"/>
+                <a:cs typeface="Meiryo"/>
+              </a:rPr>
+              <a:t>・ TDD の運用</a:t>
+            </a:r>
+          </a:p>
+        </p:txBody>
+      </p:sp>
+      <p:sp>
+        <p:nvSpPr>
+          <p:cNvPr id="34" name="TextBox 33"/>
+          <p:cNvSpPr txBox="1"/>
+          <p:nvPr/>
+        </p:nvSpPr>
+        <p:spPr>
+          <a:xfrm>
+            <a:off x="4499762" y="4023360"/>
+            <a:ext cx="3338474" cy="256032"/>
+          </a:xfrm>
+          <a:prstGeom prst="rect">
+            <a:avLst/>
+          </a:prstGeom>
+          <a:noFill/>
+        </p:spPr>
+        <p:txBody>
+          <a:bodyPr wrap="square" lIns="0" rIns="0" tIns="0" bIns="0" anchor="t">
+            <a:spAutoFit/>
+          </a:bodyPr>
+          <a:lstStyle/>
+          <a:p>
+            <a:pPr algn="l">
+              <a:spcAft>
+                <a:spcPts val="400"/>
+              </a:spcAft>
+            </a:pPr>
+            <a:r>
+              <a:rPr sz="950" b="0" i="0">
+                <a:solidFill>
+                  <a:srgbClr val="5A5A5A"/>
+                </a:solidFill>
+                <a:latin typeface="Meiryo"/>
+                <a:ea typeface="Meiryo"/>
+                <a:cs typeface="Meiryo"/>
+              </a:rPr>
+              <a:t>Red のテストは本体、Green の実装はサブエージェントへ</a:t>
+            </a:r>
+          </a:p>
+        </p:txBody>
+      </p:sp>
+      <p:sp>
+        <p:nvSpPr>
+          <p:cNvPr id="35" name="TextBox 34"/>
+          <p:cNvSpPr txBox="1"/>
+          <p:nvPr/>
+        </p:nvSpPr>
+        <p:spPr>
+          <a:xfrm>
+            <a:off x="8021116" y="3785615"/>
+            <a:ext cx="3484778" cy="237744"/>
+          </a:xfrm>
+          <a:prstGeom prst="rect">
+            <a:avLst/>
+          </a:prstGeom>
+          <a:noFill/>
+        </p:spPr>
+        <p:txBody>
+          <a:bodyPr wrap="square" lIns="0" rIns="0" tIns="0" bIns="0" anchor="t">
+            <a:spAutoFit/>
+          </a:bodyPr>
+          <a:lstStyle/>
+          <a:p>
+            <a:pPr algn="l">
+              <a:spcAft>
+                <a:spcPts val="400"/>
+              </a:spcAft>
+            </a:pPr>
+            <a:r>
+              <a:rPr sz="1050" b="1" i="0">
+                <a:solidFill>
+                  <a:srgbClr val="111111"/>
+                </a:solidFill>
+                <a:latin typeface="Meiryo"/>
+                <a:ea typeface="Meiryo"/>
+                <a:cs typeface="Meiryo"/>
+              </a:rPr>
+              <a:t>・ 実機ランの監視</a:t>
+            </a:r>
+          </a:p>
+        </p:txBody>
+      </p:sp>
+      <p:sp>
+        <p:nvSpPr>
+          <p:cNvPr id="36" name="TextBox 35"/>
+          <p:cNvSpPr txBox="1"/>
+          <p:nvPr/>
+        </p:nvSpPr>
+        <p:spPr>
+          <a:xfrm>
+            <a:off x="8167420" y="4023360"/>
+            <a:ext cx="3338474" cy="256032"/>
+          </a:xfrm>
+          <a:prstGeom prst="rect">
+            <a:avLst/>
+          </a:prstGeom>
+          <a:noFill/>
+        </p:spPr>
+        <p:txBody>
+          <a:bodyPr wrap="square" lIns="0" rIns="0" tIns="0" bIns="0" anchor="t">
+            <a:spAutoFit/>
+          </a:bodyPr>
+          <a:lstStyle/>
+          <a:p>
+            <a:pPr algn="l">
+              <a:spcAft>
+                <a:spcPts val="400"/>
+              </a:spcAft>
+            </a:pPr>
+            <a:r>
+              <a:rPr sz="950" b="0" i="0">
+                <a:solidFill>
+                  <a:srgbClr val="5A5A5A"/>
+                </a:solidFill>
+                <a:latin typeface="Meiryo"/>
+                <a:ea typeface="Meiryo"/>
+                <a:cs typeface="Meiryo"/>
+              </a:rPr>
+              <a:t>UART / SPP を監視し、結果を設計ドキュメントに反映</a:t>
+            </a:r>
+          </a:p>
+        </p:txBody>
+      </p:sp>
+      <p:sp>
+        <p:nvSpPr>
+          <p:cNvPr id="37" name="Rectangle 36"/>
+          <p:cNvSpPr/>
+          <p:nvPr/>
+        </p:nvSpPr>
+        <p:spPr>
+          <a:xfrm>
+            <a:off x="502920" y="4462272"/>
+            <a:ext cx="11185855" cy="1554480"/>
           </a:xfrm>
           <a:prstGeom prst="rect">
             <a:avLst/>
@@ -24384,14 +24841,14 @@
       </p:sp>
       <p:sp>
         <p:nvSpPr>
-          <p:cNvPr id="27" name="Rectangle 26"/>
+          <p:cNvPr id="38" name="Rectangle 37"/>
           <p:cNvSpPr/>
           <p:nvPr/>
         </p:nvSpPr>
         <p:spPr>
           <a:xfrm>
-            <a:off x="502920" y="3675887"/>
-            <a:ext cx="11185855" cy="402336"/>
+            <a:off x="502920" y="4462272"/>
+            <a:ext cx="11185855" cy="384048"/>
           </a:xfrm>
           <a:prstGeom prst="rect">
             <a:avLst/>
@@ -24428,14 +24885,14 @@
       </p:sp>
       <p:sp>
         <p:nvSpPr>
-          <p:cNvPr id="28" name="TextBox 27"/>
+          <p:cNvPr id="39" name="TextBox 38"/>
           <p:cNvSpPr txBox="1"/>
           <p:nvPr/>
         </p:nvSpPr>
         <p:spPr>
           <a:xfrm>
-            <a:off x="502920" y="3675887"/>
-            <a:ext cx="11185855" cy="402336"/>
+            <a:off x="502920" y="4462272"/>
+            <a:ext cx="11185855" cy="384048"/>
           </a:xfrm>
           <a:prstGeom prst="rect">
             <a:avLst/>
@@ -24454,7 +24911,7 @@
               </a:spcAft>
             </a:pPr>
             <a:r>
-              <a:rPr sz="1350" b="1" i="0">
+              <a:rPr sz="1300" b="1" i="0">
                 <a:solidFill>
                   <a:srgbClr val="111111"/>
                 </a:solidFill>
@@ -24469,14 +24926,14 @@
       </p:sp>
       <p:sp>
         <p:nvSpPr>
-          <p:cNvPr id="29" name="Rectangle 28"/>
+          <p:cNvPr id="40" name="Rectangle 39"/>
           <p:cNvSpPr/>
           <p:nvPr/>
         </p:nvSpPr>
         <p:spPr>
           <a:xfrm>
-            <a:off x="777240" y="4261104"/>
-            <a:ext cx="1544269" cy="676656"/>
+            <a:off x="777240" y="4956048"/>
+            <a:ext cx="1544269" cy="566928"/>
           </a:xfrm>
           <a:prstGeom prst="rect">
             <a:avLst/>
@@ -24513,14 +24970,14 @@
       </p:sp>
       <p:sp>
         <p:nvSpPr>
-          <p:cNvPr id="30" name="TextBox 29"/>
+          <p:cNvPr id="41" name="TextBox 40"/>
           <p:cNvSpPr txBox="1"/>
           <p:nvPr/>
         </p:nvSpPr>
         <p:spPr>
           <a:xfrm>
-            <a:off x="777240" y="4261104"/>
-            <a:ext cx="1544269" cy="676656"/>
+            <a:off x="777240" y="4956048"/>
+            <a:ext cx="1544269" cy="566928"/>
           </a:xfrm>
           <a:prstGeom prst="rect">
             <a:avLst/>
@@ -24539,7 +24996,7 @@
               </a:spcAft>
             </a:pPr>
             <a:r>
-              <a:rPr sz="1300" b="1" i="0">
+              <a:rPr sz="1250" b="1" i="0">
                 <a:solidFill>
                   <a:srgbClr val="111111"/>
                 </a:solidFill>
@@ -24554,13 +25011,13 @@
       </p:sp>
       <p:sp>
         <p:nvSpPr>
-          <p:cNvPr id="31" name="Right Arrow 30"/>
+          <p:cNvPr id="42" name="Right Arrow 41"/>
           <p:cNvSpPr/>
           <p:nvPr/>
         </p:nvSpPr>
         <p:spPr>
           <a:xfrm>
-            <a:off x="2339797" y="4462272"/>
+            <a:off x="2339797" y="5102352"/>
             <a:ext cx="237744" cy="274320"/>
           </a:xfrm>
           <a:prstGeom prst="rightArrow">
@@ -24598,14 +25055,14 @@
       </p:sp>
       <p:sp>
         <p:nvSpPr>
-          <p:cNvPr id="32" name="Rectangle 31"/>
+          <p:cNvPr id="43" name="Rectangle 42"/>
           <p:cNvSpPr/>
           <p:nvPr/>
         </p:nvSpPr>
         <p:spPr>
           <a:xfrm>
-            <a:off x="2595829" y="4261104"/>
-            <a:ext cx="1544269" cy="676656"/>
+            <a:off x="2595829" y="4956048"/>
+            <a:ext cx="1544269" cy="566928"/>
           </a:xfrm>
           <a:prstGeom prst="rect">
             <a:avLst/>
@@ -24642,14 +25099,14 @@
       </p:sp>
       <p:sp>
         <p:nvSpPr>
-          <p:cNvPr id="33" name="TextBox 32"/>
+          <p:cNvPr id="44" name="TextBox 43"/>
           <p:cNvSpPr txBox="1"/>
           <p:nvPr/>
         </p:nvSpPr>
         <p:spPr>
           <a:xfrm>
-            <a:off x="2595829" y="4261104"/>
-            <a:ext cx="1544269" cy="676656"/>
+            <a:off x="2595829" y="4956048"/>
+            <a:ext cx="1544269" cy="566928"/>
           </a:xfrm>
           <a:prstGeom prst="rect">
             <a:avLst/>
@@ -24668,7 +25125,7 @@
               </a:spcAft>
             </a:pPr>
             <a:r>
-              <a:rPr sz="1300" b="1" i="0">
+              <a:rPr sz="1250" b="1" i="0">
                 <a:solidFill>
                   <a:srgbClr val="111111"/>
                 </a:solidFill>
@@ -24683,13 +25140,13 @@
       </p:sp>
       <p:sp>
         <p:nvSpPr>
-          <p:cNvPr id="34" name="Right Arrow 33"/>
+          <p:cNvPr id="45" name="Right Arrow 44"/>
           <p:cNvSpPr/>
           <p:nvPr/>
         </p:nvSpPr>
         <p:spPr>
           <a:xfrm>
-            <a:off x="4158386" y="4462272"/>
+            <a:off x="4158386" y="5102352"/>
             <a:ext cx="237744" cy="274320"/>
           </a:xfrm>
           <a:prstGeom prst="rightArrow">
@@ -24727,14 +25184,14 @@
       </p:sp>
       <p:sp>
         <p:nvSpPr>
-          <p:cNvPr id="35" name="Rectangle 34"/>
+          <p:cNvPr id="46" name="Rectangle 45"/>
           <p:cNvSpPr/>
           <p:nvPr/>
         </p:nvSpPr>
         <p:spPr>
           <a:xfrm>
-            <a:off x="4414418" y="4261104"/>
-            <a:ext cx="1544269" cy="676656"/>
+            <a:off x="4414418" y="4956048"/>
+            <a:ext cx="1544269" cy="566928"/>
           </a:xfrm>
           <a:prstGeom prst="rect">
             <a:avLst/>
@@ -24771,14 +25228,14 @@
       </p:sp>
       <p:sp>
         <p:nvSpPr>
-          <p:cNvPr id="36" name="TextBox 35"/>
+          <p:cNvPr id="47" name="TextBox 46"/>
           <p:cNvSpPr txBox="1"/>
           <p:nvPr/>
         </p:nvSpPr>
         <p:spPr>
           <a:xfrm>
-            <a:off x="4414418" y="4261104"/>
-            <a:ext cx="1544269" cy="676656"/>
+            <a:off x="4414418" y="4956048"/>
+            <a:ext cx="1544269" cy="566928"/>
           </a:xfrm>
           <a:prstGeom prst="rect">
             <a:avLst/>
@@ -24797,7 +25254,7 @@
               </a:spcAft>
             </a:pPr>
             <a:r>
-              <a:rPr sz="1300" b="1" i="0">
+              <a:rPr sz="1250" b="1" i="0">
                 <a:solidFill>
                   <a:srgbClr val="111111"/>
                 </a:solidFill>
@@ -24812,13 +25269,13 @@
       </p:sp>
       <p:sp>
         <p:nvSpPr>
-          <p:cNvPr id="37" name="Right Arrow 36"/>
+          <p:cNvPr id="48" name="Right Arrow 47"/>
           <p:cNvSpPr/>
           <p:nvPr/>
         </p:nvSpPr>
         <p:spPr>
           <a:xfrm>
-            <a:off x="5976975" y="4462272"/>
+            <a:off x="5976975" y="5102352"/>
             <a:ext cx="237744" cy="274320"/>
           </a:xfrm>
           <a:prstGeom prst="rightArrow">
@@ -24856,14 +25313,14 @@
       </p:sp>
       <p:sp>
         <p:nvSpPr>
-          <p:cNvPr id="38" name="Rectangle 37"/>
+          <p:cNvPr id="49" name="Rectangle 48"/>
           <p:cNvSpPr/>
           <p:nvPr/>
         </p:nvSpPr>
         <p:spPr>
           <a:xfrm>
-            <a:off x="6233007" y="4261104"/>
-            <a:ext cx="1544269" cy="676656"/>
+            <a:off x="6233007" y="4956048"/>
+            <a:ext cx="1544269" cy="566928"/>
           </a:xfrm>
           <a:prstGeom prst="rect">
             <a:avLst/>
@@ -24900,14 +25357,14 @@
       </p:sp>
       <p:sp>
         <p:nvSpPr>
-          <p:cNvPr id="39" name="TextBox 38"/>
+          <p:cNvPr id="50" name="TextBox 49"/>
           <p:cNvSpPr txBox="1"/>
           <p:nvPr/>
         </p:nvSpPr>
         <p:spPr>
           <a:xfrm>
-            <a:off x="6233007" y="4261104"/>
-            <a:ext cx="1544269" cy="676656"/>
+            <a:off x="6233007" y="4956048"/>
+            <a:ext cx="1544269" cy="566928"/>
           </a:xfrm>
           <a:prstGeom prst="rect">
             <a:avLst/>
@@ -24926,7 +25383,7 @@
               </a:spcAft>
             </a:pPr>
             <a:r>
-              <a:rPr sz="1300" b="1" i="0">
+              <a:rPr sz="1250" b="1" i="0">
                 <a:solidFill>
                   <a:srgbClr val="111111"/>
                 </a:solidFill>
@@ -24941,13 +25398,13 @@
       </p:sp>
       <p:sp>
         <p:nvSpPr>
-          <p:cNvPr id="40" name="Right Arrow 39"/>
+          <p:cNvPr id="51" name="Right Arrow 50"/>
           <p:cNvSpPr/>
           <p:nvPr/>
         </p:nvSpPr>
         <p:spPr>
           <a:xfrm>
-            <a:off x="7795564" y="4462272"/>
+            <a:off x="7795564" y="5102352"/>
             <a:ext cx="237744" cy="274320"/>
           </a:xfrm>
           <a:prstGeom prst="rightArrow">
@@ -24985,14 +25442,14 @@
       </p:sp>
       <p:sp>
         <p:nvSpPr>
-          <p:cNvPr id="41" name="Rectangle 40"/>
+          <p:cNvPr id="52" name="Rectangle 51"/>
           <p:cNvSpPr/>
           <p:nvPr/>
         </p:nvSpPr>
         <p:spPr>
           <a:xfrm>
-            <a:off x="8051596" y="4261104"/>
-            <a:ext cx="1544269" cy="676656"/>
+            <a:off x="8051596" y="4956048"/>
+            <a:ext cx="1544269" cy="566928"/>
           </a:xfrm>
           <a:prstGeom prst="rect">
             <a:avLst/>
@@ -25029,14 +25486,14 @@
       </p:sp>
       <p:sp>
         <p:nvSpPr>
-          <p:cNvPr id="42" name="TextBox 41"/>
+          <p:cNvPr id="53" name="TextBox 52"/>
           <p:cNvSpPr txBox="1"/>
           <p:nvPr/>
         </p:nvSpPr>
         <p:spPr>
           <a:xfrm>
-            <a:off x="8051596" y="4261104"/>
-            <a:ext cx="1544269" cy="676656"/>
+            <a:off x="8051596" y="4956048"/>
+            <a:ext cx="1544269" cy="566928"/>
           </a:xfrm>
           <a:prstGeom prst="rect">
             <a:avLst/>
@@ -25055,7 +25512,7 @@
               </a:spcAft>
             </a:pPr>
             <a:r>
-              <a:rPr sz="1300" b="1" i="0">
+              <a:rPr sz="1250" b="1" i="0">
                 <a:solidFill>
                   <a:srgbClr val="111111"/>
                 </a:solidFill>
@@ -25070,13 +25527,13 @@
       </p:sp>
       <p:sp>
         <p:nvSpPr>
-          <p:cNvPr id="43" name="Right Arrow 42"/>
+          <p:cNvPr id="54" name="Right Arrow 53"/>
           <p:cNvSpPr/>
           <p:nvPr/>
         </p:nvSpPr>
         <p:spPr>
           <a:xfrm>
-            <a:off x="9614154" y="4462272"/>
+            <a:off x="9614154" y="5102352"/>
             <a:ext cx="237744" cy="274320"/>
           </a:xfrm>
           <a:prstGeom prst="rightArrow">
@@ -25114,14 +25571,14 @@
       </p:sp>
       <p:sp>
         <p:nvSpPr>
-          <p:cNvPr id="44" name="Rectangle 43"/>
+          <p:cNvPr id="55" name="Rectangle 54"/>
           <p:cNvSpPr/>
           <p:nvPr/>
         </p:nvSpPr>
         <p:spPr>
           <a:xfrm>
-            <a:off x="9870186" y="4261104"/>
-            <a:ext cx="1544269" cy="676656"/>
+            <a:off x="9870186" y="4956048"/>
+            <a:ext cx="1544269" cy="566928"/>
           </a:xfrm>
           <a:prstGeom prst="rect">
             <a:avLst/>
@@ -25158,14 +25615,14 @@
       </p:sp>
       <p:sp>
         <p:nvSpPr>
-          <p:cNvPr id="45" name="TextBox 44"/>
+          <p:cNvPr id="56" name="TextBox 55"/>
           <p:cNvSpPr txBox="1"/>
           <p:nvPr/>
         </p:nvSpPr>
         <p:spPr>
           <a:xfrm>
-            <a:off x="9870186" y="4261104"/>
-            <a:ext cx="1544269" cy="676656"/>
+            <a:off x="9870186" y="4956048"/>
+            <a:ext cx="1544269" cy="566928"/>
           </a:xfrm>
           <a:prstGeom prst="rect">
             <a:avLst/>
@@ -25184,7 +25641,7 @@
               </a:spcAft>
             </a:pPr>
             <a:r>
-              <a:rPr sz="1300" b="1" i="0">
+              <a:rPr sz="1250" b="1" i="0">
                 <a:solidFill>
                   <a:srgbClr val="111111"/>
                 </a:solidFill>
@@ -25199,14 +25656,14 @@
       </p:sp>
       <p:sp>
         <p:nvSpPr>
-          <p:cNvPr id="46" name="TextBox 45"/>
+          <p:cNvPr id="57" name="TextBox 56"/>
           <p:cNvSpPr txBox="1"/>
           <p:nvPr/>
         </p:nvSpPr>
         <p:spPr>
           <a:xfrm>
-            <a:off x="502920" y="5084064"/>
-            <a:ext cx="11185855" cy="329184"/>
+            <a:off x="502920" y="5614416"/>
+            <a:ext cx="11185855" cy="310896"/>
           </a:xfrm>
           <a:prstGeom prst="rect">
             <a:avLst/>
@@ -25240,14 +25697,14 @@
       </p:sp>
       <p:sp>
         <p:nvSpPr>
-          <p:cNvPr id="47" name="TextBox 46"/>
+          <p:cNvPr id="58" name="TextBox 57"/>
           <p:cNvSpPr txBox="1"/>
           <p:nvPr/>
         </p:nvSpPr>
         <p:spPr>
           <a:xfrm>
-            <a:off x="502920" y="5760720"/>
-            <a:ext cx="11185855" cy="365760"/>
+            <a:off x="502920" y="6089904"/>
+            <a:ext cx="11185855" cy="347472"/>
           </a:xfrm>
           <a:prstGeom prst="rect">
             <a:avLst/>
@@ -25266,7 +25723,7 @@
               </a:spcAft>
             </a:pPr>
             <a:r>
-              <a:rPr sz="1400" b="1" i="0">
+              <a:rPr sz="1350" b="1" i="0">
                 <a:solidFill>
                   <a:srgbClr val="111111"/>
                 </a:solidFill>

--- a/slides/lt-ear-parallel.pptx
+++ b/slides/lt-ear-parallel.pptx
@@ -1497,7 +1497,7 @@
           <a:lstStyle/>
           <a:p>
             <a:r>
-              <a:t>4 つの世界をまたがないと 1 回も試せない、という絵。「WSL の中の Docker の中の GCC で焼いて、Windows の Python で受ける」で笑いが取れる。</a:t>
+              <a:t>4 つの世界をまたがないと 1 回も試せない、という絵。「WSL の中の Docker の中の GCC で焼いて、Windows の Python で受ける」で笑いが取れる。② が緑にならないうちは ④ に進まない — 焼いてから気づくと左右 2 個ぶんやり直し、は口頭で。$480 はセッションログのトークン数 × 公開単価の換算値で、実際の請求額ではない。</a:t>
             </a:r>
           </a:p>
         </p:txBody>
@@ -21867,7 +21867,7 @@
         <p:spPr>
           <a:xfrm>
             <a:off x="502920" y="1133856"/>
-            <a:ext cx="2659303" cy="1956816"/>
+            <a:ext cx="2659303" cy="1847088"/>
           </a:xfrm>
           <a:prstGeom prst="rect">
             <a:avLst/>
@@ -22037,7 +22037,7 @@
         <p:spPr>
           <a:xfrm>
             <a:off x="576072" y="1755648"/>
-            <a:ext cx="2512999" cy="1280160"/>
+            <a:ext cx="2512999" cy="1170432"/>
           </a:xfrm>
           <a:prstGeom prst="rect">
             <a:avLst/>
@@ -22114,7 +22114,7 @@
         <p:spPr>
           <a:xfrm>
             <a:off x="3345103" y="1133856"/>
-            <a:ext cx="2659303" cy="1956816"/>
+            <a:ext cx="2659303" cy="1847088"/>
           </a:xfrm>
           <a:prstGeom prst="rect">
             <a:avLst/>
@@ -22284,7 +22284,7 @@
         <p:spPr>
           <a:xfrm>
             <a:off x="3418255" y="1755648"/>
-            <a:ext cx="2512999" cy="1280160"/>
+            <a:ext cx="2512999" cy="1170432"/>
           </a:xfrm>
           <a:prstGeom prst="rect">
             <a:avLst/>
@@ -22361,7 +22361,7 @@
         <p:spPr>
           <a:xfrm>
             <a:off x="6187287" y="1133856"/>
-            <a:ext cx="2659303" cy="1956816"/>
+            <a:ext cx="2659303" cy="1847088"/>
           </a:xfrm>
           <a:prstGeom prst="rect">
             <a:avLst/>
@@ -22531,7 +22531,7 @@
         <p:spPr>
           <a:xfrm>
             <a:off x="6260439" y="1755648"/>
-            <a:ext cx="2512999" cy="1280160"/>
+            <a:ext cx="2512999" cy="1170432"/>
           </a:xfrm>
           <a:prstGeom prst="rect">
             <a:avLst/>
@@ -22608,7 +22608,7 @@
         <p:spPr>
           <a:xfrm>
             <a:off x="9029471" y="1133856"/>
-            <a:ext cx="2659303" cy="1956816"/>
+            <a:ext cx="2659303" cy="1847088"/>
           </a:xfrm>
           <a:prstGeom prst="rect">
             <a:avLst/>
@@ -22778,7 +22778,7 @@
         <p:spPr>
           <a:xfrm>
             <a:off x="9102623" y="1755648"/>
-            <a:ext cx="2512999" cy="1280160"/>
+            <a:ext cx="2512999" cy="1170432"/>
           </a:xfrm>
           <a:prstGeom prst="rect">
             <a:avLst/>
@@ -22854,8 +22854,8 @@
         </p:nvSpPr>
         <p:spPr>
           <a:xfrm>
-            <a:off x="502920" y="3236976"/>
-            <a:ext cx="11185855" cy="1005840"/>
+            <a:off x="502920" y="3108960"/>
+            <a:ext cx="11185855" cy="1682496"/>
           </a:xfrm>
           <a:prstGeom prst="rect">
             <a:avLst/>
@@ -22898,7 +22898,7 @@
         </p:nvSpPr>
         <p:spPr>
           <a:xfrm>
-            <a:off x="502920" y="3236976"/>
+            <a:off x="502920" y="3108960"/>
             <a:ext cx="11185855" cy="438912"/>
           </a:xfrm>
           <a:prstGeom prst="rect">
@@ -22942,7 +22942,7 @@
         </p:nvSpPr>
         <p:spPr>
           <a:xfrm>
-            <a:off x="594360" y="3255264"/>
+            <a:off x="594360" y="3127248"/>
             <a:ext cx="457200" cy="402336"/>
           </a:xfrm>
           <a:prstGeom prst="rect">
@@ -22983,8 +22983,8 @@
         </p:nvSpPr>
         <p:spPr>
           <a:xfrm>
-            <a:off x="1088136" y="3236976"/>
-            <a:ext cx="5852160" cy="438912"/>
+            <a:off x="1088136" y="3108960"/>
+            <a:ext cx="7315200" cy="438912"/>
           </a:xfrm>
           <a:prstGeom prst="rect">
             <a:avLst/>
@@ -23024,48 +23024,7 @@
         </p:nvSpPr>
         <p:spPr>
           <a:xfrm>
-            <a:off x="6751015" y="3236976"/>
-            <a:ext cx="4937760" cy="438912"/>
-          </a:xfrm>
-          <a:prstGeom prst="rect">
-            <a:avLst/>
-          </a:prstGeom>
-          <a:noFill/>
-        </p:spPr>
-        <p:txBody>
-          <a:bodyPr wrap="square" lIns="109728" rIns="109728" tIns="65836" bIns="65836" anchor="ctr">
-            <a:spAutoFit/>
-          </a:bodyPr>
-          <a:lstStyle/>
-          <a:p>
-            <a:pPr algn="r">
-              <a:spcAft>
-                <a:spcPts val="500"/>
-              </a:spcAft>
-            </a:pPr>
-            <a:r>
-              <a:rPr sz="1200" b="0" i="0">
-                <a:solidFill>
-                  <a:srgbClr val="4A4A4A"/>
-                </a:solidFill>
-                <a:latin typeface="Meiryo"/>
-                <a:ea typeface="Meiryo"/>
-                <a:cs typeface="Meiryo"/>
-              </a:rPr>
-              <a:t>103 コミット中 102 が Co-Authored-By: Claude</a:t>
-            </a:r>
-          </a:p>
-        </p:txBody>
-      </p:sp>
-      <p:sp>
-        <p:nvSpPr>
-          <p:cNvPr id="31" name="TextBox 30"/>
-          <p:cNvSpPr txBox="1"/>
-          <p:nvPr/>
-        </p:nvSpPr>
-        <p:spPr>
-          <a:xfrm>
-            <a:off x="685800" y="3712463"/>
+            <a:off x="685800" y="3602736"/>
             <a:ext cx="3484778" cy="256032"/>
           </a:xfrm>
           <a:prstGeom prst="rect">
@@ -23100,13 +23059,13 @@
       </p:sp>
       <p:sp>
         <p:nvSpPr>
-          <p:cNvPr id="32" name="TextBox 31"/>
+          <p:cNvPr id="31" name="TextBox 30"/>
           <p:cNvSpPr txBox="1"/>
           <p:nvPr/>
         </p:nvSpPr>
         <p:spPr>
           <a:xfrm>
-            <a:off x="868680" y="3950208"/>
+            <a:off x="868680" y="3822191"/>
             <a:ext cx="3301898" cy="256032"/>
           </a:xfrm>
           <a:prstGeom prst="rect">
@@ -23141,13 +23100,13 @@
       </p:sp>
       <p:sp>
         <p:nvSpPr>
-          <p:cNvPr id="33" name="TextBox 32"/>
+          <p:cNvPr id="32" name="TextBox 31"/>
           <p:cNvSpPr txBox="1"/>
           <p:nvPr/>
         </p:nvSpPr>
         <p:spPr>
           <a:xfrm>
-            <a:off x="4353458" y="3712463"/>
+            <a:off x="4353458" y="3602736"/>
             <a:ext cx="3484778" cy="256032"/>
           </a:xfrm>
           <a:prstGeom prst="rect">
@@ -23182,13 +23141,13 @@
       </p:sp>
       <p:sp>
         <p:nvSpPr>
-          <p:cNvPr id="34" name="TextBox 33"/>
+          <p:cNvPr id="33" name="TextBox 32"/>
           <p:cNvSpPr txBox="1"/>
           <p:nvPr/>
         </p:nvSpPr>
         <p:spPr>
           <a:xfrm>
-            <a:off x="4536338" y="3950208"/>
+            <a:off x="4536338" y="3822191"/>
             <a:ext cx="3301898" cy="256032"/>
           </a:xfrm>
           <a:prstGeom prst="rect">
@@ -23223,13 +23182,13 @@
       </p:sp>
       <p:sp>
         <p:nvSpPr>
-          <p:cNvPr id="35" name="TextBox 34"/>
+          <p:cNvPr id="34" name="TextBox 33"/>
           <p:cNvSpPr txBox="1"/>
           <p:nvPr/>
         </p:nvSpPr>
         <p:spPr>
           <a:xfrm>
-            <a:off x="8021116" y="3712463"/>
+            <a:off x="8021116" y="3602736"/>
             <a:ext cx="3484778" cy="256032"/>
           </a:xfrm>
           <a:prstGeom prst="rect">
@@ -23264,13 +23223,13 @@
       </p:sp>
       <p:sp>
         <p:nvSpPr>
-          <p:cNvPr id="36" name="TextBox 35"/>
+          <p:cNvPr id="35" name="TextBox 34"/>
           <p:cNvSpPr txBox="1"/>
           <p:nvPr/>
         </p:nvSpPr>
         <p:spPr>
           <a:xfrm>
-            <a:off x="8203996" y="3950208"/>
+            <a:off x="8203996" y="3822191"/>
             <a:ext cx="3301898" cy="256032"/>
           </a:xfrm>
           <a:prstGeom prst="rect">
@@ -23305,14 +23264,392 @@
       </p:sp>
       <p:sp>
         <p:nvSpPr>
-          <p:cNvPr id="37" name="Rectangle 36"/>
+          <p:cNvPr id="36" name="Rectangle 35"/>
           <p:cNvSpPr/>
           <p:nvPr/>
         </p:nvSpPr>
         <p:spPr>
           <a:xfrm>
-            <a:off x="502920" y="4389120"/>
-            <a:ext cx="11185855" cy="1481328"/>
+            <a:off x="685800" y="4133087"/>
+            <a:ext cx="3484778" cy="566928"/>
+          </a:xfrm>
+          <a:prstGeom prst="rect">
+            <a:avLst/>
+          </a:prstGeom>
+          <a:solidFill>
+            <a:srgbClr val="FFFFFF"/>
+          </a:solidFill>
+          <a:ln w="9525">
+            <a:solidFill>
+              <a:srgbClr val="9E9E9E"/>
+            </a:solidFill>
+          </a:ln>
+          <a:effectLst/>
+        </p:spPr>
+        <p:style>
+          <a:lnRef idx="1">
+            <a:schemeClr val="accent1"/>
+          </a:lnRef>
+          <a:fillRef idx="3">
+            <a:schemeClr val="accent1"/>
+          </a:fillRef>
+          <a:effectRef idx="2">
+            <a:schemeClr val="accent1"/>
+          </a:effectRef>
+          <a:fontRef idx="minor">
+            <a:schemeClr val="lt1"/>
+          </a:fontRef>
+        </p:style>
+        <p:txBody>
+          <a:bodyPr rtlCol="0" anchor="ctr"/>
+          <a:lstStyle/>
+          <a:p/>
+        </p:txBody>
+      </p:sp>
+      <p:sp>
+        <p:nvSpPr>
+          <p:cNvPr id="37" name="TextBox 36"/>
+          <p:cNvSpPr txBox="1"/>
+          <p:nvPr/>
+        </p:nvSpPr>
+        <p:spPr>
+          <a:xfrm>
+            <a:off x="685800" y="4151376"/>
+            <a:ext cx="3484778" cy="310896"/>
+          </a:xfrm>
+          <a:prstGeom prst="rect">
+            <a:avLst/>
+          </a:prstGeom>
+          <a:noFill/>
+        </p:spPr>
+        <p:txBody>
+          <a:bodyPr wrap="square" lIns="18288" rIns="18288" tIns="10972" bIns="10972" anchor="t">
+            <a:spAutoFit/>
+          </a:bodyPr>
+          <a:lstStyle/>
+          <a:p>
+            <a:pPr algn="ctr">
+              <a:spcAft>
+                <a:spcPts val="500"/>
+              </a:spcAft>
+            </a:pPr>
+            <a:r>
+              <a:rPr sz="1700" b="1" i="0">
+                <a:solidFill>
+                  <a:srgbClr val="111111"/>
+                </a:solidFill>
+                <a:latin typeface="Meiryo"/>
+                <a:ea typeface="Meiryo"/>
+                <a:cs typeface="Meiryo"/>
+              </a:rPr>
+              <a:t>14 時間</a:t>
+            </a:r>
+          </a:p>
+        </p:txBody>
+      </p:sp>
+      <p:sp>
+        <p:nvSpPr>
+          <p:cNvPr id="38" name="TextBox 37"/>
+          <p:cNvSpPr txBox="1"/>
+          <p:nvPr/>
+        </p:nvSpPr>
+        <p:spPr>
+          <a:xfrm>
+            <a:off x="685800" y="4443984"/>
+            <a:ext cx="3484778" cy="237744"/>
+          </a:xfrm>
+          <a:prstGeom prst="rect">
+            <a:avLst/>
+          </a:prstGeom>
+          <a:noFill/>
+        </p:spPr>
+        <p:txBody>
+          <a:bodyPr wrap="square" lIns="18288" rIns="18288" tIns="10972" bIns="10972" anchor="t">
+            <a:spAutoFit/>
+          </a:bodyPr>
+          <a:lstStyle/>
+          <a:p>
+            <a:pPr algn="ctr">
+              <a:spcAft>
+                <a:spcPts val="500"/>
+              </a:spcAft>
+            </a:pPr>
+            <a:r>
+              <a:rPr sz="1050" b="0" i="0">
+                <a:solidFill>
+                  <a:srgbClr val="4A4A4A"/>
+                </a:solidFill>
+                <a:latin typeface="Meiryo"/>
+                <a:ea typeface="Meiryo"/>
+                <a:cs typeface="Meiryo"/>
+              </a:rPr>
+              <a:t>実作業時間 (ログのイベント間隔から集計)</a:t>
+            </a:r>
+          </a:p>
+        </p:txBody>
+      </p:sp>
+      <p:sp>
+        <p:nvSpPr>
+          <p:cNvPr id="39" name="Rectangle 38"/>
+          <p:cNvSpPr/>
+          <p:nvPr/>
+        </p:nvSpPr>
+        <p:spPr>
+          <a:xfrm>
+            <a:off x="4353458" y="4133087"/>
+            <a:ext cx="3484778" cy="566928"/>
+          </a:xfrm>
+          <a:prstGeom prst="rect">
+            <a:avLst/>
+          </a:prstGeom>
+          <a:solidFill>
+            <a:srgbClr val="FFFFFF"/>
+          </a:solidFill>
+          <a:ln w="9525">
+            <a:solidFill>
+              <a:srgbClr val="9E9E9E"/>
+            </a:solidFill>
+          </a:ln>
+          <a:effectLst/>
+        </p:spPr>
+        <p:style>
+          <a:lnRef idx="1">
+            <a:schemeClr val="accent1"/>
+          </a:lnRef>
+          <a:fillRef idx="3">
+            <a:schemeClr val="accent1"/>
+          </a:fillRef>
+          <a:effectRef idx="2">
+            <a:schemeClr val="accent1"/>
+          </a:effectRef>
+          <a:fontRef idx="minor">
+            <a:schemeClr val="lt1"/>
+          </a:fontRef>
+        </p:style>
+        <p:txBody>
+          <a:bodyPr rtlCol="0" anchor="ctr"/>
+          <a:lstStyle/>
+          <a:p/>
+        </p:txBody>
+      </p:sp>
+      <p:sp>
+        <p:nvSpPr>
+          <p:cNvPr id="40" name="TextBox 39"/>
+          <p:cNvSpPr txBox="1"/>
+          <p:nvPr/>
+        </p:nvSpPr>
+        <p:spPr>
+          <a:xfrm>
+            <a:off x="4353458" y="4151376"/>
+            <a:ext cx="3484778" cy="310896"/>
+          </a:xfrm>
+          <a:prstGeom prst="rect">
+            <a:avLst/>
+          </a:prstGeom>
+          <a:noFill/>
+        </p:spPr>
+        <p:txBody>
+          <a:bodyPr wrap="square" lIns="18288" rIns="18288" tIns="10972" bIns="10972" anchor="t">
+            <a:spAutoFit/>
+          </a:bodyPr>
+          <a:lstStyle/>
+          <a:p>
+            <a:pPr algn="ctr">
+              <a:spcAft>
+                <a:spcPts val="500"/>
+              </a:spcAft>
+            </a:pPr>
+            <a:r>
+              <a:rPr sz="1700" b="1" i="0">
+                <a:solidFill>
+                  <a:srgbClr val="111111"/>
+                </a:solidFill>
+                <a:latin typeface="Meiryo"/>
+                <a:ea typeface="Meiryo"/>
+                <a:cs typeface="Meiryo"/>
+              </a:rPr>
+              <a:t>$480</a:t>
+            </a:r>
+          </a:p>
+        </p:txBody>
+      </p:sp>
+      <p:sp>
+        <p:nvSpPr>
+          <p:cNvPr id="41" name="TextBox 40"/>
+          <p:cNvSpPr txBox="1"/>
+          <p:nvPr/>
+        </p:nvSpPr>
+        <p:spPr>
+          <a:xfrm>
+            <a:off x="4353458" y="4443984"/>
+            <a:ext cx="3484778" cy="237744"/>
+          </a:xfrm>
+          <a:prstGeom prst="rect">
+            <a:avLst/>
+          </a:prstGeom>
+          <a:noFill/>
+        </p:spPr>
+        <p:txBody>
+          <a:bodyPr wrap="square" lIns="18288" rIns="18288" tIns="10972" bIns="10972" anchor="t">
+            <a:spAutoFit/>
+          </a:bodyPr>
+          <a:lstStyle/>
+          <a:p>
+            <a:pPr algn="ctr">
+              <a:spcAft>
+                <a:spcPts val="500"/>
+              </a:spcAft>
+            </a:pPr>
+            <a:r>
+              <a:rPr sz="1050" b="0" i="0">
+                <a:solidFill>
+                  <a:srgbClr val="4A4A4A"/>
+                </a:solidFill>
+                <a:latin typeface="Meiryo"/>
+                <a:ea typeface="Meiryo"/>
+                <a:cs typeface="Meiryo"/>
+              </a:rPr>
+              <a:t>API 料金換算。83% がプロンプトキャッシュ</a:t>
+            </a:r>
+          </a:p>
+        </p:txBody>
+      </p:sp>
+      <p:sp>
+        <p:nvSpPr>
+          <p:cNvPr id="42" name="Rectangle 41"/>
+          <p:cNvSpPr/>
+          <p:nvPr/>
+        </p:nvSpPr>
+        <p:spPr>
+          <a:xfrm>
+            <a:off x="8021116" y="4133087"/>
+            <a:ext cx="3484778" cy="566928"/>
+          </a:xfrm>
+          <a:prstGeom prst="rect">
+            <a:avLst/>
+          </a:prstGeom>
+          <a:solidFill>
+            <a:srgbClr val="FFFFFF"/>
+          </a:solidFill>
+          <a:ln w="9525">
+            <a:solidFill>
+              <a:srgbClr val="9E9E9E"/>
+            </a:solidFill>
+          </a:ln>
+          <a:effectLst/>
+        </p:spPr>
+        <p:style>
+          <a:lnRef idx="1">
+            <a:schemeClr val="accent1"/>
+          </a:lnRef>
+          <a:fillRef idx="3">
+            <a:schemeClr val="accent1"/>
+          </a:fillRef>
+          <a:effectRef idx="2">
+            <a:schemeClr val="accent1"/>
+          </a:effectRef>
+          <a:fontRef idx="minor">
+            <a:schemeClr val="lt1"/>
+          </a:fontRef>
+        </p:style>
+        <p:txBody>
+          <a:bodyPr rtlCol="0" anchor="ctr"/>
+          <a:lstStyle/>
+          <a:p/>
+        </p:txBody>
+      </p:sp>
+      <p:sp>
+        <p:nvSpPr>
+          <p:cNvPr id="43" name="TextBox 42"/>
+          <p:cNvSpPr txBox="1"/>
+          <p:nvPr/>
+        </p:nvSpPr>
+        <p:spPr>
+          <a:xfrm>
+            <a:off x="8021116" y="4151376"/>
+            <a:ext cx="3484778" cy="310896"/>
+          </a:xfrm>
+          <a:prstGeom prst="rect">
+            <a:avLst/>
+          </a:prstGeom>
+          <a:noFill/>
+        </p:spPr>
+        <p:txBody>
+          <a:bodyPr wrap="square" lIns="18288" rIns="18288" tIns="10972" bIns="10972" anchor="t">
+            <a:spAutoFit/>
+          </a:bodyPr>
+          <a:lstStyle/>
+          <a:p>
+            <a:pPr algn="ctr">
+              <a:spcAft>
+                <a:spcPts val="500"/>
+              </a:spcAft>
+            </a:pPr>
+            <a:r>
+              <a:rPr sz="1700" b="1" i="0">
+                <a:solidFill>
+                  <a:srgbClr val="111111"/>
+                </a:solidFill>
+                <a:latin typeface="Meiryo"/>
+                <a:ea typeface="Meiryo"/>
+                <a:cs typeface="Meiryo"/>
+              </a:rPr>
+              <a:t>103 コミット</a:t>
+            </a:r>
+          </a:p>
+        </p:txBody>
+      </p:sp>
+      <p:sp>
+        <p:nvSpPr>
+          <p:cNvPr id="44" name="TextBox 43"/>
+          <p:cNvSpPr txBox="1"/>
+          <p:nvPr/>
+        </p:nvSpPr>
+        <p:spPr>
+          <a:xfrm>
+            <a:off x="8021116" y="4443984"/>
+            <a:ext cx="3484778" cy="237744"/>
+          </a:xfrm>
+          <a:prstGeom prst="rect">
+            <a:avLst/>
+          </a:prstGeom>
+          <a:noFill/>
+        </p:spPr>
+        <p:txBody>
+          <a:bodyPr wrap="square" lIns="18288" rIns="18288" tIns="10972" bIns="10972" anchor="t">
+            <a:spAutoFit/>
+          </a:bodyPr>
+          <a:lstStyle/>
+          <a:p>
+            <a:pPr algn="ctr">
+              <a:spcAft>
+                <a:spcPts val="500"/>
+              </a:spcAft>
+            </a:pPr>
+            <a:r>
+              <a:rPr sz="1050" b="0" i="0">
+                <a:solidFill>
+                  <a:srgbClr val="4A4A4A"/>
+                </a:solidFill>
+                <a:latin typeface="Meiryo"/>
+                <a:ea typeface="Meiryo"/>
+                <a:cs typeface="Meiryo"/>
+              </a:rPr>
+              <a:t>うち 102 が Co-Authored-By: Claude</a:t>
+            </a:r>
+          </a:p>
+        </p:txBody>
+      </p:sp>
+      <p:sp>
+        <p:nvSpPr>
+          <p:cNvPr id="45" name="Rectangle 44"/>
+          <p:cNvSpPr/>
+          <p:nvPr/>
+        </p:nvSpPr>
+        <p:spPr>
+          <a:xfrm>
+            <a:off x="502920" y="4937760"/>
+            <a:ext cx="11185855" cy="1060704"/>
           </a:xfrm>
           <a:prstGeom prst="rect">
             <a:avLst/>
@@ -23349,14 +23686,14 @@
       </p:sp>
       <p:sp>
         <p:nvSpPr>
-          <p:cNvPr id="38" name="Rectangle 37"/>
+          <p:cNvPr id="46" name="Rectangle 45"/>
           <p:cNvSpPr/>
           <p:nvPr/>
         </p:nvSpPr>
         <p:spPr>
           <a:xfrm>
-            <a:off x="502920" y="4389120"/>
-            <a:ext cx="11185855" cy="438912"/>
+            <a:off x="502920" y="4937760"/>
+            <a:ext cx="11185855" cy="384048"/>
           </a:xfrm>
           <a:prstGeom prst="rect">
             <a:avLst/>
@@ -23393,14 +23730,14 @@
       </p:sp>
       <p:sp>
         <p:nvSpPr>
-          <p:cNvPr id="39" name="TextBox 38"/>
+          <p:cNvPr id="47" name="TextBox 46"/>
           <p:cNvSpPr txBox="1"/>
           <p:nvPr/>
         </p:nvSpPr>
         <p:spPr>
           <a:xfrm>
-            <a:off x="502920" y="4389120"/>
-            <a:ext cx="11185855" cy="438912"/>
+            <a:off x="502920" y="4937760"/>
+            <a:ext cx="11185855" cy="384048"/>
           </a:xfrm>
           <a:prstGeom prst="rect">
             <a:avLst/>
@@ -23419,7 +23756,7 @@
               </a:spcAft>
             </a:pPr>
             <a:r>
-              <a:rPr sz="1500" b="1" i="0">
+              <a:rPr sz="1450" b="1" i="0">
                 <a:solidFill>
                   <a:srgbClr val="111111"/>
                 </a:solidFill>
@@ -23434,14 +23771,14 @@
       </p:sp>
       <p:sp>
         <p:nvSpPr>
-          <p:cNvPr id="40" name="Rectangle 39"/>
+          <p:cNvPr id="48" name="Rectangle 47"/>
           <p:cNvSpPr/>
           <p:nvPr/>
         </p:nvSpPr>
         <p:spPr>
           <a:xfrm>
-            <a:off x="777240" y="4919472"/>
-            <a:ext cx="1559509" cy="548640"/>
+            <a:off x="777240" y="5394960"/>
+            <a:ext cx="1559509" cy="493776"/>
           </a:xfrm>
           <a:prstGeom prst="rect">
             <a:avLst/>
@@ -23478,14 +23815,14 @@
       </p:sp>
       <p:sp>
         <p:nvSpPr>
-          <p:cNvPr id="41" name="TextBox 40"/>
+          <p:cNvPr id="49" name="TextBox 48"/>
           <p:cNvSpPr txBox="1"/>
           <p:nvPr/>
         </p:nvSpPr>
         <p:spPr>
           <a:xfrm>
-            <a:off x="777240" y="4919472"/>
-            <a:ext cx="1559509" cy="548640"/>
+            <a:off x="777240" y="5394960"/>
+            <a:ext cx="1559509" cy="493776"/>
           </a:xfrm>
           <a:prstGeom prst="rect">
             <a:avLst/>
@@ -23504,7 +23841,7 @@
               </a:spcAft>
             </a:pPr>
             <a:r>
-              <a:rPr sz="1350" b="1" i="0">
+              <a:rPr sz="1300" b="1" i="0">
                 <a:solidFill>
                   <a:srgbClr val="111111"/>
                 </a:solidFill>
@@ -23519,13 +23856,13 @@
       </p:sp>
       <p:sp>
         <p:nvSpPr>
-          <p:cNvPr id="42" name="Right Arrow 41"/>
+          <p:cNvPr id="50" name="Right Arrow 49"/>
           <p:cNvSpPr/>
           <p:nvPr/>
         </p:nvSpPr>
         <p:spPr>
           <a:xfrm>
-            <a:off x="2345893" y="5056632"/>
+            <a:off x="2345893" y="5504688"/>
             <a:ext cx="237744" cy="274320"/>
           </a:xfrm>
           <a:prstGeom prst="rightArrow">
@@ -23563,14 +23900,14 @@
       </p:sp>
       <p:sp>
         <p:nvSpPr>
-          <p:cNvPr id="43" name="Rectangle 42"/>
+          <p:cNvPr id="51" name="Rectangle 50"/>
           <p:cNvSpPr/>
           <p:nvPr/>
         </p:nvSpPr>
         <p:spPr>
           <a:xfrm>
-            <a:off x="2592781" y="4919472"/>
-            <a:ext cx="1559509" cy="548640"/>
+            <a:off x="2592781" y="5394960"/>
+            <a:ext cx="1559509" cy="493776"/>
           </a:xfrm>
           <a:prstGeom prst="rect">
             <a:avLst/>
@@ -23607,14 +23944,14 @@
       </p:sp>
       <p:sp>
         <p:nvSpPr>
-          <p:cNvPr id="44" name="TextBox 43"/>
+          <p:cNvPr id="52" name="TextBox 51"/>
           <p:cNvSpPr txBox="1"/>
           <p:nvPr/>
         </p:nvSpPr>
         <p:spPr>
           <a:xfrm>
-            <a:off x="2592781" y="4919472"/>
-            <a:ext cx="1559509" cy="548640"/>
+            <a:off x="2592781" y="5394960"/>
+            <a:ext cx="1559509" cy="493776"/>
           </a:xfrm>
           <a:prstGeom prst="rect">
             <a:avLst/>
@@ -23633,7 +23970,7 @@
               </a:spcAft>
             </a:pPr>
             <a:r>
-              <a:rPr sz="1350" b="1" i="0">
+              <a:rPr sz="1300" b="1" i="0">
                 <a:solidFill>
                   <a:srgbClr val="111111"/>
                 </a:solidFill>
@@ -23648,13 +23985,13 @@
       </p:sp>
       <p:sp>
         <p:nvSpPr>
-          <p:cNvPr id="45" name="Right Arrow 44"/>
+          <p:cNvPr id="53" name="Right Arrow 52"/>
           <p:cNvSpPr/>
           <p:nvPr/>
         </p:nvSpPr>
         <p:spPr>
           <a:xfrm>
-            <a:off x="4161434" y="5056632"/>
+            <a:off x="4161434" y="5504688"/>
             <a:ext cx="237744" cy="274320"/>
           </a:xfrm>
           <a:prstGeom prst="rightArrow">
@@ -23692,14 +24029,14 @@
       </p:sp>
       <p:sp>
         <p:nvSpPr>
-          <p:cNvPr id="46" name="Rectangle 45"/>
+          <p:cNvPr id="54" name="Rectangle 53"/>
           <p:cNvSpPr/>
           <p:nvPr/>
         </p:nvSpPr>
         <p:spPr>
           <a:xfrm>
-            <a:off x="4408322" y="4919472"/>
-            <a:ext cx="1559509" cy="548640"/>
+            <a:off x="4408322" y="5394960"/>
+            <a:ext cx="1559509" cy="493776"/>
           </a:xfrm>
           <a:prstGeom prst="rect">
             <a:avLst/>
@@ -23736,14 +24073,14 @@
       </p:sp>
       <p:sp>
         <p:nvSpPr>
-          <p:cNvPr id="47" name="TextBox 46"/>
+          <p:cNvPr id="55" name="TextBox 54"/>
           <p:cNvSpPr txBox="1"/>
           <p:nvPr/>
         </p:nvSpPr>
         <p:spPr>
           <a:xfrm>
-            <a:off x="4408322" y="4919472"/>
-            <a:ext cx="1559509" cy="548640"/>
+            <a:off x="4408322" y="5394960"/>
+            <a:ext cx="1559509" cy="493776"/>
           </a:xfrm>
           <a:prstGeom prst="rect">
             <a:avLst/>
@@ -23762,7 +24099,7 @@
               </a:spcAft>
             </a:pPr>
             <a:r>
-              <a:rPr sz="1350" b="1" i="0">
+              <a:rPr sz="1300" b="1" i="0">
                 <a:solidFill>
                   <a:srgbClr val="111111"/>
                 </a:solidFill>
@@ -23777,13 +24114,13 @@
       </p:sp>
       <p:sp>
         <p:nvSpPr>
-          <p:cNvPr id="48" name="Right Arrow 47"/>
+          <p:cNvPr id="56" name="Right Arrow 55"/>
           <p:cNvSpPr/>
           <p:nvPr/>
         </p:nvSpPr>
         <p:spPr>
           <a:xfrm>
-            <a:off x="5976975" y="5056632"/>
+            <a:off x="5976975" y="5504688"/>
             <a:ext cx="237744" cy="274320"/>
           </a:xfrm>
           <a:prstGeom prst="rightArrow">
@@ -23821,14 +24158,14 @@
       </p:sp>
       <p:sp>
         <p:nvSpPr>
-          <p:cNvPr id="49" name="Rectangle 48"/>
+          <p:cNvPr id="57" name="Rectangle 56"/>
           <p:cNvSpPr/>
           <p:nvPr/>
         </p:nvSpPr>
         <p:spPr>
           <a:xfrm>
-            <a:off x="6223863" y="4919472"/>
-            <a:ext cx="1559509" cy="548640"/>
+            <a:off x="6223863" y="5394960"/>
+            <a:ext cx="1559509" cy="493776"/>
           </a:xfrm>
           <a:prstGeom prst="rect">
             <a:avLst/>
@@ -23865,14 +24202,14 @@
       </p:sp>
       <p:sp>
         <p:nvSpPr>
-          <p:cNvPr id="50" name="TextBox 49"/>
+          <p:cNvPr id="58" name="TextBox 57"/>
           <p:cNvSpPr txBox="1"/>
           <p:nvPr/>
         </p:nvSpPr>
         <p:spPr>
           <a:xfrm>
-            <a:off x="6223863" y="4919472"/>
-            <a:ext cx="1559509" cy="548640"/>
+            <a:off x="6223863" y="5394960"/>
+            <a:ext cx="1559509" cy="493776"/>
           </a:xfrm>
           <a:prstGeom prst="rect">
             <a:avLst/>
@@ -23891,7 +24228,7 @@
               </a:spcAft>
             </a:pPr>
             <a:r>
-              <a:rPr sz="1350" b="1" i="0">
+              <a:rPr sz="1300" b="1" i="0">
                 <a:solidFill>
                   <a:srgbClr val="111111"/>
                 </a:solidFill>
@@ -23906,13 +24243,13 @@
       </p:sp>
       <p:sp>
         <p:nvSpPr>
-          <p:cNvPr id="51" name="Right Arrow 50"/>
+          <p:cNvPr id="59" name="Right Arrow 58"/>
           <p:cNvSpPr/>
           <p:nvPr/>
         </p:nvSpPr>
         <p:spPr>
           <a:xfrm>
-            <a:off x="7792516" y="5056632"/>
+            <a:off x="7792516" y="5504688"/>
             <a:ext cx="237744" cy="274320"/>
           </a:xfrm>
           <a:prstGeom prst="rightArrow">
@@ -23950,14 +24287,14 @@
       </p:sp>
       <p:sp>
         <p:nvSpPr>
-          <p:cNvPr id="52" name="Rectangle 51"/>
+          <p:cNvPr id="60" name="Rectangle 59"/>
           <p:cNvSpPr/>
           <p:nvPr/>
         </p:nvSpPr>
         <p:spPr>
           <a:xfrm>
-            <a:off x="8039404" y="4919472"/>
-            <a:ext cx="1559509" cy="548640"/>
+            <a:off x="8039404" y="5394960"/>
+            <a:ext cx="1559509" cy="493776"/>
           </a:xfrm>
           <a:prstGeom prst="rect">
             <a:avLst/>
@@ -23994,14 +24331,14 @@
       </p:sp>
       <p:sp>
         <p:nvSpPr>
-          <p:cNvPr id="53" name="TextBox 52"/>
+          <p:cNvPr id="61" name="TextBox 60"/>
           <p:cNvSpPr txBox="1"/>
           <p:nvPr/>
         </p:nvSpPr>
         <p:spPr>
           <a:xfrm>
-            <a:off x="8039404" y="4919472"/>
-            <a:ext cx="1559509" cy="548640"/>
+            <a:off x="8039404" y="5394960"/>
+            <a:ext cx="1559509" cy="493776"/>
           </a:xfrm>
           <a:prstGeom prst="rect">
             <a:avLst/>
@@ -24020,7 +24357,7 @@
               </a:spcAft>
             </a:pPr>
             <a:r>
-              <a:rPr sz="1350" b="1" i="0">
+              <a:rPr sz="1300" b="1" i="0">
                 <a:solidFill>
                   <a:srgbClr val="111111"/>
                 </a:solidFill>
@@ -24035,13 +24372,13 @@
       </p:sp>
       <p:sp>
         <p:nvSpPr>
-          <p:cNvPr id="54" name="Right Arrow 53"/>
+          <p:cNvPr id="62" name="Right Arrow 61"/>
           <p:cNvSpPr/>
           <p:nvPr/>
         </p:nvSpPr>
         <p:spPr>
           <a:xfrm>
-            <a:off x="9608058" y="5056632"/>
+            <a:off x="9608058" y="5504688"/>
             <a:ext cx="237744" cy="274320"/>
           </a:xfrm>
           <a:prstGeom prst="rightArrow">
@@ -24079,14 +24416,14 @@
       </p:sp>
       <p:sp>
         <p:nvSpPr>
-          <p:cNvPr id="55" name="Rectangle 54"/>
+          <p:cNvPr id="63" name="Rectangle 62"/>
           <p:cNvSpPr/>
           <p:nvPr/>
         </p:nvSpPr>
         <p:spPr>
           <a:xfrm>
-            <a:off x="9854946" y="4919472"/>
-            <a:ext cx="1559509" cy="548640"/>
+            <a:off x="9854946" y="5394960"/>
+            <a:ext cx="1559509" cy="493776"/>
           </a:xfrm>
           <a:prstGeom prst="rect">
             <a:avLst/>
@@ -24123,14 +24460,14 @@
       </p:sp>
       <p:sp>
         <p:nvSpPr>
-          <p:cNvPr id="56" name="TextBox 55"/>
+          <p:cNvPr id="64" name="TextBox 63"/>
           <p:cNvSpPr txBox="1"/>
           <p:nvPr/>
         </p:nvSpPr>
         <p:spPr>
           <a:xfrm>
-            <a:off x="9854946" y="4919472"/>
-            <a:ext cx="1559509" cy="548640"/>
+            <a:off x="9854946" y="5394960"/>
+            <a:ext cx="1559509" cy="493776"/>
           </a:xfrm>
           <a:prstGeom prst="rect">
             <a:avLst/>
@@ -24149,7 +24486,7 @@
               </a:spcAft>
             </a:pPr>
             <a:r>
-              <a:rPr sz="1350" b="1" i="0">
+              <a:rPr sz="1300" b="1" i="0">
                 <a:solidFill>
                   <a:srgbClr val="111111"/>
                 </a:solidFill>
@@ -24164,55 +24501,14 @@
       </p:sp>
       <p:sp>
         <p:nvSpPr>
-          <p:cNvPr id="57" name="TextBox 56"/>
+          <p:cNvPr id="65" name="TextBox 64"/>
           <p:cNvSpPr txBox="1"/>
           <p:nvPr/>
         </p:nvSpPr>
         <p:spPr>
           <a:xfrm>
-            <a:off x="502920" y="5522976"/>
-            <a:ext cx="11185855" cy="310896"/>
-          </a:xfrm>
-          <a:prstGeom prst="rect">
-            <a:avLst/>
-          </a:prstGeom>
-          <a:noFill/>
-        </p:spPr>
-        <p:txBody>
-          <a:bodyPr wrap="square" lIns="0" rIns="0" tIns="0" bIns="0" anchor="t">
-            <a:spAutoFit/>
-          </a:bodyPr>
-          <a:lstStyle/>
-          <a:p>
-            <a:pPr algn="ctr">
-              <a:spcAft>
-                <a:spcPts val="500"/>
-              </a:spcAft>
-            </a:pPr>
-            <a:r>
-              <a:rPr sz="1300" b="0" i="0">
-                <a:solidFill>
-                  <a:srgbClr val="4A4A4A"/>
-                </a:solidFill>
-                <a:latin typeface="Meiryo"/>
-                <a:ea typeface="Meiryo"/>
-                <a:cs typeface="Meiryo"/>
-              </a:rPr>
-              <a:t>② が緑にならないうちは ④ に進まない — 焼いてから気づくと左右 2 個ぶんやり直し</a:t>
-            </a:r>
-          </a:p>
-        </p:txBody>
-      </p:sp>
-      <p:sp>
-        <p:nvSpPr>
-          <p:cNvPr id="58" name="TextBox 57"/>
-          <p:cNvSpPr txBox="1"/>
-          <p:nvPr/>
-        </p:nvSpPr>
-        <p:spPr>
-          <a:xfrm>
-            <a:off x="502920" y="5998464"/>
-            <a:ext cx="11185855" cy="365760"/>
+            <a:off x="502920" y="6089904"/>
+            <a:ext cx="11185855" cy="347472"/>
           </a:xfrm>
           <a:prstGeom prst="rect">
             <a:avLst/>

--- a/slides/lt-ear-parallel.pptx
+++ b/slides/lt-ear-parallel.pptx
@@ -867,7 +867,7 @@
           <a:lstStyle/>
           <a:p>
             <a:r>
-              <a:t>「速くなりませんでした」で終わらせず、なぜ遅いかが定量的に説明できることを成果にする。ここが最大の山場。表を指す前に口頭でオチを言う。</a:t>
+              <a:t>ここが最大の山場。「計算は 4 コアぶん速くなった。が、その利得を Bluetooth の復帰待ちが丸ごと食った」を言い切る。worker_on_cp が毎回 +1 しているのが第 2 コアが本当に走った証拠。sniff を外す対策は実装済みで計測はこれから。</a:t>
             </a:r>
           </a:p>
         </p:txBody>
@@ -10188,7 +10188,7 @@
                 <a:ea typeface="Meiryo"/>
                 <a:cs typeface="Meiryo"/>
               </a:rPr>
-              <a:t>結果 ③ — 数字で見る</a:t>
+              <a:t>結果 ③ — 3 モード比較 (最新の Run 16)</a:t>
             </a:r>
           </a:p>
         </p:txBody>
@@ -10320,7 +10320,7 @@
         </p:nvGraphicFramePr>
         <p:xfrm>
           <a:off x="502920" y="1115568"/>
-          <a:ext cx="6903720" cy="1755648"/>
+          <a:ext cx="6903718" cy="1755648"/>
         </p:xfrm>
         <a:graphic>
           <a:graphicData uri="http://schemas.openxmlformats.org/drawingml/2006/table">
@@ -10329,9 +10329,11 @@
                 <a:tableStyleId>{5940675A-B579-460E-94D1-54222C63F5DA}</a:tableStyleId>
               </a:tblPr>
               <a:tblGrid>
-                <a:gridCol w="2416302"/>
-                <a:gridCol w="1898523"/>
-                <a:gridCol w="2588895"/>
+                <a:gridCol w="1748942"/>
+                <a:gridCol w="1012545"/>
+                <a:gridCol w="1012545"/>
+                <a:gridCol w="1748942"/>
+                <a:gridCol w="1380744"/>
               </a:tblGrid>
               <a:tr h="438912">
                 <a:tc>
@@ -10349,7 +10351,7 @@
                           <a:ea typeface="Meiryo"/>
                           <a:cs typeface="Meiryo"/>
                         </a:rPr>
-                        <a:t>指標</a:t>
+                        <a:t>mode</a:t>
                       </a:r>
                     </a:p>
                   </a:txBody>
@@ -10374,7 +10376,7 @@
                           <a:ea typeface="Meiryo"/>
                           <a:cs typeface="Meiryo"/>
                         </a:rPr>
-                        <a:t>実測値</a:t>
+                        <a:t>バッズ</a:t>
                       </a:r>
                     </a:p>
                   </a:txBody>
@@ -10399,7 +10401,57 @@
                           <a:ea typeface="Meiryo"/>
                           <a:cs typeface="Meiryo"/>
                         </a:rPr>
-                        <a:t>コメント</a:t>
+                        <a:t>コア</a:t>
+                      </a:r>
+                    </a:p>
+                  </a:txBody>
+                  <a:tcPr marL="82296" marR="82296" marT="27432" marB="27432" anchor="ctr">
+                    <a:solidFill>
+                      <a:srgbClr val="E6E6E6"/>
+                    </a:solidFill>
+                  </a:tcPr>
+                </a:tc>
+                <a:tc>
+                  <a:txBody>
+                    <a:bodyPr wrap="square"/>
+                    <a:lstStyle/>
+                    <a:p>
+                      <a:pPr algn="l"/>
+                      <a:r>
+                        <a:rPr sz="1400" b="1" i="0">
+                          <a:solidFill>
+                            <a:srgbClr val="111111"/>
+                          </a:solidFill>
+                          <a:latin typeface="Meiryo"/>
+                          <a:ea typeface="Meiryo"/>
+                          <a:cs typeface="Meiryo"/>
+                        </a:rPr>
+                        <a:t>elapsed</a:t>
+                      </a:r>
+                    </a:p>
+                  </a:txBody>
+                  <a:tcPr marL="82296" marR="82296" marT="27432" marB="27432" anchor="ctr">
+                    <a:solidFill>
+                      <a:srgbClr val="E6E6E6"/>
+                    </a:solidFill>
+                  </a:tcPr>
+                </a:tc>
+                <a:tc>
+                  <a:txBody>
+                    <a:bodyPr wrap="square"/>
+                    <a:lstStyle/>
+                    <a:p>
+                      <a:pPr algn="l"/>
+                      <a:r>
+                        <a:rPr sz="1400" b="1" i="0">
+                          <a:solidFill>
+                            <a:srgbClr val="111111"/>
+                          </a:solidFill>
+                          <a:latin typeface="Meiryo"/>
+                          <a:ea typeface="Meiryo"/>
+                          <a:cs typeface="Meiryo"/>
+                        </a:rPr>
+                        <a:t>vs single</a:t>
                       </a:r>
                     </a:p>
                   </a:txBody>
@@ -10426,7 +10478,7 @@
                           <a:ea typeface="Meiryo"/>
                           <a:cs typeface="Meiryo"/>
                         </a:rPr>
-                        <a:t>GEMM N=32  単コア</a:t>
+                        <a:t>single</a:t>
                       </a:r>
                     </a:p>
                   </a:txBody>
@@ -10451,7 +10503,57 @@
                           <a:ea typeface="Meiryo"/>
                           <a:cs typeface="Meiryo"/>
                         </a:rPr>
-                        <a:t>5 〜 10 ms</a:t>
+                        <a:t>1</a:t>
+                      </a:r>
+                    </a:p>
+                  </a:txBody>
+                  <a:tcPr marL="82296" marR="82296" marT="27432" marB="27432" anchor="ctr">
+                    <a:solidFill>
+                      <a:srgbClr val="FFFFFF"/>
+                    </a:solidFill>
+                  </a:tcPr>
+                </a:tc>
+                <a:tc>
+                  <a:txBody>
+                    <a:bodyPr wrap="square"/>
+                    <a:lstStyle/>
+                    <a:p>
+                      <a:pPr algn="l"/>
+                      <a:r>
+                        <a:rPr sz="1450" b="0" i="0">
+                          <a:solidFill>
+                            <a:srgbClr val="111111"/>
+                          </a:solidFill>
+                          <a:latin typeface="Meiryo"/>
+                          <a:ea typeface="Meiryo"/>
+                          <a:cs typeface="Meiryo"/>
+                        </a:rPr>
+                        <a:t>1</a:t>
+                      </a:r>
+                    </a:p>
+                  </a:txBody>
+                  <a:tcPr marL="82296" marR="82296" marT="27432" marB="27432" anchor="ctr">
+                    <a:solidFill>
+                      <a:srgbClr val="FFFFFF"/>
+                    </a:solidFill>
+                  </a:tcPr>
+                </a:tc>
+                <a:tc>
+                  <a:txBody>
+                    <a:bodyPr wrap="square"/>
+                    <a:lstStyle/>
+                    <a:p>
+                      <a:pPr algn="l"/>
+                      <a:r>
+                        <a:rPr sz="1450" b="0" i="0">
+                          <a:solidFill>
+                            <a:srgbClr val="111111"/>
+                          </a:solidFill>
+                          <a:latin typeface="Meiryo"/>
+                          <a:ea typeface="Meiryo"/>
+                          <a:cs typeface="Meiryo"/>
+                        </a:rPr>
+                        <a:t>3,783 µs</a:t>
                       </a:r>
                     </a:p>
                   </a:txBody>
@@ -10503,7 +10605,82 @@
                           <a:ea typeface="Meiryo"/>
                           <a:cs typeface="Meiryo"/>
                         </a:rPr>
-                        <a:t>GEMM N=32  2 ノード</a:t>
+                        <a:t>mpi</a:t>
+                      </a:r>
+                    </a:p>
+                  </a:txBody>
+                  <a:tcPr marL="82296" marR="82296" marT="27432" marB="27432" anchor="ctr">
+                    <a:solidFill>
+                      <a:srgbClr val="FFFFFF"/>
+                    </a:solidFill>
+                  </a:tcPr>
+                </a:tc>
+                <a:tc>
+                  <a:txBody>
+                    <a:bodyPr wrap="square"/>
+                    <a:lstStyle/>
+                    <a:p>
+                      <a:pPr algn="l"/>
+                      <a:r>
+                        <a:rPr sz="1450" b="0" i="0">
+                          <a:solidFill>
+                            <a:srgbClr val="111111"/>
+                          </a:solidFill>
+                          <a:latin typeface="Meiryo"/>
+                          <a:ea typeface="Meiryo"/>
+                          <a:cs typeface="Meiryo"/>
+                        </a:rPr>
+                        <a:t>2</a:t>
+                      </a:r>
+                    </a:p>
+                  </a:txBody>
+                  <a:tcPr marL="82296" marR="82296" marT="27432" marB="27432" anchor="ctr">
+                    <a:solidFill>
+                      <a:srgbClr val="FFFFFF"/>
+                    </a:solidFill>
+                  </a:tcPr>
+                </a:tc>
+                <a:tc>
+                  <a:txBody>
+                    <a:bodyPr wrap="square"/>
+                    <a:lstStyle/>
+                    <a:p>
+                      <a:pPr algn="l"/>
+                      <a:r>
+                        <a:rPr sz="1450" b="0" i="0">
+                          <a:solidFill>
+                            <a:srgbClr val="111111"/>
+                          </a:solidFill>
+                          <a:latin typeface="Meiryo"/>
+                          <a:ea typeface="Meiryo"/>
+                          <a:cs typeface="Meiryo"/>
+                        </a:rPr>
+                        <a:t>各 1</a:t>
+                      </a:r>
+                    </a:p>
+                  </a:txBody>
+                  <a:tcPr marL="82296" marR="82296" marT="27432" marB="27432" anchor="ctr">
+                    <a:solidFill>
+                      <a:srgbClr val="FFFFFF"/>
+                    </a:solidFill>
+                  </a:tcPr>
+                </a:tc>
+                <a:tc>
+                  <a:txBody>
+                    <a:bodyPr wrap="square"/>
+                    <a:lstStyle/>
+                    <a:p>
+                      <a:pPr algn="l"/>
+                      <a:r>
+                        <a:rPr sz="1450" b="0" i="0">
+                          <a:solidFill>
+                            <a:srgbClr val="111111"/>
+                          </a:solidFill>
+                          <a:latin typeface="Meiryo"/>
+                          <a:ea typeface="Meiryo"/>
+                          <a:cs typeface="Meiryo"/>
+                        </a:rPr>
+                        <a:t>3,683 µs</a:t>
                       </a:r>
                     </a:p>
                   </a:txBody>
@@ -10528,32 +10705,7 @@
                           <a:ea typeface="Meiryo"/>
                           <a:cs typeface="Meiryo"/>
                         </a:rPr>
-                        <a:t>12 〜 13 ms</a:t>
-                      </a:r>
-                    </a:p>
-                  </a:txBody>
-                  <a:tcPr marL="82296" marR="82296" marT="27432" marB="27432" anchor="ctr">
-                    <a:solidFill>
-                      <a:srgbClr val="FFFFFF"/>
-                    </a:solidFill>
-                  </a:tcPr>
-                </a:tc>
-                <a:tc>
-                  <a:txBody>
-                    <a:bodyPr wrap="square"/>
-                    <a:lstStyle/>
-                    <a:p>
-                      <a:pPr algn="l"/>
-                      <a:r>
-                        <a:rPr sz="1450" b="1" i="0">
-                          <a:solidFill>
-                            <a:srgbClr val="111111"/>
-                          </a:solidFill>
-                          <a:latin typeface="Meiryo"/>
-                          <a:ea typeface="Meiryo"/>
-                          <a:cs typeface="Meiryo"/>
-                        </a:rPr>
-                        <a:t>通信込み。遅くなった</a:t>
+                        <a:t>x1.02</a:t>
                       </a:r>
                     </a:p>
                   </a:txBody>
@@ -10580,7 +10732,7 @@
                           <a:ea typeface="Meiryo"/>
                           <a:cs typeface="Meiryo"/>
                         </a:rPr>
-                        <a:t>アイドルからの往復</a:t>
+                        <a:t>mpi+omp</a:t>
                       </a:r>
                     </a:p>
                   </a:txBody>
@@ -10605,7 +10757,32 @@
                           <a:ea typeface="Meiryo"/>
                           <a:cs typeface="Meiryo"/>
                         </a:rPr>
-                        <a:t>最大 407 ms</a:t>
+                        <a:t>2</a:t>
+                      </a:r>
+                    </a:p>
+                  </a:txBody>
+                  <a:tcPr marL="82296" marR="82296" marT="27432" marB="27432" anchor="ctr">
+                    <a:solidFill>
+                      <a:srgbClr val="FFFFFF"/>
+                    </a:solidFill>
+                  </a:tcPr>
+                </a:tc>
+                <a:tc>
+                  <a:txBody>
+                    <a:bodyPr wrap="square"/>
+                    <a:lstStyle/>
+                    <a:p>
+                      <a:pPr algn="l"/>
+                      <a:r>
+                        <a:rPr sz="1450" b="1" i="0">
+                          <a:solidFill>
+                            <a:srgbClr val="111111"/>
+                          </a:solidFill>
+                          <a:latin typeface="Meiryo"/>
+                          <a:ea typeface="Meiryo"/>
+                          <a:cs typeface="Meiryo"/>
+                        </a:rPr>
+                        <a:t>各 2</a:t>
                       </a:r>
                     </a:p>
                   </a:txBody>
@@ -10630,7 +10807,32 @@
                           <a:ea typeface="Meiryo"/>
                           <a:cs typeface="Meiryo"/>
                         </a:rPr>
-                        <a:t>ランごとに大きく変動</a:t>
+                        <a:t>313,258 µs</a:t>
+                      </a:r>
+                    </a:p>
+                  </a:txBody>
+                  <a:tcPr marL="82296" marR="82296" marT="27432" marB="27432" anchor="ctr">
+                    <a:solidFill>
+                      <a:srgbClr val="FFFFFF"/>
+                    </a:solidFill>
+                  </a:tcPr>
+                </a:tc>
+                <a:tc>
+                  <a:txBody>
+                    <a:bodyPr wrap="square"/>
+                    <a:lstStyle/>
+                    <a:p>
+                      <a:pPr algn="l"/>
+                      <a:r>
+                        <a:rPr sz="1450" b="1" i="0">
+                          <a:solidFill>
+                            <a:srgbClr val="111111"/>
+                          </a:solidFill>
+                          <a:latin typeface="Meiryo"/>
+                          <a:ea typeface="Meiryo"/>
+                          <a:cs typeface="Meiryo"/>
+                        </a:rPr>
+                        <a:t>x0.01</a:t>
                       </a:r>
                     </a:p>
                   </a:txBody>
@@ -10653,8 +10855,8 @@
         </p:nvSpPr>
         <p:spPr>
           <a:xfrm>
-            <a:off x="502920" y="3127248"/>
-            <a:ext cx="6903720" cy="1042415"/>
+            <a:off x="502920" y="3072384"/>
+            <a:ext cx="6903720" cy="969264"/>
           </a:xfrm>
           <a:prstGeom prst="rect">
             <a:avLst/>
@@ -10697,8 +10899,8 @@
         </p:nvSpPr>
         <p:spPr>
           <a:xfrm>
-            <a:off x="502920" y="3236976"/>
-            <a:ext cx="6903720" cy="475488"/>
+            <a:off x="502920" y="3163824"/>
+            <a:ext cx="6903720" cy="457200"/>
           </a:xfrm>
           <a:prstGeom prst="rect">
             <a:avLst/>
@@ -10717,7 +10919,7 @@
               </a:spcAft>
             </a:pPr>
             <a:r>
-              <a:rPr sz="2100" b="1" i="0">
+              <a:rPr sz="1900" b="1" i="0">
                 <a:solidFill>
                   <a:srgbClr val="111111"/>
                 </a:solidFill>
@@ -10725,7 +10927,7 @@
                 <a:ea typeface="Meiryo"/>
                 <a:cs typeface="Meiryo"/>
               </a:rPr>
-              <a:t>単コア 5〜10 ms   →   2 ノード 12〜13 ms</a:t>
+              <a:t>並列領域そのもの:  3,783 µs  →  1,226 µs   (x3.1)</a:t>
             </a:r>
           </a:p>
         </p:txBody>
@@ -10738,8 +10940,8 @@
         </p:nvSpPr>
         <p:spPr>
           <a:xfrm>
-            <a:off x="502920" y="3712463"/>
-            <a:ext cx="6903720" cy="329184"/>
+            <a:off x="502920" y="3621024"/>
+            <a:ext cx="6903720" cy="310896"/>
           </a:xfrm>
           <a:prstGeom prst="rect">
             <a:avLst/>
@@ -10766,7 +10968,7 @@
                 <a:ea typeface="Meiryo"/>
                 <a:cs typeface="Meiryo"/>
               </a:rPr>
-              <a:t>分散したぶんだけ遅くなった</a:t>
+              <a:t>2 バッズ × 2 コア = 4 コアぶんの効果は出ている</a:t>
             </a:r>
           </a:p>
         </p:txBody>
@@ -10779,8 +10981,8 @@
         </p:nvSpPr>
         <p:spPr>
           <a:xfrm>
-            <a:off x="502920" y="4334256"/>
-            <a:ext cx="6903720" cy="1444752"/>
+            <a:off x="502920" y="4169663"/>
+            <a:ext cx="6903720" cy="1609344"/>
           </a:xfrm>
           <a:prstGeom prst="rect">
             <a:avLst/>
@@ -10823,7 +11025,7 @@
         </p:nvSpPr>
         <p:spPr>
           <a:xfrm>
-            <a:off x="502920" y="4334256"/>
+            <a:off x="502920" y="4169663"/>
             <a:ext cx="6903720" cy="438912"/>
           </a:xfrm>
           <a:prstGeom prst="rect">
@@ -10867,7 +11069,7 @@
         </p:nvSpPr>
         <p:spPr>
           <a:xfrm>
-            <a:off x="502920" y="4334256"/>
+            <a:off x="502920" y="4169663"/>
             <a:ext cx="6903720" cy="438912"/>
           </a:xfrm>
           <a:prstGeom prst="rect">
@@ -10895,7 +11097,7 @@
                 <a:ea typeface="Meiryo"/>
                 <a:cs typeface="Meiryo"/>
               </a:rPr>
-              <a:t>407 ms の読み方</a:t>
+              <a:t>なぜ elapsed は 313 ms なのか</a:t>
             </a:r>
           </a:p>
         </p:txBody>
@@ -10908,8 +11110,8 @@
         </p:nvSpPr>
         <p:spPr>
           <a:xfrm>
-            <a:off x="502920" y="4773168"/>
-            <a:ext cx="6903720" cy="1005840"/>
+            <a:off x="502920" y="4608575"/>
+            <a:ext cx="6903720" cy="1170432"/>
           </a:xfrm>
           <a:prstGeom prst="rect">
             <a:avLst/>
@@ -10924,7 +11126,7 @@
           <a:p>
             <a:pPr algn="l">
               <a:spcAft>
-                <a:spcPts val="500"/>
+                <a:spcPts val="400"/>
               </a:spcAft>
             </a:pPr>
             <a:r>
@@ -10936,12 +11138,48 @@
                 <a:ea typeface="Meiryo"/>
                 <a:cs typeface="Meiryo"/>
               </a:rPr>
-              <a:t>407 ms は 100 回連続プローブ中の値で、GEMM 実行中の</a:t>
+              <a:t>・ mpi+omp の elapsed が常に 313 〜 318 ms なのは、2 回目の Allreduce が</a:t>
             </a:r>
           </a:p>
           <a:p>
             <a:pPr algn="l">
               <a:spcAft>
+                <a:spcPts val="800"/>
+              </a:spcAft>
+            </a:pPr>
+            <a:r>
+              <a:rPr sz="1400" b="0" i="0">
+                <a:solidFill>
+                  <a:srgbClr val="4A4A4A"/>
+                </a:solidFill>
+                <a:latin typeface="Meiryo"/>
+                <a:ea typeface="Meiryo"/>
+                <a:cs typeface="Meiryo"/>
+              </a:rPr>
+              <a:t>   省電力 (sniff) からの復帰を約 300 ms 待つため</a:t>
+            </a:r>
+          </a:p>
+          <a:p>
+            <a:pPr algn="l">
+              <a:spcAft>
+                <a:spcPts val="400"/>
+              </a:spcAft>
+            </a:pPr>
+            <a:r>
+              <a:rPr sz="1400" b="0" i="0">
+                <a:solidFill>
+                  <a:srgbClr val="111111"/>
+                </a:solidFill>
+                <a:latin typeface="Meiryo"/>
+                <a:ea typeface="Meiryo"/>
+                <a:cs typeface="Meiryo"/>
+              </a:rPr>
+              <a:t>・ リンクが起きている時の実力が mpi の x1.02 — 半分の行 + 1 往復 ≒ single</a:t>
+            </a:r>
+          </a:p>
+          <a:p>
+            <a:pPr algn="l">
+              <a:spcAft>
                 <a:spcPts val="0"/>
               </a:spcAft>
             </a:pPr>
@@ -10954,7 +11192,7 @@
                 <a:ea typeface="Meiryo"/>
                 <a:cs typeface="Meiryo"/>
               </a:rPr>
-              <a:t>レイテンシではない。省電力状態から叩き起こすとここまで伸びる。</a:t>
+              <a:t>・ 比較ランの前に sniff を抜ける対策は実装済み。計測はこれから</a:t>
             </a:r>
           </a:p>
         </p:txBody>
@@ -10968,7 +11206,295 @@
         <p:spPr>
           <a:xfrm>
             <a:off x="7607808" y="1115568"/>
-            <a:ext cx="4078224" cy="4663440"/>
+            <a:ext cx="4078224" cy="2688336"/>
+          </a:xfrm>
+          <a:prstGeom prst="rect">
+            <a:avLst/>
+          </a:prstGeom>
+          <a:solidFill>
+            <a:srgbClr val="F0F0F0"/>
+          </a:solidFill>
+          <a:ln w="9525">
+            <a:solidFill>
+              <a:srgbClr val="BFBFBF"/>
+            </a:solidFill>
+          </a:ln>
+          <a:effectLst/>
+        </p:spPr>
+        <p:style>
+          <a:lnRef idx="1">
+            <a:schemeClr val="accent1"/>
+          </a:lnRef>
+          <a:fillRef idx="3">
+            <a:schemeClr val="accent1"/>
+          </a:fillRef>
+          <a:effectRef idx="2">
+            <a:schemeClr val="accent1"/>
+          </a:effectRef>
+          <a:fontRef idx="minor">
+            <a:schemeClr val="lt1"/>
+          </a:fontRef>
+        </p:style>
+        <p:txBody>
+          <a:bodyPr rtlCol="0" anchor="ctr"/>
+          <a:lstStyle/>
+          <a:p/>
+        </p:txBody>
+      </p:sp>
+      <p:sp>
+        <p:nvSpPr>
+          <p:cNvPr id="15" name="TextBox 14"/>
+          <p:cNvSpPr txBox="1"/>
+          <p:nvPr/>
+        </p:nvSpPr>
+        <p:spPr>
+          <a:xfrm>
+            <a:off x="7607808" y="1170432"/>
+            <a:ext cx="4078224" cy="347472"/>
+          </a:xfrm>
+          <a:prstGeom prst="rect">
+            <a:avLst/>
+          </a:prstGeom>
+          <a:noFill/>
+        </p:spPr>
+        <p:txBody>
+          <a:bodyPr wrap="square" lIns="128016" rIns="128016" tIns="76809" bIns="76809" anchor="t">
+            <a:spAutoFit/>
+          </a:bodyPr>
+          <a:lstStyle/>
+          <a:p>
+            <a:pPr algn="l">
+              <a:spcAft>
+                <a:spcPts val="500"/>
+              </a:spcAft>
+            </a:pPr>
+            <a:r>
+              <a:rPr sz="1300" b="1" i="0">
+                <a:solidFill>
+                  <a:srgbClr val="4A4A4A"/>
+                </a:solidFill>
+                <a:latin typeface="Meiryo"/>
+                <a:ea typeface="Meiryo"/>
+                <a:cs typeface="Meiryo"/>
+              </a:rPr>
+              <a:t>Run 16 — Bluetooth 経由で PC が受けたログ</a:t>
+            </a:r>
+          </a:p>
+        </p:txBody>
+      </p:sp>
+      <p:sp>
+        <p:nvSpPr>
+          <p:cNvPr id="16" name="TextBox 15"/>
+          <p:cNvSpPr txBox="1"/>
+          <p:nvPr/>
+        </p:nvSpPr>
+        <p:spPr>
+          <a:xfrm>
+            <a:off x="7607808" y="1499616"/>
+            <a:ext cx="4078224" cy="2304288"/>
+          </a:xfrm>
+          <a:prstGeom prst="rect">
+            <a:avLst/>
+          </a:prstGeom>
+          <a:noFill/>
+        </p:spPr>
+        <p:txBody>
+          <a:bodyPr wrap="square" lIns="128016" rIns="128016" tIns="76809" bIns="76809" anchor="t">
+            <a:spAutoFit/>
+          </a:bodyPr>
+          <a:lstStyle/>
+          <a:p>
+            <a:pPr algn="l">
+              <a:spcAft>
+                <a:spcPts val="0"/>
+              </a:spcAft>
+            </a:pPr>
+            <a:r>
+              <a:rPr sz="1250" b="0" i="0">
+                <a:solidFill>
+                  <a:srgbClr val="111111"/>
+                </a:solidFill>
+                <a:latin typeface="Consolas"/>
+                <a:ea typeface="Consolas"/>
+                <a:cs typeface="Consolas"/>
+              </a:rPr>
+              <a:t>#47 mode=mpi     elapsed=3683 us</a:t>
+            </a:r>
+          </a:p>
+          <a:p>
+            <a:pPr algn="l">
+              <a:spcAft>
+                <a:spcPts val="0"/>
+              </a:spcAft>
+            </a:pPr>
+            <a:r>
+              <a:rPr sz="1250" b="0" i="0">
+                <a:solidFill>
+                  <a:srgbClr val="111111"/>
+                </a:solidFill>
+                <a:latin typeface="Consolas"/>
+                <a:ea typeface="Consolas"/>
+                <a:cs typeface="Consolas"/>
+              </a:rPr>
+              <a:t>#49 mode=mpi+omp elapsed=313258 us</a:t>
+            </a:r>
+          </a:p>
+          <a:p>
+            <a:pPr algn="l">
+              <a:spcAft>
+                <a:spcPts val="0"/>
+              </a:spcAft>
+            </a:pPr>
+            <a:r>
+              <a:rPr sz="1250" b="1" i="0">
+                <a:solidFill>
+                  <a:srgbClr val="111111"/>
+                </a:solidFill>
+                <a:latin typeface="Consolas"/>
+                <a:ea typeface="Consolas"/>
+                <a:cs typeface="Consolas"/>
+              </a:rPr>
+              <a:t>#50 [omp] last region:</a:t>
+            </a:r>
+          </a:p>
+          <a:p>
+            <a:pPr algn="l">
+              <a:spcAft>
+                <a:spcPts val="0"/>
+              </a:spcAft>
+            </a:pPr>
+            <a:r>
+              <a:rPr sz="1250" b="1" i="0">
+                <a:solidFill>
+                  <a:srgbClr val="111111"/>
+                </a:solidFill>
+                <a:latin typeface="Consolas"/>
+                <a:ea typeface="Consolas"/>
+                <a:cs typeface="Consolas"/>
+              </a:rPr>
+              <a:t>      primary share=1226 us,</a:t>
+            </a:r>
+          </a:p>
+          <a:p>
+            <a:pPr algn="l">
+              <a:spcAft>
+                <a:spcPts val="0"/>
+              </a:spcAft>
+            </a:pPr>
+            <a:r>
+              <a:rPr sz="1250" b="1" i="0">
+                <a:solidFill>
+                  <a:srgbClr val="111111"/>
+                </a:solidFill>
+                <a:latin typeface="Consolas"/>
+                <a:ea typeface="Consolas"/>
+                <a:cs typeface="Consolas"/>
+              </a:rPr>
+              <a:t>      extra wait for cp=0 us</a:t>
+            </a:r>
+          </a:p>
+          <a:p>
+            <a:pPr algn="l">
+              <a:spcAft>
+                <a:spcPts val="0"/>
+              </a:spcAft>
+            </a:pPr>
+            <a:r>
+              <a:rPr sz="1250" b="0" i="0">
+                <a:solidFill>
+                  <a:srgbClr val="111111"/>
+                </a:solidFill>
+                <a:latin typeface="Consolas"/>
+                <a:ea typeface="Consolas"/>
+                <a:cs typeface="Consolas"/>
+              </a:rPr>
+              <a:t>#52 mode=single  elapsed=3783 us</a:t>
+            </a:r>
+          </a:p>
+          <a:p>
+            <a:pPr algn="l">
+              <a:spcAft>
+                <a:spcPts val="0"/>
+              </a:spcAft>
+            </a:pPr>
+            <a:r>
+              <a:rPr sz="1250" b="0" i="0">
+                <a:solidFill>
+                  <a:srgbClr val="111111"/>
+                </a:solidFill>
+                <a:latin typeface="Consolas"/>
+                <a:ea typeface="Consolas"/>
+                <a:cs typeface="Consolas"/>
+              </a:rPr>
+              <a:t>#53 GEMM-CMP ... PASS</a:t>
+            </a:r>
+          </a:p>
+          <a:p>
+            <a:pPr algn="l">
+              <a:spcAft>
+                <a:spcPts val="0"/>
+              </a:spcAft>
+            </a:pPr>
+            <a:r>
+              <a:rPr sz="1250" b="1" i="0">
+                <a:solidFill>
+                  <a:srgbClr val="111111"/>
+                </a:solidFill>
+                <a:latin typeface="Consolas"/>
+                <a:ea typeface="Consolas"/>
+                <a:cs typeface="Consolas"/>
+              </a:rPr>
+              <a:t>#54 speedup vs single:</a:t>
+            </a:r>
+          </a:p>
+          <a:p>
+            <a:pPr algn="l">
+              <a:spcAft>
+                <a:spcPts val="0"/>
+              </a:spcAft>
+            </a:pPr>
+            <a:r>
+              <a:rPr sz="1250" b="1" i="0">
+                <a:solidFill>
+                  <a:srgbClr val="111111"/>
+                </a:solidFill>
+                <a:latin typeface="Consolas"/>
+                <a:ea typeface="Consolas"/>
+                <a:cs typeface="Consolas"/>
+              </a:rPr>
+              <a:t>      mpi=x1.02 mpiomp=x0.01</a:t>
+            </a:r>
+          </a:p>
+          <a:p>
+            <a:pPr algn="l">
+              <a:spcAft>
+                <a:spcPts val="0"/>
+              </a:spcAft>
+            </a:pPr>
+            <a:r>
+              <a:rPr sz="1250" b="1" i="0">
+                <a:solidFill>
+                  <a:srgbClr val="111111"/>
+                </a:solidFill>
+                <a:latin typeface="Consolas"/>
+                <a:ea typeface="Consolas"/>
+                <a:cs typeface="Consolas"/>
+              </a:rPr>
+              <a:t>      worker_on_cp=3</a:t>
+            </a:r>
+          </a:p>
+        </p:txBody>
+      </p:sp>
+      <p:sp>
+        <p:nvSpPr>
+          <p:cNvPr id="17" name="Rectangle 16"/>
+          <p:cNvSpPr/>
+          <p:nvPr/>
+        </p:nvSpPr>
+        <p:spPr>
+          <a:xfrm>
+            <a:off x="7607808" y="3931920"/>
+            <a:ext cx="4078224" cy="1847088"/>
           </a:xfrm>
           <a:prstGeom prst="rect">
             <a:avLst/>
@@ -11005,13 +11531,13 @@
       </p:sp>
       <p:sp>
         <p:nvSpPr>
-          <p:cNvPr id="15" name="Rectangle 14"/>
+          <p:cNvPr id="18" name="Rectangle 17"/>
           <p:cNvSpPr/>
           <p:nvPr/>
         </p:nvSpPr>
         <p:spPr>
           <a:xfrm>
-            <a:off x="7607808" y="1115568"/>
+            <a:off x="7607808" y="3931920"/>
             <a:ext cx="4078224" cy="438912"/>
           </a:xfrm>
           <a:prstGeom prst="rect">
@@ -11049,13 +11575,13 @@
       </p:sp>
       <p:sp>
         <p:nvSpPr>
-          <p:cNvPr id="16" name="TextBox 15"/>
+          <p:cNvPr id="19" name="TextBox 18"/>
           <p:cNvSpPr txBox="1"/>
           <p:nvPr/>
         </p:nvSpPr>
         <p:spPr>
           <a:xfrm>
-            <a:off x="7607808" y="1115568"/>
+            <a:off x="7607808" y="3931920"/>
             <a:ext cx="4078224" cy="438912"/>
           </a:xfrm>
           <a:prstGeom prst="rect">
@@ -11075,7 +11601,7 @@
               </a:spcAft>
             </a:pPr>
             <a:r>
-              <a:rPr sz="1550" b="1" i="0">
+              <a:rPr sz="1500" b="1" i="0">
                 <a:solidFill>
                   <a:srgbClr val="111111"/>
                 </a:solidFill>
@@ -11083,65 +11609,21 @@
                 <a:ea typeface="Meiryo"/>
                 <a:cs typeface="Meiryo"/>
               </a:rPr>
-              <a:t>なぜ遅いのか = この実験の本題</a:t>
-            </a:r>
-          </a:p>
-        </p:txBody>
-      </p:sp>
-      <p:sp>
-        <p:nvSpPr>
-          <p:cNvPr id="17" name="Rectangle 16"/>
-          <p:cNvSpPr/>
-          <p:nvPr/>
-        </p:nvSpPr>
-        <p:spPr>
-          <a:xfrm>
-            <a:off x="7790688" y="1700784"/>
-            <a:ext cx="3712463" cy="914400"/>
-          </a:xfrm>
-          <a:prstGeom prst="rect">
-            <a:avLst/>
-          </a:prstGeom>
-          <a:solidFill>
-            <a:srgbClr val="FFFFFF"/>
-          </a:solidFill>
-          <a:ln w="9525">
-            <a:solidFill>
-              <a:srgbClr val="9E9E9E"/>
-            </a:solidFill>
-          </a:ln>
-          <a:effectLst/>
-        </p:spPr>
-        <p:style>
-          <a:lnRef idx="1">
-            <a:schemeClr val="accent1"/>
-          </a:lnRef>
-          <a:fillRef idx="3">
-            <a:schemeClr val="accent1"/>
-          </a:fillRef>
-          <a:effectRef idx="2">
-            <a:schemeClr val="accent1"/>
-          </a:effectRef>
-          <a:fontRef idx="minor">
-            <a:schemeClr val="lt1"/>
-          </a:fontRef>
-        </p:style>
-        <p:txBody>
-          <a:bodyPr rtlCol="0" anchor="ctr"/>
-          <a:lstStyle/>
-          <a:p/>
-        </p:txBody>
-      </p:sp>
-      <p:sp>
-        <p:nvSpPr>
-          <p:cNvPr id="18" name="TextBox 17"/>
+              <a:t>第 2 コアが動いた証拠</a:t>
+            </a:r>
+          </a:p>
+        </p:txBody>
+      </p:sp>
+      <p:sp>
+        <p:nvSpPr>
+          <p:cNvPr id="20" name="TextBox 19"/>
           <p:cNvSpPr txBox="1"/>
           <p:nvPr/>
         </p:nvSpPr>
         <p:spPr>
           <a:xfrm>
-            <a:off x="7790688" y="1755648"/>
-            <a:ext cx="3712463" cy="310896"/>
+            <a:off x="7607808" y="4370831"/>
+            <a:ext cx="4078224" cy="1408176"/>
           </a:xfrm>
           <a:prstGeom prst="rect">
             <a:avLst/>
@@ -11149,18 +11631,18 @@
           <a:noFill/>
         </p:spPr>
         <p:txBody>
-          <a:bodyPr wrap="square" lIns="36576" rIns="36576" tIns="21945" bIns="21945" anchor="t">
+          <a:bodyPr wrap="square" lIns="128016" rIns="128016" tIns="76809" bIns="76809" anchor="t">
             <a:spAutoFit/>
           </a:bodyPr>
           <a:lstStyle/>
           <a:p>
-            <a:pPr algn="ctr">
-              <a:spcAft>
-                <a:spcPts val="500"/>
-              </a:spcAft>
-            </a:pPr>
-            <a:r>
-              <a:rPr sz="1400" b="1" i="0">
+            <a:pPr algn="l">
+              <a:spcAft>
+                <a:spcPts val="400"/>
+              </a:spcAft>
+            </a:pPr>
+            <a:r>
+              <a:rPr sz="1350" b="0" i="0">
                 <a:solidFill>
                   <a:srgbClr val="111111"/>
                 </a:solidFill>
@@ -11168,40 +11650,17 @@
                 <a:ea typeface="Meiryo"/>
                 <a:cs typeface="Meiryo"/>
               </a:rPr>
-              <a:t>① 分割で浮く計算</a:t>
-            </a:r>
-          </a:p>
-        </p:txBody>
-      </p:sp>
-      <p:sp>
-        <p:nvSpPr>
-          <p:cNvPr id="19" name="TextBox 18"/>
-          <p:cNvSpPr txBox="1"/>
-          <p:nvPr/>
-        </p:nvSpPr>
-        <p:spPr>
-          <a:xfrm>
-            <a:off x="7790688" y="2066544"/>
-            <a:ext cx="3712463" cy="530352"/>
-          </a:xfrm>
-          <a:prstGeom prst="rect">
-            <a:avLst/>
-          </a:prstGeom>
-          <a:noFill/>
-        </p:spPr>
-        <p:txBody>
-          <a:bodyPr wrap="square" lIns="36576" rIns="36576" tIns="21945" bIns="21945" anchor="t">
-            <a:spAutoFit/>
-          </a:bodyPr>
-          <a:lstStyle/>
-          <a:p>
-            <a:pPr algn="ctr">
-              <a:spcAft>
-                <a:spcPts val="200"/>
-              </a:spcAft>
-            </a:pPr>
-            <a:r>
-              <a:rPr sz="1250" b="0" i="0">
+              <a:t>・ worker_on_cp がランごとに +1</a:t>
+            </a:r>
+          </a:p>
+          <a:p>
+            <a:pPr algn="l">
+              <a:spcAft>
+                <a:spcPts val="800"/>
+              </a:spcAft>
+            </a:pPr>
+            <a:r>
+              <a:rPr sz="1350" b="0" i="0">
                 <a:solidFill>
                   <a:srgbClr val="4A4A4A"/>
                 </a:solidFill>
@@ -11209,317 +11668,74 @@
                 <a:ea typeface="Meiryo"/>
                 <a:cs typeface="Meiryo"/>
               </a:rPr>
-              <a:t>65,000 flop を半分に
-→  数 ms</a:t>
-            </a:r>
-          </a:p>
-        </p:txBody>
-      </p:sp>
-      <p:sp>
-        <p:nvSpPr>
-          <p:cNvPr id="20" name="Rectangle 19"/>
+              <a:t>   = 第 2 コアで並列領域が走った回数</a:t>
+            </a:r>
+          </a:p>
+          <a:p>
+            <a:pPr algn="l">
+              <a:spcAft>
+                <a:spcPts val="400"/>
+              </a:spcAft>
+            </a:pPr>
+            <a:r>
+              <a:rPr sz="1350" b="0" i="0">
+                <a:solidFill>
+                  <a:srgbClr val="111111"/>
+                </a:solidFill>
+                <a:latin typeface="Meiryo"/>
+                <a:ea typeface="Meiryo"/>
+                <a:cs typeface="Meiryo"/>
+              </a:rPr>
+              <a:t>・ extra wait for cp = 0 µs</a:t>
+            </a:r>
+          </a:p>
+          <a:p>
+            <a:pPr algn="l">
+              <a:spcAft>
+                <a:spcPts val="800"/>
+              </a:spcAft>
+            </a:pPr>
+            <a:r>
+              <a:rPr sz="1350" b="0" i="0">
+                <a:solidFill>
+                  <a:srgbClr val="4A4A4A"/>
+                </a:solidFill>
+                <a:latin typeface="Meiryo"/>
+                <a:ea typeface="Meiryo"/>
+                <a:cs typeface="Meiryo"/>
+              </a:rPr>
+              <a:t>   = CP のほうが先に終わっている</a:t>
+            </a:r>
+          </a:p>
+          <a:p>
+            <a:pPr algn="l">
+              <a:spcAft>
+                <a:spcPts val="0"/>
+              </a:spcAft>
+            </a:pPr>
+            <a:r>
+              <a:rPr sz="1350" b="0" i="0">
+                <a:solidFill>
+                  <a:srgbClr val="111111"/>
+                </a:solidFill>
+                <a:latin typeface="Meiryo"/>
+                <a:ea typeface="Meiryo"/>
+                <a:cs typeface="Meiryo"/>
+              </a:rPr>
+              <a:t>・ 3 モードとも checksum 厳密一致で PASS</a:t>
+            </a:r>
+          </a:p>
+        </p:txBody>
+      </p:sp>
+      <p:sp>
+        <p:nvSpPr>
+          <p:cNvPr id="21" name="Rectangle 20"/>
           <p:cNvSpPr/>
           <p:nvPr/>
         </p:nvSpPr>
         <p:spPr>
           <a:xfrm>
-            <a:off x="7790688" y="2706624"/>
-            <a:ext cx="3712463" cy="914400"/>
-          </a:xfrm>
-          <a:prstGeom prst="rect">
-            <a:avLst/>
-          </a:prstGeom>
-          <a:solidFill>
-            <a:srgbClr val="FFFFFF"/>
-          </a:solidFill>
-          <a:ln w="9525">
-            <a:solidFill>
-              <a:srgbClr val="9E9E9E"/>
-            </a:solidFill>
-          </a:ln>
-          <a:effectLst/>
-        </p:spPr>
-        <p:style>
-          <a:lnRef idx="1">
-            <a:schemeClr val="accent1"/>
-          </a:lnRef>
-          <a:fillRef idx="3">
-            <a:schemeClr val="accent1"/>
-          </a:fillRef>
-          <a:effectRef idx="2">
-            <a:schemeClr val="accent1"/>
-          </a:effectRef>
-          <a:fontRef idx="minor">
-            <a:schemeClr val="lt1"/>
-          </a:fontRef>
-        </p:style>
-        <p:txBody>
-          <a:bodyPr rtlCol="0" anchor="ctr"/>
-          <a:lstStyle/>
-          <a:p/>
-        </p:txBody>
-      </p:sp>
-      <p:sp>
-        <p:nvSpPr>
-          <p:cNvPr id="21" name="TextBox 20"/>
-          <p:cNvSpPr txBox="1"/>
-          <p:nvPr/>
-        </p:nvSpPr>
-        <p:spPr>
-          <a:xfrm>
-            <a:off x="7790688" y="2761488"/>
-            <a:ext cx="3712463" cy="310896"/>
-          </a:xfrm>
-          <a:prstGeom prst="rect">
-            <a:avLst/>
-          </a:prstGeom>
-          <a:noFill/>
-        </p:spPr>
-        <p:txBody>
-          <a:bodyPr wrap="square" lIns="36576" rIns="36576" tIns="21945" bIns="21945" anchor="t">
-            <a:spAutoFit/>
-          </a:bodyPr>
-          <a:lstStyle/>
-          <a:p>
-            <a:pPr algn="ctr">
-              <a:spcAft>
-                <a:spcPts val="500"/>
-              </a:spcAft>
-            </a:pPr>
-            <a:r>
-              <a:rPr sz="1400" b="1" i="0">
-                <a:solidFill>
-                  <a:srgbClr val="111111"/>
-                </a:solidFill>
-                <a:latin typeface="Meiryo"/>
-                <a:ea typeface="Meiryo"/>
-                <a:cs typeface="Meiryo"/>
-              </a:rPr>
-              <a:t>② 往復に要る時間</a:t>
-            </a:r>
-          </a:p>
-        </p:txBody>
-      </p:sp>
-      <p:sp>
-        <p:nvSpPr>
-          <p:cNvPr id="22" name="TextBox 21"/>
-          <p:cNvSpPr txBox="1"/>
-          <p:nvPr/>
-        </p:nvSpPr>
-        <p:spPr>
-          <a:xfrm>
-            <a:off x="7790688" y="3072384"/>
-            <a:ext cx="3712463" cy="530352"/>
-          </a:xfrm>
-          <a:prstGeom prst="rect">
-            <a:avLst/>
-          </a:prstGeom>
-          <a:noFill/>
-        </p:spPr>
-        <p:txBody>
-          <a:bodyPr wrap="square" lIns="36576" rIns="36576" tIns="21945" bIns="21945" anchor="t">
-            <a:spAutoFit/>
-          </a:bodyPr>
-          <a:lstStyle/>
-          <a:p>
-            <a:pPr algn="ctr">
-              <a:spcAft>
-                <a:spcPts val="200"/>
-              </a:spcAft>
-            </a:pPr>
-            <a:r>
-              <a:rPr sz="1250" b="0" i="0">
-                <a:solidFill>
-                  <a:srgbClr val="4A4A4A"/>
-                </a:solidFill>
-                <a:latin typeface="Meiryo"/>
-                <a:ea typeface="Meiryo"/>
-                <a:cs typeface="Meiryo"/>
-              </a:rPr>
-              <a:t>リンクが生きていても 数 ms
-→  ① とほぼ相殺</a:t>
-            </a:r>
-          </a:p>
-        </p:txBody>
-      </p:sp>
-      <p:sp>
-        <p:nvSpPr>
-          <p:cNvPr id="23" name="Rectangle 22"/>
-          <p:cNvSpPr/>
-          <p:nvPr/>
-        </p:nvSpPr>
-        <p:spPr>
-          <a:xfrm>
-            <a:off x="7790688" y="3712464"/>
-            <a:ext cx="3712463" cy="914400"/>
-          </a:xfrm>
-          <a:prstGeom prst="rect">
-            <a:avLst/>
-          </a:prstGeom>
-          <a:solidFill>
-            <a:srgbClr val="FFFFFF"/>
-          </a:solidFill>
-          <a:ln w="9525">
-            <a:solidFill>
-              <a:srgbClr val="9E9E9E"/>
-            </a:solidFill>
-          </a:ln>
-          <a:effectLst/>
-        </p:spPr>
-        <p:style>
-          <a:lnRef idx="1">
-            <a:schemeClr val="accent1"/>
-          </a:lnRef>
-          <a:fillRef idx="3">
-            <a:schemeClr val="accent1"/>
-          </a:fillRef>
-          <a:effectRef idx="2">
-            <a:schemeClr val="accent1"/>
-          </a:effectRef>
-          <a:fontRef idx="minor">
-            <a:schemeClr val="lt1"/>
-          </a:fontRef>
-        </p:style>
-        <p:txBody>
-          <a:bodyPr rtlCol="0" anchor="ctr"/>
-          <a:lstStyle/>
-          <a:p/>
-        </p:txBody>
-      </p:sp>
-      <p:sp>
-        <p:nvSpPr>
-          <p:cNvPr id="24" name="TextBox 23"/>
-          <p:cNvSpPr txBox="1"/>
-          <p:nvPr/>
-        </p:nvSpPr>
-        <p:spPr>
-          <a:xfrm>
-            <a:off x="7790688" y="3767328"/>
-            <a:ext cx="3712463" cy="310896"/>
-          </a:xfrm>
-          <a:prstGeom prst="rect">
-            <a:avLst/>
-          </a:prstGeom>
-          <a:noFill/>
-        </p:spPr>
-        <p:txBody>
-          <a:bodyPr wrap="square" lIns="36576" rIns="36576" tIns="21945" bIns="21945" anchor="t">
-            <a:spAutoFit/>
-          </a:bodyPr>
-          <a:lstStyle/>
-          <a:p>
-            <a:pPr algn="ctr">
-              <a:spcAft>
-                <a:spcPts val="500"/>
-              </a:spcAft>
-            </a:pPr>
-            <a:r>
-              <a:rPr sz="1400" b="1" i="0">
-                <a:solidFill>
-                  <a:srgbClr val="111111"/>
-                </a:solidFill>
-                <a:latin typeface="Meiryo"/>
-                <a:ea typeface="Meiryo"/>
-                <a:cs typeface="Meiryo"/>
-              </a:rPr>
-              <a:t>③ アイドルからの往復</a:t>
-            </a:r>
-          </a:p>
-        </p:txBody>
-      </p:sp>
-      <p:sp>
-        <p:nvSpPr>
-          <p:cNvPr id="25" name="TextBox 24"/>
-          <p:cNvSpPr txBox="1"/>
-          <p:nvPr/>
-        </p:nvSpPr>
-        <p:spPr>
-          <a:xfrm>
-            <a:off x="7790688" y="4078224"/>
-            <a:ext cx="3712463" cy="530352"/>
-          </a:xfrm>
-          <a:prstGeom prst="rect">
-            <a:avLst/>
-          </a:prstGeom>
-          <a:noFill/>
-        </p:spPr>
-        <p:txBody>
-          <a:bodyPr wrap="square" lIns="36576" rIns="36576" tIns="21945" bIns="21945" anchor="t">
-            <a:spAutoFit/>
-          </a:bodyPr>
-          <a:lstStyle/>
-          <a:p>
-            <a:pPr algn="ctr">
-              <a:spcAft>
-                <a:spcPts val="200"/>
-              </a:spcAft>
-            </a:pPr>
-            <a:r>
-              <a:rPr sz="1250" b="0" i="0">
-                <a:solidFill>
-                  <a:srgbClr val="4A4A4A"/>
-                </a:solidFill>
-                <a:latin typeface="Meiryo"/>
-                <a:ea typeface="Meiryo"/>
-                <a:cs typeface="Meiryo"/>
-              </a:rPr>
-              <a:t>最大 407 ms
-=  単コア GEMM 40 〜 80 回ぶん</a:t>
-            </a:r>
-          </a:p>
-        </p:txBody>
-      </p:sp>
-      <p:sp>
-        <p:nvSpPr>
-          <p:cNvPr id="26" name="TextBox 25"/>
-          <p:cNvSpPr txBox="1"/>
-          <p:nvPr/>
-        </p:nvSpPr>
-        <p:spPr>
-          <a:xfrm>
-            <a:off x="7717536" y="4828032"/>
-            <a:ext cx="3858768" cy="841248"/>
-          </a:xfrm>
-          <a:prstGeom prst="rect">
-            <a:avLst/>
-          </a:prstGeom>
-          <a:noFill/>
-        </p:spPr>
-        <p:txBody>
-          <a:bodyPr wrap="square" lIns="54864" rIns="54864" tIns="32918" bIns="32918" anchor="t">
-            <a:spAutoFit/>
-          </a:bodyPr>
-          <a:lstStyle/>
-          <a:p>
-            <a:pPr algn="ctr">
-              <a:spcAft>
-                <a:spcPts val="400"/>
-              </a:spcAft>
-            </a:pPr>
-            <a:r>
-              <a:rPr sz="1700" b="1" i="0">
-                <a:solidFill>
-                  <a:srgbClr val="111111"/>
-                </a:solidFill>
-                <a:latin typeface="Meiryo"/>
-                <a:ea typeface="Meiryo"/>
-                <a:cs typeface="Meiryo"/>
-              </a:rPr>
-              <a:t>「計算量 / 通信量」が小さい問題を
-分散してはいけない</a:t>
-            </a:r>
-          </a:p>
-        </p:txBody>
-      </p:sp>
-      <p:sp>
-        <p:nvSpPr>
-          <p:cNvPr id="27" name="Rectangle 26"/>
-          <p:cNvSpPr/>
-          <p:nvPr/>
-        </p:nvSpPr>
-        <p:spPr>
-          <a:xfrm>
-            <a:off x="502920" y="5852160"/>
+            <a:off x="502920" y="5907024"/>
             <a:ext cx="11185855" cy="530352"/>
           </a:xfrm>
           <a:prstGeom prst="rect">
@@ -11557,13 +11773,13 @@
       </p:sp>
       <p:sp>
         <p:nvSpPr>
-          <p:cNvPr id="28" name="TextBox 27"/>
+          <p:cNvPr id="22" name="TextBox 21"/>
           <p:cNvSpPr txBox="1"/>
           <p:nvPr/>
         </p:nvSpPr>
         <p:spPr>
           <a:xfrm>
-            <a:off x="502920" y="5852160"/>
+            <a:off x="502920" y="5907024"/>
             <a:ext cx="11185855" cy="530352"/>
           </a:xfrm>
           <a:prstGeom prst="rect">
@@ -11591,7 +11807,7 @@
                 <a:ea typeface="Meiryo"/>
                 <a:cs typeface="Meiryo"/>
               </a:rPr>
-              <a:t>速くはならなかった。が、HPC の教科書どおりの結論を、耳の中で定量的に再現できた。</a:t>
+              <a:t>計算は 4 コアぶん速くなった。が、その利得を Bluetooth の復帰待ちが丸ごと食った。</a:t>
             </a:r>
           </a:p>
         </p:txBody>
@@ -12101,7 +12317,7 @@
                 <a:ea typeface="Meiryo"/>
                 <a:cs typeface="Meiryo"/>
               </a:rPr>
-              <a:t>ソースが無くても仕様は確定できる</a:t>
+              <a:t>ノード内 2 コア並列も動いた</a:t>
             </a:r>
           </a:p>
         </p:txBody>
@@ -12142,7 +12358,7 @@
                 <a:ea typeface="Meiryo"/>
                 <a:cs typeface="Meiryo"/>
               </a:rPr>
-              <a:t>逆アセンブルで、ヘッダと食い違う実挙動を根拠付きで確定できた</a:t>
+              <a:t>第 2 コア (CP) で並列領域が走り、計算部分は 4 コアぶんの x3.1</a:t>
             </a:r>
           </a:p>
         </p:txBody>
@@ -12599,7 +12815,7 @@
                 <a:ea typeface="Meiryo"/>
                 <a:cs typeface="Meiryo"/>
               </a:rPr>
-              <a:t>ノード内 2 コア並列は未達</a:t>
+              <a:t>通信待ちを外す対策が未計測</a:t>
             </a:r>
           </a:p>
         </p:txBody>
@@ -12640,7 +12856,7 @@
                 <a:ea typeface="Meiryo"/>
                 <a:cs typeface="Meiryo"/>
               </a:rPr>
-              <a:t>OpenMP は逐次スタブのまま。2 個目のコアは音声処理と取り合いになる</a:t>
+              <a:t>比較ラン前に sniff を抜ける実装は入ったが、実機での効果はこれから</a:t>
             </a:r>
           </a:p>
         </p:txBody>
@@ -13516,7 +13732,7 @@
                 <a:ea typeface="Meiryo"/>
                 <a:cs typeface="Meiryo"/>
               </a:rPr>
-              <a:t>5 連タップで再実行、結果は Bluetooth で PC にワイヤレス配信</a:t>
+              <a:t>第 2 コアも動いた — 計算部分だけ見れば 4 コアぶんの x3.1</a:t>
             </a:r>
           </a:p>
         </p:txBody>
@@ -13598,7 +13814,7 @@
                 <a:ea typeface="Meiryo"/>
                 <a:cs typeface="Meiryo"/>
               </a:rPr>
-              <a:t>速くはならなかった — が、理由は定量的に説明できる</a:t>
+              <a:t>全体では速くならなかった — 利得を通信待ちが食った。理由は説明できる</a:t>
             </a:r>
           </a:p>
         </p:txBody>
@@ -13727,7 +13943,7 @@
                 <a:ea typeface="Meiryo"/>
                 <a:cs typeface="Meiryo"/>
               </a:rPr>
-              <a:t>① ノード内 2 コア並列</a:t>
+              <a:t>① 通信待ちを外す</a:t>
             </a:r>
           </a:p>
         </p:txBody>
@@ -13768,8 +13984,8 @@
                 <a:ea typeface="Meiryo"/>
                 <a:cs typeface="Meiryo"/>
               </a:rPr>
-              <a:t>2 個目のコアを音声処理と
-どう分け合うかが論点</a:t>
+              <a:t>比較ランの前に省電力から
+起こす。実装済み・計測待ち</a:t>
             </a:r>
           </a:p>
         </p:txBody>
@@ -14843,7 +15059,7 @@
                 <a:ea typeface="Meiryo"/>
                 <a:cs typeface="Meiryo"/>
               </a:rPr>
-              <a:t>3.  標準 MPI API のベンチを、1 行も変えずに実機で PASS させた</a:t>
+              <a:t>3.  標準 MPI + OpenMP のベンチを、1 行も変えずに実機で PASS させた</a:t>
             </a:r>
           </a:p>
           <a:p>
@@ -14861,7 +15077,7 @@
                 <a:ea typeface="Meiryo"/>
                 <a:cs typeface="Meiryo"/>
               </a:rPr>
-              <a:t>     (OpenMP は API 互換のスタブ。ノード内 2 コア並列はまだ)</a:t>
+              <a:t>     ノード間は Bluetooth、ノード内は第 2 コア。計 4 コアで走った</a:t>
             </a:r>
           </a:p>
         </p:txBody>
@@ -14946,7 +15162,7 @@
                 <a:ea typeface="Meiryo"/>
                 <a:cs typeface="Meiryo"/>
               </a:rPr>
-              <a:t>2 ノード</a:t>
+              <a:t>2 ノード × 2 コア</a:t>
             </a:r>
           </a:p>
         </p:txBody>
@@ -14987,7 +15203,7 @@
                 <a:ea typeface="Meiryo"/>
                 <a:cs typeface="Meiryo"/>
               </a:rPr>
-              <a:t>右 = rank 0 / 左 = rank 1</a:t>
+              <a:t>計 4 コアで 1 つの行列積</a:t>
             </a:r>
           </a:p>
         </p:txBody>
@@ -15198,7 +15414,7 @@
                 <a:ea typeface="Meiryo"/>
                 <a:cs typeface="Meiryo"/>
               </a:rPr>
-              <a:t>max_payload 512 B</a:t>
+              <a:t>並列領域 x3.1</a:t>
             </a:r>
           </a:p>
         </p:txBody>
@@ -15239,7 +15455,7 @@
                 <a:ea typeface="Meiryo"/>
                 <a:cs typeface="Meiryo"/>
               </a:rPr>
-              <a:t>ヘッダ 300 / バイナリ 672 / 実測 512</a:t>
+              <a:t>計算部分は 4 コアぶん速くなった</a:t>
             </a:r>
           </a:p>
         </p:txBody>
@@ -16995,7 +17211,7 @@
                           <a:ea typeface="Meiryo"/>
                           <a:cs typeface="Meiryo"/>
                         </a:rPr>
-                        <a:t>2 コア並列 (未達)</a:t>
+                        <a:t>2 コア並列 (実測 x3.1)</a:t>
                       </a:r>
                     </a:p>
                   </a:txBody>
@@ -18572,7 +18788,7 @@
                 <a:ea typeface="Meiryo"/>
                 <a:cs typeface="Meiryo"/>
               </a:rPr>
-              <a:t>逐次スタブ。2 コア目は未使用</a:t>
+              <a:t>第 2 コア (CP) で並列領域を実行</a:t>
             </a:r>
           </a:p>
         </p:txBody>
@@ -23468,7 +23684,7 @@
                 <a:ea typeface="Meiryo"/>
                 <a:cs typeface="Meiryo"/>
               </a:rPr>
-              <a:t>$480</a:t>
+              <a:t>$490</a:t>
             </a:r>
           </a:p>
         </p:txBody>
@@ -23509,7 +23725,7 @@
                 <a:ea typeface="Meiryo"/>
                 <a:cs typeface="Meiryo"/>
               </a:rPr>
-              <a:t>API 料金換算。83% がプロンプトキャッシュ</a:t>
+              <a:t>API 料金換算。87% がプロンプトキャッシュ</a:t>
             </a:r>
           </a:p>
         </p:txBody>
@@ -23594,7 +23810,7 @@
                 <a:ea typeface="Meiryo"/>
                 <a:cs typeface="Meiryo"/>
               </a:rPr>
-              <a:t>103 コミット</a:t>
+              <a:t>112 コミット</a:t>
             </a:r>
           </a:p>
         </p:txBody>
@@ -23635,7 +23851,7 @@
                 <a:ea typeface="Meiryo"/>
                 <a:cs typeface="Meiryo"/>
               </a:rPr>
-              <a:t>うち 102 が Co-Authored-By: Claude</a:t>
+              <a:t>うち 111 が Co-Authored-By: Claude</a:t>
             </a:r>
           </a:p>
         </p:txBody>

--- a/slides/lt-ear-parallel.pptx
+++ b/slides/lt-ear-parallel.pptx
@@ -4,25 +4,29 @@
   <p:sldMasterIdLst>
     <p:sldMasterId id="2147483648" r:id="rId1"/>
   </p:sldMasterIdLst>
+  <p:notesMasterIdLst>
+    <p:notesMasterId r:id="rId19"/>
+  </p:notesMasterIdLst>
   <p:sldIdLst>
-    <p:sldId id="256" r:id="rId7"/>
-    <p:sldId id="257" r:id="rId9"/>
-    <p:sldId id="258" r:id="rId10"/>
-    <p:sldId id="259" r:id="rId11"/>
-    <p:sldId id="260" r:id="rId12"/>
-    <p:sldId id="261" r:id="rId13"/>
-    <p:sldId id="262" r:id="rId14"/>
-    <p:sldId id="263" r:id="rId15"/>
-    <p:sldId id="264" r:id="rId16"/>
-    <p:sldId id="265" r:id="rId17"/>
-    <p:sldId id="266" r:id="rId18"/>
-    <p:sldId id="267" r:id="rId19"/>
-    <p:sldId id="268" r:id="rId20"/>
-    <p:sldId id="269" r:id="rId21"/>
-    <p:sldId id="270" r:id="rId22"/>
-    <p:sldId id="271" r:id="rId23"/>
+    <p:sldId id="256" r:id="rId2"/>
+    <p:sldId id="257" r:id="rId3"/>
+    <p:sldId id="258" r:id="rId4"/>
+    <p:sldId id="259" r:id="rId5"/>
+    <p:sldId id="260" r:id="rId6"/>
+    <p:sldId id="272" r:id="rId7"/>
+    <p:sldId id="261" r:id="rId8"/>
+    <p:sldId id="262" r:id="rId9"/>
+    <p:sldId id="263" r:id="rId10"/>
+    <p:sldId id="264" r:id="rId11"/>
+    <p:sldId id="265" r:id="rId12"/>
+    <p:sldId id="266" r:id="rId13"/>
+    <p:sldId id="267" r:id="rId14"/>
+    <p:sldId id="268" r:id="rId15"/>
+    <p:sldId id="269" r:id="rId16"/>
+    <p:sldId id="270" r:id="rId17"/>
+    <p:sldId id="271" r:id="rId18"/>
   </p:sldIdLst>
-  <p:sldSz cx="12191695" cy="6858000" type="screen4x3"/>
+  <p:sldSz cx="12192000" cy="6858000"/>
   <p:notesSz cx="6858000" cy="9144000"/>
   <p:defaultTextStyle>
     <a:defPPr>
@@ -119,11 +123,27 @@
       </a:defRPr>
     </a:lvl9pPr>
   </p:defaultTextStyle>
+  <p:extLst>
+    <p:ext uri="{EFAFB233-063F-42B5-8137-9DF3F51BA10A}">
+      <p15:sldGuideLst xmlns:p15="http://schemas.microsoft.com/office/powerpoint/2012/main">
+        <p15:guide id="1" orient="horz" pos="2160">
+          <p15:clr>
+            <a:srgbClr val="A4A3A4"/>
+          </p15:clr>
+        </p15:guide>
+        <p15:guide id="2" pos="2880">
+          <p15:clr>
+            <a:srgbClr val="A4A3A4"/>
+          </p15:clr>
+        </p15:guide>
+      </p15:sldGuideLst>
+    </p:ext>
+  </p:extLst>
 </p:presentation>
 </file>
 
 <file path=ppt/notesMasters/notesMaster1.xml><?xml version="1.0" encoding="utf-8"?>
-<p:notesMaster xmlns:a="http://schemas.openxmlformats.org/drawingml/2006/main" xmlns:p="http://schemas.openxmlformats.org/presentationml/2006/main" xmlns:r="http://schemas.openxmlformats.org/officeDocument/2006/relationships">
+<p:notesMaster xmlns:a="http://schemas.openxmlformats.org/drawingml/2006/main" xmlns:r="http://schemas.openxmlformats.org/officeDocument/2006/relationships" xmlns:p="http://schemas.openxmlformats.org/presentationml/2006/main">
   <p:cSld>
     <p:bg>
       <p:bgRef idx="1001">
@@ -144,242 +164,17 @@
           <a:chExt cx="0" cy="0"/>
         </a:xfrm>
       </p:grpSpPr>
-      <p:sp>
-        <p:nvSpPr>
-          <p:cNvPr id="2" name="Header Placeholder 1"/>
-          <p:cNvSpPr>
-            <a:spLocks noGrp="1"/>
-          </p:cNvSpPr>
-          <p:nvPr>
-            <p:ph type="hdr" sz="quarter"/>
-          </p:nvPr>
-        </p:nvSpPr>
-        <p:spPr>
-          <a:xfrm>
-            <a:off x="0" y="0"/>
-            <a:ext cx="2971800" cy="457200"/>
-          </a:xfrm>
-          <a:prstGeom prst="rect">
-            <a:avLst/>
-          </a:prstGeom>
-        </p:spPr>
-        <p:txBody>
-          <a:bodyPr vert="horz" lIns="91440" tIns="45720" rIns="91440" bIns="45720" rtlCol="0"/>
-          <a:lstStyle>
-            <a:lvl1pPr algn="l">
-              <a:defRPr sz="1200"/>
-            </a:lvl1pPr>
-          </a:lstStyle>
-          <a:p>
-            <a:endParaRPr lang="en-US"/>
-          </a:p>
-        </p:txBody>
-      </p:sp>
-      <p:sp>
-        <p:nvSpPr>
-          <p:cNvPr id="3" name="Date Placeholder 2"/>
-          <p:cNvSpPr>
-            <a:spLocks noGrp="1"/>
-          </p:cNvSpPr>
-          <p:nvPr>
-            <p:ph type="dt" idx="1"/>
-          </p:nvPr>
-        </p:nvSpPr>
-        <p:spPr>
-          <a:xfrm>
-            <a:off x="3884613" y="0"/>
-            <a:ext cx="2971800" cy="457200"/>
-          </a:xfrm>
-          <a:prstGeom prst="rect">
-            <a:avLst/>
-          </a:prstGeom>
-        </p:spPr>
-        <p:txBody>
-          <a:bodyPr vert="horz" lIns="91440" tIns="45720" rIns="91440" bIns="45720" rtlCol="0"/>
-          <a:lstStyle>
-            <a:lvl1pPr algn="r">
-              <a:defRPr sz="1200"/>
-            </a:lvl1pPr>
-          </a:lstStyle>
-          <a:p>
-            <a:fld id="{0F89C1C7-3DCD-1040-A9CF-14679D8B5DDD}" type="datetimeFigureOut">
-              <a:rPr lang="en-US" smtClean="0"/>
-              <a:t>10/17/16</a:t>
-            </a:fld>
-            <a:endParaRPr lang="en-US"/>
-          </a:p>
-        </p:txBody>
-      </p:sp>
-      <p:sp>
-        <p:nvSpPr>
-          <p:cNvPr id="4" name="Slide Image Placeholder 3"/>
-          <p:cNvSpPr>
-            <a:spLocks noGrp="1" noRot="1" noChangeAspect="1"/>
-          </p:cNvSpPr>
-          <p:nvPr>
-            <p:ph type="sldImg" idx="2"/>
-          </p:nvPr>
-        </p:nvSpPr>
-        <p:spPr>
-          <a:xfrm>
-            <a:off x="1143000" y="685800"/>
-            <a:ext cx="4572000" cy="3429000"/>
-          </a:xfrm>
-          <a:prstGeom prst="rect">
-            <a:avLst/>
-          </a:prstGeom>
-          <a:noFill/>
-          <a:ln w="12700">
-            <a:solidFill>
-              <a:prstClr val="black"/>
-            </a:solidFill>
-          </a:ln>
-        </p:spPr>
-        <p:txBody>
-          <a:bodyPr vert="horz" lIns="91440" tIns="45720" rIns="91440" bIns="45720" rtlCol="0" anchor="ctr"/>
-          <a:lstStyle/>
-          <a:p>
-            <a:endParaRPr lang="en-US"/>
-          </a:p>
-        </p:txBody>
-      </p:sp>
-      <p:sp>
-        <p:nvSpPr>
-          <p:cNvPr id="5" name="Notes Placeholder 4"/>
-          <p:cNvSpPr>
-            <a:spLocks noGrp="1"/>
-          </p:cNvSpPr>
-          <p:nvPr>
-            <p:ph type="body" sz="quarter" idx="3"/>
-          </p:nvPr>
-        </p:nvSpPr>
-        <p:spPr>
-          <a:xfrm>
-            <a:off x="685800" y="4343400"/>
-            <a:ext cx="5486400" cy="4114800"/>
-          </a:xfrm>
-          <a:prstGeom prst="rect">
-            <a:avLst/>
-          </a:prstGeom>
-        </p:spPr>
-        <p:txBody>
-          <a:bodyPr vert="horz" lIns="91440" tIns="45720" rIns="91440" bIns="45720" rtlCol="0"/>
-          <a:lstStyle/>
-          <a:p>
-            <a:pPr lvl="0"/>
-            <a:r>
-              <a:rPr lang="en-US" smtClean="0"/>
-              <a:t>Click to edit Master text styles</a:t>
-            </a:r>
-          </a:p>
-          <a:p>
-            <a:pPr lvl="1"/>
-            <a:r>
-              <a:rPr lang="en-US" smtClean="0"/>
-              <a:t>Second level</a:t>
-            </a:r>
-          </a:p>
-          <a:p>
-            <a:pPr lvl="2"/>
-            <a:r>
-              <a:rPr lang="en-US" smtClean="0"/>
-              <a:t>Third level</a:t>
-            </a:r>
-          </a:p>
-          <a:p>
-            <a:pPr lvl="3"/>
-            <a:r>
-              <a:rPr lang="en-US" smtClean="0"/>
-              <a:t>Fourth level</a:t>
-            </a:r>
-          </a:p>
-          <a:p>
-            <a:pPr lvl="4"/>
-            <a:r>
-              <a:rPr lang="en-US" smtClean="0"/>
-              <a:t>Fifth level</a:t>
-            </a:r>
-            <a:endParaRPr lang="en-US"/>
-          </a:p>
-        </p:txBody>
-      </p:sp>
-      <p:sp>
-        <p:nvSpPr>
-          <p:cNvPr id="6" name="Footer Placeholder 5"/>
-          <p:cNvSpPr>
-            <a:spLocks noGrp="1"/>
-          </p:cNvSpPr>
-          <p:nvPr>
-            <p:ph type="ftr" sz="quarter" idx="4"/>
-          </p:nvPr>
-        </p:nvSpPr>
-        <p:spPr>
-          <a:xfrm>
-            <a:off x="0" y="8685213"/>
-            <a:ext cx="2971800" cy="457200"/>
-          </a:xfrm>
-          <a:prstGeom prst="rect">
-            <a:avLst/>
-          </a:prstGeom>
-        </p:spPr>
-        <p:txBody>
-          <a:bodyPr vert="horz" lIns="91440" tIns="45720" rIns="91440" bIns="45720" rtlCol="0" anchor="b"/>
-          <a:lstStyle>
-            <a:lvl1pPr algn="l">
-              <a:defRPr sz="1200"/>
-            </a:lvl1pPr>
-          </a:lstStyle>
-          <a:p>
-            <a:endParaRPr lang="en-US"/>
-          </a:p>
-        </p:txBody>
-      </p:sp>
-      <p:sp>
-        <p:nvSpPr>
-          <p:cNvPr id="7" name="Slide Number Placeholder 6"/>
-          <p:cNvSpPr>
-            <a:spLocks noGrp="1"/>
-          </p:cNvSpPr>
-          <p:nvPr>
-            <p:ph type="sldNum" sz="quarter" idx="5"/>
-          </p:nvPr>
-        </p:nvSpPr>
-        <p:spPr>
-          <a:xfrm>
-            <a:off x="3884613" y="8685213"/>
-            <a:ext cx="2971800" cy="457200"/>
-          </a:xfrm>
-          <a:prstGeom prst="rect">
-            <a:avLst/>
-          </a:prstGeom>
-        </p:spPr>
-        <p:txBody>
-          <a:bodyPr vert="horz" lIns="91440" tIns="45720" rIns="91440" bIns="45720" rtlCol="0" anchor="b"/>
-          <a:lstStyle>
-            <a:lvl1pPr algn="r">
-              <a:defRPr sz="1200"/>
-            </a:lvl1pPr>
-          </a:lstStyle>
-          <a:p>
-            <a:fld id="{BB5E49A5-4136-284D-997B-48E1D791AD67}" type="slidenum">
-              <a:rPr lang="en-US" smtClean="0"/>
-              <a:t>‹#›</a:t>
-            </a:fld>
-            <a:endParaRPr lang="en-US"/>
-          </a:p>
-        </p:txBody>
-      </p:sp>
     </p:spTree>
     <p:extLst>
       <p:ext uri="{BB962C8B-B14F-4D97-AF65-F5344CB8AC3E}">
-        <p14:creationId xmlns:p14="http://schemas.microsoft.com/office/powerpoint/2010/main" val="2623252185"/>
+        <p14:creationId xmlns:p14="http://schemas.microsoft.com/office/powerpoint/2010/main" val="2844034115"/>
       </p:ext>
     </p:extLst>
   </p:cSld>
   <p:clrMap bg1="lt1" tx1="dk1" bg2="lt2" tx2="dk2" accent1="accent1" accent2="accent2" accent3="accent3" accent4="accent4" accent5="accent5" accent6="accent6" hlink="hlink" folHlink="folHlink"/>
   <p:notesStyle>
-    <a:lvl1pPr marL="0" algn="l" defTabSz="457200" rtl="0" eaLnBrk="1" latinLnBrk="0" hangingPunct="1">
-      <a:defRPr sz="1200" kern="1200">
+    <a:lvl1pPr marL="0" algn="l" defTabSz="914400" rtl="0" eaLnBrk="1" latinLnBrk="0" hangingPunct="1">
+      <a:defRPr kumimoji="1" sz="1200" kern="1200">
         <a:solidFill>
           <a:schemeClr val="tx1"/>
         </a:solidFill>
@@ -388,8 +183,8 @@
         <a:cs typeface="+mn-cs"/>
       </a:defRPr>
     </a:lvl1pPr>
-    <a:lvl2pPr marL="457200" algn="l" defTabSz="457200" rtl="0" eaLnBrk="1" latinLnBrk="0" hangingPunct="1">
-      <a:defRPr sz="1200" kern="1200">
+    <a:lvl2pPr marL="457200" algn="l" defTabSz="914400" rtl="0" eaLnBrk="1" latinLnBrk="0" hangingPunct="1">
+      <a:defRPr kumimoji="1" sz="1200" kern="1200">
         <a:solidFill>
           <a:schemeClr val="tx1"/>
         </a:solidFill>
@@ -398,8 +193,8 @@
         <a:cs typeface="+mn-cs"/>
       </a:defRPr>
     </a:lvl2pPr>
-    <a:lvl3pPr marL="914400" algn="l" defTabSz="457200" rtl="0" eaLnBrk="1" latinLnBrk="0" hangingPunct="1">
-      <a:defRPr sz="1200" kern="1200">
+    <a:lvl3pPr marL="914400" algn="l" defTabSz="914400" rtl="0" eaLnBrk="1" latinLnBrk="0" hangingPunct="1">
+      <a:defRPr kumimoji="1" sz="1200" kern="1200">
         <a:solidFill>
           <a:schemeClr val="tx1"/>
         </a:solidFill>
@@ -408,8 +203,8 @@
         <a:cs typeface="+mn-cs"/>
       </a:defRPr>
     </a:lvl3pPr>
-    <a:lvl4pPr marL="1371600" algn="l" defTabSz="457200" rtl="0" eaLnBrk="1" latinLnBrk="0" hangingPunct="1">
-      <a:defRPr sz="1200" kern="1200">
+    <a:lvl4pPr marL="1371600" algn="l" defTabSz="914400" rtl="0" eaLnBrk="1" latinLnBrk="0" hangingPunct="1">
+      <a:defRPr kumimoji="1" sz="1200" kern="1200">
         <a:solidFill>
           <a:schemeClr val="tx1"/>
         </a:solidFill>
@@ -418,8 +213,8 @@
         <a:cs typeface="+mn-cs"/>
       </a:defRPr>
     </a:lvl4pPr>
-    <a:lvl5pPr marL="1828800" algn="l" defTabSz="457200" rtl="0" eaLnBrk="1" latinLnBrk="0" hangingPunct="1">
-      <a:defRPr sz="1200" kern="1200">
+    <a:lvl5pPr marL="1828800" algn="l" defTabSz="914400" rtl="0" eaLnBrk="1" latinLnBrk="0" hangingPunct="1">
+      <a:defRPr kumimoji="1" sz="1200" kern="1200">
         <a:solidFill>
           <a:schemeClr val="tx1"/>
         </a:solidFill>
@@ -428,8 +223,8 @@
         <a:cs typeface="+mn-cs"/>
       </a:defRPr>
     </a:lvl5pPr>
-    <a:lvl6pPr marL="2286000" algn="l" defTabSz="457200" rtl="0" eaLnBrk="1" latinLnBrk="0" hangingPunct="1">
-      <a:defRPr sz="1200" kern="1200">
+    <a:lvl6pPr marL="2286000" algn="l" defTabSz="914400" rtl="0" eaLnBrk="1" latinLnBrk="0" hangingPunct="1">
+      <a:defRPr kumimoji="1" sz="1200" kern="1200">
         <a:solidFill>
           <a:schemeClr val="tx1"/>
         </a:solidFill>
@@ -438,8 +233,8 @@
         <a:cs typeface="+mn-cs"/>
       </a:defRPr>
     </a:lvl6pPr>
-    <a:lvl7pPr marL="2743200" algn="l" defTabSz="457200" rtl="0" eaLnBrk="1" latinLnBrk="0" hangingPunct="1">
-      <a:defRPr sz="1200" kern="1200">
+    <a:lvl7pPr marL="2743200" algn="l" defTabSz="914400" rtl="0" eaLnBrk="1" latinLnBrk="0" hangingPunct="1">
+      <a:defRPr kumimoji="1" sz="1200" kern="1200">
         <a:solidFill>
           <a:schemeClr val="tx1"/>
         </a:solidFill>
@@ -448,8 +243,8 @@
         <a:cs typeface="+mn-cs"/>
       </a:defRPr>
     </a:lvl7pPr>
-    <a:lvl8pPr marL="3200400" algn="l" defTabSz="457200" rtl="0" eaLnBrk="1" latinLnBrk="0" hangingPunct="1">
-      <a:defRPr sz="1200" kern="1200">
+    <a:lvl8pPr marL="3200400" algn="l" defTabSz="914400" rtl="0" eaLnBrk="1" latinLnBrk="0" hangingPunct="1">
+      <a:defRPr kumimoji="1" sz="1200" kern="1200">
         <a:solidFill>
           <a:schemeClr val="tx1"/>
         </a:solidFill>
@@ -458,8 +253,8 @@
         <a:cs typeface="+mn-cs"/>
       </a:defRPr>
     </a:lvl8pPr>
-    <a:lvl9pPr marL="3657600" algn="l" defTabSz="457200" rtl="0" eaLnBrk="1" latinLnBrk="0" hangingPunct="1">
-      <a:defRPr sz="1200" kern="1200">
+    <a:lvl9pPr marL="3657600" algn="l" defTabSz="914400" rtl="0" eaLnBrk="1" latinLnBrk="0" hangingPunct="1">
+      <a:defRPr kumimoji="1" sz="1200" kern="1200">
         <a:solidFill>
           <a:schemeClr val="tx1"/>
         </a:solidFill>
@@ -473,7 +268,7 @@
 </file>
 
 <file path=ppt/notesSlides/notesSlide1.xml><?xml version="1.0" encoding="utf-8"?>
-<p:notes xmlns:a="http://schemas.openxmlformats.org/drawingml/2006/main" xmlns:p="http://schemas.openxmlformats.org/presentationml/2006/main" xmlns:r="http://schemas.openxmlformats.org/officeDocument/2006/relationships">
+<p:notes xmlns:a="http://schemas.openxmlformats.org/drawingml/2006/main" xmlns:r="http://schemas.openxmlformats.org/officeDocument/2006/relationships" xmlns:p="http://schemas.openxmlformats.org/presentationml/2006/main">
   <p:cSld>
     <p:spTree>
       <p:nvGrpSpPr>
@@ -493,7 +288,7 @@
         <p:nvSpPr>
           <p:cNvPr id="2" name="Slide Image Placeholder 1"/>
           <p:cNvSpPr>
-            <a:spLocks noGrp="1"/>
+            <a:spLocks noGrp="1" noRot="1" noChangeAspect="1"/>
           </p:cNvSpPr>
           <p:nvPr>
             <p:ph type="sldImg" idx="2"/>
@@ -508,7 +303,7 @@
             <a:spLocks noGrp="1"/>
           </p:cNvSpPr>
           <p:nvPr>
-            <p:ph type="body" idx="3" sz="quarter"/>
+            <p:ph type="body" sz="quarter" idx="3"/>
           </p:nvPr>
         </p:nvSpPr>
         <p:spPr/>
@@ -529,7 +324,7 @@
             <a:spLocks noGrp="1"/>
           </p:cNvSpPr>
           <p:nvPr>
-            <p:ph type="sldNum" idx="5" sz="quarter"/>
+            <p:ph type="sldNum" sz="quarter" idx="5"/>
           </p:nvPr>
         </p:nvSpPr>
         <p:spPr/>
@@ -543,7 +338,7 @@
 </file>
 
 <file path=ppt/notesSlides/notesSlide10.xml><?xml version="1.0" encoding="utf-8"?>
-<p:notes xmlns:a="http://schemas.openxmlformats.org/drawingml/2006/main" xmlns:p="http://schemas.openxmlformats.org/presentationml/2006/main" xmlns:r="http://schemas.openxmlformats.org/officeDocument/2006/relationships">
+<p:notes xmlns:a="http://schemas.openxmlformats.org/drawingml/2006/main" xmlns:r="http://schemas.openxmlformats.org/officeDocument/2006/relationships" xmlns:p="http://schemas.openxmlformats.org/presentationml/2006/main">
   <p:cSld>
     <p:spTree>
       <p:nvGrpSpPr>
@@ -563,7 +358,7 @@
         <p:nvSpPr>
           <p:cNvPr id="2" name="Slide Image Placeholder 1"/>
           <p:cNvSpPr>
-            <a:spLocks noGrp="1"/>
+            <a:spLocks noGrp="1" noRot="1" noChangeAspect="1"/>
           </p:cNvSpPr>
           <p:nvPr>
             <p:ph type="sldImg" idx="2"/>
@@ -578,7 +373,7 @@
             <a:spLocks noGrp="1"/>
           </p:cNvSpPr>
           <p:nvPr>
-            <p:ph type="body" idx="3" sz="quarter"/>
+            <p:ph type="body" sz="quarter" idx="3"/>
           </p:nvPr>
         </p:nvSpPr>
         <p:spPr/>
@@ -599,7 +394,7 @@
             <a:spLocks noGrp="1"/>
           </p:cNvSpPr>
           <p:nvPr>
-            <p:ph type="sldNum" idx="5" sz="quarter"/>
+            <p:ph type="sldNum" sz="quarter" idx="5"/>
           </p:nvPr>
         </p:nvSpPr>
         <p:spPr/>
@@ -613,7 +408,7 @@
 </file>
 
 <file path=ppt/notesSlides/notesSlide11.xml><?xml version="1.0" encoding="utf-8"?>
-<p:notes xmlns:a="http://schemas.openxmlformats.org/drawingml/2006/main" xmlns:p="http://schemas.openxmlformats.org/presentationml/2006/main" xmlns:r="http://schemas.openxmlformats.org/officeDocument/2006/relationships">
+<p:notes xmlns:a="http://schemas.openxmlformats.org/drawingml/2006/main" xmlns:r="http://schemas.openxmlformats.org/officeDocument/2006/relationships" xmlns:p="http://schemas.openxmlformats.org/presentationml/2006/main">
   <p:cSld>
     <p:spTree>
       <p:nvGrpSpPr>
@@ -633,7 +428,7 @@
         <p:nvSpPr>
           <p:cNvPr id="2" name="Slide Image Placeholder 1"/>
           <p:cNvSpPr>
-            <a:spLocks noGrp="1"/>
+            <a:spLocks noGrp="1" noRot="1" noChangeAspect="1"/>
           </p:cNvSpPr>
           <p:nvPr>
             <p:ph type="sldImg" idx="2"/>
@@ -648,7 +443,7 @@
             <a:spLocks noGrp="1"/>
           </p:cNvSpPr>
           <p:nvPr>
-            <p:ph type="body" idx="3" sz="quarter"/>
+            <p:ph type="body" sz="quarter" idx="3"/>
           </p:nvPr>
         </p:nvSpPr>
         <p:spPr/>
@@ -669,7 +464,7 @@
             <a:spLocks noGrp="1"/>
           </p:cNvSpPr>
           <p:nvPr>
-            <p:ph type="sldNum" idx="5" sz="quarter"/>
+            <p:ph type="sldNum" sz="quarter" idx="5"/>
           </p:nvPr>
         </p:nvSpPr>
         <p:spPr/>
@@ -683,7 +478,7 @@
 </file>
 
 <file path=ppt/notesSlides/notesSlide12.xml><?xml version="1.0" encoding="utf-8"?>
-<p:notes xmlns:a="http://schemas.openxmlformats.org/drawingml/2006/main" xmlns:p="http://schemas.openxmlformats.org/presentationml/2006/main" xmlns:r="http://schemas.openxmlformats.org/officeDocument/2006/relationships">
+<p:notes xmlns:a="http://schemas.openxmlformats.org/drawingml/2006/main" xmlns:r="http://schemas.openxmlformats.org/officeDocument/2006/relationships" xmlns:p="http://schemas.openxmlformats.org/presentationml/2006/main">
   <p:cSld>
     <p:spTree>
       <p:nvGrpSpPr>
@@ -703,7 +498,7 @@
         <p:nvSpPr>
           <p:cNvPr id="2" name="Slide Image Placeholder 1"/>
           <p:cNvSpPr>
-            <a:spLocks noGrp="1"/>
+            <a:spLocks noGrp="1" noRot="1" noChangeAspect="1"/>
           </p:cNvSpPr>
           <p:nvPr>
             <p:ph type="sldImg" idx="2"/>
@@ -718,7 +513,7 @@
             <a:spLocks noGrp="1"/>
           </p:cNvSpPr>
           <p:nvPr>
-            <p:ph type="body" idx="3" sz="quarter"/>
+            <p:ph type="body" sz="quarter" idx="3"/>
           </p:nvPr>
         </p:nvSpPr>
         <p:spPr/>
@@ -739,7 +534,7 @@
             <a:spLocks noGrp="1"/>
           </p:cNvSpPr>
           <p:nvPr>
-            <p:ph type="sldNum" idx="5" sz="quarter"/>
+            <p:ph type="sldNum" sz="quarter" idx="5"/>
           </p:nvPr>
         </p:nvSpPr>
         <p:spPr/>
@@ -753,7 +548,7 @@
 </file>
 
 <file path=ppt/notesSlides/notesSlide13.xml><?xml version="1.0" encoding="utf-8"?>
-<p:notes xmlns:a="http://schemas.openxmlformats.org/drawingml/2006/main" xmlns:p="http://schemas.openxmlformats.org/presentationml/2006/main" xmlns:r="http://schemas.openxmlformats.org/officeDocument/2006/relationships">
+<p:notes xmlns:a="http://schemas.openxmlformats.org/drawingml/2006/main" xmlns:r="http://schemas.openxmlformats.org/officeDocument/2006/relationships" xmlns:p="http://schemas.openxmlformats.org/presentationml/2006/main">
   <p:cSld>
     <p:spTree>
       <p:nvGrpSpPr>
@@ -773,7 +568,7 @@
         <p:nvSpPr>
           <p:cNvPr id="2" name="Slide Image Placeholder 1"/>
           <p:cNvSpPr>
-            <a:spLocks noGrp="1"/>
+            <a:spLocks noGrp="1" noRot="1" noChangeAspect="1"/>
           </p:cNvSpPr>
           <p:nvPr>
             <p:ph type="sldImg" idx="2"/>
@@ -788,7 +583,7 @@
             <a:spLocks noGrp="1"/>
           </p:cNvSpPr>
           <p:nvPr>
-            <p:ph type="body" idx="3" sz="quarter"/>
+            <p:ph type="body" sz="quarter" idx="3"/>
           </p:nvPr>
         </p:nvSpPr>
         <p:spPr/>
@@ -809,7 +604,7 @@
             <a:spLocks noGrp="1"/>
           </p:cNvSpPr>
           <p:nvPr>
-            <p:ph type="sldNum" idx="5" sz="quarter"/>
+            <p:ph type="sldNum" sz="quarter" idx="5"/>
           </p:nvPr>
         </p:nvSpPr>
         <p:spPr/>
@@ -823,7 +618,7 @@
 </file>
 
 <file path=ppt/notesSlides/notesSlide14.xml><?xml version="1.0" encoding="utf-8"?>
-<p:notes xmlns:a="http://schemas.openxmlformats.org/drawingml/2006/main" xmlns:p="http://schemas.openxmlformats.org/presentationml/2006/main" xmlns:r="http://schemas.openxmlformats.org/officeDocument/2006/relationships">
+<p:notes xmlns:a="http://schemas.openxmlformats.org/drawingml/2006/main" xmlns:r="http://schemas.openxmlformats.org/officeDocument/2006/relationships" xmlns:p="http://schemas.openxmlformats.org/presentationml/2006/main">
   <p:cSld>
     <p:spTree>
       <p:nvGrpSpPr>
@@ -843,7 +638,7 @@
         <p:nvSpPr>
           <p:cNvPr id="2" name="Slide Image Placeholder 1"/>
           <p:cNvSpPr>
-            <a:spLocks noGrp="1"/>
+            <a:spLocks noGrp="1" noRot="1" noChangeAspect="1"/>
           </p:cNvSpPr>
           <p:nvPr>
             <p:ph type="sldImg" idx="2"/>
@@ -858,7 +653,7 @@
             <a:spLocks noGrp="1"/>
           </p:cNvSpPr>
           <p:nvPr>
-            <p:ph type="body" idx="3" sz="quarter"/>
+            <p:ph type="body" sz="quarter" idx="3"/>
           </p:nvPr>
         </p:nvSpPr>
         <p:spPr/>
@@ -879,7 +674,7 @@
             <a:spLocks noGrp="1"/>
           </p:cNvSpPr>
           <p:nvPr>
-            <p:ph type="sldNum" idx="5" sz="quarter"/>
+            <p:ph type="sldNum" sz="quarter" idx="5"/>
           </p:nvPr>
         </p:nvSpPr>
         <p:spPr/>
@@ -893,7 +688,7 @@
 </file>
 
 <file path=ppt/notesSlides/notesSlide15.xml><?xml version="1.0" encoding="utf-8"?>
-<p:notes xmlns:a="http://schemas.openxmlformats.org/drawingml/2006/main" xmlns:p="http://schemas.openxmlformats.org/presentationml/2006/main" xmlns:r="http://schemas.openxmlformats.org/officeDocument/2006/relationships">
+<p:notes xmlns:a="http://schemas.openxmlformats.org/drawingml/2006/main" xmlns:r="http://schemas.openxmlformats.org/officeDocument/2006/relationships" xmlns:p="http://schemas.openxmlformats.org/presentationml/2006/main">
   <p:cSld>
     <p:spTree>
       <p:nvGrpSpPr>
@@ -913,7 +708,7 @@
         <p:nvSpPr>
           <p:cNvPr id="2" name="Slide Image Placeholder 1"/>
           <p:cNvSpPr>
-            <a:spLocks noGrp="1"/>
+            <a:spLocks noGrp="1" noRot="1" noChangeAspect="1"/>
           </p:cNvSpPr>
           <p:nvPr>
             <p:ph type="sldImg" idx="2"/>
@@ -928,7 +723,7 @@
             <a:spLocks noGrp="1"/>
           </p:cNvSpPr>
           <p:nvPr>
-            <p:ph type="body" idx="3" sz="quarter"/>
+            <p:ph type="body" sz="quarter" idx="3"/>
           </p:nvPr>
         </p:nvSpPr>
         <p:spPr/>
@@ -949,7 +744,7 @@
             <a:spLocks noGrp="1"/>
           </p:cNvSpPr>
           <p:nvPr>
-            <p:ph type="sldNum" idx="5" sz="quarter"/>
+            <p:ph type="sldNum" sz="quarter" idx="5"/>
           </p:nvPr>
         </p:nvSpPr>
         <p:spPr/>
@@ -963,7 +758,7 @@
 </file>
 
 <file path=ppt/notesSlides/notesSlide16.xml><?xml version="1.0" encoding="utf-8"?>
-<p:notes xmlns:a="http://schemas.openxmlformats.org/drawingml/2006/main" xmlns:p="http://schemas.openxmlformats.org/presentationml/2006/main" xmlns:r="http://schemas.openxmlformats.org/officeDocument/2006/relationships">
+<p:notes xmlns:a="http://schemas.openxmlformats.org/drawingml/2006/main" xmlns:r="http://schemas.openxmlformats.org/officeDocument/2006/relationships" xmlns:p="http://schemas.openxmlformats.org/presentationml/2006/main">
   <p:cSld>
     <p:spTree>
       <p:nvGrpSpPr>
@@ -983,7 +778,7 @@
         <p:nvSpPr>
           <p:cNvPr id="2" name="Slide Image Placeholder 1"/>
           <p:cNvSpPr>
-            <a:spLocks noGrp="1"/>
+            <a:spLocks noGrp="1" noRot="1" noChangeAspect="1"/>
           </p:cNvSpPr>
           <p:nvPr>
             <p:ph type="sldImg" idx="2"/>
@@ -998,7 +793,7 @@
             <a:spLocks noGrp="1"/>
           </p:cNvSpPr>
           <p:nvPr>
-            <p:ph type="body" idx="3" sz="quarter"/>
+            <p:ph type="body" sz="quarter" idx="3"/>
           </p:nvPr>
         </p:nvSpPr>
         <p:spPr/>
@@ -1019,7 +814,7 @@
             <a:spLocks noGrp="1"/>
           </p:cNvSpPr>
           <p:nvPr>
-            <p:ph type="sldNum" idx="5" sz="quarter"/>
+            <p:ph type="sldNum" sz="quarter" idx="5"/>
           </p:nvPr>
         </p:nvSpPr>
         <p:spPr/>
@@ -1033,7 +828,7 @@
 </file>
 
 <file path=ppt/notesSlides/notesSlide2.xml><?xml version="1.0" encoding="utf-8"?>
-<p:notes xmlns:a="http://schemas.openxmlformats.org/drawingml/2006/main" xmlns:p="http://schemas.openxmlformats.org/presentationml/2006/main" xmlns:r="http://schemas.openxmlformats.org/officeDocument/2006/relationships">
+<p:notes xmlns:a="http://schemas.openxmlformats.org/drawingml/2006/main" xmlns:r="http://schemas.openxmlformats.org/officeDocument/2006/relationships" xmlns:p="http://schemas.openxmlformats.org/presentationml/2006/main">
   <p:cSld>
     <p:spTree>
       <p:nvGrpSpPr>
@@ -1053,7 +848,7 @@
         <p:nvSpPr>
           <p:cNvPr id="2" name="Slide Image Placeholder 1"/>
           <p:cNvSpPr>
-            <a:spLocks noGrp="1"/>
+            <a:spLocks noGrp="1" noRot="1" noChangeAspect="1"/>
           </p:cNvSpPr>
           <p:nvPr>
             <p:ph type="sldImg" idx="2"/>
@@ -1068,7 +863,7 @@
             <a:spLocks noGrp="1"/>
           </p:cNvSpPr>
           <p:nvPr>
-            <p:ph type="body" idx="3" sz="quarter"/>
+            <p:ph type="body" sz="quarter" idx="3"/>
           </p:nvPr>
         </p:nvSpPr>
         <p:spPr/>
@@ -1089,7 +884,7 @@
             <a:spLocks noGrp="1"/>
           </p:cNvSpPr>
           <p:nvPr>
-            <p:ph type="sldNum" idx="5" sz="quarter"/>
+            <p:ph type="sldNum" sz="quarter" idx="5"/>
           </p:nvPr>
         </p:nvSpPr>
         <p:spPr/>
@@ -1103,7 +898,7 @@
 </file>
 
 <file path=ppt/notesSlides/notesSlide3.xml><?xml version="1.0" encoding="utf-8"?>
-<p:notes xmlns:a="http://schemas.openxmlformats.org/drawingml/2006/main" xmlns:p="http://schemas.openxmlformats.org/presentationml/2006/main" xmlns:r="http://schemas.openxmlformats.org/officeDocument/2006/relationships">
+<p:notes xmlns:a="http://schemas.openxmlformats.org/drawingml/2006/main" xmlns:r="http://schemas.openxmlformats.org/officeDocument/2006/relationships" xmlns:p="http://schemas.openxmlformats.org/presentationml/2006/main">
   <p:cSld>
     <p:spTree>
       <p:nvGrpSpPr>
@@ -1123,7 +918,7 @@
         <p:nvSpPr>
           <p:cNvPr id="2" name="Slide Image Placeholder 1"/>
           <p:cNvSpPr>
-            <a:spLocks noGrp="1"/>
+            <a:spLocks noGrp="1" noRot="1" noChangeAspect="1"/>
           </p:cNvSpPr>
           <p:nvPr>
             <p:ph type="sldImg" idx="2"/>
@@ -1138,7 +933,7 @@
             <a:spLocks noGrp="1"/>
           </p:cNvSpPr>
           <p:nvPr>
-            <p:ph type="body" idx="3" sz="quarter"/>
+            <p:ph type="body" sz="quarter" idx="3"/>
           </p:nvPr>
         </p:nvSpPr>
         <p:spPr/>
@@ -1159,7 +954,7 @@
             <a:spLocks noGrp="1"/>
           </p:cNvSpPr>
           <p:nvPr>
-            <p:ph type="sldNum" idx="5" sz="quarter"/>
+            <p:ph type="sldNum" sz="quarter" idx="5"/>
           </p:nvPr>
         </p:nvSpPr>
         <p:spPr/>
@@ -1173,7 +968,7 @@
 </file>
 
 <file path=ppt/notesSlides/notesSlide4.xml><?xml version="1.0" encoding="utf-8"?>
-<p:notes xmlns:a="http://schemas.openxmlformats.org/drawingml/2006/main" xmlns:p="http://schemas.openxmlformats.org/presentationml/2006/main" xmlns:r="http://schemas.openxmlformats.org/officeDocument/2006/relationships">
+<p:notes xmlns:a="http://schemas.openxmlformats.org/drawingml/2006/main" xmlns:r="http://schemas.openxmlformats.org/officeDocument/2006/relationships" xmlns:p="http://schemas.openxmlformats.org/presentationml/2006/main">
   <p:cSld>
     <p:spTree>
       <p:nvGrpSpPr>
@@ -1193,7 +988,7 @@
         <p:nvSpPr>
           <p:cNvPr id="2" name="Slide Image Placeholder 1"/>
           <p:cNvSpPr>
-            <a:spLocks noGrp="1"/>
+            <a:spLocks noGrp="1" noRot="1" noChangeAspect="1"/>
           </p:cNvSpPr>
           <p:nvPr>
             <p:ph type="sldImg" idx="2"/>
@@ -1208,7 +1003,7 @@
             <a:spLocks noGrp="1"/>
           </p:cNvSpPr>
           <p:nvPr>
-            <p:ph type="body" idx="3" sz="quarter"/>
+            <p:ph type="body" sz="quarter" idx="3"/>
           </p:nvPr>
         </p:nvSpPr>
         <p:spPr/>
@@ -1229,7 +1024,7 @@
             <a:spLocks noGrp="1"/>
           </p:cNvSpPr>
           <p:nvPr>
-            <p:ph type="sldNum" idx="5" sz="quarter"/>
+            <p:ph type="sldNum" sz="quarter" idx="5"/>
           </p:nvPr>
         </p:nvSpPr>
         <p:spPr/>
@@ -1243,7 +1038,7 @@
 </file>
 
 <file path=ppt/notesSlides/notesSlide5.xml><?xml version="1.0" encoding="utf-8"?>
-<p:notes xmlns:a="http://schemas.openxmlformats.org/drawingml/2006/main" xmlns:p="http://schemas.openxmlformats.org/presentationml/2006/main" xmlns:r="http://schemas.openxmlformats.org/officeDocument/2006/relationships">
+<p:notes xmlns:a="http://schemas.openxmlformats.org/drawingml/2006/main" xmlns:r="http://schemas.openxmlformats.org/officeDocument/2006/relationships" xmlns:p="http://schemas.openxmlformats.org/presentationml/2006/main">
   <p:cSld>
     <p:spTree>
       <p:nvGrpSpPr>
@@ -1263,7 +1058,7 @@
         <p:nvSpPr>
           <p:cNvPr id="2" name="Slide Image Placeholder 1"/>
           <p:cNvSpPr>
-            <a:spLocks noGrp="1"/>
+            <a:spLocks noGrp="1" noRot="1" noChangeAspect="1"/>
           </p:cNvSpPr>
           <p:nvPr>
             <p:ph type="sldImg" idx="2"/>
@@ -1278,7 +1073,7 @@
             <a:spLocks noGrp="1"/>
           </p:cNvSpPr>
           <p:nvPr>
-            <p:ph type="body" idx="3" sz="quarter"/>
+            <p:ph type="body" sz="quarter" idx="3"/>
           </p:nvPr>
         </p:nvSpPr>
         <p:spPr/>
@@ -1299,7 +1094,7 @@
             <a:spLocks noGrp="1"/>
           </p:cNvSpPr>
           <p:nvPr>
-            <p:ph type="sldNum" idx="5" sz="quarter"/>
+            <p:ph type="sldNum" sz="quarter" idx="5"/>
           </p:nvPr>
         </p:nvSpPr>
         <p:spPr/>
@@ -1313,7 +1108,7 @@
 </file>
 
 <file path=ppt/notesSlides/notesSlide6.xml><?xml version="1.0" encoding="utf-8"?>
-<p:notes xmlns:a="http://schemas.openxmlformats.org/drawingml/2006/main" xmlns:p="http://schemas.openxmlformats.org/presentationml/2006/main" xmlns:r="http://schemas.openxmlformats.org/officeDocument/2006/relationships">
+<p:notes xmlns:a="http://schemas.openxmlformats.org/drawingml/2006/main" xmlns:r="http://schemas.openxmlformats.org/officeDocument/2006/relationships" xmlns:p="http://schemas.openxmlformats.org/presentationml/2006/main">
   <p:cSld>
     <p:spTree>
       <p:nvGrpSpPr>
@@ -1333,7 +1128,7 @@
         <p:nvSpPr>
           <p:cNvPr id="2" name="Slide Image Placeholder 1"/>
           <p:cNvSpPr>
-            <a:spLocks noGrp="1"/>
+            <a:spLocks noGrp="1" noRot="1" noChangeAspect="1"/>
           </p:cNvSpPr>
           <p:nvPr>
             <p:ph type="sldImg" idx="2"/>
@@ -1348,7 +1143,7 @@
             <a:spLocks noGrp="1"/>
           </p:cNvSpPr>
           <p:nvPr>
-            <p:ph type="body" idx="3" sz="quarter"/>
+            <p:ph type="body" sz="quarter" idx="3"/>
           </p:nvPr>
         </p:nvSpPr>
         <p:spPr/>
@@ -1369,7 +1164,7 @@
             <a:spLocks noGrp="1"/>
           </p:cNvSpPr>
           <p:nvPr>
-            <p:ph type="sldNum" idx="5" sz="quarter"/>
+            <p:ph type="sldNum" sz="quarter" idx="5"/>
           </p:nvPr>
         </p:nvSpPr>
         <p:spPr/>
@@ -1383,7 +1178,7 @@
 </file>
 
 <file path=ppt/notesSlides/notesSlide7.xml><?xml version="1.0" encoding="utf-8"?>
-<p:notes xmlns:a="http://schemas.openxmlformats.org/drawingml/2006/main" xmlns:p="http://schemas.openxmlformats.org/presentationml/2006/main" xmlns:r="http://schemas.openxmlformats.org/officeDocument/2006/relationships">
+<p:notes xmlns:a="http://schemas.openxmlformats.org/drawingml/2006/main" xmlns:r="http://schemas.openxmlformats.org/officeDocument/2006/relationships" xmlns:p="http://schemas.openxmlformats.org/presentationml/2006/main">
   <p:cSld>
     <p:spTree>
       <p:nvGrpSpPr>
@@ -1403,7 +1198,7 @@
         <p:nvSpPr>
           <p:cNvPr id="2" name="Slide Image Placeholder 1"/>
           <p:cNvSpPr>
-            <a:spLocks noGrp="1"/>
+            <a:spLocks noGrp="1" noRot="1" noChangeAspect="1"/>
           </p:cNvSpPr>
           <p:nvPr>
             <p:ph type="sldImg" idx="2"/>
@@ -1418,7 +1213,7 @@
             <a:spLocks noGrp="1"/>
           </p:cNvSpPr>
           <p:nvPr>
-            <p:ph type="body" idx="3" sz="quarter"/>
+            <p:ph type="body" sz="quarter" idx="3"/>
           </p:nvPr>
         </p:nvSpPr>
         <p:spPr/>
@@ -1439,7 +1234,7 @@
             <a:spLocks noGrp="1"/>
           </p:cNvSpPr>
           <p:nvPr>
-            <p:ph type="sldNum" idx="5" sz="quarter"/>
+            <p:ph type="sldNum" sz="quarter" idx="5"/>
           </p:nvPr>
         </p:nvSpPr>
         <p:spPr/>
@@ -1453,7 +1248,7 @@
 </file>
 
 <file path=ppt/notesSlides/notesSlide8.xml><?xml version="1.0" encoding="utf-8"?>
-<p:notes xmlns:a="http://schemas.openxmlformats.org/drawingml/2006/main" xmlns:p="http://schemas.openxmlformats.org/presentationml/2006/main" xmlns:r="http://schemas.openxmlformats.org/officeDocument/2006/relationships">
+<p:notes xmlns:a="http://schemas.openxmlformats.org/drawingml/2006/main" xmlns:r="http://schemas.openxmlformats.org/officeDocument/2006/relationships" xmlns:p="http://schemas.openxmlformats.org/presentationml/2006/main">
   <p:cSld>
     <p:spTree>
       <p:nvGrpSpPr>
@@ -1473,7 +1268,7 @@
         <p:nvSpPr>
           <p:cNvPr id="2" name="Slide Image Placeholder 1"/>
           <p:cNvSpPr>
-            <a:spLocks noGrp="1"/>
+            <a:spLocks noGrp="1" noRot="1" noChangeAspect="1"/>
           </p:cNvSpPr>
           <p:nvPr>
             <p:ph type="sldImg" idx="2"/>
@@ -1488,7 +1283,7 @@
             <a:spLocks noGrp="1"/>
           </p:cNvSpPr>
           <p:nvPr>
-            <p:ph type="body" idx="3" sz="quarter"/>
+            <p:ph type="body" sz="quarter" idx="3"/>
           </p:nvPr>
         </p:nvSpPr>
         <p:spPr/>
@@ -1509,7 +1304,7 @@
             <a:spLocks noGrp="1"/>
           </p:cNvSpPr>
           <p:nvPr>
-            <p:ph type="sldNum" idx="5" sz="quarter"/>
+            <p:ph type="sldNum" sz="quarter" idx="5"/>
           </p:nvPr>
         </p:nvSpPr>
         <p:spPr/>
@@ -1523,7 +1318,7 @@
 </file>
 
 <file path=ppt/notesSlides/notesSlide9.xml><?xml version="1.0" encoding="utf-8"?>
-<p:notes xmlns:a="http://schemas.openxmlformats.org/drawingml/2006/main" xmlns:p="http://schemas.openxmlformats.org/presentationml/2006/main" xmlns:r="http://schemas.openxmlformats.org/officeDocument/2006/relationships">
+<p:notes xmlns:a="http://schemas.openxmlformats.org/drawingml/2006/main" xmlns:r="http://schemas.openxmlformats.org/officeDocument/2006/relationships" xmlns:p="http://schemas.openxmlformats.org/presentationml/2006/main">
   <p:cSld>
     <p:spTree>
       <p:nvGrpSpPr>
@@ -1543,7 +1338,7 @@
         <p:nvSpPr>
           <p:cNvPr id="2" name="Slide Image Placeholder 1"/>
           <p:cNvSpPr>
-            <a:spLocks noGrp="1"/>
+            <a:spLocks noGrp="1" noRot="1" noChangeAspect="1"/>
           </p:cNvSpPr>
           <p:nvPr>
             <p:ph type="sldImg" idx="2"/>
@@ -1558,7 +1353,7 @@
             <a:spLocks noGrp="1"/>
           </p:cNvSpPr>
           <p:nvPr>
-            <p:ph type="body" idx="3" sz="quarter"/>
+            <p:ph type="body" sz="quarter" idx="3"/>
           </p:nvPr>
         </p:nvSpPr>
         <p:spPr/>
@@ -1579,7 +1374,7 @@
             <a:spLocks noGrp="1"/>
           </p:cNvSpPr>
           <p:nvPr>
-            <p:ph type="sldNum" idx="5" sz="quarter"/>
+            <p:ph type="sldNum" sz="quarter" idx="5"/>
           </p:nvPr>
         </p:nvSpPr>
         <p:spPr/>
@@ -1630,10 +1425,9 @@
           <a:lstStyle/>
           <a:p>
             <a:r>
-              <a:rPr lang="en-US" smtClean="0"/>
+              <a:rPr lang="en-US"/>
               <a:t>Click to edit Master title style</a:t>
             </a:r>
-            <a:endParaRPr lang="en-US"/>
           </a:p>
         </p:txBody>
       </p:sp>
@@ -1749,10 +1543,9 @@
           </a:lstStyle>
           <a:p>
             <a:r>
-              <a:rPr lang="en-US" smtClean="0"/>
+              <a:rPr lang="en-US"/>
               <a:t>Click to edit Master subtitle style</a:t>
             </a:r>
-            <a:endParaRPr lang="en-US"/>
           </a:p>
         </p:txBody>
       </p:sp>
@@ -1773,7 +1566,7 @@
           <a:p>
             <a:fld id="{5BCAD085-E8A6-8845-BD4E-CB4CCA059FC4}" type="datetimeFigureOut">
               <a:rPr lang="en-US" smtClean="0"/>
-              <a:t>1/27/13</a:t>
+              <a:t>9/1/2026</a:t>
             </a:fld>
             <a:endParaRPr lang="en-US"/>
           </a:p>
@@ -1867,10 +1660,9 @@
           <a:lstStyle/>
           <a:p>
             <a:r>
-              <a:rPr lang="en-US" smtClean="0"/>
+              <a:rPr lang="en-US"/>
               <a:t>Click to edit Master title style</a:t>
             </a:r>
-            <a:endParaRPr lang="en-US"/>
           </a:p>
         </p:txBody>
       </p:sp>
@@ -1891,38 +1683,37 @@
           <a:p>
             <a:pPr lvl="0"/>
             <a:r>
-              <a:rPr lang="en-US" smtClean="0"/>
+              <a:rPr lang="en-US"/>
               <a:t>Click to edit Master text styles</a:t>
             </a:r>
           </a:p>
           <a:p>
             <a:pPr lvl="1"/>
             <a:r>
-              <a:rPr lang="en-US" smtClean="0"/>
+              <a:rPr lang="en-US"/>
               <a:t>Second level</a:t>
             </a:r>
           </a:p>
           <a:p>
             <a:pPr lvl="2"/>
             <a:r>
-              <a:rPr lang="en-US" smtClean="0"/>
+              <a:rPr lang="en-US"/>
               <a:t>Third level</a:t>
             </a:r>
           </a:p>
           <a:p>
             <a:pPr lvl="3"/>
             <a:r>
-              <a:rPr lang="en-US" smtClean="0"/>
+              <a:rPr lang="en-US"/>
               <a:t>Fourth level</a:t>
             </a:r>
           </a:p>
           <a:p>
             <a:pPr lvl="4"/>
             <a:r>
-              <a:rPr lang="en-US" smtClean="0"/>
+              <a:rPr lang="en-US"/>
               <a:t>Fifth level</a:t>
             </a:r>
-            <a:endParaRPr lang="en-US"/>
           </a:p>
         </p:txBody>
       </p:sp>
@@ -1943,7 +1734,7 @@
           <a:p>
             <a:fld id="{5BCAD085-E8A6-8845-BD4E-CB4CCA059FC4}" type="datetimeFigureOut">
               <a:rPr lang="en-US" smtClean="0"/>
-              <a:t>1/27/13</a:t>
+              <a:t>9/1/2026</a:t>
             </a:fld>
             <a:endParaRPr lang="en-US"/>
           </a:p>
@@ -2042,10 +1833,9 @@
           <a:lstStyle/>
           <a:p>
             <a:r>
-              <a:rPr lang="en-US" smtClean="0"/>
+              <a:rPr lang="en-US"/>
               <a:t>Click to edit Master title style</a:t>
             </a:r>
-            <a:endParaRPr lang="en-US"/>
           </a:p>
         </p:txBody>
       </p:sp>
@@ -2071,38 +1861,37 @@
           <a:p>
             <a:pPr lvl="0"/>
             <a:r>
-              <a:rPr lang="en-US" smtClean="0"/>
+              <a:rPr lang="en-US"/>
               <a:t>Click to edit Master text styles</a:t>
             </a:r>
           </a:p>
           <a:p>
             <a:pPr lvl="1"/>
             <a:r>
-              <a:rPr lang="en-US" smtClean="0"/>
+              <a:rPr lang="en-US"/>
               <a:t>Second level</a:t>
             </a:r>
           </a:p>
           <a:p>
             <a:pPr lvl="2"/>
             <a:r>
-              <a:rPr lang="en-US" smtClean="0"/>
+              <a:rPr lang="en-US"/>
               <a:t>Third level</a:t>
             </a:r>
           </a:p>
           <a:p>
             <a:pPr lvl="3"/>
             <a:r>
-              <a:rPr lang="en-US" smtClean="0"/>
+              <a:rPr lang="en-US"/>
               <a:t>Fourth level</a:t>
             </a:r>
           </a:p>
           <a:p>
             <a:pPr lvl="4"/>
             <a:r>
-              <a:rPr lang="en-US" smtClean="0"/>
+              <a:rPr lang="en-US"/>
               <a:t>Fifth level</a:t>
             </a:r>
-            <a:endParaRPr lang="en-US"/>
           </a:p>
         </p:txBody>
       </p:sp>
@@ -2123,7 +1912,7 @@
           <a:p>
             <a:fld id="{5BCAD085-E8A6-8845-BD4E-CB4CCA059FC4}" type="datetimeFigureOut">
               <a:rPr lang="en-US" smtClean="0"/>
-              <a:t>1/27/13</a:t>
+              <a:t>9/1/2026</a:t>
             </a:fld>
             <a:endParaRPr lang="en-US"/>
           </a:p>
@@ -2217,10 +2006,9 @@
           <a:lstStyle/>
           <a:p>
             <a:r>
-              <a:rPr lang="en-US" smtClean="0"/>
+              <a:rPr lang="en-US"/>
               <a:t>Click to edit Master title style</a:t>
             </a:r>
-            <a:endParaRPr lang="en-US"/>
           </a:p>
         </p:txBody>
       </p:sp>
@@ -2241,38 +2029,37 @@
           <a:p>
             <a:pPr lvl="0"/>
             <a:r>
-              <a:rPr lang="en-US" smtClean="0"/>
+              <a:rPr lang="en-US"/>
               <a:t>Click to edit Master text styles</a:t>
             </a:r>
           </a:p>
           <a:p>
             <a:pPr lvl="1"/>
             <a:r>
-              <a:rPr lang="en-US" smtClean="0"/>
+              <a:rPr lang="en-US"/>
               <a:t>Second level</a:t>
             </a:r>
           </a:p>
           <a:p>
             <a:pPr lvl="2"/>
             <a:r>
-              <a:rPr lang="en-US" smtClean="0"/>
+              <a:rPr lang="en-US"/>
               <a:t>Third level</a:t>
             </a:r>
           </a:p>
           <a:p>
             <a:pPr lvl="3"/>
             <a:r>
-              <a:rPr lang="en-US" smtClean="0"/>
+              <a:rPr lang="en-US"/>
               <a:t>Fourth level</a:t>
             </a:r>
           </a:p>
           <a:p>
             <a:pPr lvl="4"/>
             <a:r>
-              <a:rPr lang="en-US" smtClean="0"/>
+              <a:rPr lang="en-US"/>
               <a:t>Fifth level</a:t>
             </a:r>
-            <a:endParaRPr lang="en-US"/>
           </a:p>
         </p:txBody>
       </p:sp>
@@ -2293,7 +2080,7 @@
           <a:p>
             <a:fld id="{5BCAD085-E8A6-8845-BD4E-CB4CCA059FC4}" type="datetimeFigureOut">
               <a:rPr lang="en-US" smtClean="0"/>
-              <a:t>1/27/13</a:t>
+              <a:t>9/1/2026</a:t>
             </a:fld>
             <a:endParaRPr lang="en-US"/>
           </a:p>
@@ -2396,10 +2183,9 @@
           </a:lstStyle>
           <a:p>
             <a:r>
-              <a:rPr lang="en-US" smtClean="0"/>
+              <a:rPr lang="en-US"/>
               <a:t>Click to edit Master title style</a:t>
             </a:r>
-            <a:endParaRPr lang="en-US"/>
           </a:p>
         </p:txBody>
       </p:sp>
@@ -2516,7 +2302,7 @@
           <a:p>
             <a:pPr lvl="0"/>
             <a:r>
-              <a:rPr lang="en-US" smtClean="0"/>
+              <a:rPr lang="en-US"/>
               <a:t>Click to edit Master text styles</a:t>
             </a:r>
           </a:p>
@@ -2539,7 +2325,7 @@
           <a:p>
             <a:fld id="{5BCAD085-E8A6-8845-BD4E-CB4CCA059FC4}" type="datetimeFigureOut">
               <a:rPr lang="en-US" smtClean="0"/>
-              <a:t>1/27/13</a:t>
+              <a:t>9/1/2026</a:t>
             </a:fld>
             <a:endParaRPr lang="en-US"/>
           </a:p>
@@ -2633,10 +2419,9 @@
           <a:lstStyle/>
           <a:p>
             <a:r>
-              <a:rPr lang="en-US" smtClean="0"/>
+              <a:rPr lang="en-US"/>
               <a:t>Click to edit Master title style</a:t>
             </a:r>
-            <a:endParaRPr lang="en-US"/>
           </a:p>
         </p:txBody>
       </p:sp>
@@ -2690,38 +2475,37 @@
           <a:p>
             <a:pPr lvl="0"/>
             <a:r>
-              <a:rPr lang="en-US" smtClean="0"/>
+              <a:rPr lang="en-US"/>
               <a:t>Click to edit Master text styles</a:t>
             </a:r>
           </a:p>
           <a:p>
             <a:pPr lvl="1"/>
             <a:r>
-              <a:rPr lang="en-US" smtClean="0"/>
+              <a:rPr lang="en-US"/>
               <a:t>Second level</a:t>
             </a:r>
           </a:p>
           <a:p>
             <a:pPr lvl="2"/>
             <a:r>
-              <a:rPr lang="en-US" smtClean="0"/>
+              <a:rPr lang="en-US"/>
               <a:t>Third level</a:t>
             </a:r>
           </a:p>
           <a:p>
             <a:pPr lvl="3"/>
             <a:r>
-              <a:rPr lang="en-US" smtClean="0"/>
+              <a:rPr lang="en-US"/>
               <a:t>Fourth level</a:t>
             </a:r>
           </a:p>
           <a:p>
             <a:pPr lvl="4"/>
             <a:r>
-              <a:rPr lang="en-US" smtClean="0"/>
+              <a:rPr lang="en-US"/>
               <a:t>Fifth level</a:t>
             </a:r>
-            <a:endParaRPr lang="en-US"/>
           </a:p>
         </p:txBody>
       </p:sp>
@@ -2775,38 +2559,37 @@
           <a:p>
             <a:pPr lvl="0"/>
             <a:r>
-              <a:rPr lang="en-US" smtClean="0"/>
+              <a:rPr lang="en-US"/>
               <a:t>Click to edit Master text styles</a:t>
             </a:r>
           </a:p>
           <a:p>
             <a:pPr lvl="1"/>
             <a:r>
-              <a:rPr lang="en-US" smtClean="0"/>
+              <a:rPr lang="en-US"/>
               <a:t>Second level</a:t>
             </a:r>
           </a:p>
           <a:p>
             <a:pPr lvl="2"/>
             <a:r>
-              <a:rPr lang="en-US" smtClean="0"/>
+              <a:rPr lang="en-US"/>
               <a:t>Third level</a:t>
             </a:r>
           </a:p>
           <a:p>
             <a:pPr lvl="3"/>
             <a:r>
-              <a:rPr lang="en-US" smtClean="0"/>
+              <a:rPr lang="en-US"/>
               <a:t>Fourth level</a:t>
             </a:r>
           </a:p>
           <a:p>
             <a:pPr lvl="4"/>
             <a:r>
-              <a:rPr lang="en-US" smtClean="0"/>
+              <a:rPr lang="en-US"/>
               <a:t>Fifth level</a:t>
             </a:r>
-            <a:endParaRPr lang="en-US"/>
           </a:p>
         </p:txBody>
       </p:sp>
@@ -2827,7 +2610,7 @@
           <a:p>
             <a:fld id="{5BCAD085-E8A6-8845-BD4E-CB4CCA059FC4}" type="datetimeFigureOut">
               <a:rPr lang="en-US" smtClean="0"/>
-              <a:t>1/27/13</a:t>
+              <a:t>9/1/2026</a:t>
             </a:fld>
             <a:endParaRPr lang="en-US"/>
           </a:p>
@@ -2925,10 +2708,9 @@
           </a:lstStyle>
           <a:p>
             <a:r>
-              <a:rPr lang="en-US" smtClean="0"/>
+              <a:rPr lang="en-US"/>
               <a:t>Click to edit Master title style</a:t>
             </a:r>
-            <a:endParaRPr lang="en-US"/>
           </a:p>
         </p:txBody>
       </p:sp>
@@ -2991,7 +2773,7 @@
           <a:p>
             <a:pPr lvl="0"/>
             <a:r>
-              <a:rPr lang="en-US" smtClean="0"/>
+              <a:rPr lang="en-US"/>
               <a:t>Click to edit Master text styles</a:t>
             </a:r>
           </a:p>
@@ -3047,38 +2829,37 @@
           <a:p>
             <a:pPr lvl="0"/>
             <a:r>
-              <a:rPr lang="en-US" smtClean="0"/>
+              <a:rPr lang="en-US"/>
               <a:t>Click to edit Master text styles</a:t>
             </a:r>
           </a:p>
           <a:p>
             <a:pPr lvl="1"/>
             <a:r>
-              <a:rPr lang="en-US" smtClean="0"/>
+              <a:rPr lang="en-US"/>
               <a:t>Second level</a:t>
             </a:r>
           </a:p>
           <a:p>
             <a:pPr lvl="2"/>
             <a:r>
-              <a:rPr lang="en-US" smtClean="0"/>
+              <a:rPr lang="en-US"/>
               <a:t>Third level</a:t>
             </a:r>
           </a:p>
           <a:p>
             <a:pPr lvl="3"/>
             <a:r>
-              <a:rPr lang="en-US" smtClean="0"/>
+              <a:rPr lang="en-US"/>
               <a:t>Fourth level</a:t>
             </a:r>
           </a:p>
           <a:p>
             <a:pPr lvl="4"/>
             <a:r>
-              <a:rPr lang="en-US" smtClean="0"/>
+              <a:rPr lang="en-US"/>
               <a:t>Fifth level</a:t>
             </a:r>
-            <a:endParaRPr lang="en-US"/>
           </a:p>
         </p:txBody>
       </p:sp>
@@ -3141,7 +2922,7 @@
           <a:p>
             <a:pPr lvl="0"/>
             <a:r>
-              <a:rPr lang="en-US" smtClean="0"/>
+              <a:rPr lang="en-US"/>
               <a:t>Click to edit Master text styles</a:t>
             </a:r>
           </a:p>
@@ -3197,38 +2978,37 @@
           <a:p>
             <a:pPr lvl="0"/>
             <a:r>
-              <a:rPr lang="en-US" smtClean="0"/>
+              <a:rPr lang="en-US"/>
               <a:t>Click to edit Master text styles</a:t>
             </a:r>
           </a:p>
           <a:p>
             <a:pPr lvl="1"/>
             <a:r>
-              <a:rPr lang="en-US" smtClean="0"/>
+              <a:rPr lang="en-US"/>
               <a:t>Second level</a:t>
             </a:r>
           </a:p>
           <a:p>
             <a:pPr lvl="2"/>
             <a:r>
-              <a:rPr lang="en-US" smtClean="0"/>
+              <a:rPr lang="en-US"/>
               <a:t>Third level</a:t>
             </a:r>
           </a:p>
           <a:p>
             <a:pPr lvl="3"/>
             <a:r>
-              <a:rPr lang="en-US" smtClean="0"/>
+              <a:rPr lang="en-US"/>
               <a:t>Fourth level</a:t>
             </a:r>
           </a:p>
           <a:p>
             <a:pPr lvl="4"/>
             <a:r>
-              <a:rPr lang="en-US" smtClean="0"/>
+              <a:rPr lang="en-US"/>
               <a:t>Fifth level</a:t>
             </a:r>
-            <a:endParaRPr lang="en-US"/>
           </a:p>
         </p:txBody>
       </p:sp>
@@ -3249,7 +3029,7 @@
           <a:p>
             <a:fld id="{5BCAD085-E8A6-8845-BD4E-CB4CCA059FC4}" type="datetimeFigureOut">
               <a:rPr lang="en-US" smtClean="0"/>
-              <a:t>1/27/13</a:t>
+              <a:t>9/1/2026</a:t>
             </a:fld>
             <a:endParaRPr lang="en-US"/>
           </a:p>
@@ -3343,10 +3123,9 @@
           <a:lstStyle/>
           <a:p>
             <a:r>
-              <a:rPr lang="en-US" smtClean="0"/>
+              <a:rPr lang="en-US"/>
               <a:t>Click to edit Master title style</a:t>
             </a:r>
-            <a:endParaRPr lang="en-US"/>
           </a:p>
         </p:txBody>
       </p:sp>
@@ -3367,7 +3146,7 @@
           <a:p>
             <a:fld id="{5BCAD085-E8A6-8845-BD4E-CB4CCA059FC4}" type="datetimeFigureOut">
               <a:rPr lang="en-US" smtClean="0"/>
-              <a:t>1/27/13</a:t>
+              <a:t>9/1/2026</a:t>
             </a:fld>
             <a:endParaRPr lang="en-US"/>
           </a:p>
@@ -3462,7 +3241,7 @@
           <a:p>
             <a:fld id="{5BCAD085-E8A6-8845-BD4E-CB4CCA059FC4}" type="datetimeFigureOut">
               <a:rPr lang="en-US" smtClean="0"/>
-              <a:t>1/27/13</a:t>
+              <a:t>9/1/2026</a:t>
             </a:fld>
             <a:endParaRPr lang="en-US"/>
           </a:p>
@@ -3565,10 +3344,9 @@
           </a:lstStyle>
           <a:p>
             <a:r>
-              <a:rPr lang="en-US" smtClean="0"/>
+              <a:rPr lang="en-US"/>
               <a:t>Click to edit Master title style</a:t>
             </a:r>
-            <a:endParaRPr lang="en-US"/>
           </a:p>
         </p:txBody>
       </p:sp>
@@ -3622,38 +3400,37 @@
           <a:p>
             <a:pPr lvl="0"/>
             <a:r>
-              <a:rPr lang="en-US" smtClean="0"/>
+              <a:rPr lang="en-US"/>
               <a:t>Click to edit Master text styles</a:t>
             </a:r>
           </a:p>
           <a:p>
             <a:pPr lvl="1"/>
             <a:r>
-              <a:rPr lang="en-US" smtClean="0"/>
+              <a:rPr lang="en-US"/>
               <a:t>Second level</a:t>
             </a:r>
           </a:p>
           <a:p>
             <a:pPr lvl="2"/>
             <a:r>
-              <a:rPr lang="en-US" smtClean="0"/>
+              <a:rPr lang="en-US"/>
               <a:t>Third level</a:t>
             </a:r>
           </a:p>
           <a:p>
             <a:pPr lvl="3"/>
             <a:r>
-              <a:rPr lang="en-US" smtClean="0"/>
+              <a:rPr lang="en-US"/>
               <a:t>Fourth level</a:t>
             </a:r>
           </a:p>
           <a:p>
             <a:pPr lvl="4"/>
             <a:r>
-              <a:rPr lang="en-US" smtClean="0"/>
+              <a:rPr lang="en-US"/>
               <a:t>Fifth level</a:t>
             </a:r>
-            <a:endParaRPr lang="en-US"/>
           </a:p>
         </p:txBody>
       </p:sp>
@@ -3716,7 +3493,7 @@
           <a:p>
             <a:pPr lvl="0"/>
             <a:r>
-              <a:rPr lang="en-US" smtClean="0"/>
+              <a:rPr lang="en-US"/>
               <a:t>Click to edit Master text styles</a:t>
             </a:r>
           </a:p>
@@ -3739,7 +3516,7 @@
           <a:p>
             <a:fld id="{5BCAD085-E8A6-8845-BD4E-CB4CCA059FC4}" type="datetimeFigureOut">
               <a:rPr lang="en-US" smtClean="0"/>
-              <a:t>1/27/13</a:t>
+              <a:t>9/1/2026</a:t>
             </a:fld>
             <a:endParaRPr lang="en-US"/>
           </a:p>
@@ -3842,10 +3619,9 @@
           </a:lstStyle>
           <a:p>
             <a:r>
-              <a:rPr lang="en-US" smtClean="0"/>
+              <a:rPr lang="en-US"/>
               <a:t>Click to edit Master title style</a:t>
             </a:r>
-            <a:endParaRPr lang="en-US"/>
           </a:p>
         </p:txBody>
       </p:sp>
@@ -3969,7 +3745,7 @@
           <a:p>
             <a:pPr lvl="0"/>
             <a:r>
-              <a:rPr lang="en-US" smtClean="0"/>
+              <a:rPr lang="en-US"/>
               <a:t>Click to edit Master text styles</a:t>
             </a:r>
           </a:p>
@@ -3992,7 +3768,7 @@
           <a:p>
             <a:fld id="{5BCAD085-E8A6-8845-BD4E-CB4CCA059FC4}" type="datetimeFigureOut">
               <a:rPr lang="en-US" smtClean="0"/>
-              <a:t>1/27/13</a:t>
+              <a:t>9/1/2026</a:t>
             </a:fld>
             <a:endParaRPr lang="en-US"/>
           </a:p>
@@ -4101,10 +3877,9 @@
           <a:lstStyle/>
           <a:p>
             <a:r>
-              <a:rPr lang="en-US" smtClean="0"/>
+              <a:rPr lang="en-US"/>
               <a:t>Click to edit Master title style</a:t>
             </a:r>
-            <a:endParaRPr lang="en-US"/>
           </a:p>
         </p:txBody>
       </p:sp>
@@ -4135,38 +3910,37 @@
           <a:p>
             <a:pPr lvl="0"/>
             <a:r>
-              <a:rPr lang="en-US" smtClean="0"/>
+              <a:rPr lang="en-US"/>
               <a:t>Click to edit Master text styles</a:t>
             </a:r>
           </a:p>
           <a:p>
             <a:pPr lvl="1"/>
             <a:r>
-              <a:rPr lang="en-US" smtClean="0"/>
+              <a:rPr lang="en-US"/>
               <a:t>Second level</a:t>
             </a:r>
           </a:p>
           <a:p>
             <a:pPr lvl="2"/>
             <a:r>
-              <a:rPr lang="en-US" smtClean="0"/>
+              <a:rPr lang="en-US"/>
               <a:t>Third level</a:t>
             </a:r>
           </a:p>
           <a:p>
             <a:pPr lvl="3"/>
             <a:r>
-              <a:rPr lang="en-US" smtClean="0"/>
+              <a:rPr lang="en-US"/>
               <a:t>Fourth level</a:t>
             </a:r>
           </a:p>
           <a:p>
             <a:pPr lvl="4"/>
             <a:r>
-              <a:rPr lang="en-US" smtClean="0"/>
+              <a:rPr lang="en-US"/>
               <a:t>Fifth level</a:t>
             </a:r>
-            <a:endParaRPr lang="en-US"/>
           </a:p>
         </p:txBody>
       </p:sp>
@@ -4205,7 +3979,7 @@
           <a:p>
             <a:fld id="{5BCAD085-E8A6-8845-BD4E-CB4CCA059FC4}" type="datetimeFigureOut">
               <a:rPr lang="en-US" smtClean="0"/>
-              <a:t>1/27/13</a:t>
+              <a:t>9/1/2026</a:t>
             </a:fld>
             <a:endParaRPr lang="en-US"/>
           </a:p>
@@ -4564,7 +4338,7 @@
 </file>
 
 <file path=ppt/slides/slide1.xml><?xml version="1.0" encoding="utf-8"?>
-<p:sld xmlns:a="http://schemas.openxmlformats.org/drawingml/2006/main" xmlns:p="http://schemas.openxmlformats.org/presentationml/2006/main" xmlns:r="http://schemas.openxmlformats.org/officeDocument/2006/relationships">
+<p:sld xmlns:a="http://schemas.openxmlformats.org/drawingml/2006/main" xmlns:r="http://schemas.openxmlformats.org/officeDocument/2006/relationships" xmlns:p="http://schemas.openxmlformats.org/presentationml/2006/main">
   <p:cSld>
     <p:spTree>
       <p:nvGrpSpPr>
@@ -4572,7 +4346,14 @@
         <p:cNvGrpSpPr/>
         <p:nvPr/>
       </p:nvGrpSpPr>
-      <p:grpSpPr/>
+      <p:grpSpPr>
+        <a:xfrm>
+          <a:off x="0" y="0"/>
+          <a:ext cx="0" cy="0"/>
+          <a:chOff x="0" y="0"/>
+          <a:chExt cx="0" cy="0"/>
+        </a:xfrm>
+      </p:grpSpPr>
       <p:sp>
         <p:nvSpPr>
           <p:cNvPr id="2" name="Rectangle 1"/>
@@ -4612,7 +4393,9 @@
         <p:txBody>
           <a:bodyPr rtlCol="0" anchor="ctr"/>
           <a:lstStyle/>
-          <a:p/>
+          <a:p>
+            <a:endParaRPr/>
+          </a:p>
         </p:txBody>
       </p:sp>
       <p:sp>
@@ -4632,7 +4415,7 @@
           <a:noFill/>
         </p:spPr>
         <p:txBody>
-          <a:bodyPr wrap="square" lIns="0" rIns="0" tIns="0" bIns="0" anchor="t">
+          <a:bodyPr wrap="square" lIns="0" tIns="0" rIns="0" bIns="0" anchor="t">
             <a:spAutoFit/>
           </a:bodyPr>
           <a:lstStyle/>
@@ -4673,7 +4456,7 @@
           <a:noFill/>
         </p:spPr>
         <p:txBody>
-          <a:bodyPr wrap="square" lIns="0" rIns="0" tIns="0" bIns="0" anchor="t">
+          <a:bodyPr wrap="square" lIns="0" tIns="0" rIns="0" bIns="0" anchor="t">
             <a:spAutoFit/>
           </a:bodyPr>
           <a:lstStyle/>
@@ -4736,7 +4519,9 @@
         <p:txBody>
           <a:bodyPr rtlCol="0" anchor="ctr"/>
           <a:lstStyle/>
-          <a:p/>
+          <a:p>
+            <a:endParaRPr/>
+          </a:p>
         </p:txBody>
       </p:sp>
       <p:sp>
@@ -4756,7 +4541,7 @@
           <a:noFill/>
         </p:spPr>
         <p:txBody>
-          <a:bodyPr wrap="square" lIns="0" rIns="0" tIns="0" bIns="0" anchor="t">
+          <a:bodyPr wrap="square" lIns="0" tIns="0" rIns="0" bIns="0" anchor="t">
             <a:spAutoFit/>
           </a:bodyPr>
           <a:lstStyle/>
@@ -4815,7 +4600,7 @@
           <a:noFill/>
         </p:spPr>
         <p:txBody>
-          <a:bodyPr wrap="square" lIns="0" rIns="0" tIns="0" bIns="0" anchor="t">
+          <a:bodyPr wrap="square" lIns="0" tIns="0" rIns="0" bIns="0" anchor="t">
             <a:spAutoFit/>
           </a:bodyPr>
           <a:lstStyle/>
@@ -4848,7 +4633,7 @@
 </file>
 
 <file path=ppt/slides/slide10.xml><?xml version="1.0" encoding="utf-8"?>
-<p:sld xmlns:a="http://schemas.openxmlformats.org/drawingml/2006/main" xmlns:p="http://schemas.openxmlformats.org/presentationml/2006/main" xmlns:r="http://schemas.openxmlformats.org/officeDocument/2006/relationships">
+<p:sld xmlns:a="http://schemas.openxmlformats.org/drawingml/2006/main" xmlns:r="http://schemas.openxmlformats.org/officeDocument/2006/relationships" xmlns:p="http://schemas.openxmlformats.org/presentationml/2006/main">
   <p:cSld>
     <p:spTree>
       <p:nvGrpSpPr>
@@ -4856,7 +4641,14 @@
         <p:cNvGrpSpPr/>
         <p:nvPr/>
       </p:nvGrpSpPr>
-      <p:grpSpPr/>
+      <p:grpSpPr>
+        <a:xfrm>
+          <a:off x="0" y="0"/>
+          <a:ext cx="0" cy="0"/>
+          <a:chOff x="0" y="0"/>
+          <a:chExt cx="0" cy="0"/>
+        </a:xfrm>
+      </p:grpSpPr>
       <p:sp>
         <p:nvSpPr>
           <p:cNvPr id="2" name="TextBox 1"/>
@@ -4874,7 +4666,7 @@
           <a:noFill/>
         </p:spPr>
         <p:txBody>
-          <a:bodyPr wrap="square" lIns="0" rIns="0" tIns="0" bIns="0" anchor="ctr">
+          <a:bodyPr wrap="square" lIns="0" tIns="0" rIns="0" bIns="0" anchor="ctr">
             <a:spAutoFit/>
           </a:bodyPr>
           <a:lstStyle/>
@@ -4893,7 +4685,7 @@
                 <a:ea typeface="Meiryo"/>
                 <a:cs typeface="Meiryo"/>
               </a:rPr>
-              <a:t>実装の山場 ② — 実機は 1 発では動かない</a:t>
+              <a:t>実装の山場 ① — SDK にソースが無い</a:t>
             </a:r>
           </a:p>
         </p:txBody>
@@ -4915,7 +4707,7 @@
           <a:noFill/>
         </p:spPr>
         <p:txBody>
-          <a:bodyPr wrap="square" lIns="0" rIns="0" tIns="0" bIns="0" anchor="ctr">
+          <a:bodyPr wrap="square" lIns="0" tIns="0" rIns="0" bIns="0" anchor="ctr">
             <a:spAutoFit/>
           </a:bodyPr>
           <a:lstStyle/>
@@ -4934,7 +4726,7 @@
                 <a:ea typeface="Meiryo"/>
                 <a:cs typeface="Meiryo"/>
               </a:rPr>
-              <a:t>9 / 15</a:t>
+              <a:t>8 / 15</a:t>
             </a:r>
           </a:p>
         </p:txBody>
@@ -4991,7 +4783,1167 @@
           <a:noFill/>
         </p:spPr>
         <p:txBody>
-          <a:bodyPr wrap="square" lIns="0" rIns="0" tIns="0" bIns="0" anchor="t">
+          <a:bodyPr wrap="square" lIns="0" tIns="0" rIns="0" bIns="0" anchor="t">
+            <a:spAutoFit/>
+          </a:bodyPr>
+          <a:lstStyle/>
+          <a:p>
+            <a:pPr algn="r">
+              <a:spcAft>
+                <a:spcPts val="500"/>
+              </a:spcAft>
+            </a:pPr>
+            <a:r>
+              <a:rPr sz="1100" b="0" i="0">
+                <a:solidFill>
+                  <a:srgbClr val="808080"/>
+                </a:solidFill>
+                <a:latin typeface="Meiryo"/>
+                <a:ea typeface="Meiryo"/>
+                <a:cs typeface="Meiryo"/>
+              </a:rPr>
+              <a:t>8</a:t>
+            </a:r>
+          </a:p>
+        </p:txBody>
+      </p:sp>
+      <p:sp>
+        <p:nvSpPr>
+          <p:cNvPr id="6" name="Rectangle 5"/>
+          <p:cNvSpPr/>
+          <p:nvPr/>
+        </p:nvSpPr>
+        <p:spPr>
+          <a:xfrm>
+            <a:off x="502920" y="1115568"/>
+            <a:ext cx="11185855" cy="603504"/>
+          </a:xfrm>
+          <a:prstGeom prst="rect">
+            <a:avLst/>
+          </a:prstGeom>
+          <a:solidFill>
+            <a:srgbClr val="F4F4F4"/>
+          </a:solidFill>
+          <a:ln w="9525">
+            <a:solidFill>
+              <a:srgbClr val="9E9E9E"/>
+            </a:solidFill>
+          </a:ln>
+          <a:effectLst/>
+        </p:spPr>
+        <p:style>
+          <a:lnRef idx="1">
+            <a:schemeClr val="accent1"/>
+          </a:lnRef>
+          <a:fillRef idx="3">
+            <a:schemeClr val="accent1"/>
+          </a:fillRef>
+          <a:effectRef idx="2">
+            <a:schemeClr val="accent1"/>
+          </a:effectRef>
+          <a:fontRef idx="minor">
+            <a:schemeClr val="lt1"/>
+          </a:fontRef>
+        </p:style>
+        <p:txBody>
+          <a:bodyPr rtlCol="0" anchor="ctr"/>
+          <a:lstStyle/>
+          <a:p>
+            <a:endParaRPr/>
+          </a:p>
+        </p:txBody>
+      </p:sp>
+      <p:sp>
+        <p:nvSpPr>
+          <p:cNvPr id="7" name="TextBox 6"/>
+          <p:cNvSpPr txBox="1"/>
+          <p:nvPr/>
+        </p:nvSpPr>
+        <p:spPr>
+          <a:xfrm>
+            <a:off x="502920" y="1115568"/>
+            <a:ext cx="11185855" cy="603504"/>
+          </a:xfrm>
+          <a:prstGeom prst="rect">
+            <a:avLst/>
+          </a:prstGeom>
+          <a:noFill/>
+        </p:spPr>
+        <p:txBody>
+          <a:bodyPr wrap="square" lIns="128016" tIns="76809" rIns="128016" bIns="76809" anchor="ctr">
+            <a:spAutoFit/>
+          </a:bodyPr>
+          <a:lstStyle/>
+          <a:p>
+            <a:pPr algn="l">
+              <a:spcAft>
+                <a:spcPts val="500"/>
+              </a:spcAft>
+            </a:pPr>
+            <a:r>
+              <a:rPr sz="1650" b="1" i="0">
+                <a:solidFill>
+                  <a:srgbClr val="111111"/>
+                </a:solidFill>
+                <a:latin typeface="Meiryo"/>
+                <a:ea typeface="Meiryo"/>
+                <a:cs typeface="Meiryo"/>
+              </a:rPr>
+              <a:t>問題: 左右リンクの本体は inc/ と lib/ しか無い = プリビルトの .a しか無い → 仕様が読めない</a:t>
+            </a:r>
+          </a:p>
+        </p:txBody>
+      </p:sp>
+      <p:sp>
+        <p:nvSpPr>
+          <p:cNvPr id="8" name="Rectangle 7"/>
+          <p:cNvSpPr/>
+          <p:nvPr/>
+        </p:nvSpPr>
+        <p:spPr>
+          <a:xfrm>
+            <a:off x="502920" y="1828800"/>
+            <a:ext cx="11185855" cy="548640"/>
+          </a:xfrm>
+          <a:prstGeom prst="rect">
+            <a:avLst/>
+          </a:prstGeom>
+          <a:solidFill>
+            <a:srgbClr val="E6E6E6"/>
+          </a:solidFill>
+          <a:ln w="9525">
+            <a:solidFill>
+              <a:srgbClr val="9E9E9E"/>
+            </a:solidFill>
+          </a:ln>
+          <a:effectLst/>
+        </p:spPr>
+        <p:style>
+          <a:lnRef idx="1">
+            <a:schemeClr val="accent1"/>
+          </a:lnRef>
+          <a:fillRef idx="3">
+            <a:schemeClr val="accent1"/>
+          </a:fillRef>
+          <a:effectRef idx="2">
+            <a:schemeClr val="accent1"/>
+          </a:effectRef>
+          <a:fontRef idx="minor">
+            <a:schemeClr val="lt1"/>
+          </a:fontRef>
+        </p:style>
+        <p:txBody>
+          <a:bodyPr rtlCol="0" anchor="ctr"/>
+          <a:lstStyle/>
+          <a:p>
+            <a:endParaRPr/>
+          </a:p>
+        </p:txBody>
+      </p:sp>
+      <p:sp>
+        <p:nvSpPr>
+          <p:cNvPr id="9" name="TextBox 8"/>
+          <p:cNvSpPr txBox="1"/>
+          <p:nvPr/>
+        </p:nvSpPr>
+        <p:spPr>
+          <a:xfrm>
+            <a:off x="502920" y="1828800"/>
+            <a:ext cx="11185855" cy="548640"/>
+          </a:xfrm>
+          <a:prstGeom prst="rect">
+            <a:avLst/>
+          </a:prstGeom>
+          <a:noFill/>
+        </p:spPr>
+        <p:txBody>
+          <a:bodyPr wrap="square" lIns="128016" tIns="76809" rIns="128016" bIns="76809" anchor="ctr">
+            <a:spAutoFit/>
+          </a:bodyPr>
+          <a:lstStyle/>
+          <a:p>
+            <a:pPr algn="l">
+              <a:spcAft>
+                <a:spcPts val="500"/>
+              </a:spcAft>
+            </a:pPr>
+            <a:r>
+              <a:rPr sz="1650" b="1" i="0">
+                <a:solidFill>
+                  <a:srgbClr val="111111"/>
+                </a:solidFill>
+                <a:latin typeface="Meiryo"/>
+                <a:ea typeface="Meiryo"/>
+                <a:cs typeface="Meiryo"/>
+              </a:rPr>
+              <a:t>やったこと: 静的ライブラリを逆アセンブルして、仕様を実物から確定した</a:t>
+            </a:r>
+          </a:p>
+        </p:txBody>
+      </p:sp>
+      <p:graphicFrame>
+        <p:nvGraphicFramePr>
+          <p:cNvPr id="10" name="Table 9"/>
+          <p:cNvGraphicFramePr>
+            <a:graphicFrameLocks noGrp="1"/>
+          </p:cNvGraphicFramePr>
+          <p:nvPr/>
+        </p:nvGraphicFramePr>
+        <p:xfrm>
+          <a:off x="502920" y="2505456"/>
+          <a:ext cx="11185853" cy="1426464"/>
+        </p:xfrm>
+        <a:graphic>
+          <a:graphicData uri="http://schemas.openxmlformats.org/drawingml/2006/table">
+            <a:tbl>
+              <a:tblPr>
+                <a:tableStyleId>{5940675A-B579-460E-94D1-54222C63F5DA}</a:tableStyleId>
+              </a:tblPr>
+              <a:tblGrid>
+                <a:gridCol w="2933994">
+                  <a:extLst>
+                    <a:ext uri="{9D8B030D-6E8A-4147-A177-3AD203B41FA5}">
+                      <a16:colId xmlns:a16="http://schemas.microsoft.com/office/drawing/2014/main" val="20000"/>
+                    </a:ext>
+                  </a:extLst>
+                </a:gridCol>
+                <a:gridCol w="2933994">
+                  <a:extLst>
+                    <a:ext uri="{9D8B030D-6E8A-4147-A177-3AD203B41FA5}">
+                      <a16:colId xmlns:a16="http://schemas.microsoft.com/office/drawing/2014/main" val="20001"/>
+                    </a:ext>
+                  </a:extLst>
+                </a:gridCol>
+                <a:gridCol w="5317865">
+                  <a:extLst>
+                    <a:ext uri="{9D8B030D-6E8A-4147-A177-3AD203B41FA5}">
+                      <a16:colId xmlns:a16="http://schemas.microsoft.com/office/drawing/2014/main" val="20002"/>
+                    </a:ext>
+                  </a:extLst>
+                </a:gridCol>
+              </a:tblGrid>
+              <a:tr h="475488">
+                <a:tc>
+                  <a:txBody>
+                    <a:bodyPr/>
+                    <a:lstStyle/>
+                    <a:p>
+                      <a:pPr algn="l"/>
+                      <a:r>
+                        <a:rPr sz="1450" b="1" i="0">
+                          <a:solidFill>
+                            <a:srgbClr val="111111"/>
+                          </a:solidFill>
+                          <a:latin typeface="Meiryo"/>
+                          <a:ea typeface="Meiryo"/>
+                          <a:cs typeface="Meiryo"/>
+                        </a:rPr>
+                        <a:t>調べたこと</a:t>
+                      </a:r>
+                    </a:p>
+                  </a:txBody>
+                  <a:tcPr marL="82296" marR="82296" marT="27432" marB="27432" anchor="ctr">
+                    <a:solidFill>
+                      <a:srgbClr val="E6E6E6"/>
+                    </a:solidFill>
+                  </a:tcPr>
+                </a:tc>
+                <a:tc>
+                  <a:txBody>
+                    <a:bodyPr/>
+                    <a:lstStyle/>
+                    <a:p>
+                      <a:pPr algn="l"/>
+                      <a:r>
+                        <a:rPr sz="1450" b="1" i="0">
+                          <a:solidFill>
+                            <a:srgbClr val="111111"/>
+                          </a:solidFill>
+                          <a:latin typeface="Meiryo"/>
+                          <a:ea typeface="Meiryo"/>
+                          <a:cs typeface="Meiryo"/>
+                        </a:rPr>
+                        <a:t>ヘッダの記述</a:t>
+                      </a:r>
+                    </a:p>
+                  </a:txBody>
+                  <a:tcPr marL="82296" marR="82296" marT="27432" marB="27432" anchor="ctr">
+                    <a:solidFill>
+                      <a:srgbClr val="E6E6E6"/>
+                    </a:solidFill>
+                  </a:tcPr>
+                </a:tc>
+                <a:tc>
+                  <a:txBody>
+                    <a:bodyPr/>
+                    <a:lstStyle/>
+                    <a:p>
+                      <a:pPr algn="l"/>
+                      <a:r>
+                        <a:rPr sz="1450" b="1" i="0">
+                          <a:solidFill>
+                            <a:srgbClr val="111111"/>
+                          </a:solidFill>
+                          <a:latin typeface="Meiryo"/>
+                          <a:ea typeface="Meiryo"/>
+                          <a:cs typeface="Meiryo"/>
+                        </a:rPr>
+                        <a:t>逆アセンブルした実体</a:t>
+                      </a:r>
+                    </a:p>
+                  </a:txBody>
+                  <a:tcPr marL="82296" marR="82296" marT="27432" marB="27432" anchor="ctr">
+                    <a:solidFill>
+                      <a:srgbClr val="E6E6E6"/>
+                    </a:solidFill>
+                  </a:tcPr>
+                </a:tc>
+                <a:extLst>
+                  <a:ext uri="{0D108BD9-81ED-4DB2-BD59-A6C34878D82A}">
+                    <a16:rowId xmlns:a16="http://schemas.microsoft.com/office/drawing/2014/main" val="10000"/>
+                  </a:ext>
+                </a:extLst>
+              </a:tr>
+              <a:tr h="475488">
+                <a:tc>
+                  <a:txBody>
+                    <a:bodyPr/>
+                    <a:lstStyle/>
+                    <a:p>
+                      <a:pPr algn="l"/>
+                      <a:r>
+                        <a:rPr sz="1500" b="0" i="0">
+                          <a:solidFill>
+                            <a:srgbClr val="111111"/>
+                          </a:solidFill>
+                          <a:latin typeface="Meiryo"/>
+                          <a:ea typeface="Meiryo"/>
+                          <a:cs typeface="Meiryo"/>
+                        </a:rPr>
+                        <a:t>送信ペイロード上限</a:t>
+                      </a:r>
+                    </a:p>
+                  </a:txBody>
+                  <a:tcPr marL="82296" marR="82296" marT="27432" marB="27432" anchor="ctr">
+                    <a:solidFill>
+                      <a:srgbClr val="FFFFFF"/>
+                    </a:solidFill>
+                  </a:tcPr>
+                </a:tc>
+                <a:tc>
+                  <a:txBody>
+                    <a:bodyPr/>
+                    <a:lstStyle/>
+                    <a:p>
+                      <a:pPr algn="l"/>
+                      <a:r>
+                        <a:rPr sz="1500" b="0" i="0">
+                          <a:solidFill>
+                            <a:srgbClr val="111111"/>
+                          </a:solidFill>
+                          <a:latin typeface="Meiryo"/>
+                          <a:ea typeface="Meiryo"/>
+                          <a:cs typeface="Meiryo"/>
+                        </a:rPr>
+                        <a:t>300</a:t>
+                      </a:r>
+                    </a:p>
+                  </a:txBody>
+                  <a:tcPr marL="82296" marR="82296" marT="27432" marB="27432" anchor="ctr">
+                    <a:solidFill>
+                      <a:srgbClr val="FFFFFF"/>
+                    </a:solidFill>
+                  </a:tcPr>
+                </a:tc>
+                <a:tc>
+                  <a:txBody>
+                    <a:bodyPr/>
+                    <a:lstStyle/>
+                    <a:p>
+                      <a:pPr algn="l"/>
+                      <a:r>
+                        <a:rPr sz="1500" b="1" i="0">
+                          <a:solidFill>
+                            <a:srgbClr val="111111"/>
+                          </a:solidFill>
+                          <a:latin typeface="Meiryo"/>
+                          <a:ea typeface="Meiryo"/>
+                          <a:cs typeface="Meiryo"/>
+                        </a:rPr>
+                        <a:t>実行時 assert は 672</a:t>
+                      </a:r>
+                    </a:p>
+                  </a:txBody>
+                  <a:tcPr marL="82296" marR="82296" marT="27432" marB="27432" anchor="ctr">
+                    <a:solidFill>
+                      <a:srgbClr val="FFFFFF"/>
+                    </a:solidFill>
+                  </a:tcPr>
+                </a:tc>
+                <a:extLst>
+                  <a:ext uri="{0D108BD9-81ED-4DB2-BD59-A6C34878D82A}">
+                    <a16:rowId xmlns:a16="http://schemas.microsoft.com/office/drawing/2014/main" val="10001"/>
+                  </a:ext>
+                </a:extLst>
+              </a:tr>
+              <a:tr h="475488">
+                <a:tc>
+                  <a:txBody>
+                    <a:bodyPr/>
+                    <a:lstStyle/>
+                    <a:p>
+                      <a:pPr algn="l"/>
+                      <a:r>
+                        <a:rPr sz="1500" b="0" i="0">
+                          <a:solidFill>
+                            <a:srgbClr val="111111"/>
+                          </a:solidFill>
+                          <a:latin typeface="Meiryo"/>
+                          <a:ea typeface="Meiryo"/>
+                          <a:cs typeface="Meiryo"/>
+                        </a:rPr>
+                        <a:t>RX ハンドラのスレッド</a:t>
+                      </a:r>
+                    </a:p>
+                  </a:txBody>
+                  <a:tcPr marL="82296" marR="82296" marT="27432" marB="27432" anchor="ctr">
+                    <a:solidFill>
+                      <a:srgbClr val="FFFFFF"/>
+                    </a:solidFill>
+                  </a:tcPr>
+                </a:tc>
+                <a:tc>
+                  <a:txBody>
+                    <a:bodyPr/>
+                    <a:lstStyle/>
+                    <a:p>
+                      <a:pPr algn="l"/>
+                      <a:r>
+                        <a:rPr sz="1500" b="0" i="0">
+                          <a:solidFill>
+                            <a:srgbClr val="111111"/>
+                          </a:solidFill>
+                          <a:latin typeface="Meiryo"/>
+                          <a:ea typeface="Meiryo"/>
+                          <a:cs typeface="Meiryo"/>
+                        </a:rPr>
+                        <a:t>記述なし</a:t>
+                      </a:r>
+                    </a:p>
+                  </a:txBody>
+                  <a:tcPr marL="82296" marR="82296" marT="27432" marB="27432" anchor="ctr">
+                    <a:solidFill>
+                      <a:srgbClr val="FFFFFF"/>
+                    </a:solidFill>
+                  </a:tcPr>
+                </a:tc>
+                <a:tc>
+                  <a:txBody>
+                    <a:bodyPr/>
+                    <a:lstStyle/>
+                    <a:p>
+                      <a:pPr algn="l"/>
+                      <a:r>
+                        <a:rPr sz="1500" b="1" i="0">
+                          <a:solidFill>
+                            <a:srgbClr val="111111"/>
+                          </a:solidFill>
+                          <a:latin typeface="Meiryo"/>
+                          <a:ea typeface="Meiryo"/>
+                          <a:cs typeface="Meiryo"/>
+                        </a:rPr>
+                        <a:t>BT スタック本体のループ (止めると全部止まる)</a:t>
+                      </a:r>
+                    </a:p>
+                  </a:txBody>
+                  <a:tcPr marL="82296" marR="82296" marT="27432" marB="27432" anchor="ctr">
+                    <a:solidFill>
+                      <a:srgbClr val="FFFFFF"/>
+                    </a:solidFill>
+                  </a:tcPr>
+                </a:tc>
+                <a:extLst>
+                  <a:ext uri="{0D108BD9-81ED-4DB2-BD59-A6C34878D82A}">
+                    <a16:rowId xmlns:a16="http://schemas.microsoft.com/office/drawing/2014/main" val="10002"/>
+                  </a:ext>
+                </a:extLst>
+              </a:tr>
+            </a:tbl>
+          </a:graphicData>
+        </a:graphic>
+      </p:graphicFrame>
+      <p:sp>
+        <p:nvSpPr>
+          <p:cNvPr id="11" name="Rectangle 10"/>
+          <p:cNvSpPr/>
+          <p:nvPr/>
+        </p:nvSpPr>
+        <p:spPr>
+          <a:xfrm>
+            <a:off x="502920" y="4169663"/>
+            <a:ext cx="3545738" cy="1005840"/>
+          </a:xfrm>
+          <a:prstGeom prst="rect">
+            <a:avLst/>
+          </a:prstGeom>
+          <a:solidFill>
+            <a:srgbClr val="F4F4F4"/>
+          </a:solidFill>
+          <a:ln w="9525">
+            <a:solidFill>
+              <a:srgbClr val="9E9E9E"/>
+            </a:solidFill>
+          </a:ln>
+          <a:effectLst/>
+        </p:spPr>
+        <p:style>
+          <a:lnRef idx="1">
+            <a:schemeClr val="accent1"/>
+          </a:lnRef>
+          <a:fillRef idx="3">
+            <a:schemeClr val="accent1"/>
+          </a:fillRef>
+          <a:effectRef idx="2">
+            <a:schemeClr val="accent1"/>
+          </a:effectRef>
+          <a:fontRef idx="minor">
+            <a:schemeClr val="lt1"/>
+          </a:fontRef>
+        </p:style>
+        <p:txBody>
+          <a:bodyPr rtlCol="0" anchor="ctr"/>
+          <a:lstStyle/>
+          <a:p>
+            <a:endParaRPr/>
+          </a:p>
+        </p:txBody>
+      </p:sp>
+      <p:sp>
+        <p:nvSpPr>
+          <p:cNvPr id="12" name="TextBox 11"/>
+          <p:cNvSpPr txBox="1"/>
+          <p:nvPr/>
+        </p:nvSpPr>
+        <p:spPr>
+          <a:xfrm>
+            <a:off x="502920" y="4224528"/>
+            <a:ext cx="3545738" cy="566928"/>
+          </a:xfrm>
+          <a:prstGeom prst="rect">
+            <a:avLst/>
+          </a:prstGeom>
+          <a:noFill/>
+        </p:spPr>
+        <p:txBody>
+          <a:bodyPr wrap="square" lIns="18288" tIns="10972" rIns="18288" bIns="10972" anchor="t">
+            <a:spAutoFit/>
+          </a:bodyPr>
+          <a:lstStyle/>
+          <a:p>
+            <a:pPr algn="ctr">
+              <a:spcAft>
+                <a:spcPts val="500"/>
+              </a:spcAft>
+            </a:pPr>
+            <a:r>
+              <a:rPr sz="3400" b="1" i="0">
+                <a:solidFill>
+                  <a:srgbClr val="111111"/>
+                </a:solidFill>
+                <a:latin typeface="Meiryo"/>
+                <a:ea typeface="Meiryo"/>
+                <a:cs typeface="Meiryo"/>
+              </a:rPr>
+              <a:t>300</a:t>
+            </a:r>
+          </a:p>
+        </p:txBody>
+      </p:sp>
+      <p:sp>
+        <p:nvSpPr>
+          <p:cNvPr id="13" name="TextBox 12"/>
+          <p:cNvSpPr txBox="1"/>
+          <p:nvPr/>
+        </p:nvSpPr>
+        <p:spPr>
+          <a:xfrm>
+            <a:off x="502920" y="4791456"/>
+            <a:ext cx="3545738" cy="310896"/>
+          </a:xfrm>
+          <a:prstGeom prst="rect">
+            <a:avLst/>
+          </a:prstGeom>
+          <a:noFill/>
+        </p:spPr>
+        <p:txBody>
+          <a:bodyPr wrap="square" lIns="18288" tIns="10972" rIns="18288" bIns="10972" anchor="t">
+            <a:spAutoFit/>
+          </a:bodyPr>
+          <a:lstStyle/>
+          <a:p>
+            <a:pPr algn="ctr">
+              <a:spcAft>
+                <a:spcPts val="500"/>
+              </a:spcAft>
+            </a:pPr>
+            <a:r>
+              <a:rPr sz="1350" b="0" i="0">
+                <a:solidFill>
+                  <a:srgbClr val="4A4A4A"/>
+                </a:solidFill>
+                <a:latin typeface="Meiryo"/>
+                <a:ea typeface="Meiryo"/>
+                <a:cs typeface="Meiryo"/>
+              </a:rPr>
+              <a:t>ヘッダの定数</a:t>
+            </a:r>
+          </a:p>
+        </p:txBody>
+      </p:sp>
+      <p:sp>
+        <p:nvSpPr>
+          <p:cNvPr id="14" name="Rectangle 13"/>
+          <p:cNvSpPr/>
+          <p:nvPr/>
+        </p:nvSpPr>
+        <p:spPr>
+          <a:xfrm>
+            <a:off x="4322978" y="4169663"/>
+            <a:ext cx="3545738" cy="1005840"/>
+          </a:xfrm>
+          <a:prstGeom prst="rect">
+            <a:avLst/>
+          </a:prstGeom>
+          <a:solidFill>
+            <a:srgbClr val="F4F4F4"/>
+          </a:solidFill>
+          <a:ln w="9525">
+            <a:solidFill>
+              <a:srgbClr val="9E9E9E"/>
+            </a:solidFill>
+          </a:ln>
+          <a:effectLst/>
+        </p:spPr>
+        <p:style>
+          <a:lnRef idx="1">
+            <a:schemeClr val="accent1"/>
+          </a:lnRef>
+          <a:fillRef idx="3">
+            <a:schemeClr val="accent1"/>
+          </a:fillRef>
+          <a:effectRef idx="2">
+            <a:schemeClr val="accent1"/>
+          </a:effectRef>
+          <a:fontRef idx="minor">
+            <a:schemeClr val="lt1"/>
+          </a:fontRef>
+        </p:style>
+        <p:txBody>
+          <a:bodyPr rtlCol="0" anchor="ctr"/>
+          <a:lstStyle/>
+          <a:p>
+            <a:endParaRPr/>
+          </a:p>
+        </p:txBody>
+      </p:sp>
+      <p:sp>
+        <p:nvSpPr>
+          <p:cNvPr id="15" name="TextBox 14"/>
+          <p:cNvSpPr txBox="1"/>
+          <p:nvPr/>
+        </p:nvSpPr>
+        <p:spPr>
+          <a:xfrm>
+            <a:off x="4322978" y="4224528"/>
+            <a:ext cx="3545738" cy="566928"/>
+          </a:xfrm>
+          <a:prstGeom prst="rect">
+            <a:avLst/>
+          </a:prstGeom>
+          <a:noFill/>
+        </p:spPr>
+        <p:txBody>
+          <a:bodyPr wrap="square" lIns="18288" tIns="10972" rIns="18288" bIns="10972" anchor="t">
+            <a:spAutoFit/>
+          </a:bodyPr>
+          <a:lstStyle/>
+          <a:p>
+            <a:pPr algn="ctr">
+              <a:spcAft>
+                <a:spcPts val="500"/>
+              </a:spcAft>
+            </a:pPr>
+            <a:r>
+              <a:rPr sz="3400" b="1" i="0">
+                <a:solidFill>
+                  <a:srgbClr val="111111"/>
+                </a:solidFill>
+                <a:latin typeface="Meiryo"/>
+                <a:ea typeface="Meiryo"/>
+                <a:cs typeface="Meiryo"/>
+              </a:rPr>
+              <a:t>672</a:t>
+            </a:r>
+          </a:p>
+        </p:txBody>
+      </p:sp>
+      <p:sp>
+        <p:nvSpPr>
+          <p:cNvPr id="16" name="TextBox 15"/>
+          <p:cNvSpPr txBox="1"/>
+          <p:nvPr/>
+        </p:nvSpPr>
+        <p:spPr>
+          <a:xfrm>
+            <a:off x="4322978" y="4791456"/>
+            <a:ext cx="3545738" cy="310896"/>
+          </a:xfrm>
+          <a:prstGeom prst="rect">
+            <a:avLst/>
+          </a:prstGeom>
+          <a:noFill/>
+        </p:spPr>
+        <p:txBody>
+          <a:bodyPr wrap="square" lIns="18288" tIns="10972" rIns="18288" bIns="10972" anchor="t">
+            <a:spAutoFit/>
+          </a:bodyPr>
+          <a:lstStyle/>
+          <a:p>
+            <a:pPr algn="ctr">
+              <a:spcAft>
+                <a:spcPts val="500"/>
+              </a:spcAft>
+            </a:pPr>
+            <a:r>
+              <a:rPr sz="1350" b="0" i="0">
+                <a:solidFill>
+                  <a:srgbClr val="4A4A4A"/>
+                </a:solidFill>
+                <a:latin typeface="Meiryo"/>
+                <a:ea typeface="Meiryo"/>
+                <a:cs typeface="Meiryo"/>
+              </a:rPr>
+              <a:t>バイナリの assert</a:t>
+            </a:r>
+          </a:p>
+        </p:txBody>
+      </p:sp>
+      <p:sp>
+        <p:nvSpPr>
+          <p:cNvPr id="17" name="Rectangle 16"/>
+          <p:cNvSpPr/>
+          <p:nvPr/>
+        </p:nvSpPr>
+        <p:spPr>
+          <a:xfrm>
+            <a:off x="8143036" y="4169663"/>
+            <a:ext cx="3545738" cy="1005840"/>
+          </a:xfrm>
+          <a:prstGeom prst="rect">
+            <a:avLst/>
+          </a:prstGeom>
+          <a:solidFill>
+            <a:srgbClr val="E6E6E6"/>
+          </a:solidFill>
+          <a:ln w="9525">
+            <a:solidFill>
+              <a:srgbClr val="9E9E9E"/>
+            </a:solidFill>
+          </a:ln>
+          <a:effectLst/>
+        </p:spPr>
+        <p:style>
+          <a:lnRef idx="1">
+            <a:schemeClr val="accent1"/>
+          </a:lnRef>
+          <a:fillRef idx="3">
+            <a:schemeClr val="accent1"/>
+          </a:fillRef>
+          <a:effectRef idx="2">
+            <a:schemeClr val="accent1"/>
+          </a:effectRef>
+          <a:fontRef idx="minor">
+            <a:schemeClr val="lt1"/>
+          </a:fontRef>
+        </p:style>
+        <p:txBody>
+          <a:bodyPr rtlCol="0" anchor="ctr"/>
+          <a:lstStyle/>
+          <a:p>
+            <a:endParaRPr/>
+          </a:p>
+        </p:txBody>
+      </p:sp>
+      <p:sp>
+        <p:nvSpPr>
+          <p:cNvPr id="18" name="TextBox 17"/>
+          <p:cNvSpPr txBox="1"/>
+          <p:nvPr/>
+        </p:nvSpPr>
+        <p:spPr>
+          <a:xfrm>
+            <a:off x="8143036" y="4224528"/>
+            <a:ext cx="3545738" cy="566928"/>
+          </a:xfrm>
+          <a:prstGeom prst="rect">
+            <a:avLst/>
+          </a:prstGeom>
+          <a:noFill/>
+        </p:spPr>
+        <p:txBody>
+          <a:bodyPr wrap="square" lIns="18288" tIns="10972" rIns="18288" bIns="10972" anchor="t">
+            <a:spAutoFit/>
+          </a:bodyPr>
+          <a:lstStyle/>
+          <a:p>
+            <a:pPr algn="ctr">
+              <a:spcAft>
+                <a:spcPts val="500"/>
+              </a:spcAft>
+            </a:pPr>
+            <a:r>
+              <a:rPr sz="3400" b="1" i="0">
+                <a:solidFill>
+                  <a:srgbClr val="111111"/>
+                </a:solidFill>
+                <a:latin typeface="Meiryo"/>
+                <a:ea typeface="Meiryo"/>
+                <a:cs typeface="Meiryo"/>
+              </a:rPr>
+              <a:t>512</a:t>
+            </a:r>
+          </a:p>
+        </p:txBody>
+      </p:sp>
+      <p:sp>
+        <p:nvSpPr>
+          <p:cNvPr id="19" name="TextBox 18"/>
+          <p:cNvSpPr txBox="1"/>
+          <p:nvPr/>
+        </p:nvSpPr>
+        <p:spPr>
+          <a:xfrm>
+            <a:off x="8143036" y="4791456"/>
+            <a:ext cx="3545738" cy="310896"/>
+          </a:xfrm>
+          <a:prstGeom prst="rect">
+            <a:avLst/>
+          </a:prstGeom>
+          <a:noFill/>
+        </p:spPr>
+        <p:txBody>
+          <a:bodyPr wrap="square" lIns="18288" tIns="10972" rIns="18288" bIns="10972" anchor="t">
+            <a:spAutoFit/>
+          </a:bodyPr>
+          <a:lstStyle/>
+          <a:p>
+            <a:pPr algn="ctr">
+              <a:spcAft>
+                <a:spcPts val="500"/>
+              </a:spcAft>
+            </a:pPr>
+            <a:r>
+              <a:rPr sz="1350" b="0" i="0">
+                <a:solidFill>
+                  <a:srgbClr val="4A4A4A"/>
+                </a:solidFill>
+                <a:latin typeface="Meiryo"/>
+                <a:ea typeface="Meiryo"/>
+                <a:cs typeface="Meiryo"/>
+              </a:rPr>
+              <a:t>実測値</a:t>
+            </a:r>
+          </a:p>
+        </p:txBody>
+      </p:sp>
+      <p:sp>
+        <p:nvSpPr>
+          <p:cNvPr id="20" name="TextBox 19"/>
+          <p:cNvSpPr txBox="1"/>
+          <p:nvPr/>
+        </p:nvSpPr>
+        <p:spPr>
+          <a:xfrm>
+            <a:off x="502920" y="5321808"/>
+            <a:ext cx="11185855" cy="402336"/>
+          </a:xfrm>
+          <a:prstGeom prst="rect">
+            <a:avLst/>
+          </a:prstGeom>
+          <a:noFill/>
+        </p:spPr>
+        <p:txBody>
+          <a:bodyPr wrap="square" lIns="0" tIns="0" rIns="0" bIns="0" anchor="t">
+            <a:spAutoFit/>
+          </a:bodyPr>
+          <a:lstStyle/>
+          <a:p>
+            <a:pPr algn="ctr">
+              <a:spcAft>
+                <a:spcPts val="500"/>
+              </a:spcAft>
+            </a:pPr>
+            <a:r>
+              <a:rPr sz="1400" b="0" i="0">
+                <a:solidFill>
+                  <a:srgbClr val="4A4A4A"/>
+                </a:solidFill>
+                <a:latin typeface="Meiryo"/>
+                <a:ea typeface="Meiryo"/>
+                <a:cs typeface="Meiryo"/>
+              </a:rPr>
+              <a:t>起動時に 4 → 64 → … → 668 B を掃引して上限を実測。256 B 超はフレームに分割し、in-flight を 536 B に抑える</a:t>
+            </a:r>
+          </a:p>
+        </p:txBody>
+      </p:sp>
+      <p:sp>
+        <p:nvSpPr>
+          <p:cNvPr id="21" name="Rectangle 20"/>
+          <p:cNvSpPr/>
+          <p:nvPr/>
+        </p:nvSpPr>
+        <p:spPr>
+          <a:xfrm>
+            <a:off x="502920" y="5797296"/>
+            <a:ext cx="11185855" cy="512064"/>
+          </a:xfrm>
+          <a:prstGeom prst="rect">
+            <a:avLst/>
+          </a:prstGeom>
+          <a:solidFill>
+            <a:srgbClr val="E6E6E6"/>
+          </a:solidFill>
+          <a:ln w="9525">
+            <a:solidFill>
+              <a:srgbClr val="9E9E9E"/>
+            </a:solidFill>
+          </a:ln>
+          <a:effectLst/>
+        </p:spPr>
+        <p:style>
+          <a:lnRef idx="1">
+            <a:schemeClr val="accent1"/>
+          </a:lnRef>
+          <a:fillRef idx="3">
+            <a:schemeClr val="accent1"/>
+          </a:fillRef>
+          <a:effectRef idx="2">
+            <a:schemeClr val="accent1"/>
+          </a:effectRef>
+          <a:fontRef idx="minor">
+            <a:schemeClr val="lt1"/>
+          </a:fontRef>
+        </p:style>
+        <p:txBody>
+          <a:bodyPr rtlCol="0" anchor="ctr"/>
+          <a:lstStyle/>
+          <a:p>
+            <a:endParaRPr/>
+          </a:p>
+        </p:txBody>
+      </p:sp>
+      <p:sp>
+        <p:nvSpPr>
+          <p:cNvPr id="22" name="TextBox 21"/>
+          <p:cNvSpPr txBox="1"/>
+          <p:nvPr/>
+        </p:nvSpPr>
+        <p:spPr>
+          <a:xfrm>
+            <a:off x="502920" y="5797296"/>
+            <a:ext cx="11185855" cy="512064"/>
+          </a:xfrm>
+          <a:prstGeom prst="rect">
+            <a:avLst/>
+          </a:prstGeom>
+          <a:noFill/>
+        </p:spPr>
+        <p:txBody>
+          <a:bodyPr wrap="square" tIns="54864" bIns="54864" anchor="ctr">
+            <a:spAutoFit/>
+          </a:bodyPr>
+          <a:lstStyle/>
+          <a:p>
+            <a:pPr algn="ctr">
+              <a:spcAft>
+                <a:spcPts val="500"/>
+              </a:spcAft>
+            </a:pPr>
+            <a:r>
+              <a:rPr sz="1700" b="1" i="0">
+                <a:solidFill>
+                  <a:srgbClr val="111111"/>
+                </a:solidFill>
+                <a:latin typeface="Meiryo"/>
+                <a:ea typeface="Meiryo"/>
+                <a:cs typeface="Meiryo"/>
+              </a:rPr>
+              <a:t>ヘッダを信じるな。リンクされるバイナリを信じろ。</a:t>
+            </a:r>
+          </a:p>
+        </p:txBody>
+      </p:sp>
+    </p:spTree>
+  </p:cSld>
+  <p:clrMapOvr>
+    <a:masterClrMapping/>
+  </p:clrMapOvr>
+</p:sld>
+</file>
+
+<file path=ppt/slides/slide11.xml><?xml version="1.0" encoding="utf-8"?>
+<p:sld xmlns:a="http://schemas.openxmlformats.org/drawingml/2006/main" xmlns:r="http://schemas.openxmlformats.org/officeDocument/2006/relationships" xmlns:p="http://schemas.openxmlformats.org/presentationml/2006/main">
+  <p:cSld>
+    <p:spTree>
+      <p:nvGrpSpPr>
+        <p:cNvPr id="1" name=""/>
+        <p:cNvGrpSpPr/>
+        <p:nvPr/>
+      </p:nvGrpSpPr>
+      <p:grpSpPr>
+        <a:xfrm>
+          <a:off x="0" y="0"/>
+          <a:ext cx="0" cy="0"/>
+          <a:chOff x="0" y="0"/>
+          <a:chExt cx="0" cy="0"/>
+        </a:xfrm>
+      </p:grpSpPr>
+      <p:sp>
+        <p:nvSpPr>
+          <p:cNvPr id="2" name="TextBox 1"/>
+          <p:cNvSpPr txBox="1"/>
+          <p:nvPr/>
+        </p:nvSpPr>
+        <p:spPr>
+          <a:xfrm>
+            <a:off x="502920" y="256032"/>
+            <a:ext cx="9357055" cy="603504"/>
+          </a:xfrm>
+          <a:prstGeom prst="rect">
+            <a:avLst/>
+          </a:prstGeom>
+          <a:noFill/>
+        </p:spPr>
+        <p:txBody>
+          <a:bodyPr wrap="square" lIns="0" tIns="0" rIns="0" bIns="0" anchor="ctr">
+            <a:spAutoFit/>
+          </a:bodyPr>
+          <a:lstStyle/>
+          <a:p>
+            <a:pPr algn="l">
+              <a:spcAft>
+                <a:spcPts val="500"/>
+              </a:spcAft>
+            </a:pPr>
+            <a:r>
+              <a:rPr sz="2800" b="1" i="0">
+                <a:solidFill>
+                  <a:srgbClr val="111111"/>
+                </a:solidFill>
+                <a:latin typeface="Meiryo"/>
+                <a:ea typeface="Meiryo"/>
+                <a:cs typeface="Meiryo"/>
+              </a:rPr>
+              <a:t>実装の山場 ② — 実機は 1 発では動かない</a:t>
+            </a:r>
+          </a:p>
+        </p:txBody>
+      </p:sp>
+      <p:sp>
+        <p:nvSpPr>
+          <p:cNvPr id="3" name="TextBox 2"/>
+          <p:cNvSpPr txBox="1"/>
+          <p:nvPr/>
+        </p:nvSpPr>
+        <p:spPr>
+          <a:xfrm>
+            <a:off x="8579815" y="310896"/>
+            <a:ext cx="3108960" cy="493776"/>
+          </a:xfrm>
+          <a:prstGeom prst="rect">
+            <a:avLst/>
+          </a:prstGeom>
+          <a:noFill/>
+        </p:spPr>
+        <p:txBody>
+          <a:bodyPr wrap="square" lIns="0" tIns="0" rIns="0" bIns="0" anchor="ctr">
+            <a:spAutoFit/>
+          </a:bodyPr>
+          <a:lstStyle/>
+          <a:p>
+            <a:pPr algn="r">
+              <a:spcAft>
+                <a:spcPts val="500"/>
+              </a:spcAft>
+            </a:pPr>
+            <a:r>
+              <a:rPr sz="1300" b="0" i="0">
+                <a:solidFill>
+                  <a:srgbClr val="808080"/>
+                </a:solidFill>
+                <a:latin typeface="Meiryo"/>
+                <a:ea typeface="Meiryo"/>
+                <a:cs typeface="Meiryo"/>
+              </a:rPr>
+              <a:t>9 / 15</a:t>
+            </a:r>
+          </a:p>
+        </p:txBody>
+      </p:sp>
+      <p:cxnSp>
+        <p:nvCxnSpPr>
+          <p:cNvPr id="4" name="Connector 3"/>
+          <p:cNvCxnSpPr/>
+          <p:nvPr/>
+        </p:nvCxnSpPr>
+        <p:spPr>
+          <a:xfrm>
+            <a:off x="502920" y="969264"/>
+            <a:ext cx="11185855" cy="0"/>
+          </a:xfrm>
+          <a:prstGeom prst="line">
+            <a:avLst/>
+          </a:prstGeom>
+          <a:ln w="12700">
+            <a:solidFill>
+              <a:srgbClr val="BFBFBF"/>
+            </a:solidFill>
+          </a:ln>
+        </p:spPr>
+        <p:style>
+          <a:lnRef idx="2">
+            <a:schemeClr val="accent1"/>
+          </a:lnRef>
+          <a:fillRef idx="0">
+            <a:schemeClr val="accent1"/>
+          </a:fillRef>
+          <a:effectRef idx="1">
+            <a:schemeClr val="accent1"/>
+          </a:effectRef>
+          <a:fontRef idx="minor">
+            <a:schemeClr val="tx1"/>
+          </a:fontRef>
+        </p:style>
+      </p:cxnSp>
+      <p:sp>
+        <p:nvSpPr>
+          <p:cNvPr id="5" name="TextBox 4"/>
+          <p:cNvSpPr txBox="1"/>
+          <p:nvPr/>
+        </p:nvSpPr>
+        <p:spPr>
+          <a:xfrm>
+            <a:off x="10591495" y="6455664"/>
+            <a:ext cx="1097280" cy="274320"/>
+          </a:xfrm>
+          <a:prstGeom prst="rect">
+            <a:avLst/>
+          </a:prstGeom>
+          <a:noFill/>
+        </p:spPr>
+        <p:txBody>
+          <a:bodyPr wrap="square" lIns="0" tIns="0" rIns="0" bIns="0" anchor="t">
             <a:spAutoFit/>
           </a:bodyPr>
           <a:lstStyle/>
@@ -5030,18 +5982,36 @@
         <a:graphic>
           <a:graphicData uri="http://schemas.openxmlformats.org/drawingml/2006/table">
             <a:tbl>
-              <a:tblPr firstRow="0" bandRow="0">
+              <a:tblPr>
                 <a:tableStyleId>{5940675A-B579-460E-94D1-54222C63F5DA}</a:tableStyleId>
               </a:tblPr>
               <a:tblGrid>
-                <a:gridCol w="409353"/>
-                <a:gridCol w="3029215"/>
-                <a:gridCol w="3602310"/>
+                <a:gridCol w="409353">
+                  <a:extLst>
+                    <a:ext uri="{9D8B030D-6E8A-4147-A177-3AD203B41FA5}">
+                      <a16:colId xmlns:a16="http://schemas.microsoft.com/office/drawing/2014/main" val="20000"/>
+                    </a:ext>
+                  </a:extLst>
+                </a:gridCol>
+                <a:gridCol w="3029215">
+                  <a:extLst>
+                    <a:ext uri="{9D8B030D-6E8A-4147-A177-3AD203B41FA5}">
+                      <a16:colId xmlns:a16="http://schemas.microsoft.com/office/drawing/2014/main" val="20001"/>
+                    </a:ext>
+                  </a:extLst>
+                </a:gridCol>
+                <a:gridCol w="3602310">
+                  <a:extLst>
+                    <a:ext uri="{9D8B030D-6E8A-4147-A177-3AD203B41FA5}">
+                      <a16:colId xmlns:a16="http://schemas.microsoft.com/office/drawing/2014/main" val="20002"/>
+                    </a:ext>
+                  </a:extLst>
+                </a:gridCol>
               </a:tblGrid>
               <a:tr h="566928">
                 <a:tc>
                   <a:txBody>
-                    <a:bodyPr wrap="square"/>
+                    <a:bodyPr/>
                     <a:lstStyle/>
                     <a:p>
                       <a:pPr algn="l"/>
@@ -5066,7 +6036,7 @@
                 </a:tc>
                 <a:tc>
                   <a:txBody>
-                    <a:bodyPr wrap="square"/>
+                    <a:bodyPr/>
                     <a:lstStyle/>
                     <a:p>
                       <a:pPr algn="l"/>
@@ -5091,7 +6061,7 @@
                 </a:tc>
                 <a:tc>
                   <a:txBody>
-                    <a:bodyPr wrap="square"/>
+                    <a:bodyPr/>
                     <a:lstStyle/>
                     <a:p>
                       <a:pPr algn="l"/>
@@ -5114,11 +6084,16 @@
                     </a:solidFill>
                   </a:tcPr>
                 </a:tc>
+                <a:extLst>
+                  <a:ext uri="{0D108BD9-81ED-4DB2-BD59-A6C34878D82A}">
+                    <a16:rowId xmlns:a16="http://schemas.microsoft.com/office/drawing/2014/main" val="10000"/>
+                  </a:ext>
+                </a:extLst>
               </a:tr>
               <a:tr h="566928">
                 <a:tc>
                   <a:txBody>
-                    <a:bodyPr wrap="square"/>
+                    <a:bodyPr/>
                     <a:lstStyle/>
                     <a:p>
                       <a:pPr algn="l"/>
@@ -5143,7 +6118,7 @@
                 </a:tc>
                 <a:tc>
                   <a:txBody>
-                    <a:bodyPr wrap="square"/>
+                    <a:bodyPr/>
                     <a:lstStyle/>
                     <a:p>
                       <a:pPr algn="l"/>
@@ -5168,7 +6143,7 @@
                 </a:tc>
                 <a:tc>
                   <a:txBody>
-                    <a:bodyPr wrap="square"/>
+                    <a:bodyPr/>
                     <a:lstStyle/>
                     <a:p>
                       <a:pPr algn="l"/>
@@ -5191,11 +6166,16 @@
                     </a:solidFill>
                   </a:tcPr>
                 </a:tc>
+                <a:extLst>
+                  <a:ext uri="{0D108BD9-81ED-4DB2-BD59-A6C34878D82A}">
+                    <a16:rowId xmlns:a16="http://schemas.microsoft.com/office/drawing/2014/main" val="10001"/>
+                  </a:ext>
+                </a:extLst>
               </a:tr>
               <a:tr h="566928">
                 <a:tc>
                   <a:txBody>
-                    <a:bodyPr wrap="square"/>
+                    <a:bodyPr/>
                     <a:lstStyle/>
                     <a:p>
                       <a:pPr algn="l"/>
@@ -5220,7 +6200,7 @@
                 </a:tc>
                 <a:tc>
                   <a:txBody>
-                    <a:bodyPr wrap="square"/>
+                    <a:bodyPr/>
                     <a:lstStyle/>
                     <a:p>
                       <a:pPr algn="l"/>
@@ -5245,7 +6225,7 @@
                 </a:tc>
                 <a:tc>
                   <a:txBody>
-                    <a:bodyPr wrap="square"/>
+                    <a:bodyPr/>
                     <a:lstStyle/>
                     <a:p>
                       <a:pPr algn="l"/>
@@ -5268,11 +6248,16 @@
                     </a:solidFill>
                   </a:tcPr>
                 </a:tc>
+                <a:extLst>
+                  <a:ext uri="{0D108BD9-81ED-4DB2-BD59-A6C34878D82A}">
+                    <a16:rowId xmlns:a16="http://schemas.microsoft.com/office/drawing/2014/main" val="10002"/>
+                  </a:ext>
+                </a:extLst>
               </a:tr>
               <a:tr h="566928">
                 <a:tc>
                   <a:txBody>
-                    <a:bodyPr wrap="square"/>
+                    <a:bodyPr/>
                     <a:lstStyle/>
                     <a:p>
                       <a:pPr algn="l"/>
@@ -5297,7 +6282,7 @@
                 </a:tc>
                 <a:tc>
                   <a:txBody>
-                    <a:bodyPr wrap="square"/>
+                    <a:bodyPr/>
                     <a:lstStyle/>
                     <a:p>
                       <a:pPr algn="l"/>
@@ -5322,7 +6307,7 @@
                 </a:tc>
                 <a:tc>
                   <a:txBody>
-                    <a:bodyPr wrap="square"/>
+                    <a:bodyPr/>
                     <a:lstStyle/>
                     <a:p>
                       <a:pPr algn="l"/>
@@ -5345,11 +6330,16 @@
                     </a:solidFill>
                   </a:tcPr>
                 </a:tc>
+                <a:extLst>
+                  <a:ext uri="{0D108BD9-81ED-4DB2-BD59-A6C34878D82A}">
+                    <a16:rowId xmlns:a16="http://schemas.microsoft.com/office/drawing/2014/main" val="10003"/>
+                  </a:ext>
+                </a:extLst>
               </a:tr>
               <a:tr h="566928">
                 <a:tc>
                   <a:txBody>
-                    <a:bodyPr wrap="square"/>
+                    <a:bodyPr/>
                     <a:lstStyle/>
                     <a:p>
                       <a:pPr algn="l"/>
@@ -5374,7 +6364,7 @@
                 </a:tc>
                 <a:tc>
                   <a:txBody>
-                    <a:bodyPr wrap="square"/>
+                    <a:bodyPr/>
                     <a:lstStyle/>
                     <a:p>
                       <a:pPr algn="l"/>
@@ -5399,7 +6389,7 @@
                 </a:tc>
                 <a:tc>
                   <a:txBody>
-                    <a:bodyPr wrap="square"/>
+                    <a:bodyPr/>
                     <a:lstStyle/>
                     <a:p>
                       <a:pPr algn="l"/>
@@ -5422,11 +6412,16 @@
                     </a:solidFill>
                   </a:tcPr>
                 </a:tc>
+                <a:extLst>
+                  <a:ext uri="{0D108BD9-81ED-4DB2-BD59-A6C34878D82A}">
+                    <a16:rowId xmlns:a16="http://schemas.microsoft.com/office/drawing/2014/main" val="10004"/>
+                  </a:ext>
+                </a:extLst>
               </a:tr>
               <a:tr h="566928">
                 <a:tc>
                   <a:txBody>
-                    <a:bodyPr wrap="square"/>
+                    <a:bodyPr/>
                     <a:lstStyle/>
                     <a:p>
                       <a:pPr algn="l"/>
@@ -5451,7 +6446,7 @@
                 </a:tc>
                 <a:tc>
                   <a:txBody>
-                    <a:bodyPr wrap="square"/>
+                    <a:bodyPr/>
                     <a:lstStyle/>
                     <a:p>
                       <a:pPr algn="l"/>
@@ -5476,7 +6471,7 @@
                 </a:tc>
                 <a:tc>
                   <a:txBody>
-                    <a:bodyPr wrap="square"/>
+                    <a:bodyPr/>
                     <a:lstStyle/>
                     <a:p>
                       <a:pPr algn="l"/>
@@ -5499,6 +6494,11 @@
                     </a:solidFill>
                   </a:tcPr>
                 </a:tc>
+                <a:extLst>
+                  <a:ext uri="{0D108BD9-81ED-4DB2-BD59-A6C34878D82A}">
+                    <a16:rowId xmlns:a16="http://schemas.microsoft.com/office/drawing/2014/main" val="10005"/>
+                  </a:ext>
+                </a:extLst>
               </a:tr>
             </a:tbl>
           </a:graphicData>
@@ -5545,7 +6545,9 @@
         <p:txBody>
           <a:bodyPr rtlCol="0" anchor="ctr"/>
           <a:lstStyle/>
-          <a:p/>
+          <a:p>
+            <a:endParaRPr/>
+          </a:p>
         </p:txBody>
       </p:sp>
       <p:sp>
@@ -5565,7 +6567,7 @@
           <a:noFill/>
         </p:spPr>
         <p:txBody>
-          <a:bodyPr wrap="square" lIns="128016" rIns="128016" tIns="76809" bIns="76809" anchor="t">
+          <a:bodyPr wrap="square" lIns="128016" tIns="76809" rIns="128016" bIns="76809" anchor="t">
             <a:spAutoFit/>
           </a:bodyPr>
           <a:lstStyle/>
@@ -5606,7 +6608,7 @@
           <a:noFill/>
         </p:spPr>
         <p:txBody>
-          <a:bodyPr wrap="square" lIns="128016" rIns="128016" tIns="76809" bIns="76809" anchor="t">
+          <a:bodyPr wrap="square" lIns="128016" tIns="76809" rIns="128016" bIns="76809" anchor="t">
             <a:spAutoFit/>
           </a:bodyPr>
           <a:lstStyle/>
@@ -5743,7 +6745,9 @@
         <p:txBody>
           <a:bodyPr rtlCol="0" anchor="ctr"/>
           <a:lstStyle/>
-          <a:p/>
+          <a:p>
+            <a:endParaRPr/>
+          </a:p>
         </p:txBody>
       </p:sp>
       <p:sp>
@@ -5787,7 +6791,9 @@
         <p:txBody>
           <a:bodyPr rtlCol="0" anchor="ctr"/>
           <a:lstStyle/>
-          <a:p/>
+          <a:p>
+            <a:endParaRPr/>
+          </a:p>
         </p:txBody>
       </p:sp>
       <p:sp>
@@ -5807,7 +6813,7 @@
           <a:noFill/>
         </p:spPr>
         <p:txBody>
-          <a:bodyPr wrap="square" lIns="128016" rIns="128016" tIns="76809" bIns="76809" anchor="ctr">
+          <a:bodyPr wrap="square" lIns="128016" tIns="76809" rIns="128016" bIns="76809" anchor="ctr">
             <a:spAutoFit/>
           </a:bodyPr>
           <a:lstStyle/>
@@ -5848,7 +6854,7 @@
           <a:noFill/>
         </p:spPr>
         <p:txBody>
-          <a:bodyPr wrap="square" lIns="128016" rIns="128016" tIns="76809" bIns="76809" anchor="t">
+          <a:bodyPr wrap="square" lIns="128016" tIns="76809" rIns="128016" bIns="76809" anchor="t">
             <a:spAutoFit/>
           </a:bodyPr>
           <a:lstStyle/>
@@ -5949,7 +6955,9 @@
         <p:txBody>
           <a:bodyPr rtlCol="0" anchor="ctr"/>
           <a:lstStyle/>
-          <a:p/>
+          <a:p>
+            <a:endParaRPr/>
+          </a:p>
         </p:txBody>
       </p:sp>
       <p:sp>
@@ -6010,7 +7018,7 @@
           <a:noFill/>
         </p:spPr>
         <p:txBody>
-          <a:bodyPr wrap="square" lIns="0" rIns="0" tIns="0" bIns="0" anchor="t">
+          <a:bodyPr wrap="square" lIns="0" tIns="0" rIns="0" bIns="0" anchor="t">
             <a:spAutoFit/>
           </a:bodyPr>
           <a:lstStyle/>
@@ -6042,8 +7050,8 @@
 </p:sld>
 </file>
 
-<file path=ppt/slides/slide11.xml><?xml version="1.0" encoding="utf-8"?>
-<p:sld xmlns:a="http://schemas.openxmlformats.org/drawingml/2006/main" xmlns:p="http://schemas.openxmlformats.org/presentationml/2006/main" xmlns:r="http://schemas.openxmlformats.org/officeDocument/2006/relationships">
+<file path=ppt/slides/slide12.xml><?xml version="1.0" encoding="utf-8"?>
+<p:sld xmlns:a="http://schemas.openxmlformats.org/drawingml/2006/main" xmlns:r="http://schemas.openxmlformats.org/officeDocument/2006/relationships" xmlns:p="http://schemas.openxmlformats.org/presentationml/2006/main">
   <p:cSld>
     <p:spTree>
       <p:nvGrpSpPr>
@@ -6051,7 +7059,14 @@
         <p:cNvGrpSpPr/>
         <p:nvPr/>
       </p:nvGrpSpPr>
-      <p:grpSpPr/>
+      <p:grpSpPr>
+        <a:xfrm>
+          <a:off x="0" y="0"/>
+          <a:ext cx="0" cy="0"/>
+          <a:chOff x="0" y="0"/>
+          <a:chExt cx="0" cy="0"/>
+        </a:xfrm>
+      </p:grpSpPr>
       <p:sp>
         <p:nvSpPr>
           <p:cNvPr id="2" name="TextBox 1"/>
@@ -6069,7 +7084,7 @@
           <a:noFill/>
         </p:spPr>
         <p:txBody>
-          <a:bodyPr wrap="square" lIns="0" rIns="0" tIns="0" bIns="0" anchor="ctr">
+          <a:bodyPr wrap="square" lIns="0" tIns="0" rIns="0" bIns="0" anchor="ctr">
             <a:spAutoFit/>
           </a:bodyPr>
           <a:lstStyle/>
@@ -6110,7 +7125,7 @@
           <a:noFill/>
         </p:spPr>
         <p:txBody>
-          <a:bodyPr wrap="square" lIns="0" rIns="0" tIns="0" bIns="0" anchor="ctr">
+          <a:bodyPr wrap="square" lIns="0" tIns="0" rIns="0" bIns="0" anchor="ctr">
             <a:spAutoFit/>
           </a:bodyPr>
           <a:lstStyle/>
@@ -6186,7 +7201,7 @@
           <a:noFill/>
         </p:spPr>
         <p:txBody>
-          <a:bodyPr wrap="square" lIns="0" rIns="0" tIns="0" bIns="0" anchor="t">
+          <a:bodyPr wrap="square" lIns="0" tIns="0" rIns="0" bIns="0" anchor="t">
             <a:spAutoFit/>
           </a:bodyPr>
           <a:lstStyle/>
@@ -6251,7 +7266,9 @@
         <p:txBody>
           <a:bodyPr rtlCol="0" anchor="ctr"/>
           <a:lstStyle/>
-          <a:p/>
+          <a:p>
+            <a:endParaRPr/>
+          </a:p>
         </p:txBody>
       </p:sp>
       <p:sp>
@@ -6336,7 +7353,9 @@
         <p:txBody>
           <a:bodyPr rtlCol="0" anchor="ctr"/>
           <a:lstStyle/>
-          <a:p/>
+          <a:p>
+            <a:endParaRPr/>
+          </a:p>
         </p:txBody>
       </p:sp>
       <p:sp>
@@ -6380,7 +7399,9 @@
         <p:txBody>
           <a:bodyPr rtlCol="0" anchor="ctr"/>
           <a:lstStyle/>
-          <a:p/>
+          <a:p>
+            <a:endParaRPr/>
+          </a:p>
         </p:txBody>
       </p:sp>
       <p:sp>
@@ -6400,7 +7421,7 @@
           <a:noFill/>
         </p:spPr>
         <p:txBody>
-          <a:bodyPr wrap="square" lIns="128016" rIns="128016" tIns="76809" bIns="76809" anchor="ctr">
+          <a:bodyPr wrap="square" lIns="128016" tIns="76809" rIns="128016" bIns="76809" anchor="ctr">
             <a:spAutoFit/>
           </a:bodyPr>
           <a:lstStyle/>
@@ -6441,7 +7462,7 @@
           <a:noFill/>
         </p:spPr>
         <p:txBody>
-          <a:bodyPr wrap="square" lIns="128016" rIns="128016" tIns="76809" bIns="76809" anchor="t">
+          <a:bodyPr wrap="square" lIns="128016" tIns="76809" rIns="128016" bIns="76809" anchor="t">
             <a:spAutoFit/>
           </a:bodyPr>
           <a:lstStyle/>
@@ -6560,7 +7581,9 @@
         <p:txBody>
           <a:bodyPr rtlCol="0" anchor="ctr"/>
           <a:lstStyle/>
-          <a:p/>
+          <a:p>
+            <a:endParaRPr/>
+          </a:p>
         </p:txBody>
       </p:sp>
       <p:sp>
@@ -6604,7 +7627,9 @@
         <p:txBody>
           <a:bodyPr rtlCol="0" anchor="ctr"/>
           <a:lstStyle/>
-          <a:p/>
+          <a:p>
+            <a:endParaRPr/>
+          </a:p>
         </p:txBody>
       </p:sp>
       <p:sp>
@@ -6624,7 +7649,7 @@
           <a:noFill/>
         </p:spPr>
         <p:txBody>
-          <a:bodyPr wrap="square" lIns="128016" rIns="128016" tIns="76809" bIns="76809" anchor="ctr">
+          <a:bodyPr wrap="square" lIns="128016" tIns="76809" rIns="128016" bIns="76809" anchor="ctr">
             <a:spAutoFit/>
           </a:bodyPr>
           <a:lstStyle/>
@@ -6665,7 +7690,7 @@
           <a:noFill/>
         </p:spPr>
         <p:txBody>
-          <a:bodyPr wrap="square" lIns="128016" rIns="128016" tIns="76809" bIns="76809" anchor="t">
+          <a:bodyPr wrap="square" lIns="128016" tIns="76809" rIns="128016" bIns="76809" anchor="t">
             <a:spAutoFit/>
           </a:bodyPr>
           <a:lstStyle/>
@@ -6784,7 +7809,9 @@
         <p:txBody>
           <a:bodyPr rtlCol="0" anchor="ctr"/>
           <a:lstStyle/>
-          <a:p/>
+          <a:p>
+            <a:endParaRPr/>
+          </a:p>
         </p:txBody>
       </p:sp>
       <p:sp>
@@ -6804,7 +7831,7 @@
           <a:noFill/>
         </p:spPr>
         <p:txBody>
-          <a:bodyPr wrap="square" lIns="36576" rIns="36576" tIns="21945" bIns="21945" anchor="t">
+          <a:bodyPr wrap="square" lIns="36576" tIns="21945" rIns="36576" bIns="21945" anchor="t">
             <a:spAutoFit/>
           </a:bodyPr>
           <a:lstStyle/>
@@ -6845,7 +7872,7 @@
           <a:noFill/>
         </p:spPr>
         <p:txBody>
-          <a:bodyPr wrap="square" lIns="36576" rIns="36576" tIns="21945" bIns="21945" anchor="t">
+          <a:bodyPr wrap="square" lIns="36576" tIns="21945" rIns="36576" bIns="21945" anchor="t">
             <a:spAutoFit/>
           </a:bodyPr>
           <a:lstStyle/>
@@ -6911,7 +7938,9 @@
         <p:txBody>
           <a:bodyPr rtlCol="0" anchor="ctr"/>
           <a:lstStyle/>
-          <a:p/>
+          <a:p>
+            <a:endParaRPr/>
+          </a:p>
         </p:txBody>
       </p:sp>
       <p:sp>
@@ -6955,7 +7984,9 @@
         <p:txBody>
           <a:bodyPr rtlCol="0" anchor="ctr"/>
           <a:lstStyle/>
-          <a:p/>
+          <a:p>
+            <a:endParaRPr/>
+          </a:p>
         </p:txBody>
       </p:sp>
       <p:sp>
@@ -6975,7 +8006,7 @@
           <a:noFill/>
         </p:spPr>
         <p:txBody>
-          <a:bodyPr wrap="square" lIns="36576" rIns="36576" tIns="21945" bIns="21945" anchor="t">
+          <a:bodyPr wrap="square" lIns="36576" tIns="21945" rIns="36576" bIns="21945" anchor="t">
             <a:spAutoFit/>
           </a:bodyPr>
           <a:lstStyle/>
@@ -7016,7 +8047,7 @@
           <a:noFill/>
         </p:spPr>
         <p:txBody>
-          <a:bodyPr wrap="square" lIns="36576" rIns="36576" tIns="21945" bIns="21945" anchor="t">
+          <a:bodyPr wrap="square" lIns="36576" tIns="21945" rIns="36576" bIns="21945" anchor="t">
             <a:spAutoFit/>
           </a:bodyPr>
           <a:lstStyle/>
@@ -7082,7 +8113,9 @@
         <p:txBody>
           <a:bodyPr rtlCol="0" anchor="ctr"/>
           <a:lstStyle/>
-          <a:p/>
+          <a:p>
+            <a:endParaRPr/>
+          </a:p>
         </p:txBody>
       </p:sp>
       <p:sp>
@@ -7126,7 +8159,9 @@
         <p:txBody>
           <a:bodyPr rtlCol="0" anchor="ctr"/>
           <a:lstStyle/>
-          <a:p/>
+          <a:p>
+            <a:endParaRPr/>
+          </a:p>
         </p:txBody>
       </p:sp>
       <p:sp>
@@ -7146,7 +8181,7 @@
           <a:noFill/>
         </p:spPr>
         <p:txBody>
-          <a:bodyPr wrap="square" lIns="36576" rIns="36576" tIns="21945" bIns="21945" anchor="t">
+          <a:bodyPr wrap="square" lIns="36576" tIns="21945" rIns="36576" bIns="21945" anchor="t">
             <a:spAutoFit/>
           </a:bodyPr>
           <a:lstStyle/>
@@ -7187,7 +8222,7 @@
           <a:noFill/>
         </p:spPr>
         <p:txBody>
-          <a:bodyPr wrap="square" lIns="36576" rIns="36576" tIns="21945" bIns="21945" anchor="t">
+          <a:bodyPr wrap="square" lIns="36576" tIns="21945" rIns="36576" bIns="21945" anchor="t">
             <a:spAutoFit/>
           </a:bodyPr>
           <a:lstStyle/>
@@ -7253,7 +8288,9 @@
         <p:txBody>
           <a:bodyPr rtlCol="0" anchor="ctr"/>
           <a:lstStyle/>
-          <a:p/>
+          <a:p>
+            <a:endParaRPr/>
+          </a:p>
         </p:txBody>
       </p:sp>
       <p:sp>
@@ -7297,7 +8334,9 @@
         <p:txBody>
           <a:bodyPr rtlCol="0" anchor="ctr"/>
           <a:lstStyle/>
-          <a:p/>
+          <a:p>
+            <a:endParaRPr/>
+          </a:p>
         </p:txBody>
       </p:sp>
       <p:sp>
@@ -7317,7 +8356,7 @@
           <a:noFill/>
         </p:spPr>
         <p:txBody>
-          <a:bodyPr wrap="square" lIns="36576" rIns="36576" tIns="21945" bIns="21945" anchor="t">
+          <a:bodyPr wrap="square" lIns="36576" tIns="21945" rIns="36576" bIns="21945" anchor="t">
             <a:spAutoFit/>
           </a:bodyPr>
           <a:lstStyle/>
@@ -7358,7 +8397,7 @@
           <a:noFill/>
         </p:spPr>
         <p:txBody>
-          <a:bodyPr wrap="square" lIns="36576" rIns="36576" tIns="21945" bIns="21945" anchor="t">
+          <a:bodyPr wrap="square" lIns="36576" tIns="21945" rIns="36576" bIns="21945" anchor="t">
             <a:spAutoFit/>
           </a:bodyPr>
           <a:lstStyle/>
@@ -7400,7 +8439,7 @@
           <a:noFill/>
         </p:spPr>
         <p:txBody>
-          <a:bodyPr wrap="square" lIns="0" rIns="0" tIns="0" bIns="0" anchor="t">
+          <a:bodyPr wrap="square" lIns="0" tIns="0" rIns="0" bIns="0" anchor="t">
             <a:spAutoFit/>
           </a:bodyPr>
           <a:lstStyle/>
@@ -7432,8 +8471,8 @@
 </p:sld>
 </file>
 
-<file path=ppt/slides/slide12.xml><?xml version="1.0" encoding="utf-8"?>
-<p:sld xmlns:a="http://schemas.openxmlformats.org/drawingml/2006/main" xmlns:p="http://schemas.openxmlformats.org/presentationml/2006/main" xmlns:r="http://schemas.openxmlformats.org/officeDocument/2006/relationships">
+<file path=ppt/slides/slide13.xml><?xml version="1.0" encoding="utf-8"?>
+<p:sld xmlns:a="http://schemas.openxmlformats.org/drawingml/2006/main" xmlns:r="http://schemas.openxmlformats.org/officeDocument/2006/relationships" xmlns:p="http://schemas.openxmlformats.org/presentationml/2006/main">
   <p:cSld>
     <p:spTree>
       <p:nvGrpSpPr>
@@ -7441,7 +8480,14 @@
         <p:cNvGrpSpPr/>
         <p:nvPr/>
       </p:nvGrpSpPr>
-      <p:grpSpPr/>
+      <p:grpSpPr>
+        <a:xfrm>
+          <a:off x="0" y="0"/>
+          <a:ext cx="0" cy="0"/>
+          <a:chOff x="0" y="0"/>
+          <a:chExt cx="0" cy="0"/>
+        </a:xfrm>
+      </p:grpSpPr>
       <p:sp>
         <p:nvSpPr>
           <p:cNvPr id="2" name="TextBox 1"/>
@@ -7459,7 +8505,7 @@
           <a:noFill/>
         </p:spPr>
         <p:txBody>
-          <a:bodyPr wrap="square" lIns="0" rIns="0" tIns="0" bIns="0" anchor="ctr">
+          <a:bodyPr wrap="square" lIns="0" tIns="0" rIns="0" bIns="0" anchor="ctr">
             <a:spAutoFit/>
           </a:bodyPr>
           <a:lstStyle/>
@@ -7500,7 +8546,7 @@
           <a:noFill/>
         </p:spPr>
         <p:txBody>
-          <a:bodyPr wrap="square" lIns="0" rIns="0" tIns="0" bIns="0" anchor="ctr">
+          <a:bodyPr wrap="square" lIns="0" tIns="0" rIns="0" bIns="0" anchor="ctr">
             <a:spAutoFit/>
           </a:bodyPr>
           <a:lstStyle/>
@@ -7576,7 +8622,7 @@
           <a:noFill/>
         </p:spPr>
         <p:txBody>
-          <a:bodyPr wrap="square" lIns="0" rIns="0" tIns="0" bIns="0" anchor="t">
+          <a:bodyPr wrap="square" lIns="0" tIns="0" rIns="0" bIns="0" anchor="t">
             <a:spAutoFit/>
           </a:bodyPr>
           <a:lstStyle/>
@@ -7641,7 +8687,9 @@
         <p:txBody>
           <a:bodyPr rtlCol="0" anchor="ctr"/>
           <a:lstStyle/>
-          <a:p/>
+          <a:p>
+            <a:endParaRPr/>
+          </a:p>
         </p:txBody>
       </p:sp>
       <p:sp>
@@ -7661,7 +8709,7 @@
           <a:noFill/>
         </p:spPr>
         <p:txBody>
-          <a:bodyPr wrap="square" lIns="128016" rIns="128016" tIns="76809" bIns="76809" anchor="t">
+          <a:bodyPr wrap="square" lIns="128016" tIns="76809" rIns="128016" bIns="76809" anchor="t">
             <a:spAutoFit/>
           </a:bodyPr>
           <a:lstStyle/>
@@ -7702,7 +8750,7 @@
           <a:noFill/>
         </p:spPr>
         <p:txBody>
-          <a:bodyPr wrap="square" lIns="128016" rIns="128016" tIns="76809" bIns="76809" anchor="t">
+          <a:bodyPr wrap="square" lIns="128016" tIns="76809" rIns="128016" bIns="76809" anchor="t">
             <a:spAutoFit/>
           </a:bodyPr>
           <a:lstStyle/>
@@ -7856,17 +8904,14 @@
                 <a:spcPts val="0"/>
               </a:spcAft>
             </a:pPr>
-            <a:r>
-              <a:rPr sz="1350" b="0" i="0">
-                <a:solidFill>
-                  <a:srgbClr val="111111"/>
-                </a:solidFill>
-                <a:latin typeface="Consolas"/>
-                <a:ea typeface="Consolas"/>
-                <a:cs typeface="Consolas"/>
-              </a:rPr>
-              <a:t/>
-            </a:r>
+            <a:endParaRPr sz="1350" b="1" i="0">
+              <a:solidFill>
+                <a:srgbClr val="111111"/>
+              </a:solidFill>
+              <a:latin typeface="Consolas"/>
+              <a:ea typeface="Consolas"/>
+              <a:cs typeface="Consolas"/>
+            </a:endParaRPr>
           </a:p>
           <a:p>
             <a:pPr algn="l">
@@ -7983,7 +9028,9 @@
         <p:txBody>
           <a:bodyPr rtlCol="0" anchor="ctr"/>
           <a:lstStyle/>
-          <a:p/>
+          <a:p>
+            <a:endParaRPr/>
+          </a:p>
         </p:txBody>
       </p:sp>
       <p:sp>
@@ -8027,7 +9074,9 @@
         <p:txBody>
           <a:bodyPr rtlCol="0" anchor="ctr"/>
           <a:lstStyle/>
-          <a:p/>
+          <a:p>
+            <a:endParaRPr/>
+          </a:p>
         </p:txBody>
       </p:sp>
       <p:sp>
@@ -8047,7 +9096,7 @@
           <a:noFill/>
         </p:spPr>
         <p:txBody>
-          <a:bodyPr wrap="square" lIns="128016" rIns="128016" tIns="76809" bIns="76809" anchor="ctr">
+          <a:bodyPr wrap="square" lIns="128016" tIns="76809" rIns="128016" bIns="76809" anchor="ctr">
             <a:spAutoFit/>
           </a:bodyPr>
           <a:lstStyle/>
@@ -8088,7 +9137,7 @@
           <a:noFill/>
         </p:spPr>
         <p:txBody>
-          <a:bodyPr wrap="square" lIns="0" rIns="0" tIns="0" bIns="0" anchor="t">
+          <a:bodyPr wrap="square" lIns="0" tIns="0" rIns="0" bIns="0" anchor="t">
             <a:spAutoFit/>
           </a:bodyPr>
           <a:lstStyle/>
@@ -8129,7 +9178,7 @@
           <a:noFill/>
         </p:spPr>
         <p:txBody>
-          <a:bodyPr wrap="square" lIns="0" rIns="0" tIns="0" bIns="0" anchor="t">
+          <a:bodyPr wrap="square" lIns="0" tIns="0" rIns="0" bIns="0" anchor="t">
             <a:spAutoFit/>
           </a:bodyPr>
           <a:lstStyle/>
@@ -8170,7 +9219,7 @@
           <a:noFill/>
         </p:spPr>
         <p:txBody>
-          <a:bodyPr wrap="square" lIns="0" rIns="0" tIns="0" bIns="0" anchor="t">
+          <a:bodyPr wrap="square" lIns="0" tIns="0" rIns="0" bIns="0" anchor="t">
             <a:spAutoFit/>
           </a:bodyPr>
           <a:lstStyle/>
@@ -8211,7 +9260,7 @@
           <a:noFill/>
         </p:spPr>
         <p:txBody>
-          <a:bodyPr wrap="square" lIns="0" rIns="0" tIns="0" bIns="0" anchor="t">
+          <a:bodyPr wrap="square" lIns="0" tIns="0" rIns="0" bIns="0" anchor="t">
             <a:spAutoFit/>
           </a:bodyPr>
           <a:lstStyle/>
@@ -8252,7 +9301,7 @@
           <a:noFill/>
         </p:spPr>
         <p:txBody>
-          <a:bodyPr wrap="square" lIns="0" rIns="0" tIns="0" bIns="0" anchor="t">
+          <a:bodyPr wrap="square" lIns="0" tIns="0" rIns="0" bIns="0" anchor="t">
             <a:spAutoFit/>
           </a:bodyPr>
           <a:lstStyle/>
@@ -8293,7 +9342,7 @@
           <a:noFill/>
         </p:spPr>
         <p:txBody>
-          <a:bodyPr wrap="square" lIns="0" rIns="0" tIns="0" bIns="0" anchor="t">
+          <a:bodyPr wrap="square" lIns="0" tIns="0" rIns="0" bIns="0" anchor="t">
             <a:spAutoFit/>
           </a:bodyPr>
           <a:lstStyle/>
@@ -8334,7 +9383,7 @@
           <a:noFill/>
         </p:spPr>
         <p:txBody>
-          <a:bodyPr wrap="square" lIns="0" rIns="0" tIns="0" bIns="0" anchor="t">
+          <a:bodyPr wrap="square" lIns="0" tIns="0" rIns="0" bIns="0" anchor="t">
             <a:spAutoFit/>
           </a:bodyPr>
           <a:lstStyle/>
@@ -8375,7 +9424,7 @@
           <a:noFill/>
         </p:spPr>
         <p:txBody>
-          <a:bodyPr wrap="square" lIns="0" rIns="0" tIns="0" bIns="0" anchor="t">
+          <a:bodyPr wrap="square" lIns="0" tIns="0" rIns="0" bIns="0" anchor="t">
             <a:spAutoFit/>
           </a:bodyPr>
           <a:lstStyle/>
@@ -8440,7 +9489,9 @@
         <p:txBody>
           <a:bodyPr rtlCol="0" anchor="ctr"/>
           <a:lstStyle/>
-          <a:p/>
+          <a:p>
+            <a:endParaRPr/>
+          </a:p>
         </p:txBody>
       </p:sp>
       <p:sp>
@@ -8484,7 +9535,9 @@
         <p:txBody>
           <a:bodyPr rtlCol="0" anchor="ctr"/>
           <a:lstStyle/>
-          <a:p/>
+          <a:p>
+            <a:endParaRPr/>
+          </a:p>
         </p:txBody>
       </p:sp>
       <p:sp>
@@ -8504,7 +9557,7 @@
           <a:noFill/>
         </p:spPr>
         <p:txBody>
-          <a:bodyPr wrap="square" lIns="128016" rIns="128016" tIns="76809" bIns="76809" anchor="ctr">
+          <a:bodyPr wrap="square" lIns="128016" tIns="76809" rIns="128016" bIns="76809" anchor="ctr">
             <a:spAutoFit/>
           </a:bodyPr>
           <a:lstStyle/>
@@ -8545,7 +9598,7 @@
           <a:noFill/>
         </p:spPr>
         <p:txBody>
-          <a:bodyPr wrap="square" lIns="128016" rIns="128016" tIns="76809" bIns="76809" anchor="t">
+          <a:bodyPr wrap="square" lIns="128016" tIns="76809" rIns="128016" bIns="76809" anchor="t">
             <a:spAutoFit/>
           </a:bodyPr>
           <a:lstStyle/>
@@ -8631,8 +9684,8 @@
 </p:sld>
 </file>
 
-<file path=ppt/slides/slide13.xml><?xml version="1.0" encoding="utf-8"?>
-<p:sld xmlns:a="http://schemas.openxmlformats.org/drawingml/2006/main" xmlns:p="http://schemas.openxmlformats.org/presentationml/2006/main" xmlns:r="http://schemas.openxmlformats.org/officeDocument/2006/relationships">
+<file path=ppt/slides/slide14.xml><?xml version="1.0" encoding="utf-8"?>
+<p:sld xmlns:a="http://schemas.openxmlformats.org/drawingml/2006/main" xmlns:r="http://schemas.openxmlformats.org/officeDocument/2006/relationships" xmlns:p="http://schemas.openxmlformats.org/presentationml/2006/main">
   <p:cSld>
     <p:spTree>
       <p:nvGrpSpPr>
@@ -8640,7 +9693,14 @@
         <p:cNvGrpSpPr/>
         <p:nvPr/>
       </p:nvGrpSpPr>
-      <p:grpSpPr/>
+      <p:grpSpPr>
+        <a:xfrm>
+          <a:off x="0" y="0"/>
+          <a:ext cx="0" cy="0"/>
+          <a:chOff x="0" y="0"/>
+          <a:chExt cx="0" cy="0"/>
+        </a:xfrm>
+      </p:grpSpPr>
       <p:sp>
         <p:nvSpPr>
           <p:cNvPr id="2" name="TextBox 1"/>
@@ -8658,7 +9718,7 @@
           <a:noFill/>
         </p:spPr>
         <p:txBody>
-          <a:bodyPr wrap="square" lIns="0" rIns="0" tIns="0" bIns="0" anchor="ctr">
+          <a:bodyPr wrap="square" lIns="0" tIns="0" rIns="0" bIns="0" anchor="ctr">
             <a:spAutoFit/>
           </a:bodyPr>
           <a:lstStyle/>
@@ -8699,7 +9759,7 @@
           <a:noFill/>
         </p:spPr>
         <p:txBody>
-          <a:bodyPr wrap="square" lIns="0" rIns="0" tIns="0" bIns="0" anchor="ctr">
+          <a:bodyPr wrap="square" lIns="0" tIns="0" rIns="0" bIns="0" anchor="ctr">
             <a:spAutoFit/>
           </a:bodyPr>
           <a:lstStyle/>
@@ -8775,7 +9835,7 @@
           <a:noFill/>
         </p:spPr>
         <p:txBody>
-          <a:bodyPr wrap="square" lIns="0" rIns="0" tIns="0" bIns="0" anchor="t">
+          <a:bodyPr wrap="square" lIns="0" tIns="0" rIns="0" bIns="0" anchor="t">
             <a:spAutoFit/>
           </a:bodyPr>
           <a:lstStyle/>
@@ -8840,7 +9900,9 @@
         <p:txBody>
           <a:bodyPr rtlCol="0" anchor="ctr"/>
           <a:lstStyle/>
-          <a:p/>
+          <a:p>
+            <a:endParaRPr/>
+          </a:p>
         </p:txBody>
       </p:sp>
       <p:sp>
@@ -8860,7 +9922,7 @@
           <a:noFill/>
         </p:spPr>
         <p:txBody>
-          <a:bodyPr wrap="square" lIns="128016" rIns="128016" tIns="76809" bIns="76809" anchor="t">
+          <a:bodyPr wrap="square" lIns="128016" tIns="76809" rIns="128016" bIns="76809" anchor="t">
             <a:spAutoFit/>
           </a:bodyPr>
           <a:lstStyle/>
@@ -8901,7 +9963,7 @@
           <a:noFill/>
         </p:spPr>
         <p:txBody>
-          <a:bodyPr wrap="square" lIns="128016" rIns="128016" tIns="76809" bIns="76809" anchor="t">
+          <a:bodyPr wrap="square" lIns="128016" tIns="76809" rIns="128016" bIns="76809" anchor="t">
             <a:spAutoFit/>
           </a:bodyPr>
           <a:lstStyle/>
@@ -9030,19 +10092,43 @@
         <a:graphic>
           <a:graphicData uri="http://schemas.openxmlformats.org/drawingml/2006/table">
             <a:tbl>
-              <a:tblPr firstRow="0" bandRow="0">
+              <a:tblPr>
                 <a:tableStyleId>{5940675A-B579-460E-94D1-54222C63F5DA}</a:tableStyleId>
               </a:tblPr>
               <a:tblGrid>
-                <a:gridCol w="791196"/>
-                <a:gridCol w="1758214"/>
-                <a:gridCol w="1494482"/>
-                <a:gridCol w="967018"/>
+                <a:gridCol w="791196">
+                  <a:extLst>
+                    <a:ext uri="{9D8B030D-6E8A-4147-A177-3AD203B41FA5}">
+                      <a16:colId xmlns:a16="http://schemas.microsoft.com/office/drawing/2014/main" val="20000"/>
+                    </a:ext>
+                  </a:extLst>
+                </a:gridCol>
+                <a:gridCol w="1758214">
+                  <a:extLst>
+                    <a:ext uri="{9D8B030D-6E8A-4147-A177-3AD203B41FA5}">
+                      <a16:colId xmlns:a16="http://schemas.microsoft.com/office/drawing/2014/main" val="20001"/>
+                    </a:ext>
+                  </a:extLst>
+                </a:gridCol>
+                <a:gridCol w="1494482">
+                  <a:extLst>
+                    <a:ext uri="{9D8B030D-6E8A-4147-A177-3AD203B41FA5}">
+                      <a16:colId xmlns:a16="http://schemas.microsoft.com/office/drawing/2014/main" val="20002"/>
+                    </a:ext>
+                  </a:extLst>
+                </a:gridCol>
+                <a:gridCol w="967018">
+                  <a:extLst>
+                    <a:ext uri="{9D8B030D-6E8A-4147-A177-3AD203B41FA5}">
+                      <a16:colId xmlns:a16="http://schemas.microsoft.com/office/drawing/2014/main" val="20003"/>
+                    </a:ext>
+                  </a:extLst>
+                </a:gridCol>
               </a:tblGrid>
               <a:tr h="420624">
                 <a:tc>
                   <a:txBody>
-                    <a:bodyPr wrap="square"/>
+                    <a:bodyPr/>
                     <a:lstStyle/>
                     <a:p>
                       <a:pPr algn="l"/>
@@ -9067,7 +10153,7 @@
                 </a:tc>
                 <a:tc>
                   <a:txBody>
-                    <a:bodyPr wrap="square"/>
+                    <a:bodyPr/>
                     <a:lstStyle/>
                     <a:p>
                       <a:pPr algn="l"/>
@@ -9092,7 +10178,7 @@
                 </a:tc>
                 <a:tc>
                   <a:txBody>
-                    <a:bodyPr wrap="square"/>
+                    <a:bodyPr/>
                     <a:lstStyle/>
                     <a:p>
                       <a:pPr algn="l"/>
@@ -9117,7 +10203,7 @@
                 </a:tc>
                 <a:tc>
                   <a:txBody>
-                    <a:bodyPr wrap="square"/>
+                    <a:bodyPr/>
                     <a:lstStyle/>
                     <a:p>
                       <a:pPr algn="l"/>
@@ -9140,11 +10226,16 @@
                     </a:solidFill>
                   </a:tcPr>
                 </a:tc>
+                <a:extLst>
+                  <a:ext uri="{0D108BD9-81ED-4DB2-BD59-A6C34878D82A}">
+                    <a16:rowId xmlns:a16="http://schemas.microsoft.com/office/drawing/2014/main" val="10000"/>
+                  </a:ext>
+                </a:extLst>
               </a:tr>
               <a:tr h="420624">
                 <a:tc>
                   <a:txBody>
-                    <a:bodyPr wrap="square"/>
+                    <a:bodyPr/>
                     <a:lstStyle/>
                     <a:p>
                       <a:pPr algn="l"/>
@@ -9169,7 +10260,7 @@
                 </a:tc>
                 <a:tc>
                   <a:txBody>
-                    <a:bodyPr wrap="square"/>
+                    <a:bodyPr/>
                     <a:lstStyle/>
                     <a:p>
                       <a:pPr algn="l"/>
@@ -9194,7 +10285,7 @@
                 </a:tc>
                 <a:tc>
                   <a:txBody>
-                    <a:bodyPr wrap="square"/>
+                    <a:bodyPr/>
                     <a:lstStyle/>
                     <a:p>
                       <a:pPr algn="l"/>
@@ -9219,7 +10310,7 @@
                 </a:tc>
                 <a:tc>
                   <a:txBody>
-                    <a:bodyPr wrap="square"/>
+                    <a:bodyPr/>
                     <a:lstStyle/>
                     <a:p>
                       <a:pPr algn="l"/>
@@ -9242,11 +10333,16 @@
                     </a:solidFill>
                   </a:tcPr>
                 </a:tc>
+                <a:extLst>
+                  <a:ext uri="{0D108BD9-81ED-4DB2-BD59-A6C34878D82A}">
+                    <a16:rowId xmlns:a16="http://schemas.microsoft.com/office/drawing/2014/main" val="10001"/>
+                  </a:ext>
+                </a:extLst>
               </a:tr>
               <a:tr h="420624">
                 <a:tc>
                   <a:txBody>
-                    <a:bodyPr wrap="square"/>
+                    <a:bodyPr/>
                     <a:lstStyle/>
                     <a:p>
                       <a:pPr algn="l"/>
@@ -9271,7 +10367,7 @@
                 </a:tc>
                 <a:tc>
                   <a:txBody>
-                    <a:bodyPr wrap="square"/>
+                    <a:bodyPr/>
                     <a:lstStyle/>
                     <a:p>
                       <a:pPr algn="l"/>
@@ -9296,7 +10392,7 @@
                 </a:tc>
                 <a:tc>
                   <a:txBody>
-                    <a:bodyPr wrap="square"/>
+                    <a:bodyPr/>
                     <a:lstStyle/>
                     <a:p>
                       <a:pPr algn="l"/>
@@ -9321,7 +10417,7 @@
                 </a:tc>
                 <a:tc>
                   <a:txBody>
-                    <a:bodyPr wrap="square"/>
+                    <a:bodyPr/>
                     <a:lstStyle/>
                     <a:p>
                       <a:pPr algn="l"/>
@@ -9344,11 +10440,16 @@
                     </a:solidFill>
                   </a:tcPr>
                 </a:tc>
+                <a:extLst>
+                  <a:ext uri="{0D108BD9-81ED-4DB2-BD59-A6C34878D82A}">
+                    <a16:rowId xmlns:a16="http://schemas.microsoft.com/office/drawing/2014/main" val="10002"/>
+                  </a:ext>
+                </a:extLst>
               </a:tr>
               <a:tr h="420624">
                 <a:tc>
                   <a:txBody>
-                    <a:bodyPr wrap="square"/>
+                    <a:bodyPr/>
                     <a:lstStyle/>
                     <a:p>
                       <a:pPr algn="l"/>
@@ -9373,7 +10474,7 @@
                 </a:tc>
                 <a:tc>
                   <a:txBody>
-                    <a:bodyPr wrap="square"/>
+                    <a:bodyPr/>
                     <a:lstStyle/>
                     <a:p>
                       <a:pPr algn="l"/>
@@ -9398,7 +10499,7 @@
                 </a:tc>
                 <a:tc>
                   <a:txBody>
-                    <a:bodyPr wrap="square"/>
+                    <a:bodyPr/>
                     <a:lstStyle/>
                     <a:p>
                       <a:pPr algn="l"/>
@@ -9423,7 +10524,7 @@
                 </a:tc>
                 <a:tc>
                   <a:txBody>
-                    <a:bodyPr wrap="square"/>
+                    <a:bodyPr/>
                     <a:lstStyle/>
                     <a:p>
                       <a:pPr algn="l"/>
@@ -9446,11 +10547,16 @@
                     </a:solidFill>
                   </a:tcPr>
                 </a:tc>
+                <a:extLst>
+                  <a:ext uri="{0D108BD9-81ED-4DB2-BD59-A6C34878D82A}">
+                    <a16:rowId xmlns:a16="http://schemas.microsoft.com/office/drawing/2014/main" val="10003"/>
+                  </a:ext>
+                </a:extLst>
               </a:tr>
               <a:tr h="420624">
                 <a:tc>
                   <a:txBody>
-                    <a:bodyPr wrap="square"/>
+                    <a:bodyPr/>
                     <a:lstStyle/>
                     <a:p>
                       <a:pPr algn="l"/>
@@ -9475,7 +10581,7 @@
                 </a:tc>
                 <a:tc>
                   <a:txBody>
-                    <a:bodyPr wrap="square"/>
+                    <a:bodyPr/>
                     <a:lstStyle/>
                     <a:p>
                       <a:pPr algn="l"/>
@@ -9500,7 +10606,7 @@
                 </a:tc>
                 <a:tc>
                   <a:txBody>
-                    <a:bodyPr wrap="square"/>
+                    <a:bodyPr/>
                     <a:lstStyle/>
                     <a:p>
                       <a:pPr algn="l"/>
@@ -9525,7 +10631,7 @@
                 </a:tc>
                 <a:tc>
                   <a:txBody>
-                    <a:bodyPr wrap="square"/>
+                    <a:bodyPr/>
                     <a:lstStyle/>
                     <a:p>
                       <a:pPr algn="l"/>
@@ -9548,11 +10654,16 @@
                     </a:solidFill>
                   </a:tcPr>
                 </a:tc>
+                <a:extLst>
+                  <a:ext uri="{0D108BD9-81ED-4DB2-BD59-A6C34878D82A}">
+                    <a16:rowId xmlns:a16="http://schemas.microsoft.com/office/drawing/2014/main" val="10004"/>
+                  </a:ext>
+                </a:extLst>
               </a:tr>
               <a:tr h="420624">
                 <a:tc>
                   <a:txBody>
-                    <a:bodyPr wrap="square"/>
+                    <a:bodyPr/>
                     <a:lstStyle/>
                     <a:p>
                       <a:pPr algn="l"/>
@@ -9577,7 +10688,7 @@
                 </a:tc>
                 <a:tc>
                   <a:txBody>
-                    <a:bodyPr wrap="square"/>
+                    <a:bodyPr/>
                     <a:lstStyle/>
                     <a:p>
                       <a:pPr algn="l"/>
@@ -9602,7 +10713,7 @@
                 </a:tc>
                 <a:tc>
                   <a:txBody>
-                    <a:bodyPr wrap="square"/>
+                    <a:bodyPr/>
                     <a:lstStyle/>
                     <a:p>
                       <a:pPr algn="l"/>
@@ -9627,7 +10738,7 @@
                 </a:tc>
                 <a:tc>
                   <a:txBody>
-                    <a:bodyPr wrap="square"/>
+                    <a:bodyPr/>
                     <a:lstStyle/>
                     <a:p>
                       <a:pPr algn="l"/>
@@ -9650,6 +10761,11 @@
                     </a:solidFill>
                   </a:tcPr>
                 </a:tc>
+                <a:extLst>
+                  <a:ext uri="{0D108BD9-81ED-4DB2-BD59-A6C34878D82A}">
+                    <a16:rowId xmlns:a16="http://schemas.microsoft.com/office/drawing/2014/main" val="10005"/>
+                  </a:ext>
+                </a:extLst>
               </a:tr>
             </a:tbl>
           </a:graphicData>
@@ -9696,7 +10812,9 @@
         <p:txBody>
           <a:bodyPr rtlCol="0" anchor="ctr"/>
           <a:lstStyle/>
-          <a:p/>
+          <a:p>
+            <a:endParaRPr/>
+          </a:p>
         </p:txBody>
       </p:sp>
       <p:sp>
@@ -9740,7 +10858,9 @@
         <p:txBody>
           <a:bodyPr rtlCol="0" anchor="ctr"/>
           <a:lstStyle/>
-          <a:p/>
+          <a:p>
+            <a:endParaRPr/>
+          </a:p>
         </p:txBody>
       </p:sp>
       <p:sp>
@@ -9760,7 +10880,7 @@
           <a:noFill/>
         </p:spPr>
         <p:txBody>
-          <a:bodyPr wrap="square" lIns="128016" rIns="128016" tIns="76809" bIns="76809" anchor="ctr">
+          <a:bodyPr wrap="square" lIns="128016" tIns="76809" rIns="128016" bIns="76809" anchor="ctr">
             <a:spAutoFit/>
           </a:bodyPr>
           <a:lstStyle/>
@@ -9801,7 +10921,7 @@
           <a:noFill/>
         </p:spPr>
         <p:txBody>
-          <a:bodyPr wrap="square" lIns="128016" rIns="128016" tIns="76809" bIns="76809" anchor="t">
+          <a:bodyPr wrap="square" lIns="128016" tIns="76809" rIns="128016" bIns="76809" anchor="t">
             <a:spAutoFit/>
           </a:bodyPr>
           <a:lstStyle/>
@@ -9884,7 +11004,9 @@
         <p:txBody>
           <a:bodyPr rtlCol="0" anchor="ctr"/>
           <a:lstStyle/>
-          <a:p/>
+          <a:p>
+            <a:endParaRPr/>
+          </a:p>
         </p:txBody>
       </p:sp>
       <p:sp>
@@ -9928,7 +11050,9 @@
         <p:txBody>
           <a:bodyPr rtlCol="0" anchor="ctr"/>
           <a:lstStyle/>
-          <a:p/>
+          <a:p>
+            <a:endParaRPr/>
+          </a:p>
         </p:txBody>
       </p:sp>
       <p:sp>
@@ -9948,7 +11072,7 @@
           <a:noFill/>
         </p:spPr>
         <p:txBody>
-          <a:bodyPr wrap="square" lIns="128016" rIns="128016" tIns="76809" bIns="76809" anchor="ctr">
+          <a:bodyPr wrap="square" lIns="128016" tIns="76809" rIns="128016" bIns="76809" anchor="ctr">
             <a:spAutoFit/>
           </a:bodyPr>
           <a:lstStyle/>
@@ -9989,7 +11113,7 @@
           <a:noFill/>
         </p:spPr>
         <p:txBody>
-          <a:bodyPr wrap="square" lIns="128016" rIns="128016" tIns="76809" bIns="76809" anchor="t">
+          <a:bodyPr wrap="square" lIns="128016" tIns="76809" rIns="128016" bIns="76809" anchor="t">
             <a:spAutoFit/>
           </a:bodyPr>
           <a:lstStyle/>
@@ -10090,7 +11214,9 @@
         <p:txBody>
           <a:bodyPr rtlCol="0" anchor="ctr"/>
           <a:lstStyle/>
-          <a:p/>
+          <a:p>
+            <a:endParaRPr/>
+          </a:p>
         </p:txBody>
       </p:sp>
       <p:sp>
@@ -10142,8 +11268,8 @@
 </p:sld>
 </file>
 
-<file path=ppt/slides/slide14.xml><?xml version="1.0" encoding="utf-8"?>
-<p:sld xmlns:a="http://schemas.openxmlformats.org/drawingml/2006/main" xmlns:p="http://schemas.openxmlformats.org/presentationml/2006/main" xmlns:r="http://schemas.openxmlformats.org/officeDocument/2006/relationships">
+<file path=ppt/slides/slide15.xml><?xml version="1.0" encoding="utf-8"?>
+<p:sld xmlns:a="http://schemas.openxmlformats.org/drawingml/2006/main" xmlns:r="http://schemas.openxmlformats.org/officeDocument/2006/relationships" xmlns:p="http://schemas.openxmlformats.org/presentationml/2006/main">
   <p:cSld>
     <p:spTree>
       <p:nvGrpSpPr>
@@ -10151,7 +11277,14 @@
         <p:cNvGrpSpPr/>
         <p:nvPr/>
       </p:nvGrpSpPr>
-      <p:grpSpPr/>
+      <p:grpSpPr>
+        <a:xfrm>
+          <a:off x="0" y="0"/>
+          <a:ext cx="0" cy="0"/>
+          <a:chOff x="0" y="0"/>
+          <a:chExt cx="0" cy="0"/>
+        </a:xfrm>
+      </p:grpSpPr>
       <p:sp>
         <p:nvSpPr>
           <p:cNvPr id="2" name="TextBox 1"/>
@@ -10169,7 +11302,7 @@
           <a:noFill/>
         </p:spPr>
         <p:txBody>
-          <a:bodyPr wrap="square" lIns="0" rIns="0" tIns="0" bIns="0" anchor="ctr">
+          <a:bodyPr wrap="square" lIns="0" tIns="0" rIns="0" bIns="0" anchor="ctr">
             <a:spAutoFit/>
           </a:bodyPr>
           <a:lstStyle/>
@@ -10210,7 +11343,7 @@
           <a:noFill/>
         </p:spPr>
         <p:txBody>
-          <a:bodyPr wrap="square" lIns="0" rIns="0" tIns="0" bIns="0" anchor="ctr">
+          <a:bodyPr wrap="square" lIns="0" tIns="0" rIns="0" bIns="0" anchor="ctr">
             <a:spAutoFit/>
           </a:bodyPr>
           <a:lstStyle/>
@@ -10286,7 +11419,7 @@
           <a:noFill/>
         </p:spPr>
         <p:txBody>
-          <a:bodyPr wrap="square" lIns="0" rIns="0" tIns="0" bIns="0" anchor="t">
+          <a:bodyPr wrap="square" lIns="0" tIns="0" rIns="0" bIns="0" anchor="t">
             <a:spAutoFit/>
           </a:bodyPr>
           <a:lstStyle/>
@@ -10325,20 +11458,50 @@
         <a:graphic>
           <a:graphicData uri="http://schemas.openxmlformats.org/drawingml/2006/table">
             <a:tbl>
-              <a:tblPr firstRow="0" bandRow="0">
+              <a:tblPr>
                 <a:tableStyleId>{5940675A-B579-460E-94D1-54222C63F5DA}</a:tableStyleId>
               </a:tblPr>
               <a:tblGrid>
-                <a:gridCol w="1748942"/>
-                <a:gridCol w="1012545"/>
-                <a:gridCol w="1012545"/>
-                <a:gridCol w="1748942"/>
-                <a:gridCol w="1380744"/>
+                <a:gridCol w="1748942">
+                  <a:extLst>
+                    <a:ext uri="{9D8B030D-6E8A-4147-A177-3AD203B41FA5}">
+                      <a16:colId xmlns:a16="http://schemas.microsoft.com/office/drawing/2014/main" val="20000"/>
+                    </a:ext>
+                  </a:extLst>
+                </a:gridCol>
+                <a:gridCol w="1012545">
+                  <a:extLst>
+                    <a:ext uri="{9D8B030D-6E8A-4147-A177-3AD203B41FA5}">
+                      <a16:colId xmlns:a16="http://schemas.microsoft.com/office/drawing/2014/main" val="20001"/>
+                    </a:ext>
+                  </a:extLst>
+                </a:gridCol>
+                <a:gridCol w="1012545">
+                  <a:extLst>
+                    <a:ext uri="{9D8B030D-6E8A-4147-A177-3AD203B41FA5}">
+                      <a16:colId xmlns:a16="http://schemas.microsoft.com/office/drawing/2014/main" val="20002"/>
+                    </a:ext>
+                  </a:extLst>
+                </a:gridCol>
+                <a:gridCol w="1748942">
+                  <a:extLst>
+                    <a:ext uri="{9D8B030D-6E8A-4147-A177-3AD203B41FA5}">
+                      <a16:colId xmlns:a16="http://schemas.microsoft.com/office/drawing/2014/main" val="20003"/>
+                    </a:ext>
+                  </a:extLst>
+                </a:gridCol>
+                <a:gridCol w="1380744">
+                  <a:extLst>
+                    <a:ext uri="{9D8B030D-6E8A-4147-A177-3AD203B41FA5}">
+                      <a16:colId xmlns:a16="http://schemas.microsoft.com/office/drawing/2014/main" val="20004"/>
+                    </a:ext>
+                  </a:extLst>
+                </a:gridCol>
               </a:tblGrid>
               <a:tr h="438912">
                 <a:tc>
                   <a:txBody>
-                    <a:bodyPr wrap="square"/>
+                    <a:bodyPr/>
                     <a:lstStyle/>
                     <a:p>
                       <a:pPr algn="l"/>
@@ -10363,7 +11526,7 @@
                 </a:tc>
                 <a:tc>
                   <a:txBody>
-                    <a:bodyPr wrap="square"/>
+                    <a:bodyPr/>
                     <a:lstStyle/>
                     <a:p>
                       <a:pPr algn="l"/>
@@ -10388,7 +11551,7 @@
                 </a:tc>
                 <a:tc>
                   <a:txBody>
-                    <a:bodyPr wrap="square"/>
+                    <a:bodyPr/>
                     <a:lstStyle/>
                     <a:p>
                       <a:pPr algn="l"/>
@@ -10413,7 +11576,7 @@
                 </a:tc>
                 <a:tc>
                   <a:txBody>
-                    <a:bodyPr wrap="square"/>
+                    <a:bodyPr/>
                     <a:lstStyle/>
                     <a:p>
                       <a:pPr algn="l"/>
@@ -10438,7 +11601,7 @@
                 </a:tc>
                 <a:tc>
                   <a:txBody>
-                    <a:bodyPr wrap="square"/>
+                    <a:bodyPr/>
                     <a:lstStyle/>
                     <a:p>
                       <a:pPr algn="l"/>
@@ -10461,11 +11624,16 @@
                     </a:solidFill>
                   </a:tcPr>
                 </a:tc>
+                <a:extLst>
+                  <a:ext uri="{0D108BD9-81ED-4DB2-BD59-A6C34878D82A}">
+                    <a16:rowId xmlns:a16="http://schemas.microsoft.com/office/drawing/2014/main" val="10000"/>
+                  </a:ext>
+                </a:extLst>
               </a:tr>
               <a:tr h="438912">
                 <a:tc>
                   <a:txBody>
-                    <a:bodyPr wrap="square"/>
+                    <a:bodyPr/>
                     <a:lstStyle/>
                     <a:p>
                       <a:pPr algn="l"/>
@@ -10490,7 +11658,7 @@
                 </a:tc>
                 <a:tc>
                   <a:txBody>
-                    <a:bodyPr wrap="square"/>
+                    <a:bodyPr/>
                     <a:lstStyle/>
                     <a:p>
                       <a:pPr algn="l"/>
@@ -10515,7 +11683,7 @@
                 </a:tc>
                 <a:tc>
                   <a:txBody>
-                    <a:bodyPr wrap="square"/>
+                    <a:bodyPr/>
                     <a:lstStyle/>
                     <a:p>
                       <a:pPr algn="l"/>
@@ -10540,7 +11708,7 @@
                 </a:tc>
                 <a:tc>
                   <a:txBody>
-                    <a:bodyPr wrap="square"/>
+                    <a:bodyPr/>
                     <a:lstStyle/>
                     <a:p>
                       <a:pPr algn="l"/>
@@ -10565,7 +11733,7 @@
                 </a:tc>
                 <a:tc>
                   <a:txBody>
-                    <a:bodyPr wrap="square"/>
+                    <a:bodyPr/>
                     <a:lstStyle/>
                     <a:p>
                       <a:pPr algn="l"/>
@@ -10588,11 +11756,16 @@
                     </a:solidFill>
                   </a:tcPr>
                 </a:tc>
+                <a:extLst>
+                  <a:ext uri="{0D108BD9-81ED-4DB2-BD59-A6C34878D82A}">
+                    <a16:rowId xmlns:a16="http://schemas.microsoft.com/office/drawing/2014/main" val="10001"/>
+                  </a:ext>
+                </a:extLst>
               </a:tr>
               <a:tr h="438912">
                 <a:tc>
                   <a:txBody>
-                    <a:bodyPr wrap="square"/>
+                    <a:bodyPr/>
                     <a:lstStyle/>
                     <a:p>
                       <a:pPr algn="l"/>
@@ -10617,7 +11790,7 @@
                 </a:tc>
                 <a:tc>
                   <a:txBody>
-                    <a:bodyPr wrap="square"/>
+                    <a:bodyPr/>
                     <a:lstStyle/>
                     <a:p>
                       <a:pPr algn="l"/>
@@ -10642,7 +11815,7 @@
                 </a:tc>
                 <a:tc>
                   <a:txBody>
-                    <a:bodyPr wrap="square"/>
+                    <a:bodyPr/>
                     <a:lstStyle/>
                     <a:p>
                       <a:pPr algn="l"/>
@@ -10667,7 +11840,7 @@
                 </a:tc>
                 <a:tc>
                   <a:txBody>
-                    <a:bodyPr wrap="square"/>
+                    <a:bodyPr/>
                     <a:lstStyle/>
                     <a:p>
                       <a:pPr algn="l"/>
@@ -10692,7 +11865,7 @@
                 </a:tc>
                 <a:tc>
                   <a:txBody>
-                    <a:bodyPr wrap="square"/>
+                    <a:bodyPr/>
                     <a:lstStyle/>
                     <a:p>
                       <a:pPr algn="l"/>
@@ -10715,11 +11888,16 @@
                     </a:solidFill>
                   </a:tcPr>
                 </a:tc>
+                <a:extLst>
+                  <a:ext uri="{0D108BD9-81ED-4DB2-BD59-A6C34878D82A}">
+                    <a16:rowId xmlns:a16="http://schemas.microsoft.com/office/drawing/2014/main" val="10002"/>
+                  </a:ext>
+                </a:extLst>
               </a:tr>
               <a:tr h="438912">
                 <a:tc>
                   <a:txBody>
-                    <a:bodyPr wrap="square"/>
+                    <a:bodyPr/>
                     <a:lstStyle/>
                     <a:p>
                       <a:pPr algn="l"/>
@@ -10744,7 +11922,7 @@
                 </a:tc>
                 <a:tc>
                   <a:txBody>
-                    <a:bodyPr wrap="square"/>
+                    <a:bodyPr/>
                     <a:lstStyle/>
                     <a:p>
                       <a:pPr algn="l"/>
@@ -10769,7 +11947,7 @@
                 </a:tc>
                 <a:tc>
                   <a:txBody>
-                    <a:bodyPr wrap="square"/>
+                    <a:bodyPr/>
                     <a:lstStyle/>
                     <a:p>
                       <a:pPr algn="l"/>
@@ -10794,7 +11972,7 @@
                 </a:tc>
                 <a:tc>
                   <a:txBody>
-                    <a:bodyPr wrap="square"/>
+                    <a:bodyPr/>
                     <a:lstStyle/>
                     <a:p>
                       <a:pPr algn="l"/>
@@ -10819,7 +11997,7 @@
                 </a:tc>
                 <a:tc>
                   <a:txBody>
-                    <a:bodyPr wrap="square"/>
+                    <a:bodyPr/>
                     <a:lstStyle/>
                     <a:p>
                       <a:pPr algn="l"/>
@@ -10842,6 +12020,11 @@
                     </a:solidFill>
                   </a:tcPr>
                 </a:tc>
+                <a:extLst>
+                  <a:ext uri="{0D108BD9-81ED-4DB2-BD59-A6C34878D82A}">
+                    <a16:rowId xmlns:a16="http://schemas.microsoft.com/office/drawing/2014/main" val="10003"/>
+                  </a:ext>
+                </a:extLst>
               </a:tr>
             </a:tbl>
           </a:graphicData>
@@ -10888,7 +12071,9 @@
         <p:txBody>
           <a:bodyPr rtlCol="0" anchor="ctr"/>
           <a:lstStyle/>
-          <a:p/>
+          <a:p>
+            <a:endParaRPr/>
+          </a:p>
         </p:txBody>
       </p:sp>
       <p:sp>
@@ -10908,7 +12093,7 @@
           <a:noFill/>
         </p:spPr>
         <p:txBody>
-          <a:bodyPr wrap="square" lIns="45720" rIns="45720" tIns="27432" bIns="27432" anchor="t">
+          <a:bodyPr wrap="square" lIns="45720" tIns="27432" rIns="45720" bIns="27432" anchor="t">
             <a:spAutoFit/>
           </a:bodyPr>
           <a:lstStyle/>
@@ -10949,7 +12134,7 @@
           <a:noFill/>
         </p:spPr>
         <p:txBody>
-          <a:bodyPr wrap="square" lIns="45720" rIns="45720" tIns="27432" bIns="27432" anchor="t">
+          <a:bodyPr wrap="square" lIns="45720" tIns="27432" rIns="45720" bIns="27432" anchor="t">
             <a:spAutoFit/>
           </a:bodyPr>
           <a:lstStyle/>
@@ -11014,7 +12199,9 @@
         <p:txBody>
           <a:bodyPr rtlCol="0" anchor="ctr"/>
           <a:lstStyle/>
-          <a:p/>
+          <a:p>
+            <a:endParaRPr/>
+          </a:p>
         </p:txBody>
       </p:sp>
       <p:sp>
@@ -11058,7 +12245,9 @@
         <p:txBody>
           <a:bodyPr rtlCol="0" anchor="ctr"/>
           <a:lstStyle/>
-          <a:p/>
+          <a:p>
+            <a:endParaRPr/>
+          </a:p>
         </p:txBody>
       </p:sp>
       <p:sp>
@@ -11078,7 +12267,7 @@
           <a:noFill/>
         </p:spPr>
         <p:txBody>
-          <a:bodyPr wrap="square" lIns="128016" rIns="128016" tIns="76809" bIns="76809" anchor="ctr">
+          <a:bodyPr wrap="square" lIns="128016" tIns="76809" rIns="128016" bIns="76809" anchor="ctr">
             <a:spAutoFit/>
           </a:bodyPr>
           <a:lstStyle/>
@@ -11119,7 +12308,7 @@
           <a:noFill/>
         </p:spPr>
         <p:txBody>
-          <a:bodyPr wrap="square" lIns="128016" rIns="128016" tIns="76809" bIns="76809" anchor="t">
+          <a:bodyPr wrap="square" lIns="128016" tIns="76809" rIns="128016" bIns="76809" anchor="t">
             <a:spAutoFit/>
           </a:bodyPr>
           <a:lstStyle/>
@@ -11238,7 +12427,9 @@
         <p:txBody>
           <a:bodyPr rtlCol="0" anchor="ctr"/>
           <a:lstStyle/>
-          <a:p/>
+          <a:p>
+            <a:endParaRPr/>
+          </a:p>
         </p:txBody>
       </p:sp>
       <p:sp>
@@ -11258,7 +12449,7 @@
           <a:noFill/>
         </p:spPr>
         <p:txBody>
-          <a:bodyPr wrap="square" lIns="128016" rIns="128016" tIns="76809" bIns="76809" anchor="t">
+          <a:bodyPr wrap="square" lIns="128016" tIns="76809" rIns="128016" bIns="76809" anchor="t">
             <a:spAutoFit/>
           </a:bodyPr>
           <a:lstStyle/>
@@ -11299,7 +12490,7 @@
           <a:noFill/>
         </p:spPr>
         <p:txBody>
-          <a:bodyPr wrap="square" lIns="128016" rIns="128016" tIns="76809" bIns="76809" anchor="t">
+          <a:bodyPr wrap="square" lIns="128016" tIns="76809" rIns="128016" bIns="76809" anchor="t">
             <a:spAutoFit/>
           </a:bodyPr>
           <a:lstStyle/>
@@ -11526,7 +12717,9 @@
         <p:txBody>
           <a:bodyPr rtlCol="0" anchor="ctr"/>
           <a:lstStyle/>
-          <a:p/>
+          <a:p>
+            <a:endParaRPr/>
+          </a:p>
         </p:txBody>
       </p:sp>
       <p:sp>
@@ -11570,7 +12763,9 @@
         <p:txBody>
           <a:bodyPr rtlCol="0" anchor="ctr"/>
           <a:lstStyle/>
-          <a:p/>
+          <a:p>
+            <a:endParaRPr/>
+          </a:p>
         </p:txBody>
       </p:sp>
       <p:sp>
@@ -11590,7 +12785,7 @@
           <a:noFill/>
         </p:spPr>
         <p:txBody>
-          <a:bodyPr wrap="square" lIns="128016" rIns="128016" tIns="76809" bIns="76809" anchor="ctr">
+          <a:bodyPr wrap="square" lIns="128016" tIns="76809" rIns="128016" bIns="76809" anchor="ctr">
             <a:spAutoFit/>
           </a:bodyPr>
           <a:lstStyle/>
@@ -11631,7 +12826,7 @@
           <a:noFill/>
         </p:spPr>
         <p:txBody>
-          <a:bodyPr wrap="square" lIns="128016" rIns="128016" tIns="76809" bIns="76809" anchor="t">
+          <a:bodyPr wrap="square" lIns="128016" tIns="76809" rIns="128016" bIns="76809" anchor="t">
             <a:spAutoFit/>
           </a:bodyPr>
           <a:lstStyle/>
@@ -11768,7 +12963,9 @@
         <p:txBody>
           <a:bodyPr rtlCol="0" anchor="ctr"/>
           <a:lstStyle/>
-          <a:p/>
+          <a:p>
+            <a:endParaRPr/>
+          </a:p>
         </p:txBody>
       </p:sp>
       <p:sp>
@@ -11820,8 +13017,8 @@
 </p:sld>
 </file>
 
-<file path=ppt/slides/slide15.xml><?xml version="1.0" encoding="utf-8"?>
-<p:sld xmlns:a="http://schemas.openxmlformats.org/drawingml/2006/main" xmlns:p="http://schemas.openxmlformats.org/presentationml/2006/main" xmlns:r="http://schemas.openxmlformats.org/officeDocument/2006/relationships">
+<file path=ppt/slides/slide16.xml><?xml version="1.0" encoding="utf-8"?>
+<p:sld xmlns:a="http://schemas.openxmlformats.org/drawingml/2006/main" xmlns:r="http://schemas.openxmlformats.org/officeDocument/2006/relationships" xmlns:p="http://schemas.openxmlformats.org/presentationml/2006/main">
   <p:cSld>
     <p:spTree>
       <p:nvGrpSpPr>
@@ -11829,7 +13026,14 @@
         <p:cNvGrpSpPr/>
         <p:nvPr/>
       </p:nvGrpSpPr>
-      <p:grpSpPr/>
+      <p:grpSpPr>
+        <a:xfrm>
+          <a:off x="0" y="0"/>
+          <a:ext cx="0" cy="0"/>
+          <a:chOff x="0" y="0"/>
+          <a:chExt cx="0" cy="0"/>
+        </a:xfrm>
+      </p:grpSpPr>
       <p:sp>
         <p:nvSpPr>
           <p:cNvPr id="2" name="TextBox 1"/>
@@ -11847,7 +13051,7 @@
           <a:noFill/>
         </p:spPr>
         <p:txBody>
-          <a:bodyPr wrap="square" lIns="0" rIns="0" tIns="0" bIns="0" anchor="ctr">
+          <a:bodyPr wrap="square" lIns="0" tIns="0" rIns="0" bIns="0" anchor="ctr">
             <a:spAutoFit/>
           </a:bodyPr>
           <a:lstStyle/>
@@ -11888,7 +13092,7 @@
           <a:noFill/>
         </p:spPr>
         <p:txBody>
-          <a:bodyPr wrap="square" lIns="0" rIns="0" tIns="0" bIns="0" anchor="ctr">
+          <a:bodyPr wrap="square" lIns="0" tIns="0" rIns="0" bIns="0" anchor="ctr">
             <a:spAutoFit/>
           </a:bodyPr>
           <a:lstStyle/>
@@ -11964,7 +13168,7 @@
           <a:noFill/>
         </p:spPr>
         <p:txBody>
-          <a:bodyPr wrap="square" lIns="0" rIns="0" tIns="0" bIns="0" anchor="t">
+          <a:bodyPr wrap="square" lIns="0" tIns="0" rIns="0" bIns="0" anchor="t">
             <a:spAutoFit/>
           </a:bodyPr>
           <a:lstStyle/>
@@ -12029,7 +13233,9 @@
         <p:txBody>
           <a:bodyPr rtlCol="0" anchor="ctr"/>
           <a:lstStyle/>
-          <a:p/>
+          <a:p>
+            <a:endParaRPr/>
+          </a:p>
         </p:txBody>
       </p:sp>
       <p:sp>
@@ -12073,7 +13279,9 @@
         <p:txBody>
           <a:bodyPr rtlCol="0" anchor="ctr"/>
           <a:lstStyle/>
-          <a:p/>
+          <a:p>
+            <a:endParaRPr/>
+          </a:p>
         </p:txBody>
       </p:sp>
       <p:sp>
@@ -12093,7 +13301,7 @@
           <a:noFill/>
         </p:spPr>
         <p:txBody>
-          <a:bodyPr wrap="square" lIns="146304" rIns="146304" tIns="87782" bIns="87782" anchor="ctr">
+          <a:bodyPr wrap="square" lIns="146304" tIns="87782" rIns="146304" bIns="87782" anchor="ctr">
             <a:spAutoFit/>
           </a:bodyPr>
           <a:lstStyle/>
@@ -12134,7 +13342,7 @@
           <a:noFill/>
         </p:spPr>
         <p:txBody>
-          <a:bodyPr wrap="square" lIns="0" rIns="0" tIns="0" bIns="0" anchor="t">
+          <a:bodyPr wrap="square" lIns="0" tIns="0" rIns="0" bIns="0" anchor="t">
             <a:spAutoFit/>
           </a:bodyPr>
           <a:lstStyle/>
@@ -12175,7 +13383,7 @@
           <a:noFill/>
         </p:spPr>
         <p:txBody>
-          <a:bodyPr wrap="square" lIns="0" rIns="0" tIns="0" bIns="0" anchor="t">
+          <a:bodyPr wrap="square" lIns="0" tIns="0" rIns="0" bIns="0" anchor="t">
             <a:spAutoFit/>
           </a:bodyPr>
           <a:lstStyle/>
@@ -12216,7 +13424,7 @@
           <a:noFill/>
         </p:spPr>
         <p:txBody>
-          <a:bodyPr wrap="square" lIns="0" rIns="0" tIns="0" bIns="0" anchor="t">
+          <a:bodyPr wrap="square" lIns="0" tIns="0" rIns="0" bIns="0" anchor="t">
             <a:spAutoFit/>
           </a:bodyPr>
           <a:lstStyle/>
@@ -12257,7 +13465,7 @@
           <a:noFill/>
         </p:spPr>
         <p:txBody>
-          <a:bodyPr wrap="square" lIns="0" rIns="0" tIns="0" bIns="0" anchor="t">
+          <a:bodyPr wrap="square" lIns="0" tIns="0" rIns="0" bIns="0" anchor="t">
             <a:spAutoFit/>
           </a:bodyPr>
           <a:lstStyle/>
@@ -12298,7 +13506,7 @@
           <a:noFill/>
         </p:spPr>
         <p:txBody>
-          <a:bodyPr wrap="square" lIns="0" rIns="0" tIns="0" bIns="0" anchor="t">
+          <a:bodyPr wrap="square" lIns="0" tIns="0" rIns="0" bIns="0" anchor="t">
             <a:spAutoFit/>
           </a:bodyPr>
           <a:lstStyle/>
@@ -12339,7 +13547,7 @@
           <a:noFill/>
         </p:spPr>
         <p:txBody>
-          <a:bodyPr wrap="square" lIns="0" rIns="0" tIns="0" bIns="0" anchor="t">
+          <a:bodyPr wrap="square" lIns="0" tIns="0" rIns="0" bIns="0" anchor="t">
             <a:spAutoFit/>
           </a:bodyPr>
           <a:lstStyle/>
@@ -12380,7 +13588,7 @@
           <a:noFill/>
         </p:spPr>
         <p:txBody>
-          <a:bodyPr wrap="square" lIns="0" rIns="0" tIns="0" bIns="0" anchor="t">
+          <a:bodyPr wrap="square" lIns="0" tIns="0" rIns="0" bIns="0" anchor="t">
             <a:spAutoFit/>
           </a:bodyPr>
           <a:lstStyle/>
@@ -12421,7 +13629,7 @@
           <a:noFill/>
         </p:spPr>
         <p:txBody>
-          <a:bodyPr wrap="square" lIns="0" rIns="0" tIns="0" bIns="0" anchor="t">
+          <a:bodyPr wrap="square" lIns="0" tIns="0" rIns="0" bIns="0" anchor="t">
             <a:spAutoFit/>
           </a:bodyPr>
           <a:lstStyle/>
@@ -12462,7 +13670,7 @@
           <a:noFill/>
         </p:spPr>
         <p:txBody>
-          <a:bodyPr wrap="square" lIns="0" rIns="0" tIns="0" bIns="0" anchor="t">
+          <a:bodyPr wrap="square" lIns="0" tIns="0" rIns="0" bIns="0" anchor="t">
             <a:spAutoFit/>
           </a:bodyPr>
           <a:lstStyle/>
@@ -12503,7 +13711,7 @@
           <a:noFill/>
         </p:spPr>
         <p:txBody>
-          <a:bodyPr wrap="square" lIns="0" rIns="0" tIns="0" bIns="0" anchor="t">
+          <a:bodyPr wrap="square" lIns="0" tIns="0" rIns="0" bIns="0" anchor="t">
             <a:spAutoFit/>
           </a:bodyPr>
           <a:lstStyle/>
@@ -12544,7 +13752,7 @@
           <a:noFill/>
         </p:spPr>
         <p:txBody>
-          <a:bodyPr wrap="square" lIns="0" rIns="0" tIns="0" bIns="0" anchor="t">
+          <a:bodyPr wrap="square" lIns="0" tIns="0" rIns="0" bIns="0" anchor="t">
             <a:spAutoFit/>
           </a:bodyPr>
           <a:lstStyle/>
@@ -12585,7 +13793,7 @@
           <a:noFill/>
         </p:spPr>
         <p:txBody>
-          <a:bodyPr wrap="square" lIns="0" rIns="0" tIns="0" bIns="0" anchor="t">
+          <a:bodyPr wrap="square" lIns="0" tIns="0" rIns="0" bIns="0" anchor="t">
             <a:spAutoFit/>
           </a:bodyPr>
           <a:lstStyle/>
@@ -12650,7 +13858,9 @@
         <p:txBody>
           <a:bodyPr rtlCol="0" anchor="ctr"/>
           <a:lstStyle/>
-          <a:p/>
+          <a:p>
+            <a:endParaRPr/>
+          </a:p>
         </p:txBody>
       </p:sp>
       <p:sp>
@@ -12694,7 +13904,9 @@
         <p:txBody>
           <a:bodyPr rtlCol="0" anchor="ctr"/>
           <a:lstStyle/>
-          <a:p/>
+          <a:p>
+            <a:endParaRPr/>
+          </a:p>
         </p:txBody>
       </p:sp>
       <p:sp>
@@ -12714,7 +13926,7 @@
           <a:noFill/>
         </p:spPr>
         <p:txBody>
-          <a:bodyPr wrap="square" lIns="146304" rIns="146304" tIns="87782" bIns="87782" anchor="ctr">
+          <a:bodyPr wrap="square" lIns="146304" tIns="87782" rIns="146304" bIns="87782" anchor="ctr">
             <a:spAutoFit/>
           </a:bodyPr>
           <a:lstStyle/>
@@ -12755,7 +13967,7 @@
           <a:noFill/>
         </p:spPr>
         <p:txBody>
-          <a:bodyPr wrap="square" lIns="0" rIns="0" tIns="0" bIns="0" anchor="t">
+          <a:bodyPr wrap="square" lIns="0" tIns="0" rIns="0" bIns="0" anchor="t">
             <a:spAutoFit/>
           </a:bodyPr>
           <a:lstStyle/>
@@ -12796,7 +14008,7 @@
           <a:noFill/>
         </p:spPr>
         <p:txBody>
-          <a:bodyPr wrap="square" lIns="0" rIns="0" tIns="0" bIns="0" anchor="t">
+          <a:bodyPr wrap="square" lIns="0" tIns="0" rIns="0" bIns="0" anchor="t">
             <a:spAutoFit/>
           </a:bodyPr>
           <a:lstStyle/>
@@ -12837,7 +14049,7 @@
           <a:noFill/>
         </p:spPr>
         <p:txBody>
-          <a:bodyPr wrap="square" lIns="0" rIns="0" tIns="0" bIns="0" anchor="t">
+          <a:bodyPr wrap="square" lIns="0" tIns="0" rIns="0" bIns="0" anchor="t">
             <a:spAutoFit/>
           </a:bodyPr>
           <a:lstStyle/>
@@ -12878,7 +14090,7 @@
           <a:noFill/>
         </p:spPr>
         <p:txBody>
-          <a:bodyPr wrap="square" lIns="0" rIns="0" tIns="0" bIns="0" anchor="t">
+          <a:bodyPr wrap="square" lIns="0" tIns="0" rIns="0" bIns="0" anchor="t">
             <a:spAutoFit/>
           </a:bodyPr>
           <a:lstStyle/>
@@ -12919,7 +14131,7 @@
           <a:noFill/>
         </p:spPr>
         <p:txBody>
-          <a:bodyPr wrap="square" lIns="0" rIns="0" tIns="0" bIns="0" anchor="t">
+          <a:bodyPr wrap="square" lIns="0" tIns="0" rIns="0" bIns="0" anchor="t">
             <a:spAutoFit/>
           </a:bodyPr>
           <a:lstStyle/>
@@ -12960,7 +14172,7 @@
           <a:noFill/>
         </p:spPr>
         <p:txBody>
-          <a:bodyPr wrap="square" lIns="0" rIns="0" tIns="0" bIns="0" anchor="t">
+          <a:bodyPr wrap="square" lIns="0" tIns="0" rIns="0" bIns="0" anchor="t">
             <a:spAutoFit/>
           </a:bodyPr>
           <a:lstStyle/>
@@ -13001,7 +14213,7 @@
           <a:noFill/>
         </p:spPr>
         <p:txBody>
-          <a:bodyPr wrap="square" lIns="0" rIns="0" tIns="0" bIns="0" anchor="t">
+          <a:bodyPr wrap="square" lIns="0" tIns="0" rIns="0" bIns="0" anchor="t">
             <a:spAutoFit/>
           </a:bodyPr>
           <a:lstStyle/>
@@ -13042,7 +14254,7 @@
           <a:noFill/>
         </p:spPr>
         <p:txBody>
-          <a:bodyPr wrap="square" lIns="0" rIns="0" tIns="0" bIns="0" anchor="t">
+          <a:bodyPr wrap="square" lIns="0" tIns="0" rIns="0" bIns="0" anchor="t">
             <a:spAutoFit/>
           </a:bodyPr>
           <a:lstStyle/>
@@ -13083,7 +14295,7 @@
           <a:noFill/>
         </p:spPr>
         <p:txBody>
-          <a:bodyPr wrap="square" lIns="0" rIns="0" tIns="0" bIns="0" anchor="t">
+          <a:bodyPr wrap="square" lIns="0" tIns="0" rIns="0" bIns="0" anchor="t">
             <a:spAutoFit/>
           </a:bodyPr>
           <a:lstStyle/>
@@ -13124,7 +14336,7 @@
           <a:noFill/>
         </p:spPr>
         <p:txBody>
-          <a:bodyPr wrap="square" lIns="0" rIns="0" tIns="0" bIns="0" anchor="t">
+          <a:bodyPr wrap="square" lIns="0" tIns="0" rIns="0" bIns="0" anchor="t">
             <a:spAutoFit/>
           </a:bodyPr>
           <a:lstStyle/>
@@ -13165,7 +14377,7 @@
           <a:noFill/>
         </p:spPr>
         <p:txBody>
-          <a:bodyPr wrap="square" lIns="0" rIns="0" tIns="0" bIns="0" anchor="t">
+          <a:bodyPr wrap="square" lIns="0" tIns="0" rIns="0" bIns="0" anchor="t">
             <a:spAutoFit/>
           </a:bodyPr>
           <a:lstStyle/>
@@ -13206,7 +14418,7 @@
           <a:noFill/>
         </p:spPr>
         <p:txBody>
-          <a:bodyPr wrap="square" lIns="0" rIns="0" tIns="0" bIns="0" anchor="t">
+          <a:bodyPr wrap="square" lIns="0" tIns="0" rIns="0" bIns="0" anchor="t">
             <a:spAutoFit/>
           </a:bodyPr>
           <a:lstStyle/>
@@ -13238,8 +14450,8 @@
 </p:sld>
 </file>
 
-<file path=ppt/slides/slide16.xml><?xml version="1.0" encoding="utf-8"?>
-<p:sld xmlns:a="http://schemas.openxmlformats.org/drawingml/2006/main" xmlns:p="http://schemas.openxmlformats.org/presentationml/2006/main" xmlns:r="http://schemas.openxmlformats.org/officeDocument/2006/relationships">
+<file path=ppt/slides/slide17.xml><?xml version="1.0" encoding="utf-8"?>
+<p:sld xmlns:a="http://schemas.openxmlformats.org/drawingml/2006/main" xmlns:r="http://schemas.openxmlformats.org/officeDocument/2006/relationships" xmlns:p="http://schemas.openxmlformats.org/presentationml/2006/main">
   <p:cSld>
     <p:spTree>
       <p:nvGrpSpPr>
@@ -13247,7 +14459,14 @@
         <p:cNvGrpSpPr/>
         <p:nvPr/>
       </p:nvGrpSpPr>
-      <p:grpSpPr/>
+      <p:grpSpPr>
+        <a:xfrm>
+          <a:off x="0" y="0"/>
+          <a:ext cx="0" cy="0"/>
+          <a:chOff x="0" y="0"/>
+          <a:chExt cx="0" cy="0"/>
+        </a:xfrm>
+      </p:grpSpPr>
       <p:sp>
         <p:nvSpPr>
           <p:cNvPr id="2" name="TextBox 1"/>
@@ -13265,7 +14484,7 @@
           <a:noFill/>
         </p:spPr>
         <p:txBody>
-          <a:bodyPr wrap="square" lIns="0" rIns="0" tIns="0" bIns="0" anchor="ctr">
+          <a:bodyPr wrap="square" lIns="0" tIns="0" rIns="0" bIns="0" anchor="ctr">
             <a:spAutoFit/>
           </a:bodyPr>
           <a:lstStyle/>
@@ -13306,7 +14525,7 @@
           <a:noFill/>
         </p:spPr>
         <p:txBody>
-          <a:bodyPr wrap="square" lIns="0" rIns="0" tIns="0" bIns="0" anchor="ctr">
+          <a:bodyPr wrap="square" lIns="0" tIns="0" rIns="0" bIns="0" anchor="ctr">
             <a:spAutoFit/>
           </a:bodyPr>
           <a:lstStyle/>
@@ -13382,7 +14601,7 @@
           <a:noFill/>
         </p:spPr>
         <p:txBody>
-          <a:bodyPr wrap="square" lIns="0" rIns="0" tIns="0" bIns="0" anchor="t">
+          <a:bodyPr wrap="square" lIns="0" tIns="0" rIns="0" bIns="0" anchor="t">
             <a:spAutoFit/>
           </a:bodyPr>
           <a:lstStyle/>
@@ -13447,7 +14666,9 @@
         <p:txBody>
           <a:bodyPr rtlCol="0" anchor="ctr"/>
           <a:lstStyle/>
-          <a:p/>
+          <a:p>
+            <a:endParaRPr/>
+          </a:p>
         </p:txBody>
       </p:sp>
       <p:sp>
@@ -13508,7 +14729,7 @@
           <a:noFill/>
         </p:spPr>
         <p:txBody>
-          <a:bodyPr wrap="square" lIns="0" rIns="0" tIns="0" bIns="0" anchor="t">
+          <a:bodyPr wrap="square" lIns="0" tIns="0" rIns="0" bIns="0" anchor="t">
             <a:spAutoFit/>
           </a:bodyPr>
           <a:lstStyle/>
@@ -13549,7 +14770,7 @@
           <a:noFill/>
         </p:spPr>
         <p:txBody>
-          <a:bodyPr wrap="square" lIns="0" rIns="0" tIns="0" bIns="0" anchor="t">
+          <a:bodyPr wrap="square" lIns="0" tIns="0" rIns="0" bIns="0" anchor="t">
             <a:spAutoFit/>
           </a:bodyPr>
           <a:lstStyle/>
@@ -13590,7 +14811,7 @@
           <a:noFill/>
         </p:spPr>
         <p:txBody>
-          <a:bodyPr wrap="square" lIns="0" rIns="0" tIns="0" bIns="0" anchor="t">
+          <a:bodyPr wrap="square" lIns="0" tIns="0" rIns="0" bIns="0" anchor="t">
             <a:spAutoFit/>
           </a:bodyPr>
           <a:lstStyle/>
@@ -13631,7 +14852,7 @@
           <a:noFill/>
         </p:spPr>
         <p:txBody>
-          <a:bodyPr wrap="square" lIns="0" rIns="0" tIns="0" bIns="0" anchor="t">
+          <a:bodyPr wrap="square" lIns="0" tIns="0" rIns="0" bIns="0" anchor="t">
             <a:spAutoFit/>
           </a:bodyPr>
           <a:lstStyle/>
@@ -13672,7 +14893,7 @@
           <a:noFill/>
         </p:spPr>
         <p:txBody>
-          <a:bodyPr wrap="square" lIns="0" rIns="0" tIns="0" bIns="0" anchor="t">
+          <a:bodyPr wrap="square" lIns="0" tIns="0" rIns="0" bIns="0" anchor="t">
             <a:spAutoFit/>
           </a:bodyPr>
           <a:lstStyle/>
@@ -13713,7 +14934,7 @@
           <a:noFill/>
         </p:spPr>
         <p:txBody>
-          <a:bodyPr wrap="square" lIns="0" rIns="0" tIns="0" bIns="0" anchor="t">
+          <a:bodyPr wrap="square" lIns="0" tIns="0" rIns="0" bIns="0" anchor="t">
             <a:spAutoFit/>
           </a:bodyPr>
           <a:lstStyle/>
@@ -13754,7 +14975,7 @@
           <a:noFill/>
         </p:spPr>
         <p:txBody>
-          <a:bodyPr wrap="square" lIns="0" rIns="0" tIns="0" bIns="0" anchor="t">
+          <a:bodyPr wrap="square" lIns="0" tIns="0" rIns="0" bIns="0" anchor="t">
             <a:spAutoFit/>
           </a:bodyPr>
           <a:lstStyle/>
@@ -13795,7 +15016,7 @@
           <a:noFill/>
         </p:spPr>
         <p:txBody>
-          <a:bodyPr wrap="square" lIns="0" rIns="0" tIns="0" bIns="0" anchor="t">
+          <a:bodyPr wrap="square" lIns="0" tIns="0" rIns="0" bIns="0" anchor="t">
             <a:spAutoFit/>
           </a:bodyPr>
           <a:lstStyle/>
@@ -13860,7 +15081,9 @@
         <p:txBody>
           <a:bodyPr rtlCol="0" anchor="ctr"/>
           <a:lstStyle/>
-          <a:p/>
+          <a:p>
+            <a:endParaRPr/>
+          </a:p>
         </p:txBody>
       </p:sp>
       <p:sp>
@@ -13904,7 +15127,9 @@
         <p:txBody>
           <a:bodyPr rtlCol="0" anchor="ctr"/>
           <a:lstStyle/>
-          <a:p/>
+          <a:p>
+            <a:endParaRPr/>
+          </a:p>
         </p:txBody>
       </p:sp>
       <p:sp>
@@ -13924,7 +15149,7 @@
           <a:noFill/>
         </p:spPr>
         <p:txBody>
-          <a:bodyPr wrap="square" lIns="128016" rIns="128016" tIns="76809" bIns="76809" anchor="ctr">
+          <a:bodyPr wrap="square" lIns="128016" tIns="76809" rIns="128016" bIns="76809" anchor="ctr">
             <a:spAutoFit/>
           </a:bodyPr>
           <a:lstStyle/>
@@ -13965,7 +15190,7 @@
           <a:noFill/>
         </p:spPr>
         <p:txBody>
-          <a:bodyPr wrap="square" lIns="128016" rIns="128016" tIns="76809" bIns="76809" anchor="t">
+          <a:bodyPr wrap="square" lIns="128016" tIns="76809" rIns="128016" bIns="76809" anchor="t">
             <a:spAutoFit/>
           </a:bodyPr>
           <a:lstStyle/>
@@ -14031,7 +15256,9 @@
         <p:txBody>
           <a:bodyPr rtlCol="0" anchor="ctr"/>
           <a:lstStyle/>
-          <a:p/>
+          <a:p>
+            <a:endParaRPr/>
+          </a:p>
         </p:txBody>
       </p:sp>
       <p:sp>
@@ -14075,7 +15302,9 @@
         <p:txBody>
           <a:bodyPr rtlCol="0" anchor="ctr"/>
           <a:lstStyle/>
-          <a:p/>
+          <a:p>
+            <a:endParaRPr/>
+          </a:p>
         </p:txBody>
       </p:sp>
       <p:sp>
@@ -14095,7 +15324,7 @@
           <a:noFill/>
         </p:spPr>
         <p:txBody>
-          <a:bodyPr wrap="square" lIns="128016" rIns="128016" tIns="76809" bIns="76809" anchor="ctr">
+          <a:bodyPr wrap="square" lIns="128016" tIns="76809" rIns="128016" bIns="76809" anchor="ctr">
             <a:spAutoFit/>
           </a:bodyPr>
           <a:lstStyle/>
@@ -14136,7 +15365,7 @@
           <a:noFill/>
         </p:spPr>
         <p:txBody>
-          <a:bodyPr wrap="square" lIns="128016" rIns="128016" tIns="76809" bIns="76809" anchor="t">
+          <a:bodyPr wrap="square" lIns="128016" tIns="76809" rIns="128016" bIns="76809" anchor="t">
             <a:spAutoFit/>
           </a:bodyPr>
           <a:lstStyle/>
@@ -14202,7 +15431,9 @@
         <p:txBody>
           <a:bodyPr rtlCol="0" anchor="ctr"/>
           <a:lstStyle/>
-          <a:p/>
+          <a:p>
+            <a:endParaRPr/>
+          </a:p>
         </p:txBody>
       </p:sp>
       <p:sp>
@@ -14246,7 +15477,9 @@
         <p:txBody>
           <a:bodyPr rtlCol="0" anchor="ctr"/>
           <a:lstStyle/>
-          <a:p/>
+          <a:p>
+            <a:endParaRPr/>
+          </a:p>
         </p:txBody>
       </p:sp>
       <p:sp>
@@ -14266,7 +15499,7 @@
           <a:noFill/>
         </p:spPr>
         <p:txBody>
-          <a:bodyPr wrap="square" lIns="128016" rIns="128016" tIns="76809" bIns="76809" anchor="ctr">
+          <a:bodyPr wrap="square" lIns="128016" tIns="76809" rIns="128016" bIns="76809" anchor="ctr">
             <a:spAutoFit/>
           </a:bodyPr>
           <a:lstStyle/>
@@ -14307,7 +15540,7 @@
           <a:noFill/>
         </p:spPr>
         <p:txBody>
-          <a:bodyPr wrap="square" lIns="128016" rIns="128016" tIns="76809" bIns="76809" anchor="t">
+          <a:bodyPr wrap="square" lIns="128016" tIns="76809" rIns="128016" bIns="76809" anchor="t">
             <a:spAutoFit/>
           </a:bodyPr>
           <a:lstStyle/>
@@ -14373,7 +15606,9 @@
         <p:txBody>
           <a:bodyPr rtlCol="0" anchor="ctr"/>
           <a:lstStyle/>
-          <a:p/>
+          <a:p>
+            <a:endParaRPr/>
+          </a:p>
         </p:txBody>
       </p:sp>
       <p:sp>
@@ -14434,7 +15669,7 @@
           <a:noFill/>
         </p:spPr>
         <p:txBody>
-          <a:bodyPr wrap="square" lIns="0" rIns="0" tIns="0" bIns="0" anchor="t">
+          <a:bodyPr wrap="square" lIns="0" tIns="0" rIns="0" bIns="0" anchor="t">
             <a:spAutoFit/>
           </a:bodyPr>
           <a:lstStyle/>
@@ -14467,7 +15702,7 @@
 </file>
 
 <file path=ppt/slides/slide2.xml><?xml version="1.0" encoding="utf-8"?>
-<p:sld xmlns:a="http://schemas.openxmlformats.org/drawingml/2006/main" xmlns:p="http://schemas.openxmlformats.org/presentationml/2006/main" xmlns:r="http://schemas.openxmlformats.org/officeDocument/2006/relationships">
+<p:sld xmlns:a="http://schemas.openxmlformats.org/drawingml/2006/main" xmlns:r="http://schemas.openxmlformats.org/officeDocument/2006/relationships" xmlns:p="http://schemas.openxmlformats.org/presentationml/2006/main">
   <p:cSld>
     <p:spTree>
       <p:nvGrpSpPr>
@@ -14475,7 +15710,14 @@
         <p:cNvGrpSpPr/>
         <p:nvPr/>
       </p:nvGrpSpPr>
-      <p:grpSpPr/>
+      <p:grpSpPr>
+        <a:xfrm>
+          <a:off x="0" y="0"/>
+          <a:ext cx="0" cy="0"/>
+          <a:chOff x="0" y="0"/>
+          <a:chExt cx="0" cy="0"/>
+        </a:xfrm>
+      </p:grpSpPr>
       <p:sp>
         <p:nvSpPr>
           <p:cNvPr id="2" name="TextBox 1"/>
@@ -14493,7 +15735,7 @@
           <a:noFill/>
         </p:spPr>
         <p:txBody>
-          <a:bodyPr wrap="square" lIns="0" rIns="0" tIns="0" bIns="0" anchor="ctr">
+          <a:bodyPr wrap="square" lIns="0" tIns="0" rIns="0" bIns="0" anchor="ctr">
             <a:spAutoFit/>
           </a:bodyPr>
           <a:lstStyle/>
@@ -14534,7 +15776,7 @@
           <a:noFill/>
         </p:spPr>
         <p:txBody>
-          <a:bodyPr wrap="square" lIns="0" rIns="0" tIns="0" bIns="0" anchor="ctr">
+          <a:bodyPr wrap="square" lIns="0" tIns="0" rIns="0" bIns="0" anchor="ctr">
             <a:spAutoFit/>
           </a:bodyPr>
           <a:lstStyle/>
@@ -14610,7 +15852,7 @@
           <a:noFill/>
         </p:spPr>
         <p:txBody>
-          <a:bodyPr wrap="square" lIns="0" rIns="0" tIns="0" bIns="0" anchor="t">
+          <a:bodyPr wrap="square" lIns="0" tIns="0" rIns="0" bIns="0" anchor="t">
             <a:spAutoFit/>
           </a:bodyPr>
           <a:lstStyle/>
@@ -14675,7 +15917,9 @@
         <p:txBody>
           <a:bodyPr rtlCol="0" anchor="ctr"/>
           <a:lstStyle/>
-          <a:p/>
+          <a:p>
+            <a:endParaRPr/>
+          </a:p>
         </p:txBody>
       </p:sp>
       <p:sp>
@@ -14719,7 +15963,9 @@
         <p:txBody>
           <a:bodyPr rtlCol="0" anchor="ctr"/>
           <a:lstStyle/>
-          <a:p/>
+          <a:p>
+            <a:endParaRPr/>
+          </a:p>
         </p:txBody>
       </p:sp>
       <p:sp>
@@ -14739,7 +15985,7 @@
           <a:noFill/>
         </p:spPr>
         <p:txBody>
-          <a:bodyPr wrap="square" lIns="128016" rIns="128016" tIns="76809" bIns="76809" anchor="ctr">
+          <a:bodyPr wrap="square" lIns="128016" tIns="76809" rIns="128016" bIns="76809" anchor="ctr">
             <a:spAutoFit/>
           </a:bodyPr>
           <a:lstStyle/>
@@ -14780,7 +16026,7 @@
           <a:noFill/>
         </p:spPr>
         <p:txBody>
-          <a:bodyPr wrap="square" lIns="128016" rIns="128016" tIns="76809" bIns="76809" anchor="t">
+          <a:bodyPr wrap="square" lIns="128016" tIns="76809" rIns="128016" bIns="76809" anchor="t">
             <a:spAutoFit/>
           </a:bodyPr>
           <a:lstStyle/>
@@ -14899,7 +16145,9 @@
         <p:txBody>
           <a:bodyPr rtlCol="0" anchor="ctr"/>
           <a:lstStyle/>
-          <a:p/>
+          <a:p>
+            <a:endParaRPr/>
+          </a:p>
         </p:txBody>
       </p:sp>
       <p:sp>
@@ -14943,7 +16191,9 @@
         <p:txBody>
           <a:bodyPr rtlCol="0" anchor="ctr"/>
           <a:lstStyle/>
-          <a:p/>
+          <a:p>
+            <a:endParaRPr/>
+          </a:p>
         </p:txBody>
       </p:sp>
       <p:sp>
@@ -14963,7 +16213,7 @@
           <a:noFill/>
         </p:spPr>
         <p:txBody>
-          <a:bodyPr wrap="square" lIns="128016" rIns="128016" tIns="76809" bIns="76809" anchor="ctr">
+          <a:bodyPr wrap="square" lIns="128016" tIns="76809" rIns="128016" bIns="76809" anchor="ctr">
             <a:spAutoFit/>
           </a:bodyPr>
           <a:lstStyle/>
@@ -15004,7 +16254,7 @@
           <a:noFill/>
         </p:spPr>
         <p:txBody>
-          <a:bodyPr wrap="square" lIns="128016" rIns="128016" tIns="76809" bIns="76809" anchor="t">
+          <a:bodyPr wrap="square" lIns="128016" tIns="76809" rIns="128016" bIns="76809" anchor="t">
             <a:spAutoFit/>
           </a:bodyPr>
           <a:lstStyle/>
@@ -15123,7 +16373,9 @@
         <p:txBody>
           <a:bodyPr rtlCol="0" anchor="ctr"/>
           <a:lstStyle/>
-          <a:p/>
+          <a:p>
+            <a:endParaRPr/>
+          </a:p>
         </p:txBody>
       </p:sp>
       <p:sp>
@@ -15143,7 +16395,7 @@
           <a:noFill/>
         </p:spPr>
         <p:txBody>
-          <a:bodyPr wrap="square" lIns="45720" rIns="45720" tIns="27432" bIns="27432" anchor="t">
+          <a:bodyPr wrap="square" lIns="45720" tIns="27432" rIns="45720" bIns="27432" anchor="t">
             <a:spAutoFit/>
           </a:bodyPr>
           <a:lstStyle/>
@@ -15184,7 +16436,7 @@
           <a:noFill/>
         </p:spPr>
         <p:txBody>
-          <a:bodyPr wrap="square" lIns="45720" rIns="45720" tIns="27432" bIns="27432" anchor="t">
+          <a:bodyPr wrap="square" lIns="45720" tIns="27432" rIns="45720" bIns="27432" anchor="t">
             <a:spAutoFit/>
           </a:bodyPr>
           <a:lstStyle/>
@@ -15249,7 +16501,9 @@
         <p:txBody>
           <a:bodyPr rtlCol="0" anchor="ctr"/>
           <a:lstStyle/>
-          <a:p/>
+          <a:p>
+            <a:endParaRPr/>
+          </a:p>
         </p:txBody>
       </p:sp>
       <p:sp>
@@ -15269,7 +16523,7 @@
           <a:noFill/>
         </p:spPr>
         <p:txBody>
-          <a:bodyPr wrap="square" lIns="45720" rIns="45720" tIns="27432" bIns="27432" anchor="t">
+          <a:bodyPr wrap="square" lIns="45720" tIns="27432" rIns="45720" bIns="27432" anchor="t">
             <a:spAutoFit/>
           </a:bodyPr>
           <a:lstStyle/>
@@ -15310,7 +16564,7 @@
           <a:noFill/>
         </p:spPr>
         <p:txBody>
-          <a:bodyPr wrap="square" lIns="45720" rIns="45720" tIns="27432" bIns="27432" anchor="t">
+          <a:bodyPr wrap="square" lIns="45720" tIns="27432" rIns="45720" bIns="27432" anchor="t">
             <a:spAutoFit/>
           </a:bodyPr>
           <a:lstStyle/>
@@ -15375,7 +16629,9 @@
         <p:txBody>
           <a:bodyPr rtlCol="0" anchor="ctr"/>
           <a:lstStyle/>
-          <a:p/>
+          <a:p>
+            <a:endParaRPr/>
+          </a:p>
         </p:txBody>
       </p:sp>
       <p:sp>
@@ -15395,7 +16651,7 @@
           <a:noFill/>
         </p:spPr>
         <p:txBody>
-          <a:bodyPr wrap="square" lIns="45720" rIns="45720" tIns="27432" bIns="27432" anchor="t">
+          <a:bodyPr wrap="square" lIns="45720" tIns="27432" rIns="45720" bIns="27432" anchor="t">
             <a:spAutoFit/>
           </a:bodyPr>
           <a:lstStyle/>
@@ -15436,7 +16692,7 @@
           <a:noFill/>
         </p:spPr>
         <p:txBody>
-          <a:bodyPr wrap="square" lIns="45720" rIns="45720" tIns="27432" bIns="27432" anchor="t">
+          <a:bodyPr wrap="square" lIns="45720" tIns="27432" rIns="45720" bIns="27432" anchor="t">
             <a:spAutoFit/>
           </a:bodyPr>
           <a:lstStyle/>
@@ -15501,7 +16757,9 @@
         <p:txBody>
           <a:bodyPr rtlCol="0" anchor="ctr"/>
           <a:lstStyle/>
-          <a:p/>
+          <a:p>
+            <a:endParaRPr/>
+          </a:p>
         </p:txBody>
       </p:sp>
       <p:sp>
@@ -15521,7 +16779,7 @@
           <a:noFill/>
         </p:spPr>
         <p:txBody>
-          <a:bodyPr wrap="square" lIns="45720" rIns="45720" tIns="27432" bIns="27432" anchor="t">
+          <a:bodyPr wrap="square" lIns="45720" tIns="27432" rIns="45720" bIns="27432" anchor="t">
             <a:spAutoFit/>
           </a:bodyPr>
           <a:lstStyle/>
@@ -15562,7 +16820,7 @@
           <a:noFill/>
         </p:spPr>
         <p:txBody>
-          <a:bodyPr wrap="square" lIns="45720" rIns="45720" tIns="27432" bIns="27432" anchor="t">
+          <a:bodyPr wrap="square" lIns="45720" tIns="27432" rIns="45720" bIns="27432" anchor="t">
             <a:spAutoFit/>
           </a:bodyPr>
           <a:lstStyle/>
@@ -15627,7 +16885,9 @@
         <p:txBody>
           <a:bodyPr rtlCol="0" anchor="ctr"/>
           <a:lstStyle/>
-          <a:p/>
+          <a:p>
+            <a:endParaRPr/>
+          </a:p>
         </p:txBody>
       </p:sp>
       <p:sp>
@@ -15647,7 +16907,7 @@
           <a:noFill/>
         </p:spPr>
         <p:txBody>
-          <a:bodyPr wrap="square" lIns="45720" rIns="45720" tIns="27432" bIns="27432" anchor="t">
+          <a:bodyPr wrap="square" lIns="45720" tIns="27432" rIns="45720" bIns="27432" anchor="t">
             <a:spAutoFit/>
           </a:bodyPr>
           <a:lstStyle/>
@@ -15688,7 +16948,7 @@
           <a:noFill/>
         </p:spPr>
         <p:txBody>
-          <a:bodyPr wrap="square" lIns="45720" rIns="45720" tIns="27432" bIns="27432" anchor="t">
+          <a:bodyPr wrap="square" lIns="45720" tIns="27432" rIns="45720" bIns="27432" anchor="t">
             <a:spAutoFit/>
           </a:bodyPr>
           <a:lstStyle/>
@@ -15753,7 +17013,9 @@
         <p:txBody>
           <a:bodyPr rtlCol="0" anchor="ctr"/>
           <a:lstStyle/>
-          <a:p/>
+          <a:p>
+            <a:endParaRPr/>
+          </a:p>
         </p:txBody>
       </p:sp>
       <p:sp>
@@ -15773,7 +17035,7 @@
           <a:noFill/>
         </p:spPr>
         <p:txBody>
-          <a:bodyPr wrap="square" lIns="45720" rIns="45720" tIns="27432" bIns="27432" anchor="t">
+          <a:bodyPr wrap="square" lIns="45720" tIns="27432" rIns="45720" bIns="27432" anchor="t">
             <a:spAutoFit/>
           </a:bodyPr>
           <a:lstStyle/>
@@ -15814,7 +17076,7 @@
           <a:noFill/>
         </p:spPr>
         <p:txBody>
-          <a:bodyPr wrap="square" lIns="45720" rIns="45720" tIns="27432" bIns="27432" anchor="t">
+          <a:bodyPr wrap="square" lIns="45720" tIns="27432" rIns="45720" bIns="27432" anchor="t">
             <a:spAutoFit/>
           </a:bodyPr>
           <a:lstStyle/>
@@ -15847,7 +17109,7 @@
 </file>
 
 <file path=ppt/slides/slide3.xml><?xml version="1.0" encoding="utf-8"?>
-<p:sld xmlns:a="http://schemas.openxmlformats.org/drawingml/2006/main" xmlns:p="http://schemas.openxmlformats.org/presentationml/2006/main" xmlns:r="http://schemas.openxmlformats.org/officeDocument/2006/relationships">
+<p:sld xmlns:a="http://schemas.openxmlformats.org/drawingml/2006/main" xmlns:r="http://schemas.openxmlformats.org/officeDocument/2006/relationships" xmlns:p="http://schemas.openxmlformats.org/presentationml/2006/main">
   <p:cSld>
     <p:spTree>
       <p:nvGrpSpPr>
@@ -15855,7 +17117,14 @@
         <p:cNvGrpSpPr/>
         <p:nvPr/>
       </p:nvGrpSpPr>
-      <p:grpSpPr/>
+      <p:grpSpPr>
+        <a:xfrm>
+          <a:off x="0" y="0"/>
+          <a:ext cx="0" cy="0"/>
+          <a:chOff x="0" y="0"/>
+          <a:chExt cx="0" cy="0"/>
+        </a:xfrm>
+      </p:grpSpPr>
       <p:sp>
         <p:nvSpPr>
           <p:cNvPr id="2" name="TextBox 1"/>
@@ -15873,7 +17142,7 @@
           <a:noFill/>
         </p:spPr>
         <p:txBody>
-          <a:bodyPr wrap="square" lIns="0" rIns="0" tIns="0" bIns="0" anchor="ctr">
+          <a:bodyPr wrap="square" lIns="0" tIns="0" rIns="0" bIns="0" anchor="ctr">
             <a:spAutoFit/>
           </a:bodyPr>
           <a:lstStyle/>
@@ -15914,7 +17183,7 @@
           <a:noFill/>
         </p:spPr>
         <p:txBody>
-          <a:bodyPr wrap="square" lIns="0" rIns="0" tIns="0" bIns="0" anchor="ctr">
+          <a:bodyPr wrap="square" lIns="0" tIns="0" rIns="0" bIns="0" anchor="ctr">
             <a:spAutoFit/>
           </a:bodyPr>
           <a:lstStyle/>
@@ -15990,7 +17259,7 @@
           <a:noFill/>
         </p:spPr>
         <p:txBody>
-          <a:bodyPr wrap="square" lIns="0" rIns="0" tIns="0" bIns="0" anchor="t">
+          <a:bodyPr wrap="square" lIns="0" tIns="0" rIns="0" bIns="0" anchor="t">
             <a:spAutoFit/>
           </a:bodyPr>
           <a:lstStyle/>
@@ -16055,7 +17324,9 @@
         <p:txBody>
           <a:bodyPr rtlCol="0" anchor="ctr"/>
           <a:lstStyle/>
-          <a:p/>
+          <a:p>
+            <a:endParaRPr/>
+          </a:p>
         </p:txBody>
       </p:sp>
       <p:sp>
@@ -16075,7 +17346,7 @@
           <a:noFill/>
         </p:spPr>
         <p:txBody>
-          <a:bodyPr wrap="square" lIns="45720" rIns="45720" tIns="27432" bIns="27432" anchor="t">
+          <a:bodyPr wrap="square" lIns="45720" tIns="27432" rIns="45720" bIns="27432" anchor="t">
             <a:spAutoFit/>
           </a:bodyPr>
           <a:lstStyle/>
@@ -16140,7 +17411,9 @@
         <p:txBody>
           <a:bodyPr rtlCol="0" anchor="ctr"/>
           <a:lstStyle/>
-          <a:p/>
+          <a:p>
+            <a:endParaRPr/>
+          </a:p>
         </p:txBody>
       </p:sp>
       <p:sp>
@@ -16160,7 +17433,7 @@
           <a:noFill/>
         </p:spPr>
         <p:txBody>
-          <a:bodyPr wrap="square" lIns="27432" rIns="27432" tIns="16459" bIns="16459" anchor="ctr">
+          <a:bodyPr wrap="square" lIns="27432" tIns="16459" rIns="27432" bIns="16459" anchor="ctr">
             <a:spAutoFit/>
           </a:bodyPr>
           <a:lstStyle/>
@@ -16225,7 +17498,9 @@
         <p:txBody>
           <a:bodyPr rtlCol="0" anchor="ctr"/>
           <a:lstStyle/>
-          <a:p/>
+          <a:p>
+            <a:endParaRPr/>
+          </a:p>
         </p:txBody>
       </p:sp>
       <p:sp>
@@ -16245,7 +17520,7 @@
           <a:noFill/>
         </p:spPr>
         <p:txBody>
-          <a:bodyPr wrap="square" lIns="27432" rIns="27432" tIns="16459" bIns="16459" anchor="ctr">
+          <a:bodyPr wrap="square" lIns="27432" tIns="16459" rIns="27432" bIns="16459" anchor="ctr">
             <a:spAutoFit/>
           </a:bodyPr>
           <a:lstStyle/>
@@ -16310,7 +17585,9 @@
         <p:txBody>
           <a:bodyPr rtlCol="0" anchor="ctr"/>
           <a:lstStyle/>
-          <a:p/>
+          <a:p>
+            <a:endParaRPr/>
+          </a:p>
         </p:txBody>
       </p:sp>
       <p:sp>
@@ -16330,7 +17607,7 @@
           <a:noFill/>
         </p:spPr>
         <p:txBody>
-          <a:bodyPr wrap="square" lIns="27432" rIns="27432" tIns="16459" bIns="16459" anchor="ctr">
+          <a:bodyPr wrap="square" lIns="27432" tIns="16459" rIns="27432" bIns="16459" anchor="ctr">
             <a:spAutoFit/>
           </a:bodyPr>
           <a:lstStyle/>
@@ -16371,7 +17648,7 @@
           <a:noFill/>
         </p:spPr>
         <p:txBody>
-          <a:bodyPr wrap="square" lIns="27432" rIns="27432" tIns="16459" bIns="16459" anchor="t">
+          <a:bodyPr wrap="square" lIns="27432" tIns="16459" rIns="27432" bIns="16459" anchor="t">
             <a:spAutoFit/>
           </a:bodyPr>
           <a:lstStyle/>
@@ -16436,7 +17713,9 @@
         <p:txBody>
           <a:bodyPr rtlCol="0" anchor="ctr"/>
           <a:lstStyle/>
-          <a:p/>
+          <a:p>
+            <a:endParaRPr/>
+          </a:p>
         </p:txBody>
       </p:sp>
       <p:sp>
@@ -16456,7 +17735,7 @@
           <a:noFill/>
         </p:spPr>
         <p:txBody>
-          <a:bodyPr wrap="square" lIns="45720" rIns="45720" tIns="27432" bIns="27432" anchor="t">
+          <a:bodyPr wrap="square" lIns="45720" tIns="27432" rIns="45720" bIns="27432" anchor="t">
             <a:spAutoFit/>
           </a:bodyPr>
           <a:lstStyle/>
@@ -16521,7 +17800,9 @@
         <p:txBody>
           <a:bodyPr rtlCol="0" anchor="ctr"/>
           <a:lstStyle/>
-          <a:p/>
+          <a:p>
+            <a:endParaRPr/>
+          </a:p>
         </p:txBody>
       </p:sp>
       <p:sp>
@@ -16541,7 +17822,7 @@
           <a:noFill/>
         </p:spPr>
         <p:txBody>
-          <a:bodyPr wrap="square" lIns="27432" rIns="27432" tIns="16459" bIns="16459" anchor="ctr">
+          <a:bodyPr wrap="square" lIns="27432" tIns="16459" rIns="27432" bIns="16459" anchor="ctr">
             <a:spAutoFit/>
           </a:bodyPr>
           <a:lstStyle/>
@@ -16606,7 +17887,9 @@
         <p:txBody>
           <a:bodyPr rtlCol="0" anchor="ctr"/>
           <a:lstStyle/>
-          <a:p/>
+          <a:p>
+            <a:endParaRPr/>
+          </a:p>
         </p:txBody>
       </p:sp>
       <p:sp>
@@ -16626,7 +17909,7 @@
           <a:noFill/>
         </p:spPr>
         <p:txBody>
-          <a:bodyPr wrap="square" lIns="27432" rIns="27432" tIns="16459" bIns="16459" anchor="ctr">
+          <a:bodyPr wrap="square" lIns="27432" tIns="16459" rIns="27432" bIns="16459" anchor="ctr">
             <a:spAutoFit/>
           </a:bodyPr>
           <a:lstStyle/>
@@ -16691,7 +17974,9 @@
         <p:txBody>
           <a:bodyPr rtlCol="0" anchor="ctr"/>
           <a:lstStyle/>
-          <a:p/>
+          <a:p>
+            <a:endParaRPr/>
+          </a:p>
         </p:txBody>
       </p:sp>
       <p:sp>
@@ -16711,7 +17996,7 @@
           <a:noFill/>
         </p:spPr>
         <p:txBody>
-          <a:bodyPr wrap="square" lIns="27432" rIns="27432" tIns="16459" bIns="16459" anchor="ctr">
+          <a:bodyPr wrap="square" lIns="27432" tIns="16459" rIns="27432" bIns="16459" anchor="ctr">
             <a:spAutoFit/>
           </a:bodyPr>
           <a:lstStyle/>
@@ -16752,7 +18037,7 @@
           <a:noFill/>
         </p:spPr>
         <p:txBody>
-          <a:bodyPr wrap="square" lIns="27432" rIns="27432" tIns="16459" bIns="16459" anchor="t">
+          <a:bodyPr wrap="square" lIns="27432" tIns="16459" rIns="27432" bIns="16459" anchor="t">
             <a:spAutoFit/>
           </a:bodyPr>
           <a:lstStyle/>
@@ -16815,7 +18100,7 @@
           </a:fontRef>
         </p:style>
         <p:txBody>
-          <a:bodyPr rtlCol="0" anchor="ctr" wrap="square" lIns="18288" rIns="18288"/>
+          <a:bodyPr wrap="square" lIns="18288" rIns="18288" rtlCol="0" anchor="ctr"/>
           <a:lstStyle/>
           <a:p>
             <a:pPr algn="ctr"/>
@@ -16850,7 +18135,7 @@
           <a:noFill/>
         </p:spPr>
         <p:txBody>
-          <a:bodyPr wrap="square" lIns="18288" rIns="18288" tIns="10972" bIns="10972" anchor="t">
+          <a:bodyPr wrap="square" lIns="18288" tIns="10972" rIns="18288" bIns="10972" anchor="t">
             <a:spAutoFit/>
           </a:bodyPr>
           <a:lstStyle/>
@@ -16892,7 +18177,7 @@
           <a:noFill/>
         </p:spPr>
         <p:txBody>
-          <a:bodyPr wrap="square" lIns="0" rIns="0" tIns="0" bIns="0" anchor="t">
+          <a:bodyPr wrap="square" lIns="0" tIns="0" rIns="0" bIns="0" anchor="t">
             <a:spAutoFit/>
           </a:bodyPr>
           <a:lstStyle/>
@@ -16931,32 +18216,40 @@
         <a:graphic>
           <a:graphicData uri="http://schemas.openxmlformats.org/drawingml/2006/table">
             <a:tbl>
-              <a:tblPr firstRow="0" bandRow="0">
+              <a:tblPr>
                 <a:tableStyleId>{5940675A-B579-460E-94D1-54222C63F5DA}</a:tableStyleId>
               </a:tblPr>
               <a:tblGrid>
-                <a:gridCol w="1371600"/>
-                <a:gridCol w="2377440"/>
-                <a:gridCol w="2011680"/>
+                <a:gridCol w="1371600">
+                  <a:extLst>
+                    <a:ext uri="{9D8B030D-6E8A-4147-A177-3AD203B41FA5}">
+                      <a16:colId xmlns:a16="http://schemas.microsoft.com/office/drawing/2014/main" val="20000"/>
+                    </a:ext>
+                  </a:extLst>
+                </a:gridCol>
+                <a:gridCol w="2377440">
+                  <a:extLst>
+                    <a:ext uri="{9D8B030D-6E8A-4147-A177-3AD203B41FA5}">
+                      <a16:colId xmlns:a16="http://schemas.microsoft.com/office/drawing/2014/main" val="20001"/>
+                    </a:ext>
+                  </a:extLst>
+                </a:gridCol>
+                <a:gridCol w="2011680">
+                  <a:extLst>
+                    <a:ext uri="{9D8B030D-6E8A-4147-A177-3AD203B41FA5}">
+                      <a16:colId xmlns:a16="http://schemas.microsoft.com/office/drawing/2014/main" val="20002"/>
+                    </a:ext>
+                  </a:extLst>
+                </a:gridCol>
               </a:tblGrid>
               <a:tr h="384048">
                 <a:tc>
                   <a:txBody>
-                    <a:bodyPr wrap="square"/>
+                    <a:bodyPr/>
                     <a:lstStyle/>
                     <a:p>
                       <a:pPr algn="l"/>
-                      <a:r>
-                        <a:rPr sz="1400" b="1" i="0">
-                          <a:solidFill>
-                            <a:srgbClr val="111111"/>
-                          </a:solidFill>
-                          <a:latin typeface="Meiryo"/>
-                          <a:ea typeface="Meiryo"/>
-                          <a:cs typeface="Meiryo"/>
-                        </a:rPr>
-                        <a:t/>
-                      </a:r>
+                      <a:endParaRPr/>
                     </a:p>
                   </a:txBody>
                   <a:tcPr marL="82296" marR="82296" marT="27432" marB="27432" anchor="ctr">
@@ -16967,7 +18260,7 @@
                 </a:tc>
                 <a:tc>
                   <a:txBody>
-                    <a:bodyPr wrap="square"/>
+                    <a:bodyPr/>
                     <a:lstStyle/>
                     <a:p>
                       <a:pPr algn="l"/>
@@ -16992,7 +18285,7 @@
                 </a:tc>
                 <a:tc>
                   <a:txBody>
-                    <a:bodyPr wrap="square"/>
+                    <a:bodyPr/>
                     <a:lstStyle/>
                     <a:p>
                       <a:pPr algn="l"/>
@@ -17015,11 +18308,16 @@
                     </a:solidFill>
                   </a:tcPr>
                 </a:tc>
+                <a:extLst>
+                  <a:ext uri="{0D108BD9-81ED-4DB2-BD59-A6C34878D82A}">
+                    <a16:rowId xmlns:a16="http://schemas.microsoft.com/office/drawing/2014/main" val="10000"/>
+                  </a:ext>
+                </a:extLst>
               </a:tr>
               <a:tr h="384048">
                 <a:tc>
                   <a:txBody>
-                    <a:bodyPr wrap="square"/>
+                    <a:bodyPr/>
                     <a:lstStyle/>
                     <a:p>
                       <a:pPr algn="l"/>
@@ -17044,7 +18342,7 @@
                 </a:tc>
                 <a:tc>
                   <a:txBody>
-                    <a:bodyPr wrap="square"/>
+                    <a:bodyPr/>
                     <a:lstStyle/>
                     <a:p>
                       <a:pPr algn="l"/>
@@ -17069,7 +18367,7 @@
                 </a:tc>
                 <a:tc>
                   <a:txBody>
-                    <a:bodyPr wrap="square"/>
+                    <a:bodyPr/>
                     <a:lstStyle/>
                     <a:p>
                       <a:pPr algn="l"/>
@@ -17092,11 +18390,16 @@
                     </a:solidFill>
                   </a:tcPr>
                 </a:tc>
+                <a:extLst>
+                  <a:ext uri="{0D108BD9-81ED-4DB2-BD59-A6C34878D82A}">
+                    <a16:rowId xmlns:a16="http://schemas.microsoft.com/office/drawing/2014/main" val="10001"/>
+                  </a:ext>
+                </a:extLst>
               </a:tr>
               <a:tr h="384048">
                 <a:tc>
                   <a:txBody>
-                    <a:bodyPr wrap="square"/>
+                    <a:bodyPr/>
                     <a:lstStyle/>
                     <a:p>
                       <a:pPr algn="l"/>
@@ -17121,7 +18424,7 @@
                 </a:tc>
                 <a:tc>
                   <a:txBody>
-                    <a:bodyPr wrap="square"/>
+                    <a:bodyPr/>
                     <a:lstStyle/>
                     <a:p>
                       <a:pPr algn="l"/>
@@ -17146,7 +18449,7 @@
                 </a:tc>
                 <a:tc>
                   <a:txBody>
-                    <a:bodyPr wrap="square"/>
+                    <a:bodyPr/>
                     <a:lstStyle/>
                     <a:p>
                       <a:pPr algn="l"/>
@@ -17169,11 +18472,16 @@
                     </a:solidFill>
                   </a:tcPr>
                 </a:tc>
+                <a:extLst>
+                  <a:ext uri="{0D108BD9-81ED-4DB2-BD59-A6C34878D82A}">
+                    <a16:rowId xmlns:a16="http://schemas.microsoft.com/office/drawing/2014/main" val="10002"/>
+                  </a:ext>
+                </a:extLst>
               </a:tr>
               <a:tr h="384048">
                 <a:tc>
                   <a:txBody>
-                    <a:bodyPr wrap="square"/>
+                    <a:bodyPr/>
                     <a:lstStyle/>
                     <a:p>
                       <a:pPr algn="l"/>
@@ -17198,7 +18506,7 @@
                 </a:tc>
                 <a:tc>
                   <a:txBody>
-                    <a:bodyPr wrap="square"/>
+                    <a:bodyPr/>
                     <a:lstStyle/>
                     <a:p>
                       <a:pPr algn="l"/>
@@ -17223,7 +18531,7 @@
                 </a:tc>
                 <a:tc>
                   <a:txBody>
-                    <a:bodyPr wrap="square"/>
+                    <a:bodyPr/>
                     <a:lstStyle/>
                     <a:p>
                       <a:pPr algn="l"/>
@@ -17246,6 +18554,11 @@
                     </a:solidFill>
                   </a:tcPr>
                 </a:tc>
+                <a:extLst>
+                  <a:ext uri="{0D108BD9-81ED-4DB2-BD59-A6C34878D82A}">
+                    <a16:rowId xmlns:a16="http://schemas.microsoft.com/office/drawing/2014/main" val="10003"/>
+                  </a:ext>
+                </a:extLst>
               </a:tr>
             </a:tbl>
           </a:graphicData>
@@ -17292,7 +18605,9 @@
         <p:txBody>
           <a:bodyPr rtlCol="0" anchor="ctr"/>
           <a:lstStyle/>
-          <a:p/>
+          <a:p>
+            <a:endParaRPr/>
+          </a:p>
         </p:txBody>
       </p:sp>
       <p:sp>
@@ -17312,7 +18627,7 @@
           <a:noFill/>
         </p:spPr>
         <p:txBody>
-          <a:bodyPr wrap="square" lIns="45720" rIns="45720" tIns="27432" bIns="27432" anchor="t">
+          <a:bodyPr wrap="square" lIns="45720" tIns="27432" rIns="45720" bIns="27432" anchor="t">
             <a:spAutoFit/>
           </a:bodyPr>
           <a:lstStyle/>
@@ -17353,7 +18668,7 @@
           <a:noFill/>
         </p:spPr>
         <p:txBody>
-          <a:bodyPr wrap="square" lIns="27432" rIns="27432" tIns="16459" bIns="16459" anchor="t">
+          <a:bodyPr wrap="square" lIns="27432" tIns="16459" rIns="27432" bIns="16459" anchor="t">
             <a:spAutoFit/>
           </a:bodyPr>
           <a:lstStyle/>
@@ -17458,7 +18773,9 @@
         <p:txBody>
           <a:bodyPr rtlCol="0" anchor="ctr"/>
           <a:lstStyle/>
-          <a:p/>
+          <a:p>
+            <a:endParaRPr/>
+          </a:p>
         </p:txBody>
       </p:sp>
       <p:sp>
@@ -17478,7 +18795,7 @@
           <a:noFill/>
         </p:spPr>
         <p:txBody>
-          <a:bodyPr wrap="square" lIns="27432" rIns="27432" tIns="16459" bIns="16459" anchor="ctr">
+          <a:bodyPr wrap="square" lIns="27432" tIns="16459" rIns="27432" bIns="16459" anchor="ctr">
             <a:spAutoFit/>
           </a:bodyPr>
           <a:lstStyle/>
@@ -17543,7 +18860,9 @@
         <p:txBody>
           <a:bodyPr rtlCol="0" anchor="ctr"/>
           <a:lstStyle/>
-          <a:p/>
+          <a:p>
+            <a:endParaRPr/>
+          </a:p>
         </p:txBody>
       </p:sp>
       <p:sp>
@@ -17563,7 +18882,7 @@
           <a:noFill/>
         </p:spPr>
         <p:txBody>
-          <a:bodyPr wrap="square" lIns="27432" rIns="27432" tIns="16459" bIns="16459" anchor="ctr">
+          <a:bodyPr wrap="square" lIns="27432" tIns="16459" rIns="27432" bIns="16459" anchor="ctr">
             <a:spAutoFit/>
           </a:bodyPr>
           <a:lstStyle/>
@@ -17604,7 +18923,7 @@
           <a:noFill/>
         </p:spPr>
         <p:txBody>
-          <a:bodyPr wrap="square" lIns="27432" rIns="27432" tIns="16459" bIns="16459" anchor="t">
+          <a:bodyPr wrap="square" lIns="27432" tIns="16459" rIns="27432" bIns="16459" anchor="t">
             <a:spAutoFit/>
           </a:bodyPr>
           <a:lstStyle/>
@@ -17637,7 +18956,7 @@
 </file>
 
 <file path=ppt/slides/slide4.xml><?xml version="1.0" encoding="utf-8"?>
-<p:sld xmlns:a="http://schemas.openxmlformats.org/drawingml/2006/main" xmlns:p="http://schemas.openxmlformats.org/presentationml/2006/main" xmlns:r="http://schemas.openxmlformats.org/officeDocument/2006/relationships">
+<p:sld xmlns:a="http://schemas.openxmlformats.org/drawingml/2006/main" xmlns:r="http://schemas.openxmlformats.org/officeDocument/2006/relationships" xmlns:p="http://schemas.openxmlformats.org/presentationml/2006/main">
   <p:cSld>
     <p:spTree>
       <p:nvGrpSpPr>
@@ -17645,7 +18964,14 @@
         <p:cNvGrpSpPr/>
         <p:nvPr/>
       </p:nvGrpSpPr>
-      <p:grpSpPr/>
+      <p:grpSpPr>
+        <a:xfrm>
+          <a:off x="0" y="0"/>
+          <a:ext cx="0" cy="0"/>
+          <a:chOff x="0" y="0"/>
+          <a:chExt cx="0" cy="0"/>
+        </a:xfrm>
+      </p:grpSpPr>
       <p:sp>
         <p:nvSpPr>
           <p:cNvPr id="2" name="TextBox 1"/>
@@ -17663,7 +18989,7 @@
           <a:noFill/>
         </p:spPr>
         <p:txBody>
-          <a:bodyPr wrap="square" lIns="0" rIns="0" tIns="0" bIns="0" anchor="ctr">
+          <a:bodyPr wrap="square" lIns="0" tIns="0" rIns="0" bIns="0" anchor="ctr">
             <a:spAutoFit/>
           </a:bodyPr>
           <a:lstStyle/>
@@ -17704,7 +19030,7 @@
           <a:noFill/>
         </p:spPr>
         <p:txBody>
-          <a:bodyPr wrap="square" lIns="0" rIns="0" tIns="0" bIns="0" anchor="ctr">
+          <a:bodyPr wrap="square" lIns="0" tIns="0" rIns="0" bIns="0" anchor="ctr">
             <a:spAutoFit/>
           </a:bodyPr>
           <a:lstStyle/>
@@ -17780,7 +19106,7 @@
           <a:noFill/>
         </p:spPr>
         <p:txBody>
-          <a:bodyPr wrap="square" lIns="0" rIns="0" tIns="0" bIns="0" anchor="t">
+          <a:bodyPr wrap="square" lIns="0" tIns="0" rIns="0" bIns="0" anchor="t">
             <a:spAutoFit/>
           </a:bodyPr>
           <a:lstStyle/>
@@ -17845,7 +19171,9 @@
         <p:txBody>
           <a:bodyPr rtlCol="0" anchor="ctr"/>
           <a:lstStyle/>
-          <a:p/>
+          <a:p>
+            <a:endParaRPr/>
+          </a:p>
         </p:txBody>
       </p:sp>
       <p:sp>
@@ -17865,7 +19193,7 @@
           <a:noFill/>
         </p:spPr>
         <p:txBody>
-          <a:bodyPr wrap="square" lIns="45720" rIns="45720" tIns="27432" bIns="27432" anchor="t">
+          <a:bodyPr wrap="square" lIns="45720" tIns="27432" rIns="45720" bIns="27432" anchor="t">
             <a:spAutoFit/>
           </a:bodyPr>
           <a:lstStyle/>
@@ -17906,7 +19234,7 @@
           <a:noFill/>
         </p:spPr>
         <p:txBody>
-          <a:bodyPr wrap="square" lIns="45720" rIns="45720" tIns="27432" bIns="27432" anchor="t">
+          <a:bodyPr wrap="square" lIns="45720" tIns="27432" rIns="45720" bIns="27432" anchor="t">
             <a:spAutoFit/>
           </a:bodyPr>
           <a:lstStyle/>
@@ -17972,7 +19300,9 @@
         <p:txBody>
           <a:bodyPr rtlCol="0" anchor="ctr"/>
           <a:lstStyle/>
-          <a:p/>
+          <a:p>
+            <a:endParaRPr/>
+          </a:p>
         </p:txBody>
       </p:sp>
       <p:sp>
@@ -17992,7 +19322,7 @@
           <a:noFill/>
         </p:spPr>
         <p:txBody>
-          <a:bodyPr wrap="square" lIns="45720" rIns="45720" tIns="27432" bIns="27432" anchor="t">
+          <a:bodyPr wrap="square" lIns="45720" tIns="27432" rIns="45720" bIns="27432" anchor="t">
             <a:spAutoFit/>
           </a:bodyPr>
           <a:lstStyle/>
@@ -18033,7 +19363,7 @@
           <a:noFill/>
         </p:spPr>
         <p:txBody>
-          <a:bodyPr wrap="square" lIns="45720" rIns="45720" tIns="27432" bIns="27432" anchor="t">
+          <a:bodyPr wrap="square" lIns="45720" tIns="27432" rIns="45720" bIns="27432" anchor="t">
             <a:spAutoFit/>
           </a:bodyPr>
           <a:lstStyle/>
@@ -18097,7 +19427,7 @@
           </a:fontRef>
         </p:style>
         <p:txBody>
-          <a:bodyPr rtlCol="0" anchor="ctr" wrap="square" lIns="18288" rIns="18288"/>
+          <a:bodyPr wrap="square" lIns="18288" rIns="18288" rtlCol="0" anchor="ctr"/>
           <a:lstStyle/>
           <a:p>
             <a:pPr algn="ctr"/>
@@ -18132,7 +19462,7 @@
           <a:noFill/>
         </p:spPr>
         <p:txBody>
-          <a:bodyPr wrap="square" lIns="18288" rIns="18288" tIns="10972" bIns="10972" anchor="t">
+          <a:bodyPr wrap="square" lIns="18288" tIns="10972" rIns="18288" bIns="10972" anchor="t">
             <a:spAutoFit/>
           </a:bodyPr>
           <a:lstStyle/>
@@ -18174,7 +19504,7 @@
           <a:noFill/>
         </p:spPr>
         <p:txBody>
-          <a:bodyPr wrap="square" lIns="0" rIns="0" tIns="0" bIns="0" anchor="t">
+          <a:bodyPr wrap="square" lIns="0" tIns="0" rIns="0" bIns="0" anchor="t">
             <a:spAutoFit/>
           </a:bodyPr>
           <a:lstStyle/>
@@ -18239,7 +19569,9 @@
         <p:txBody>
           <a:bodyPr rtlCol="0" anchor="ctr"/>
           <a:lstStyle/>
-          <a:p/>
+          <a:p>
+            <a:endParaRPr/>
+          </a:p>
         </p:txBody>
       </p:sp>
       <p:sp>
@@ -18259,7 +19591,7 @@
           <a:noFill/>
         </p:spPr>
         <p:txBody>
-          <a:bodyPr wrap="square" lIns="45720" rIns="45720" tIns="27432" bIns="27432" anchor="ctr">
+          <a:bodyPr wrap="square" lIns="45720" tIns="27432" rIns="45720" bIns="27432" anchor="ctr">
             <a:spAutoFit/>
           </a:bodyPr>
           <a:lstStyle/>
@@ -18324,7 +19656,9 @@
         <p:txBody>
           <a:bodyPr rtlCol="0" anchor="ctr"/>
           <a:lstStyle/>
-          <a:p/>
+          <a:p>
+            <a:endParaRPr/>
+          </a:p>
         </p:txBody>
       </p:sp>
       <p:sp>
@@ -18368,7 +19702,9 @@
         <p:txBody>
           <a:bodyPr rtlCol="0" anchor="ctr"/>
           <a:lstStyle/>
-          <a:p/>
+          <a:p>
+            <a:endParaRPr/>
+          </a:p>
         </p:txBody>
       </p:sp>
       <p:sp>
@@ -18388,7 +19724,7 @@
           <a:noFill/>
         </p:spPr>
         <p:txBody>
-          <a:bodyPr wrap="square" lIns="45720" rIns="45720" tIns="27432" bIns="27432" anchor="t">
+          <a:bodyPr wrap="square" lIns="45720" tIns="27432" rIns="45720" bIns="27432" anchor="t">
             <a:spAutoFit/>
           </a:bodyPr>
           <a:lstStyle/>
@@ -18429,7 +19765,7 @@
           <a:noFill/>
         </p:spPr>
         <p:txBody>
-          <a:bodyPr wrap="square" lIns="45720" rIns="45720" tIns="27432" bIns="27432" anchor="t">
+          <a:bodyPr wrap="square" lIns="45720" tIns="27432" rIns="45720" bIns="27432" anchor="t">
             <a:spAutoFit/>
           </a:bodyPr>
           <a:lstStyle/>
@@ -18494,7 +19830,9 @@
         <p:txBody>
           <a:bodyPr rtlCol="0" anchor="ctr"/>
           <a:lstStyle/>
-          <a:p/>
+          <a:p>
+            <a:endParaRPr/>
+          </a:p>
         </p:txBody>
       </p:sp>
       <p:sp>
@@ -18538,7 +19876,9 @@
         <p:txBody>
           <a:bodyPr rtlCol="0" anchor="ctr"/>
           <a:lstStyle/>
-          <a:p/>
+          <a:p>
+            <a:endParaRPr/>
+          </a:p>
         </p:txBody>
       </p:sp>
       <p:sp>
@@ -18558,7 +19898,7 @@
           <a:noFill/>
         </p:spPr>
         <p:txBody>
-          <a:bodyPr wrap="square" lIns="128016" rIns="128016" tIns="76809" bIns="76809" anchor="ctr">
+          <a:bodyPr wrap="square" lIns="128016" tIns="76809" rIns="128016" bIns="76809" anchor="ctr">
             <a:spAutoFit/>
           </a:bodyPr>
           <a:lstStyle/>
@@ -18599,7 +19939,7 @@
           <a:noFill/>
         </p:spPr>
         <p:txBody>
-          <a:bodyPr wrap="square" lIns="128016" rIns="128016" tIns="76809" bIns="76809" anchor="t">
+          <a:bodyPr wrap="square" lIns="128016" tIns="76809" rIns="128016" bIns="76809" anchor="t">
             <a:spAutoFit/>
           </a:bodyPr>
           <a:lstStyle/>
@@ -18664,7 +20004,9 @@
         <p:txBody>
           <a:bodyPr rtlCol="0" anchor="ctr"/>
           <a:lstStyle/>
-          <a:p/>
+          <a:p>
+            <a:endParaRPr/>
+          </a:p>
         </p:txBody>
       </p:sp>
       <p:sp>
@@ -18708,7 +20050,9 @@
         <p:txBody>
           <a:bodyPr rtlCol="0" anchor="ctr"/>
           <a:lstStyle/>
-          <a:p/>
+          <a:p>
+            <a:endParaRPr/>
+          </a:p>
         </p:txBody>
       </p:sp>
       <p:sp>
@@ -18728,7 +20072,7 @@
           <a:noFill/>
         </p:spPr>
         <p:txBody>
-          <a:bodyPr wrap="square" lIns="128016" rIns="128016" tIns="76809" bIns="76809" anchor="ctr">
+          <a:bodyPr wrap="square" lIns="128016" tIns="76809" rIns="128016" bIns="76809" anchor="ctr">
             <a:spAutoFit/>
           </a:bodyPr>
           <a:lstStyle/>
@@ -18769,7 +20113,7 @@
           <a:noFill/>
         </p:spPr>
         <p:txBody>
-          <a:bodyPr wrap="square" lIns="128016" rIns="128016" tIns="76809" bIns="76809" anchor="t">
+          <a:bodyPr wrap="square" lIns="128016" tIns="76809" rIns="128016" bIns="76809" anchor="t">
             <a:spAutoFit/>
           </a:bodyPr>
           <a:lstStyle/>
@@ -18834,7 +20178,9 @@
         <p:txBody>
           <a:bodyPr rtlCol="0" anchor="ctr"/>
           <a:lstStyle/>
-          <a:p/>
+          <a:p>
+            <a:endParaRPr/>
+          </a:p>
         </p:txBody>
       </p:sp>
       <p:sp>
@@ -18878,7 +20224,9 @@
         <p:txBody>
           <a:bodyPr rtlCol="0" anchor="ctr"/>
           <a:lstStyle/>
-          <a:p/>
+          <a:p>
+            <a:endParaRPr/>
+          </a:p>
         </p:txBody>
       </p:sp>
       <p:sp>
@@ -18898,7 +20246,7 @@
           <a:noFill/>
         </p:spPr>
         <p:txBody>
-          <a:bodyPr wrap="square" lIns="128016" rIns="128016" tIns="76809" bIns="76809" anchor="ctr">
+          <a:bodyPr wrap="square" lIns="128016" tIns="76809" rIns="128016" bIns="76809" anchor="ctr">
             <a:spAutoFit/>
           </a:bodyPr>
           <a:lstStyle/>
@@ -18939,7 +20287,7 @@
           <a:noFill/>
         </p:spPr>
         <p:txBody>
-          <a:bodyPr wrap="square" lIns="128016" rIns="128016" tIns="76809" bIns="76809" anchor="t">
+          <a:bodyPr wrap="square" lIns="128016" tIns="76809" rIns="128016" bIns="76809" anchor="t">
             <a:spAutoFit/>
           </a:bodyPr>
           <a:lstStyle/>
@@ -18972,7 +20320,7 @@
 </file>
 
 <file path=ppt/slides/slide5.xml><?xml version="1.0" encoding="utf-8"?>
-<p:sld xmlns:a="http://schemas.openxmlformats.org/drawingml/2006/main" xmlns:p="http://schemas.openxmlformats.org/presentationml/2006/main" xmlns:r="http://schemas.openxmlformats.org/officeDocument/2006/relationships">
+<p:sld xmlns:a="http://schemas.openxmlformats.org/drawingml/2006/main" xmlns:r="http://schemas.openxmlformats.org/officeDocument/2006/relationships" xmlns:p="http://schemas.openxmlformats.org/presentationml/2006/main">
   <p:cSld>
     <p:spTree>
       <p:nvGrpSpPr>
@@ -18980,7 +20328,14 @@
         <p:cNvGrpSpPr/>
         <p:nvPr/>
       </p:nvGrpSpPr>
-      <p:grpSpPr/>
+      <p:grpSpPr>
+        <a:xfrm>
+          <a:off x="0" y="0"/>
+          <a:ext cx="0" cy="0"/>
+          <a:chOff x="0" y="0"/>
+          <a:chExt cx="0" cy="0"/>
+        </a:xfrm>
+      </p:grpSpPr>
       <p:sp>
         <p:nvSpPr>
           <p:cNvPr id="2" name="TextBox 1"/>
@@ -18998,7 +20353,7 @@
           <a:noFill/>
         </p:spPr>
         <p:txBody>
-          <a:bodyPr wrap="square" lIns="0" rIns="0" tIns="0" bIns="0" anchor="ctr">
+          <a:bodyPr wrap="square" lIns="0" tIns="0" rIns="0" bIns="0" anchor="ctr">
             <a:spAutoFit/>
           </a:bodyPr>
           <a:lstStyle/>
@@ -19039,7 +20394,7 @@
           <a:noFill/>
         </p:spPr>
         <p:txBody>
-          <a:bodyPr wrap="square" lIns="0" rIns="0" tIns="0" bIns="0" anchor="ctr">
+          <a:bodyPr wrap="square" lIns="0" tIns="0" rIns="0" bIns="0" anchor="ctr">
             <a:spAutoFit/>
           </a:bodyPr>
           <a:lstStyle/>
@@ -19115,7 +20470,7 @@
           <a:noFill/>
         </p:spPr>
         <p:txBody>
-          <a:bodyPr wrap="square" lIns="0" rIns="0" tIns="0" bIns="0" anchor="t">
+          <a:bodyPr wrap="square" lIns="0" tIns="0" rIns="0" bIns="0" anchor="t">
             <a:spAutoFit/>
           </a:bodyPr>
           <a:lstStyle/>
@@ -19154,17 +20509,29 @@
         <a:graphic>
           <a:graphicData uri="http://schemas.openxmlformats.org/drawingml/2006/table">
             <a:tbl>
-              <a:tblPr firstRow="0" bandRow="0">
+              <a:tblPr>
                 <a:tableStyleId>{5940675A-B579-460E-94D1-54222C63F5DA}</a:tableStyleId>
               </a:tblPr>
               <a:tblGrid>
-                <a:gridCol w="1234440"/>
-                <a:gridCol w="5486400"/>
+                <a:gridCol w="1234440">
+                  <a:extLst>
+                    <a:ext uri="{9D8B030D-6E8A-4147-A177-3AD203B41FA5}">
+                      <a16:colId xmlns:a16="http://schemas.microsoft.com/office/drawing/2014/main" val="20000"/>
+                    </a:ext>
+                  </a:extLst>
+                </a:gridCol>
+                <a:gridCol w="5486400">
+                  <a:extLst>
+                    <a:ext uri="{9D8B030D-6E8A-4147-A177-3AD203B41FA5}">
+                      <a16:colId xmlns:a16="http://schemas.microsoft.com/office/drawing/2014/main" val="20001"/>
+                    </a:ext>
+                  </a:extLst>
+                </a:gridCol>
               </a:tblGrid>
               <a:tr h="457200">
                 <a:tc>
                   <a:txBody>
-                    <a:bodyPr wrap="square"/>
+                    <a:bodyPr/>
                     <a:lstStyle/>
                     <a:p>
                       <a:pPr algn="l"/>
@@ -19189,7 +20556,7 @@
                 </a:tc>
                 <a:tc>
                   <a:txBody>
-                    <a:bodyPr wrap="square"/>
+                    <a:bodyPr/>
                     <a:lstStyle/>
                     <a:p>
                       <a:pPr algn="l"/>
@@ -19212,11 +20579,16 @@
                     </a:solidFill>
                   </a:tcPr>
                 </a:tc>
+                <a:extLst>
+                  <a:ext uri="{0D108BD9-81ED-4DB2-BD59-A6C34878D82A}">
+                    <a16:rowId xmlns:a16="http://schemas.microsoft.com/office/drawing/2014/main" val="10000"/>
+                  </a:ext>
+                </a:extLst>
               </a:tr>
               <a:tr h="457200">
                 <a:tc>
                   <a:txBody>
-                    <a:bodyPr wrap="square"/>
+                    <a:bodyPr/>
                     <a:lstStyle/>
                     <a:p>
                       <a:pPr algn="l"/>
@@ -19241,7 +20613,7 @@
                 </a:tc>
                 <a:tc>
                   <a:txBody>
-                    <a:bodyPr wrap="square"/>
+                    <a:bodyPr/>
                     <a:lstStyle/>
                     <a:p>
                       <a:pPr algn="l"/>
@@ -19264,11 +20636,16 @@
                     </a:solidFill>
                   </a:tcPr>
                 </a:tc>
+                <a:extLst>
+                  <a:ext uri="{0D108BD9-81ED-4DB2-BD59-A6C34878D82A}">
+                    <a16:rowId xmlns:a16="http://schemas.microsoft.com/office/drawing/2014/main" val="10001"/>
+                  </a:ext>
+                </a:extLst>
               </a:tr>
               <a:tr h="457200">
                 <a:tc>
                   <a:txBody>
-                    <a:bodyPr wrap="square"/>
+                    <a:bodyPr/>
                     <a:lstStyle/>
                     <a:p>
                       <a:pPr algn="l"/>
@@ -19293,7 +20670,7 @@
                 </a:tc>
                 <a:tc>
                   <a:txBody>
-                    <a:bodyPr wrap="square"/>
+                    <a:bodyPr/>
                     <a:lstStyle/>
                     <a:p>
                       <a:pPr algn="l"/>
@@ -19316,11 +20693,16 @@
                     </a:solidFill>
                   </a:tcPr>
                 </a:tc>
+                <a:extLst>
+                  <a:ext uri="{0D108BD9-81ED-4DB2-BD59-A6C34878D82A}">
+                    <a16:rowId xmlns:a16="http://schemas.microsoft.com/office/drawing/2014/main" val="10002"/>
+                  </a:ext>
+                </a:extLst>
               </a:tr>
               <a:tr h="457200">
                 <a:tc>
                   <a:txBody>
-                    <a:bodyPr wrap="square"/>
+                    <a:bodyPr/>
                     <a:lstStyle/>
                     <a:p>
                       <a:pPr algn="l"/>
@@ -19345,7 +20727,7 @@
                 </a:tc>
                 <a:tc>
                   <a:txBody>
-                    <a:bodyPr wrap="square"/>
+                    <a:bodyPr/>
                     <a:lstStyle/>
                     <a:p>
                       <a:pPr algn="l"/>
@@ -19368,11 +20750,16 @@
                     </a:solidFill>
                   </a:tcPr>
                 </a:tc>
+                <a:extLst>
+                  <a:ext uri="{0D108BD9-81ED-4DB2-BD59-A6C34878D82A}">
+                    <a16:rowId xmlns:a16="http://schemas.microsoft.com/office/drawing/2014/main" val="10003"/>
+                  </a:ext>
+                </a:extLst>
               </a:tr>
               <a:tr h="457200">
                 <a:tc>
                   <a:txBody>
-                    <a:bodyPr wrap="square"/>
+                    <a:bodyPr/>
                     <a:lstStyle/>
                     <a:p>
                       <a:pPr algn="l"/>
@@ -19397,7 +20784,7 @@
                 </a:tc>
                 <a:tc>
                   <a:txBody>
-                    <a:bodyPr wrap="square"/>
+                    <a:bodyPr/>
                     <a:lstStyle/>
                     <a:p>
                       <a:pPr algn="l"/>
@@ -19420,11 +20807,16 @@
                     </a:solidFill>
                   </a:tcPr>
                 </a:tc>
+                <a:extLst>
+                  <a:ext uri="{0D108BD9-81ED-4DB2-BD59-A6C34878D82A}">
+                    <a16:rowId xmlns:a16="http://schemas.microsoft.com/office/drawing/2014/main" val="10004"/>
+                  </a:ext>
+                </a:extLst>
               </a:tr>
               <a:tr h="457200">
                 <a:tc>
                   <a:txBody>
-                    <a:bodyPr wrap="square"/>
+                    <a:bodyPr/>
                     <a:lstStyle/>
                     <a:p>
                       <a:pPr algn="l"/>
@@ -19449,7 +20841,7 @@
                 </a:tc>
                 <a:tc>
                   <a:txBody>
-                    <a:bodyPr wrap="square"/>
+                    <a:bodyPr/>
                     <a:lstStyle/>
                     <a:p>
                       <a:pPr algn="l"/>
@@ -19472,11 +20864,16 @@
                     </a:solidFill>
                   </a:tcPr>
                 </a:tc>
+                <a:extLst>
+                  <a:ext uri="{0D108BD9-81ED-4DB2-BD59-A6C34878D82A}">
+                    <a16:rowId xmlns:a16="http://schemas.microsoft.com/office/drawing/2014/main" val="10005"/>
+                  </a:ext>
+                </a:extLst>
               </a:tr>
               <a:tr h="457200">
                 <a:tc>
                   <a:txBody>
-                    <a:bodyPr wrap="square"/>
+                    <a:bodyPr/>
                     <a:lstStyle/>
                     <a:p>
                       <a:pPr algn="l"/>
@@ -19501,7 +20898,7 @@
                 </a:tc>
                 <a:tc>
                   <a:txBody>
-                    <a:bodyPr wrap="square"/>
+                    <a:bodyPr/>
                     <a:lstStyle/>
                     <a:p>
                       <a:pPr algn="l"/>
@@ -19524,6 +20921,11 @@
                     </a:solidFill>
                   </a:tcPr>
                 </a:tc>
+                <a:extLst>
+                  <a:ext uri="{0D108BD9-81ED-4DB2-BD59-A6C34878D82A}">
+                    <a16:rowId xmlns:a16="http://schemas.microsoft.com/office/drawing/2014/main" val="10006"/>
+                  </a:ext>
+                </a:extLst>
               </a:tr>
             </a:tbl>
           </a:graphicData>
@@ -19570,7 +20972,9 @@
         <p:txBody>
           <a:bodyPr rtlCol="0" anchor="ctr"/>
           <a:lstStyle/>
-          <a:p/>
+          <a:p>
+            <a:endParaRPr/>
+          </a:p>
         </p:txBody>
       </p:sp>
       <p:sp>
@@ -19657,7 +21061,9 @@
         <p:txBody>
           <a:bodyPr rtlCol="0" anchor="ctr"/>
           <a:lstStyle/>
-          <a:p/>
+          <a:p>
+            <a:endParaRPr/>
+          </a:p>
         </p:txBody>
       </p:sp>
       <p:sp>
@@ -19701,7 +21107,9 @@
         <p:txBody>
           <a:bodyPr rtlCol="0" anchor="ctr"/>
           <a:lstStyle/>
-          <a:p/>
+          <a:p>
+            <a:endParaRPr/>
+          </a:p>
         </p:txBody>
       </p:sp>
       <p:sp>
@@ -19721,7 +21129,7 @@
           <a:noFill/>
         </p:spPr>
         <p:txBody>
-          <a:bodyPr wrap="square" lIns="128016" rIns="128016" tIns="76809" bIns="76809" anchor="ctr">
+          <a:bodyPr wrap="square" lIns="128016" tIns="76809" rIns="128016" bIns="76809" anchor="ctr">
             <a:spAutoFit/>
           </a:bodyPr>
           <a:lstStyle/>
@@ -19762,7 +21170,7 @@
           <a:noFill/>
         </p:spPr>
         <p:txBody>
-          <a:bodyPr wrap="square" lIns="128016" rIns="128016" tIns="76809" bIns="76809" anchor="t">
+          <a:bodyPr wrap="square" lIns="128016" tIns="76809" rIns="128016" bIns="76809" anchor="t">
             <a:spAutoFit/>
           </a:bodyPr>
           <a:lstStyle/>
@@ -19881,7 +21289,9 @@
         <p:txBody>
           <a:bodyPr rtlCol="0" anchor="ctr"/>
           <a:lstStyle/>
-          <a:p/>
+          <a:p>
+            <a:endParaRPr/>
+          </a:p>
         </p:txBody>
       </p:sp>
       <p:sp>
@@ -19925,7 +21335,9 @@
         <p:txBody>
           <a:bodyPr rtlCol="0" anchor="ctr"/>
           <a:lstStyle/>
-          <a:p/>
+          <a:p>
+            <a:endParaRPr/>
+          </a:p>
         </p:txBody>
       </p:sp>
       <p:sp>
@@ -19945,7 +21357,7 @@
           <a:noFill/>
         </p:spPr>
         <p:txBody>
-          <a:bodyPr wrap="square" lIns="128016" rIns="128016" tIns="76809" bIns="76809" anchor="ctr">
+          <a:bodyPr wrap="square" lIns="128016" tIns="76809" rIns="128016" bIns="76809" anchor="ctr">
             <a:spAutoFit/>
           </a:bodyPr>
           <a:lstStyle/>
@@ -19986,7 +21398,7 @@
           <a:noFill/>
         </p:spPr>
         <p:txBody>
-          <a:bodyPr wrap="square" lIns="128016" rIns="128016" tIns="76809" bIns="76809" anchor="t">
+          <a:bodyPr wrap="square" lIns="128016" tIns="76809" rIns="128016" bIns="76809" anchor="t">
             <a:spAutoFit/>
           </a:bodyPr>
           <a:lstStyle/>
@@ -20037,7 +21449,7 @@
 </file>
 
 <file path=ppt/slides/slide6.xml><?xml version="1.0" encoding="utf-8"?>
-<p:sld xmlns:a="http://schemas.openxmlformats.org/drawingml/2006/main" xmlns:p="http://schemas.openxmlformats.org/presentationml/2006/main" xmlns:r="http://schemas.openxmlformats.org/officeDocument/2006/relationships">
+<p:sld xmlns:a="http://schemas.openxmlformats.org/drawingml/2006/main" xmlns:r="http://schemas.openxmlformats.org/officeDocument/2006/relationships" xmlns:p="http://schemas.openxmlformats.org/presentationml/2006/main">
   <p:cSld>
     <p:spTree>
       <p:nvGrpSpPr>
@@ -20045,7 +21457,104 @@
         <p:cNvGrpSpPr/>
         <p:nvPr/>
       </p:nvGrpSpPr>
-      <p:grpSpPr/>
+      <p:grpSpPr>
+        <a:xfrm>
+          <a:off x="0" y="0"/>
+          <a:ext cx="0" cy="0"/>
+          <a:chOff x="0" y="0"/>
+          <a:chExt cx="0" cy="0"/>
+        </a:xfrm>
+      </p:grpSpPr>
+      <p:pic>
+        <p:nvPicPr>
+          <p:cNvPr id="3" name="図 2">
+            <a:extLst>
+              <a:ext uri="{FF2B5EF4-FFF2-40B4-BE49-F238E27FC236}">
+                <a16:creationId xmlns:a16="http://schemas.microsoft.com/office/drawing/2014/main" id="{AAEFEFA9-14E0-DA0C-B8A6-E48635E76EA4}"/>
+              </a:ext>
+            </a:extLst>
+          </p:cNvPr>
+          <p:cNvPicPr>
+            <a:picLocks noChangeAspect="1"/>
+          </p:cNvPicPr>
+          <p:nvPr/>
+        </p:nvPicPr>
+        <p:blipFill>
+          <a:blip r:embed="rId2"/>
+          <a:stretch>
+            <a:fillRect/>
+          </a:stretch>
+        </p:blipFill>
+        <p:spPr>
+          <a:xfrm>
+            <a:off x="5568647" y="1376437"/>
+            <a:ext cx="4354286" cy="3265715"/>
+          </a:xfrm>
+          <a:prstGeom prst="rect">
+            <a:avLst/>
+          </a:prstGeom>
+        </p:spPr>
+      </p:pic>
+      <p:pic>
+        <p:nvPicPr>
+          <p:cNvPr id="5" name="図 4">
+            <a:extLst>
+              <a:ext uri="{FF2B5EF4-FFF2-40B4-BE49-F238E27FC236}">
+                <a16:creationId xmlns:a16="http://schemas.microsoft.com/office/drawing/2014/main" id="{047CDFF0-1416-CCD4-DCCA-DB3DBB87C92B}"/>
+              </a:ext>
+            </a:extLst>
+          </p:cNvPr>
+          <p:cNvPicPr>
+            <a:picLocks noChangeAspect="1"/>
+          </p:cNvPicPr>
+          <p:nvPr/>
+        </p:nvPicPr>
+        <p:blipFill>
+          <a:blip r:embed="rId3"/>
+          <a:stretch>
+            <a:fillRect/>
+          </a:stretch>
+        </p:blipFill>
+        <p:spPr>
+          <a:xfrm>
+            <a:off x="866018" y="1376437"/>
+            <a:ext cx="3957561" cy="2968171"/>
+          </a:xfrm>
+          <a:prstGeom prst="rect">
+            <a:avLst/>
+          </a:prstGeom>
+        </p:spPr>
+      </p:pic>
+    </p:spTree>
+    <p:extLst>
+      <p:ext uri="{BB962C8B-B14F-4D97-AF65-F5344CB8AC3E}">
+        <p14:creationId xmlns:p14="http://schemas.microsoft.com/office/powerpoint/2010/main" val="2532270267"/>
+      </p:ext>
+    </p:extLst>
+  </p:cSld>
+  <p:clrMapOvr>
+    <a:masterClrMapping/>
+  </p:clrMapOvr>
+</p:sld>
+</file>
+
+<file path=ppt/slides/slide7.xml><?xml version="1.0" encoding="utf-8"?>
+<p:sld xmlns:a="http://schemas.openxmlformats.org/drawingml/2006/main" xmlns:r="http://schemas.openxmlformats.org/officeDocument/2006/relationships" xmlns:p="http://schemas.openxmlformats.org/presentationml/2006/main">
+  <p:cSld>
+    <p:spTree>
+      <p:nvGrpSpPr>
+        <p:cNvPr id="1" name=""/>
+        <p:cNvGrpSpPr/>
+        <p:nvPr/>
+      </p:nvGrpSpPr>
+      <p:grpSpPr>
+        <a:xfrm>
+          <a:off x="0" y="0"/>
+          <a:ext cx="0" cy="0"/>
+          <a:chOff x="0" y="0"/>
+          <a:chExt cx="0" cy="0"/>
+        </a:xfrm>
+      </p:grpSpPr>
       <p:sp>
         <p:nvSpPr>
           <p:cNvPr id="2" name="TextBox 1"/>
@@ -20063,7 +21572,7 @@
           <a:noFill/>
         </p:spPr>
         <p:txBody>
-          <a:bodyPr wrap="square" lIns="0" rIns="0" tIns="0" bIns="0" anchor="ctr">
+          <a:bodyPr wrap="square" lIns="0" tIns="0" rIns="0" bIns="0" anchor="ctr">
             <a:spAutoFit/>
           </a:bodyPr>
           <a:lstStyle/>
@@ -20104,7 +21613,7 @@
           <a:noFill/>
         </p:spPr>
         <p:txBody>
-          <a:bodyPr wrap="square" lIns="0" rIns="0" tIns="0" bIns="0" anchor="ctr">
+          <a:bodyPr wrap="square" lIns="0" tIns="0" rIns="0" bIns="0" anchor="ctr">
             <a:spAutoFit/>
           </a:bodyPr>
           <a:lstStyle/>
@@ -20180,7 +21689,7 @@
           <a:noFill/>
         </p:spPr>
         <p:txBody>
-          <a:bodyPr wrap="square" lIns="0" rIns="0" tIns="0" bIns="0" anchor="t">
+          <a:bodyPr wrap="square" lIns="0" tIns="0" rIns="0" bIns="0" anchor="t">
             <a:spAutoFit/>
           </a:bodyPr>
           <a:lstStyle/>
@@ -20245,7 +21754,9 @@
         <p:txBody>
           <a:bodyPr rtlCol="0" anchor="ctr"/>
           <a:lstStyle/>
-          <a:p/>
+          <a:p>
+            <a:endParaRPr/>
+          </a:p>
         </p:txBody>
       </p:sp>
       <p:sp>
@@ -20265,7 +21776,7 @@
           <a:noFill/>
         </p:spPr>
         <p:txBody>
-          <a:bodyPr wrap="square" lIns="128016" rIns="128016" tIns="76809" bIns="76809" anchor="ctr">
+          <a:bodyPr wrap="square" lIns="128016" tIns="76809" rIns="128016" bIns="76809" anchor="ctr">
             <a:spAutoFit/>
           </a:bodyPr>
           <a:lstStyle/>
@@ -20304,18 +21815,36 @@
         <a:graphic>
           <a:graphicData uri="http://schemas.openxmlformats.org/drawingml/2006/table">
             <a:tbl>
-              <a:tblPr firstRow="0" bandRow="0">
+              <a:tblPr>
                 <a:tableStyleId>{5940675A-B579-460E-94D1-54222C63F5DA}</a:tableStyleId>
               </a:tblPr>
               <a:tblGrid>
-                <a:gridCol w="5134490"/>
-                <a:gridCol w="2842307"/>
-                <a:gridCol w="3209056"/>
+                <a:gridCol w="5134490">
+                  <a:extLst>
+                    <a:ext uri="{9D8B030D-6E8A-4147-A177-3AD203B41FA5}">
+                      <a16:colId xmlns:a16="http://schemas.microsoft.com/office/drawing/2014/main" val="20000"/>
+                    </a:ext>
+                  </a:extLst>
+                </a:gridCol>
+                <a:gridCol w="2842307">
+                  <a:extLst>
+                    <a:ext uri="{9D8B030D-6E8A-4147-A177-3AD203B41FA5}">
+                      <a16:colId xmlns:a16="http://schemas.microsoft.com/office/drawing/2014/main" val="20001"/>
+                    </a:ext>
+                  </a:extLst>
+                </a:gridCol>
+                <a:gridCol w="3209056">
+                  <a:extLst>
+                    <a:ext uri="{9D8B030D-6E8A-4147-A177-3AD203B41FA5}">
+                      <a16:colId xmlns:a16="http://schemas.microsoft.com/office/drawing/2014/main" val="20002"/>
+                    </a:ext>
+                  </a:extLst>
+                </a:gridCol>
               </a:tblGrid>
               <a:tr h="457200">
                 <a:tc>
                   <a:txBody>
-                    <a:bodyPr wrap="square"/>
+                    <a:bodyPr/>
                     <a:lstStyle/>
                     <a:p>
                       <a:pPr algn="l"/>
@@ -20340,7 +21869,7 @@
                 </a:tc>
                 <a:tc>
                   <a:txBody>
-                    <a:bodyPr wrap="square"/>
+                    <a:bodyPr/>
                     <a:lstStyle/>
                     <a:p>
                       <a:pPr algn="l"/>
@@ -20365,7 +21894,7 @@
                 </a:tc>
                 <a:tc>
                   <a:txBody>
-                    <a:bodyPr wrap="square"/>
+                    <a:bodyPr/>
                     <a:lstStyle/>
                     <a:p>
                       <a:pPr algn="l"/>
@@ -20388,11 +21917,16 @@
                     </a:solidFill>
                   </a:tcPr>
                 </a:tc>
+                <a:extLst>
+                  <a:ext uri="{0D108BD9-81ED-4DB2-BD59-A6C34878D82A}">
+                    <a16:rowId xmlns:a16="http://schemas.microsoft.com/office/drawing/2014/main" val="10000"/>
+                  </a:ext>
+                </a:extLst>
               </a:tr>
               <a:tr h="457200">
                 <a:tc>
                   <a:txBody>
-                    <a:bodyPr wrap="square"/>
+                    <a:bodyPr/>
                     <a:lstStyle/>
                     <a:p>
                       <a:pPr algn="l"/>
@@ -20417,7 +21951,7 @@
                 </a:tc>
                 <a:tc>
                   <a:txBody>
-                    <a:bodyPr wrap="square"/>
+                    <a:bodyPr/>
                     <a:lstStyle/>
                     <a:p>
                       <a:pPr algn="l"/>
@@ -20442,7 +21976,7 @@
                 </a:tc>
                 <a:tc>
                   <a:txBody>
-                    <a:bodyPr wrap="square"/>
+                    <a:bodyPr/>
                     <a:lstStyle/>
                     <a:p>
                       <a:pPr algn="l"/>
@@ -20465,11 +21999,16 @@
                     </a:solidFill>
                   </a:tcPr>
                 </a:tc>
+                <a:extLst>
+                  <a:ext uri="{0D108BD9-81ED-4DB2-BD59-A6C34878D82A}">
+                    <a16:rowId xmlns:a16="http://schemas.microsoft.com/office/drawing/2014/main" val="10001"/>
+                  </a:ext>
+                </a:extLst>
               </a:tr>
               <a:tr h="457200">
                 <a:tc>
                   <a:txBody>
-                    <a:bodyPr wrap="square"/>
+                    <a:bodyPr/>
                     <a:lstStyle/>
                     <a:p>
                       <a:pPr algn="l"/>
@@ -20494,7 +22033,7 @@
                 </a:tc>
                 <a:tc>
                   <a:txBody>
-                    <a:bodyPr wrap="square"/>
+                    <a:bodyPr/>
                     <a:lstStyle/>
                     <a:p>
                       <a:pPr algn="l"/>
@@ -20519,7 +22058,7 @@
                 </a:tc>
                 <a:tc>
                   <a:txBody>
-                    <a:bodyPr wrap="square"/>
+                    <a:bodyPr/>
                     <a:lstStyle/>
                     <a:p>
                       <a:pPr algn="l"/>
@@ -20542,11 +22081,16 @@
                     </a:solidFill>
                   </a:tcPr>
                 </a:tc>
+                <a:extLst>
+                  <a:ext uri="{0D108BD9-81ED-4DB2-BD59-A6C34878D82A}">
+                    <a16:rowId xmlns:a16="http://schemas.microsoft.com/office/drawing/2014/main" val="10002"/>
+                  </a:ext>
+                </a:extLst>
               </a:tr>
               <a:tr h="457200">
                 <a:tc>
                   <a:txBody>
-                    <a:bodyPr wrap="square"/>
+                    <a:bodyPr/>
                     <a:lstStyle/>
                     <a:p>
                       <a:pPr algn="l"/>
@@ -20571,7 +22115,7 @@
                 </a:tc>
                 <a:tc>
                   <a:txBody>
-                    <a:bodyPr wrap="square"/>
+                    <a:bodyPr/>
                     <a:lstStyle/>
                     <a:p>
                       <a:pPr algn="l"/>
@@ -20596,7 +22140,7 @@
                 </a:tc>
                 <a:tc>
                   <a:txBody>
-                    <a:bodyPr wrap="square"/>
+                    <a:bodyPr/>
                     <a:lstStyle/>
                     <a:p>
                       <a:pPr algn="l"/>
@@ -20619,11 +22163,16 @@
                     </a:solidFill>
                   </a:tcPr>
                 </a:tc>
+                <a:extLst>
+                  <a:ext uri="{0D108BD9-81ED-4DB2-BD59-A6C34878D82A}">
+                    <a16:rowId xmlns:a16="http://schemas.microsoft.com/office/drawing/2014/main" val="10003"/>
+                  </a:ext>
+                </a:extLst>
               </a:tr>
               <a:tr h="457200">
                 <a:tc>
                   <a:txBody>
-                    <a:bodyPr wrap="square"/>
+                    <a:bodyPr/>
                     <a:lstStyle/>
                     <a:p>
                       <a:pPr algn="l"/>
@@ -20648,7 +22197,7 @@
                 </a:tc>
                 <a:tc>
                   <a:txBody>
-                    <a:bodyPr wrap="square"/>
+                    <a:bodyPr/>
                     <a:lstStyle/>
                     <a:p>
                       <a:pPr algn="l"/>
@@ -20673,7 +22222,7 @@
                 </a:tc>
                 <a:tc>
                   <a:txBody>
-                    <a:bodyPr wrap="square"/>
+                    <a:bodyPr/>
                     <a:lstStyle/>
                     <a:p>
                       <a:pPr algn="l"/>
@@ -20696,11 +22245,16 @@
                     </a:solidFill>
                   </a:tcPr>
                 </a:tc>
+                <a:extLst>
+                  <a:ext uri="{0D108BD9-81ED-4DB2-BD59-A6C34878D82A}">
+                    <a16:rowId xmlns:a16="http://schemas.microsoft.com/office/drawing/2014/main" val="10004"/>
+                  </a:ext>
+                </a:extLst>
               </a:tr>
               <a:tr h="457200">
                 <a:tc>
                   <a:txBody>
-                    <a:bodyPr wrap="square"/>
+                    <a:bodyPr/>
                     <a:lstStyle/>
                     <a:p>
                       <a:pPr algn="l"/>
@@ -20725,7 +22279,7 @@
                 </a:tc>
                 <a:tc>
                   <a:txBody>
-                    <a:bodyPr wrap="square"/>
+                    <a:bodyPr/>
                     <a:lstStyle/>
                     <a:p>
                       <a:pPr algn="l"/>
@@ -20750,7 +22304,7 @@
                 </a:tc>
                 <a:tc>
                   <a:txBody>
-                    <a:bodyPr wrap="square"/>
+                    <a:bodyPr/>
                     <a:lstStyle/>
                     <a:p>
                       <a:pPr algn="l"/>
@@ -20773,6 +22327,11 @@
                     </a:solidFill>
                   </a:tcPr>
                 </a:tc>
+                <a:extLst>
+                  <a:ext uri="{0D108BD9-81ED-4DB2-BD59-A6C34878D82A}">
+                    <a16:rowId xmlns:a16="http://schemas.microsoft.com/office/drawing/2014/main" val="10005"/>
+                  </a:ext>
+                </a:extLst>
               </a:tr>
             </a:tbl>
           </a:graphicData>
@@ -20795,7 +22354,7 @@
           <a:noFill/>
         </p:spPr>
         <p:txBody>
-          <a:bodyPr wrap="square" lIns="64008" rIns="64008" tIns="38404" bIns="38404" anchor="t">
+          <a:bodyPr wrap="square" lIns="64008" tIns="38404" rIns="64008" bIns="38404" anchor="t">
             <a:spAutoFit/>
           </a:bodyPr>
           <a:lstStyle/>
@@ -20878,7 +22437,9 @@
         <p:txBody>
           <a:bodyPr rtlCol="0" anchor="ctr"/>
           <a:lstStyle/>
-          <a:p/>
+          <a:p>
+            <a:endParaRPr/>
+          </a:p>
         </p:txBody>
       </p:sp>
       <p:sp>
@@ -20898,7 +22459,7 @@
           <a:noFill/>
         </p:spPr>
         <p:txBody>
-          <a:bodyPr wrap="square" lIns="128016" rIns="128016" tIns="76809" bIns="76809" anchor="ctr">
+          <a:bodyPr wrap="square" lIns="128016" tIns="76809" rIns="128016" bIns="76809" anchor="ctr">
             <a:spAutoFit/>
           </a:bodyPr>
           <a:lstStyle/>
@@ -20930,8 +22491,8 @@
 </p:sld>
 </file>
 
-<file path=ppt/slides/slide7.xml><?xml version="1.0" encoding="utf-8"?>
-<p:sld xmlns:a="http://schemas.openxmlformats.org/drawingml/2006/main" xmlns:p="http://schemas.openxmlformats.org/presentationml/2006/main" xmlns:r="http://schemas.openxmlformats.org/officeDocument/2006/relationships">
+<file path=ppt/slides/slide8.xml><?xml version="1.0" encoding="utf-8"?>
+<p:sld xmlns:a="http://schemas.openxmlformats.org/drawingml/2006/main" xmlns:r="http://schemas.openxmlformats.org/officeDocument/2006/relationships" xmlns:p="http://schemas.openxmlformats.org/presentationml/2006/main">
   <p:cSld>
     <p:spTree>
       <p:nvGrpSpPr>
@@ -20939,7 +22500,14 @@
         <p:cNvGrpSpPr/>
         <p:nvPr/>
       </p:nvGrpSpPr>
-      <p:grpSpPr/>
+      <p:grpSpPr>
+        <a:xfrm>
+          <a:off x="0" y="0"/>
+          <a:ext cx="0" cy="0"/>
+          <a:chOff x="0" y="0"/>
+          <a:chExt cx="0" cy="0"/>
+        </a:xfrm>
+      </p:grpSpPr>
       <p:sp>
         <p:nvSpPr>
           <p:cNvPr id="2" name="TextBox 1"/>
@@ -20957,7 +22525,7 @@
           <a:noFill/>
         </p:spPr>
         <p:txBody>
-          <a:bodyPr wrap="square" lIns="0" rIns="0" tIns="0" bIns="0" anchor="ctr">
+          <a:bodyPr wrap="square" lIns="0" tIns="0" rIns="0" bIns="0" anchor="ctr">
             <a:spAutoFit/>
           </a:bodyPr>
           <a:lstStyle/>
@@ -20998,7 +22566,7 @@
           <a:noFill/>
         </p:spPr>
         <p:txBody>
-          <a:bodyPr wrap="square" lIns="0" rIns="0" tIns="0" bIns="0" anchor="ctr">
+          <a:bodyPr wrap="square" lIns="0" tIns="0" rIns="0" bIns="0" anchor="ctr">
             <a:spAutoFit/>
           </a:bodyPr>
           <a:lstStyle/>
@@ -21074,7 +22642,7 @@
           <a:noFill/>
         </p:spPr>
         <p:txBody>
-          <a:bodyPr wrap="square" lIns="0" rIns="0" tIns="0" bIns="0" anchor="t">
+          <a:bodyPr wrap="square" lIns="0" tIns="0" rIns="0" bIns="0" anchor="t">
             <a:spAutoFit/>
           </a:bodyPr>
           <a:lstStyle/>
@@ -21139,7 +22707,9 @@
         <p:txBody>
           <a:bodyPr rtlCol="0" anchor="ctr"/>
           <a:lstStyle/>
-          <a:p/>
+          <a:p>
+            <a:endParaRPr/>
+          </a:p>
         </p:txBody>
       </p:sp>
       <p:sp>
@@ -21159,7 +22729,7 @@
           <a:noFill/>
         </p:spPr>
         <p:txBody>
-          <a:bodyPr wrap="square" lIns="18288" rIns="18288" tIns="10972" bIns="10972" anchor="t">
+          <a:bodyPr wrap="square" lIns="18288" tIns="10972" rIns="18288" bIns="10972" anchor="t">
             <a:spAutoFit/>
           </a:bodyPr>
           <a:lstStyle/>
@@ -21200,7 +22770,7 @@
           <a:noFill/>
         </p:spPr>
         <p:txBody>
-          <a:bodyPr wrap="square" lIns="18288" rIns="18288" tIns="10972" bIns="10972" anchor="t">
+          <a:bodyPr wrap="square" lIns="18288" tIns="10972" rIns="18288" bIns="10972" anchor="t">
             <a:spAutoFit/>
           </a:bodyPr>
           <a:lstStyle/>
@@ -21265,7 +22835,9 @@
         <p:txBody>
           <a:bodyPr rtlCol="0" anchor="ctr"/>
           <a:lstStyle/>
-          <a:p/>
+          <a:p>
+            <a:endParaRPr/>
+          </a:p>
         </p:txBody>
       </p:sp>
       <p:sp>
@@ -21285,7 +22857,7 @@
           <a:noFill/>
         </p:spPr>
         <p:txBody>
-          <a:bodyPr wrap="square" lIns="18288" rIns="18288" tIns="10972" bIns="10972" anchor="t">
+          <a:bodyPr wrap="square" lIns="18288" tIns="10972" rIns="18288" bIns="10972" anchor="t">
             <a:spAutoFit/>
           </a:bodyPr>
           <a:lstStyle/>
@@ -21326,7 +22898,7 @@
           <a:noFill/>
         </p:spPr>
         <p:txBody>
-          <a:bodyPr wrap="square" lIns="18288" rIns="18288" tIns="10972" bIns="10972" anchor="t">
+          <a:bodyPr wrap="square" lIns="18288" tIns="10972" rIns="18288" bIns="10972" anchor="t">
             <a:spAutoFit/>
           </a:bodyPr>
           <a:lstStyle/>
@@ -21391,7 +22963,9 @@
         <p:txBody>
           <a:bodyPr rtlCol="0" anchor="ctr"/>
           <a:lstStyle/>
-          <a:p/>
+          <a:p>
+            <a:endParaRPr/>
+          </a:p>
         </p:txBody>
       </p:sp>
       <p:sp>
@@ -21411,7 +22985,7 @@
           <a:noFill/>
         </p:spPr>
         <p:txBody>
-          <a:bodyPr wrap="square" lIns="18288" rIns="18288" tIns="10972" bIns="10972" anchor="t">
+          <a:bodyPr wrap="square" lIns="18288" tIns="10972" rIns="18288" bIns="10972" anchor="t">
             <a:spAutoFit/>
           </a:bodyPr>
           <a:lstStyle/>
@@ -21452,7 +23026,7 @@
           <a:noFill/>
         </p:spPr>
         <p:txBody>
-          <a:bodyPr wrap="square" lIns="18288" rIns="18288" tIns="10972" bIns="10972" anchor="t">
+          <a:bodyPr wrap="square" lIns="18288" tIns="10972" rIns="18288" bIns="10972" anchor="t">
             <a:spAutoFit/>
           </a:bodyPr>
           <a:lstStyle/>
@@ -21517,7 +23091,9 @@
         <p:txBody>
           <a:bodyPr rtlCol="0" anchor="ctr"/>
           <a:lstStyle/>
-          <a:p/>
+          <a:p>
+            <a:endParaRPr/>
+          </a:p>
         </p:txBody>
       </p:sp>
       <p:sp>
@@ -21537,7 +23113,7 @@
           <a:noFill/>
         </p:spPr>
         <p:txBody>
-          <a:bodyPr wrap="square" lIns="18288" rIns="18288" tIns="10972" bIns="10972" anchor="t">
+          <a:bodyPr wrap="square" lIns="18288" tIns="10972" rIns="18288" bIns="10972" anchor="t">
             <a:spAutoFit/>
           </a:bodyPr>
           <a:lstStyle/>
@@ -21578,7 +23154,7 @@
           <a:noFill/>
         </p:spPr>
         <p:txBody>
-          <a:bodyPr wrap="square" lIns="18288" rIns="18288" tIns="10972" bIns="10972" anchor="t">
+          <a:bodyPr wrap="square" lIns="18288" tIns="10972" rIns="18288" bIns="10972" anchor="t">
             <a:spAutoFit/>
           </a:bodyPr>
           <a:lstStyle/>
@@ -21643,7 +23219,9 @@
         <p:txBody>
           <a:bodyPr rtlCol="0" anchor="ctr"/>
           <a:lstStyle/>
-          <a:p/>
+          <a:p>
+            <a:endParaRPr/>
+          </a:p>
         </p:txBody>
       </p:sp>
       <p:sp>
@@ -21663,7 +23241,7 @@
           <a:noFill/>
         </p:spPr>
         <p:txBody>
-          <a:bodyPr wrap="square" lIns="18288" rIns="18288" tIns="10972" bIns="10972" anchor="t">
+          <a:bodyPr wrap="square" lIns="18288" tIns="10972" rIns="18288" bIns="10972" anchor="t">
             <a:spAutoFit/>
           </a:bodyPr>
           <a:lstStyle/>
@@ -21704,7 +23282,7 @@
           <a:noFill/>
         </p:spPr>
         <p:txBody>
-          <a:bodyPr wrap="square" lIns="18288" rIns="18288" tIns="10972" bIns="10972" anchor="t">
+          <a:bodyPr wrap="square" lIns="18288" tIns="10972" rIns="18288" bIns="10972" anchor="t">
             <a:spAutoFit/>
           </a:bodyPr>
           <a:lstStyle/>
@@ -21769,7 +23347,9 @@
         <p:txBody>
           <a:bodyPr rtlCol="0" anchor="ctr"/>
           <a:lstStyle/>
-          <a:p/>
+          <a:p>
+            <a:endParaRPr/>
+          </a:p>
         </p:txBody>
       </p:sp>
       <p:sp>
@@ -21813,7 +23393,9 @@
         <p:txBody>
           <a:bodyPr rtlCol="0" anchor="ctr"/>
           <a:lstStyle/>
-          <a:p/>
+          <a:p>
+            <a:endParaRPr/>
+          </a:p>
         </p:txBody>
       </p:sp>
       <p:sp>
@@ -21833,7 +23415,7 @@
           <a:noFill/>
         </p:spPr>
         <p:txBody>
-          <a:bodyPr wrap="square" lIns="128016" rIns="128016" tIns="76809" bIns="76809" anchor="ctr">
+          <a:bodyPr wrap="square" lIns="128016" tIns="76809" rIns="128016" bIns="76809" anchor="ctr">
             <a:spAutoFit/>
           </a:bodyPr>
           <a:lstStyle/>
@@ -21874,7 +23456,7 @@
           <a:noFill/>
         </p:spPr>
         <p:txBody>
-          <a:bodyPr wrap="square" lIns="128016" rIns="128016" tIns="76809" bIns="76809" anchor="t">
+          <a:bodyPr wrap="square" lIns="128016" tIns="76809" rIns="128016" bIns="76809" anchor="t">
             <a:spAutoFit/>
           </a:bodyPr>
           <a:lstStyle/>
@@ -21906,8 +23488,8 @@
 </p:sld>
 </file>
 
-<file path=ppt/slides/slide8.xml><?xml version="1.0" encoding="utf-8"?>
-<p:sld xmlns:a="http://schemas.openxmlformats.org/drawingml/2006/main" xmlns:p="http://schemas.openxmlformats.org/presentationml/2006/main" xmlns:r="http://schemas.openxmlformats.org/officeDocument/2006/relationships">
+<file path=ppt/slides/slide9.xml><?xml version="1.0" encoding="utf-8"?>
+<p:sld xmlns:a="http://schemas.openxmlformats.org/drawingml/2006/main" xmlns:r="http://schemas.openxmlformats.org/officeDocument/2006/relationships" xmlns:p="http://schemas.openxmlformats.org/presentationml/2006/main">
   <p:cSld>
     <p:spTree>
       <p:nvGrpSpPr>
@@ -21915,7 +23497,14 @@
         <p:cNvGrpSpPr/>
         <p:nvPr/>
       </p:nvGrpSpPr>
-      <p:grpSpPr/>
+      <p:grpSpPr>
+        <a:xfrm>
+          <a:off x="0" y="0"/>
+          <a:ext cx="0" cy="0"/>
+          <a:chOff x="0" y="0"/>
+          <a:chExt cx="0" cy="0"/>
+        </a:xfrm>
+      </p:grpSpPr>
       <p:sp>
         <p:nvSpPr>
           <p:cNvPr id="2" name="TextBox 1"/>
@@ -21933,7 +23522,7 @@
           <a:noFill/>
         </p:spPr>
         <p:txBody>
-          <a:bodyPr wrap="square" lIns="0" rIns="0" tIns="0" bIns="0" anchor="ctr">
+          <a:bodyPr wrap="square" lIns="0" tIns="0" rIns="0" bIns="0" anchor="ctr">
             <a:spAutoFit/>
           </a:bodyPr>
           <a:lstStyle/>
@@ -21974,7 +23563,7 @@
           <a:noFill/>
         </p:spPr>
         <p:txBody>
-          <a:bodyPr wrap="square" lIns="0" rIns="0" tIns="0" bIns="0" anchor="ctr">
+          <a:bodyPr wrap="square" lIns="0" tIns="0" rIns="0" bIns="0" anchor="ctr">
             <a:spAutoFit/>
           </a:bodyPr>
           <a:lstStyle/>
@@ -22050,7 +23639,7 @@
           <a:noFill/>
         </p:spPr>
         <p:txBody>
-          <a:bodyPr wrap="square" lIns="0" rIns="0" tIns="0" bIns="0" anchor="t">
+          <a:bodyPr wrap="square" lIns="0" tIns="0" rIns="0" bIns="0" anchor="t">
             <a:spAutoFit/>
           </a:bodyPr>
           <a:lstStyle/>
@@ -22115,7 +23704,9 @@
         <p:txBody>
           <a:bodyPr rtlCol="0" anchor="ctr"/>
           <a:lstStyle/>
-          <a:p/>
+          <a:p>
+            <a:endParaRPr/>
+          </a:p>
         </p:txBody>
       </p:sp>
       <p:sp>
@@ -22159,7 +23750,9 @@
         <p:txBody>
           <a:bodyPr rtlCol="0" anchor="ctr"/>
           <a:lstStyle/>
-          <a:p/>
+          <a:p>
+            <a:endParaRPr/>
+          </a:p>
         </p:txBody>
       </p:sp>
       <p:sp>
@@ -22179,7 +23772,7 @@
           <a:noFill/>
         </p:spPr>
         <p:txBody>
-          <a:bodyPr wrap="square" lIns="0" rIns="0" tIns="0" bIns="0" anchor="t">
+          <a:bodyPr wrap="square" lIns="0" tIns="0" rIns="0" bIns="0" anchor="t">
             <a:spAutoFit/>
           </a:bodyPr>
           <a:lstStyle/>
@@ -22220,7 +23813,7 @@
           <a:noFill/>
         </p:spPr>
         <p:txBody>
-          <a:bodyPr wrap="square" lIns="0" rIns="0" tIns="0" bIns="0" anchor="ctr">
+          <a:bodyPr wrap="square" lIns="0" tIns="0" rIns="0" bIns="0" anchor="ctr">
             <a:spAutoFit/>
           </a:bodyPr>
           <a:lstStyle/>
@@ -22261,7 +23854,7 @@
           <a:noFill/>
         </p:spPr>
         <p:txBody>
-          <a:bodyPr wrap="square" lIns="45720" rIns="45720" tIns="27432" bIns="27432" anchor="t">
+          <a:bodyPr wrap="square" lIns="45720" tIns="27432" rIns="45720" bIns="27432" anchor="t">
             <a:spAutoFit/>
           </a:bodyPr>
           <a:lstStyle/>
@@ -22362,7 +23955,9 @@
         <p:txBody>
           <a:bodyPr rtlCol="0" anchor="ctr"/>
           <a:lstStyle/>
-          <a:p/>
+          <a:p>
+            <a:endParaRPr/>
+          </a:p>
         </p:txBody>
       </p:sp>
       <p:sp>
@@ -22406,7 +24001,9 @@
         <p:txBody>
           <a:bodyPr rtlCol="0" anchor="ctr"/>
           <a:lstStyle/>
-          <a:p/>
+          <a:p>
+            <a:endParaRPr/>
+          </a:p>
         </p:txBody>
       </p:sp>
       <p:sp>
@@ -22426,7 +24023,7 @@
           <a:noFill/>
         </p:spPr>
         <p:txBody>
-          <a:bodyPr wrap="square" lIns="0" rIns="0" tIns="0" bIns="0" anchor="t">
+          <a:bodyPr wrap="square" lIns="0" tIns="0" rIns="0" bIns="0" anchor="t">
             <a:spAutoFit/>
           </a:bodyPr>
           <a:lstStyle/>
@@ -22467,7 +24064,7 @@
           <a:noFill/>
         </p:spPr>
         <p:txBody>
-          <a:bodyPr wrap="square" lIns="0" rIns="0" tIns="0" bIns="0" anchor="ctr">
+          <a:bodyPr wrap="square" lIns="0" tIns="0" rIns="0" bIns="0" anchor="ctr">
             <a:spAutoFit/>
           </a:bodyPr>
           <a:lstStyle/>
@@ -22508,7 +24105,7 @@
           <a:noFill/>
         </p:spPr>
         <p:txBody>
-          <a:bodyPr wrap="square" lIns="45720" rIns="45720" tIns="27432" bIns="27432" anchor="t">
+          <a:bodyPr wrap="square" lIns="45720" tIns="27432" rIns="45720" bIns="27432" anchor="t">
             <a:spAutoFit/>
           </a:bodyPr>
           <a:lstStyle/>
@@ -22609,7 +24206,9 @@
         <p:txBody>
           <a:bodyPr rtlCol="0" anchor="ctr"/>
           <a:lstStyle/>
-          <a:p/>
+          <a:p>
+            <a:endParaRPr/>
+          </a:p>
         </p:txBody>
       </p:sp>
       <p:sp>
@@ -22653,7 +24252,9 @@
         <p:txBody>
           <a:bodyPr rtlCol="0" anchor="ctr"/>
           <a:lstStyle/>
-          <a:p/>
+          <a:p>
+            <a:endParaRPr/>
+          </a:p>
         </p:txBody>
       </p:sp>
       <p:sp>
@@ -22673,7 +24274,7 @@
           <a:noFill/>
         </p:spPr>
         <p:txBody>
-          <a:bodyPr wrap="square" lIns="0" rIns="0" tIns="0" bIns="0" anchor="t">
+          <a:bodyPr wrap="square" lIns="0" tIns="0" rIns="0" bIns="0" anchor="t">
             <a:spAutoFit/>
           </a:bodyPr>
           <a:lstStyle/>
@@ -22714,7 +24315,7 @@
           <a:noFill/>
         </p:spPr>
         <p:txBody>
-          <a:bodyPr wrap="square" lIns="0" rIns="0" tIns="0" bIns="0" anchor="ctr">
+          <a:bodyPr wrap="square" lIns="0" tIns="0" rIns="0" bIns="0" anchor="ctr">
             <a:spAutoFit/>
           </a:bodyPr>
           <a:lstStyle/>
@@ -22755,7 +24356,7 @@
           <a:noFill/>
         </p:spPr>
         <p:txBody>
-          <a:bodyPr wrap="square" lIns="45720" rIns="45720" tIns="27432" bIns="27432" anchor="t">
+          <a:bodyPr wrap="square" lIns="45720" tIns="27432" rIns="45720" bIns="27432" anchor="t">
             <a:spAutoFit/>
           </a:bodyPr>
           <a:lstStyle/>
@@ -22856,7 +24457,9 @@
         <p:txBody>
           <a:bodyPr rtlCol="0" anchor="ctr"/>
           <a:lstStyle/>
-          <a:p/>
+          <a:p>
+            <a:endParaRPr/>
+          </a:p>
         </p:txBody>
       </p:sp>
       <p:sp>
@@ -22900,7 +24503,9 @@
         <p:txBody>
           <a:bodyPr rtlCol="0" anchor="ctr"/>
           <a:lstStyle/>
-          <a:p/>
+          <a:p>
+            <a:endParaRPr/>
+          </a:p>
         </p:txBody>
       </p:sp>
       <p:sp>
@@ -22920,7 +24525,7 @@
           <a:noFill/>
         </p:spPr>
         <p:txBody>
-          <a:bodyPr wrap="square" lIns="0" rIns="0" tIns="0" bIns="0" anchor="t">
+          <a:bodyPr wrap="square" lIns="0" tIns="0" rIns="0" bIns="0" anchor="t">
             <a:spAutoFit/>
           </a:bodyPr>
           <a:lstStyle/>
@@ -22961,7 +24566,7 @@
           <a:noFill/>
         </p:spPr>
         <p:txBody>
-          <a:bodyPr wrap="square" lIns="0" rIns="0" tIns="0" bIns="0" anchor="ctr">
+          <a:bodyPr wrap="square" lIns="0" tIns="0" rIns="0" bIns="0" anchor="ctr">
             <a:spAutoFit/>
           </a:bodyPr>
           <a:lstStyle/>
@@ -23002,7 +24607,7 @@
           <a:noFill/>
         </p:spPr>
         <p:txBody>
-          <a:bodyPr wrap="square" lIns="45720" rIns="45720" tIns="27432" bIns="27432" anchor="t">
+          <a:bodyPr wrap="square" lIns="45720" tIns="27432" rIns="45720" bIns="27432" anchor="t">
             <a:spAutoFit/>
           </a:bodyPr>
           <a:lstStyle/>
@@ -23103,7 +24708,9 @@
         <p:txBody>
           <a:bodyPr rtlCol="0" anchor="ctr"/>
           <a:lstStyle/>
-          <a:p/>
+          <a:p>
+            <a:endParaRPr/>
+          </a:p>
         </p:txBody>
       </p:sp>
       <p:sp>
@@ -23147,7 +24754,9 @@
         <p:txBody>
           <a:bodyPr rtlCol="0" anchor="ctr"/>
           <a:lstStyle/>
-          <a:p/>
+          <a:p>
+            <a:endParaRPr/>
+          </a:p>
         </p:txBody>
       </p:sp>
       <p:sp>
@@ -23167,7 +24776,7 @@
           <a:noFill/>
         </p:spPr>
         <p:txBody>
-          <a:bodyPr wrap="square" lIns="0" rIns="0" tIns="0" bIns="0" anchor="t">
+          <a:bodyPr wrap="square" lIns="0" tIns="0" rIns="0" bIns="0" anchor="t">
             <a:spAutoFit/>
           </a:bodyPr>
           <a:lstStyle/>
@@ -23208,7 +24817,7 @@
           <a:noFill/>
         </p:spPr>
         <p:txBody>
-          <a:bodyPr wrap="square" lIns="0" rIns="0" tIns="0" bIns="0" anchor="ctr">
+          <a:bodyPr wrap="square" lIns="0" tIns="0" rIns="0" bIns="0" anchor="ctr">
             <a:spAutoFit/>
           </a:bodyPr>
           <a:lstStyle/>
@@ -23249,7 +24858,7 @@
           <a:noFill/>
         </p:spPr>
         <p:txBody>
-          <a:bodyPr wrap="square" lIns="0" rIns="0" tIns="0" bIns="0" anchor="t">
+          <a:bodyPr wrap="square" lIns="0" tIns="0" rIns="0" bIns="0" anchor="t">
             <a:spAutoFit/>
           </a:bodyPr>
           <a:lstStyle/>
@@ -23290,7 +24899,7 @@
           <a:noFill/>
         </p:spPr>
         <p:txBody>
-          <a:bodyPr wrap="square" lIns="0" rIns="0" tIns="0" bIns="0" anchor="t">
+          <a:bodyPr wrap="square" lIns="0" tIns="0" rIns="0" bIns="0" anchor="t">
             <a:spAutoFit/>
           </a:bodyPr>
           <a:lstStyle/>
@@ -23331,7 +24940,7 @@
           <a:noFill/>
         </p:spPr>
         <p:txBody>
-          <a:bodyPr wrap="square" lIns="0" rIns="0" tIns="0" bIns="0" anchor="t">
+          <a:bodyPr wrap="square" lIns="0" tIns="0" rIns="0" bIns="0" anchor="t">
             <a:spAutoFit/>
           </a:bodyPr>
           <a:lstStyle/>
@@ -23372,7 +24981,7 @@
           <a:noFill/>
         </p:spPr>
         <p:txBody>
-          <a:bodyPr wrap="square" lIns="0" rIns="0" tIns="0" bIns="0" anchor="t">
+          <a:bodyPr wrap="square" lIns="0" tIns="0" rIns="0" bIns="0" anchor="t">
             <a:spAutoFit/>
           </a:bodyPr>
           <a:lstStyle/>
@@ -23413,7 +25022,7 @@
           <a:noFill/>
         </p:spPr>
         <p:txBody>
-          <a:bodyPr wrap="square" lIns="0" rIns="0" tIns="0" bIns="0" anchor="t">
+          <a:bodyPr wrap="square" lIns="0" tIns="0" rIns="0" bIns="0" anchor="t">
             <a:spAutoFit/>
           </a:bodyPr>
           <a:lstStyle/>
@@ -23454,7 +25063,7 @@
           <a:noFill/>
         </p:spPr>
         <p:txBody>
-          <a:bodyPr wrap="square" lIns="0" rIns="0" tIns="0" bIns="0" anchor="t">
+          <a:bodyPr wrap="square" lIns="0" tIns="0" rIns="0" bIns="0" anchor="t">
             <a:spAutoFit/>
           </a:bodyPr>
           <a:lstStyle/>
@@ -23519,7 +25128,9 @@
         <p:txBody>
           <a:bodyPr rtlCol="0" anchor="ctr"/>
           <a:lstStyle/>
-          <a:p/>
+          <a:p>
+            <a:endParaRPr/>
+          </a:p>
         </p:txBody>
       </p:sp>
       <p:sp>
@@ -23539,7 +25150,7 @@
           <a:noFill/>
         </p:spPr>
         <p:txBody>
-          <a:bodyPr wrap="square" lIns="18288" rIns="18288" tIns="10972" bIns="10972" anchor="t">
+          <a:bodyPr wrap="square" lIns="18288" tIns="10972" rIns="18288" bIns="10972" anchor="t">
             <a:spAutoFit/>
           </a:bodyPr>
           <a:lstStyle/>
@@ -23580,7 +25191,7 @@
           <a:noFill/>
         </p:spPr>
         <p:txBody>
-          <a:bodyPr wrap="square" lIns="18288" rIns="18288" tIns="10972" bIns="10972" anchor="t">
+          <a:bodyPr wrap="square" lIns="18288" tIns="10972" rIns="18288" bIns="10972" anchor="t">
             <a:spAutoFit/>
           </a:bodyPr>
           <a:lstStyle/>
@@ -23645,7 +25256,9 @@
         <p:txBody>
           <a:bodyPr rtlCol="0" anchor="ctr"/>
           <a:lstStyle/>
-          <a:p/>
+          <a:p>
+            <a:endParaRPr/>
+          </a:p>
         </p:txBody>
       </p:sp>
       <p:sp>
@@ -23665,7 +25278,7 @@
           <a:noFill/>
         </p:spPr>
         <p:txBody>
-          <a:bodyPr wrap="square" lIns="18288" rIns="18288" tIns="10972" bIns="10972" anchor="t">
+          <a:bodyPr wrap="square" lIns="18288" tIns="10972" rIns="18288" bIns="10972" anchor="t">
             <a:spAutoFit/>
           </a:bodyPr>
           <a:lstStyle/>
@@ -23706,7 +25319,7 @@
           <a:noFill/>
         </p:spPr>
         <p:txBody>
-          <a:bodyPr wrap="square" lIns="18288" rIns="18288" tIns="10972" bIns="10972" anchor="t">
+          <a:bodyPr wrap="square" lIns="18288" tIns="10972" rIns="18288" bIns="10972" anchor="t">
             <a:spAutoFit/>
           </a:bodyPr>
           <a:lstStyle/>
@@ -23771,7 +25384,9 @@
         <p:txBody>
           <a:bodyPr rtlCol="0" anchor="ctr"/>
           <a:lstStyle/>
-          <a:p/>
+          <a:p>
+            <a:endParaRPr/>
+          </a:p>
         </p:txBody>
       </p:sp>
       <p:sp>
@@ -23791,7 +25406,7 @@
           <a:noFill/>
         </p:spPr>
         <p:txBody>
-          <a:bodyPr wrap="square" lIns="18288" rIns="18288" tIns="10972" bIns="10972" anchor="t">
+          <a:bodyPr wrap="square" lIns="18288" tIns="10972" rIns="18288" bIns="10972" anchor="t">
             <a:spAutoFit/>
           </a:bodyPr>
           <a:lstStyle/>
@@ -23832,7 +25447,7 @@
           <a:noFill/>
         </p:spPr>
         <p:txBody>
-          <a:bodyPr wrap="square" lIns="18288" rIns="18288" tIns="10972" bIns="10972" anchor="t">
+          <a:bodyPr wrap="square" lIns="18288" tIns="10972" rIns="18288" bIns="10972" anchor="t">
             <a:spAutoFit/>
           </a:bodyPr>
           <a:lstStyle/>
@@ -23897,7 +25512,9 @@
         <p:txBody>
           <a:bodyPr rtlCol="0" anchor="ctr"/>
           <a:lstStyle/>
-          <a:p/>
+          <a:p>
+            <a:endParaRPr/>
+          </a:p>
         </p:txBody>
       </p:sp>
       <p:sp>
@@ -23941,7 +25558,9 @@
         <p:txBody>
           <a:bodyPr rtlCol="0" anchor="ctr"/>
           <a:lstStyle/>
-          <a:p/>
+          <a:p>
+            <a:endParaRPr/>
+          </a:p>
         </p:txBody>
       </p:sp>
       <p:sp>
@@ -23961,7 +25580,7 @@
           <a:noFill/>
         </p:spPr>
         <p:txBody>
-          <a:bodyPr wrap="square" lIns="128016" rIns="128016" tIns="76809" bIns="76809" anchor="ctr">
+          <a:bodyPr wrap="square" lIns="128016" tIns="76809" rIns="128016" bIns="76809" anchor="ctr">
             <a:spAutoFit/>
           </a:bodyPr>
           <a:lstStyle/>
@@ -24026,7 +25645,9 @@
         <p:txBody>
           <a:bodyPr rtlCol="0" anchor="ctr"/>
           <a:lstStyle/>
-          <a:p/>
+          <a:p>
+            <a:endParaRPr/>
+          </a:p>
         </p:txBody>
       </p:sp>
       <p:sp>
@@ -24046,7 +25667,7 @@
           <a:noFill/>
         </p:spPr>
         <p:txBody>
-          <a:bodyPr wrap="square" lIns="18288" rIns="18288" tIns="10972" bIns="10972" anchor="ctr">
+          <a:bodyPr wrap="square" lIns="18288" tIns="10972" rIns="18288" bIns="10972" anchor="ctr">
             <a:spAutoFit/>
           </a:bodyPr>
           <a:lstStyle/>
@@ -24111,7 +25732,9 @@
         <p:txBody>
           <a:bodyPr rtlCol="0" anchor="ctr"/>
           <a:lstStyle/>
-          <a:p/>
+          <a:p>
+            <a:endParaRPr/>
+          </a:p>
         </p:txBody>
       </p:sp>
       <p:sp>
@@ -24155,7 +25778,9 @@
         <p:txBody>
           <a:bodyPr rtlCol="0" anchor="ctr"/>
           <a:lstStyle/>
-          <a:p/>
+          <a:p>
+            <a:endParaRPr/>
+          </a:p>
         </p:txBody>
       </p:sp>
       <p:sp>
@@ -24175,7 +25800,7 @@
           <a:noFill/>
         </p:spPr>
         <p:txBody>
-          <a:bodyPr wrap="square" lIns="18288" rIns="18288" tIns="10972" bIns="10972" anchor="ctr">
+          <a:bodyPr wrap="square" lIns="18288" tIns="10972" rIns="18288" bIns="10972" anchor="ctr">
             <a:spAutoFit/>
           </a:bodyPr>
           <a:lstStyle/>
@@ -24240,7 +25865,9 @@
         <p:txBody>
           <a:bodyPr rtlCol="0" anchor="ctr"/>
           <a:lstStyle/>
-          <a:p/>
+          <a:p>
+            <a:endParaRPr/>
+          </a:p>
         </p:txBody>
       </p:sp>
       <p:sp>
@@ -24284,7 +25911,9 @@
         <p:txBody>
           <a:bodyPr rtlCol="0" anchor="ctr"/>
           <a:lstStyle/>
-          <a:p/>
+          <a:p>
+            <a:endParaRPr/>
+          </a:p>
         </p:txBody>
       </p:sp>
       <p:sp>
@@ -24304,7 +25933,7 @@
           <a:noFill/>
         </p:spPr>
         <p:txBody>
-          <a:bodyPr wrap="square" lIns="18288" rIns="18288" tIns="10972" bIns="10972" anchor="ctr">
+          <a:bodyPr wrap="square" lIns="18288" tIns="10972" rIns="18288" bIns="10972" anchor="ctr">
             <a:spAutoFit/>
           </a:bodyPr>
           <a:lstStyle/>
@@ -24369,7 +25998,9 @@
         <p:txBody>
           <a:bodyPr rtlCol="0" anchor="ctr"/>
           <a:lstStyle/>
-          <a:p/>
+          <a:p>
+            <a:endParaRPr/>
+          </a:p>
         </p:txBody>
       </p:sp>
       <p:sp>
@@ -24413,7 +26044,9 @@
         <p:txBody>
           <a:bodyPr rtlCol="0" anchor="ctr"/>
           <a:lstStyle/>
-          <a:p/>
+          <a:p>
+            <a:endParaRPr/>
+          </a:p>
         </p:txBody>
       </p:sp>
       <p:sp>
@@ -24433,7 +26066,7 @@
           <a:noFill/>
         </p:spPr>
         <p:txBody>
-          <a:bodyPr wrap="square" lIns="18288" rIns="18288" tIns="10972" bIns="10972" anchor="ctr">
+          <a:bodyPr wrap="square" lIns="18288" tIns="10972" rIns="18288" bIns="10972" anchor="ctr">
             <a:spAutoFit/>
           </a:bodyPr>
           <a:lstStyle/>
@@ -24498,7 +26131,9 @@
         <p:txBody>
           <a:bodyPr rtlCol="0" anchor="ctr"/>
           <a:lstStyle/>
-          <a:p/>
+          <a:p>
+            <a:endParaRPr/>
+          </a:p>
         </p:txBody>
       </p:sp>
       <p:sp>
@@ -24542,7 +26177,9 @@
         <p:txBody>
           <a:bodyPr rtlCol="0" anchor="ctr"/>
           <a:lstStyle/>
-          <a:p/>
+          <a:p>
+            <a:endParaRPr/>
+          </a:p>
         </p:txBody>
       </p:sp>
       <p:sp>
@@ -24562,7 +26199,7 @@
           <a:noFill/>
         </p:spPr>
         <p:txBody>
-          <a:bodyPr wrap="square" lIns="18288" rIns="18288" tIns="10972" bIns="10972" anchor="ctr">
+          <a:bodyPr wrap="square" lIns="18288" tIns="10972" rIns="18288" bIns="10972" anchor="ctr">
             <a:spAutoFit/>
           </a:bodyPr>
           <a:lstStyle/>
@@ -24627,7 +26264,9 @@
         <p:txBody>
           <a:bodyPr rtlCol="0" anchor="ctr"/>
           <a:lstStyle/>
-          <a:p/>
+          <a:p>
+            <a:endParaRPr/>
+          </a:p>
         </p:txBody>
       </p:sp>
       <p:sp>
@@ -24671,7 +26310,9 @@
         <p:txBody>
           <a:bodyPr rtlCol="0" anchor="ctr"/>
           <a:lstStyle/>
-          <a:p/>
+          <a:p>
+            <a:endParaRPr/>
+          </a:p>
         </p:txBody>
       </p:sp>
       <p:sp>
@@ -24691,7 +26332,7 @@
           <a:noFill/>
         </p:spPr>
         <p:txBody>
-          <a:bodyPr wrap="square" lIns="18288" rIns="18288" tIns="10972" bIns="10972" anchor="ctr">
+          <a:bodyPr wrap="square" lIns="18288" tIns="10972" rIns="18288" bIns="10972" anchor="ctr">
             <a:spAutoFit/>
           </a:bodyPr>
           <a:lstStyle/>
@@ -24732,7 +26373,7 @@
           <a:noFill/>
         </p:spPr>
         <p:txBody>
-          <a:bodyPr wrap="square" lIns="0" rIns="0" tIns="0" bIns="0" anchor="t">
+          <a:bodyPr wrap="square" lIns="0" tIns="0" rIns="0" bIns="0" anchor="t">
             <a:spAutoFit/>
           </a:bodyPr>
           <a:lstStyle/>
@@ -24752,1114 +26393,6 @@
                 <a:cs typeface="Meiryo"/>
               </a:rPr>
               <a:t>WSL の中の Docker の中の GCC でビルドして、Windows の Python で結果を受ける</a:t>
-            </a:r>
-          </a:p>
-        </p:txBody>
-      </p:sp>
-    </p:spTree>
-  </p:cSld>
-  <p:clrMapOvr>
-    <a:masterClrMapping/>
-  </p:clrMapOvr>
-</p:sld>
-</file>
-
-<file path=ppt/slides/slide9.xml><?xml version="1.0" encoding="utf-8"?>
-<p:sld xmlns:a="http://schemas.openxmlformats.org/drawingml/2006/main" xmlns:p="http://schemas.openxmlformats.org/presentationml/2006/main" xmlns:r="http://schemas.openxmlformats.org/officeDocument/2006/relationships">
-  <p:cSld>
-    <p:spTree>
-      <p:nvGrpSpPr>
-        <p:cNvPr id="1" name=""/>
-        <p:cNvGrpSpPr/>
-        <p:nvPr/>
-      </p:nvGrpSpPr>
-      <p:grpSpPr/>
-      <p:sp>
-        <p:nvSpPr>
-          <p:cNvPr id="2" name="TextBox 1"/>
-          <p:cNvSpPr txBox="1"/>
-          <p:nvPr/>
-        </p:nvSpPr>
-        <p:spPr>
-          <a:xfrm>
-            <a:off x="502920" y="256032"/>
-            <a:ext cx="9357055" cy="603504"/>
-          </a:xfrm>
-          <a:prstGeom prst="rect">
-            <a:avLst/>
-          </a:prstGeom>
-          <a:noFill/>
-        </p:spPr>
-        <p:txBody>
-          <a:bodyPr wrap="square" lIns="0" rIns="0" tIns="0" bIns="0" anchor="ctr">
-            <a:spAutoFit/>
-          </a:bodyPr>
-          <a:lstStyle/>
-          <a:p>
-            <a:pPr algn="l">
-              <a:spcAft>
-                <a:spcPts val="500"/>
-              </a:spcAft>
-            </a:pPr>
-            <a:r>
-              <a:rPr sz="2800" b="1" i="0">
-                <a:solidFill>
-                  <a:srgbClr val="111111"/>
-                </a:solidFill>
-                <a:latin typeface="Meiryo"/>
-                <a:ea typeface="Meiryo"/>
-                <a:cs typeface="Meiryo"/>
-              </a:rPr>
-              <a:t>実装の山場 ① — SDK にソースが無い</a:t>
-            </a:r>
-          </a:p>
-        </p:txBody>
-      </p:sp>
-      <p:sp>
-        <p:nvSpPr>
-          <p:cNvPr id="3" name="TextBox 2"/>
-          <p:cNvSpPr txBox="1"/>
-          <p:nvPr/>
-        </p:nvSpPr>
-        <p:spPr>
-          <a:xfrm>
-            <a:off x="8579815" y="310896"/>
-            <a:ext cx="3108960" cy="493776"/>
-          </a:xfrm>
-          <a:prstGeom prst="rect">
-            <a:avLst/>
-          </a:prstGeom>
-          <a:noFill/>
-        </p:spPr>
-        <p:txBody>
-          <a:bodyPr wrap="square" lIns="0" rIns="0" tIns="0" bIns="0" anchor="ctr">
-            <a:spAutoFit/>
-          </a:bodyPr>
-          <a:lstStyle/>
-          <a:p>
-            <a:pPr algn="r">
-              <a:spcAft>
-                <a:spcPts val="500"/>
-              </a:spcAft>
-            </a:pPr>
-            <a:r>
-              <a:rPr sz="1300" b="0" i="0">
-                <a:solidFill>
-                  <a:srgbClr val="808080"/>
-                </a:solidFill>
-                <a:latin typeface="Meiryo"/>
-                <a:ea typeface="Meiryo"/>
-                <a:cs typeface="Meiryo"/>
-              </a:rPr>
-              <a:t>8 / 15</a:t>
-            </a:r>
-          </a:p>
-        </p:txBody>
-      </p:sp>
-      <p:cxnSp>
-        <p:nvCxnSpPr>
-          <p:cNvPr id="4" name="Connector 3"/>
-          <p:cNvCxnSpPr/>
-          <p:nvPr/>
-        </p:nvCxnSpPr>
-        <p:spPr>
-          <a:xfrm>
-            <a:off x="502920" y="969264"/>
-            <a:ext cx="11185855" cy="0"/>
-          </a:xfrm>
-          <a:prstGeom prst="line">
-            <a:avLst/>
-          </a:prstGeom>
-          <a:ln w="12700">
-            <a:solidFill>
-              <a:srgbClr val="BFBFBF"/>
-            </a:solidFill>
-          </a:ln>
-        </p:spPr>
-        <p:style>
-          <a:lnRef idx="2">
-            <a:schemeClr val="accent1"/>
-          </a:lnRef>
-          <a:fillRef idx="0">
-            <a:schemeClr val="accent1"/>
-          </a:fillRef>
-          <a:effectRef idx="1">
-            <a:schemeClr val="accent1"/>
-          </a:effectRef>
-          <a:fontRef idx="minor">
-            <a:schemeClr val="tx1"/>
-          </a:fontRef>
-        </p:style>
-      </p:cxnSp>
-      <p:sp>
-        <p:nvSpPr>
-          <p:cNvPr id="5" name="TextBox 4"/>
-          <p:cNvSpPr txBox="1"/>
-          <p:nvPr/>
-        </p:nvSpPr>
-        <p:spPr>
-          <a:xfrm>
-            <a:off x="10591495" y="6455664"/>
-            <a:ext cx="1097280" cy="274320"/>
-          </a:xfrm>
-          <a:prstGeom prst="rect">
-            <a:avLst/>
-          </a:prstGeom>
-          <a:noFill/>
-        </p:spPr>
-        <p:txBody>
-          <a:bodyPr wrap="square" lIns="0" rIns="0" tIns="0" bIns="0" anchor="t">
-            <a:spAutoFit/>
-          </a:bodyPr>
-          <a:lstStyle/>
-          <a:p>
-            <a:pPr algn="r">
-              <a:spcAft>
-                <a:spcPts val="500"/>
-              </a:spcAft>
-            </a:pPr>
-            <a:r>
-              <a:rPr sz="1100" b="0" i="0">
-                <a:solidFill>
-                  <a:srgbClr val="808080"/>
-                </a:solidFill>
-                <a:latin typeface="Meiryo"/>
-                <a:ea typeface="Meiryo"/>
-                <a:cs typeface="Meiryo"/>
-              </a:rPr>
-              <a:t>8</a:t>
-            </a:r>
-          </a:p>
-        </p:txBody>
-      </p:sp>
-      <p:sp>
-        <p:nvSpPr>
-          <p:cNvPr id="6" name="Rectangle 5"/>
-          <p:cNvSpPr/>
-          <p:nvPr/>
-        </p:nvSpPr>
-        <p:spPr>
-          <a:xfrm>
-            <a:off x="502920" y="1115568"/>
-            <a:ext cx="11185855" cy="603504"/>
-          </a:xfrm>
-          <a:prstGeom prst="rect">
-            <a:avLst/>
-          </a:prstGeom>
-          <a:solidFill>
-            <a:srgbClr val="F4F4F4"/>
-          </a:solidFill>
-          <a:ln w="9525">
-            <a:solidFill>
-              <a:srgbClr val="9E9E9E"/>
-            </a:solidFill>
-          </a:ln>
-          <a:effectLst/>
-        </p:spPr>
-        <p:style>
-          <a:lnRef idx="1">
-            <a:schemeClr val="accent1"/>
-          </a:lnRef>
-          <a:fillRef idx="3">
-            <a:schemeClr val="accent1"/>
-          </a:fillRef>
-          <a:effectRef idx="2">
-            <a:schemeClr val="accent1"/>
-          </a:effectRef>
-          <a:fontRef idx="minor">
-            <a:schemeClr val="lt1"/>
-          </a:fontRef>
-        </p:style>
-        <p:txBody>
-          <a:bodyPr rtlCol="0" anchor="ctr"/>
-          <a:lstStyle/>
-          <a:p/>
-        </p:txBody>
-      </p:sp>
-      <p:sp>
-        <p:nvSpPr>
-          <p:cNvPr id="7" name="TextBox 6"/>
-          <p:cNvSpPr txBox="1"/>
-          <p:nvPr/>
-        </p:nvSpPr>
-        <p:spPr>
-          <a:xfrm>
-            <a:off x="502920" y="1115568"/>
-            <a:ext cx="11185855" cy="603504"/>
-          </a:xfrm>
-          <a:prstGeom prst="rect">
-            <a:avLst/>
-          </a:prstGeom>
-          <a:noFill/>
-        </p:spPr>
-        <p:txBody>
-          <a:bodyPr wrap="square" lIns="128016" rIns="128016" tIns="76809" bIns="76809" anchor="ctr">
-            <a:spAutoFit/>
-          </a:bodyPr>
-          <a:lstStyle/>
-          <a:p>
-            <a:pPr algn="l">
-              <a:spcAft>
-                <a:spcPts val="500"/>
-              </a:spcAft>
-            </a:pPr>
-            <a:r>
-              <a:rPr sz="1650" b="1" i="0">
-                <a:solidFill>
-                  <a:srgbClr val="111111"/>
-                </a:solidFill>
-                <a:latin typeface="Meiryo"/>
-                <a:ea typeface="Meiryo"/>
-                <a:cs typeface="Meiryo"/>
-              </a:rPr>
-              <a:t>問題: 左右リンクの本体は inc/ と lib/ しか無い = プリビルトの .a しか無い → 仕様が読めない</a:t>
-            </a:r>
-          </a:p>
-        </p:txBody>
-      </p:sp>
-      <p:sp>
-        <p:nvSpPr>
-          <p:cNvPr id="8" name="Rectangle 7"/>
-          <p:cNvSpPr/>
-          <p:nvPr/>
-        </p:nvSpPr>
-        <p:spPr>
-          <a:xfrm>
-            <a:off x="502920" y="1828800"/>
-            <a:ext cx="11185855" cy="548640"/>
-          </a:xfrm>
-          <a:prstGeom prst="rect">
-            <a:avLst/>
-          </a:prstGeom>
-          <a:solidFill>
-            <a:srgbClr val="E6E6E6"/>
-          </a:solidFill>
-          <a:ln w="9525">
-            <a:solidFill>
-              <a:srgbClr val="9E9E9E"/>
-            </a:solidFill>
-          </a:ln>
-          <a:effectLst/>
-        </p:spPr>
-        <p:style>
-          <a:lnRef idx="1">
-            <a:schemeClr val="accent1"/>
-          </a:lnRef>
-          <a:fillRef idx="3">
-            <a:schemeClr val="accent1"/>
-          </a:fillRef>
-          <a:effectRef idx="2">
-            <a:schemeClr val="accent1"/>
-          </a:effectRef>
-          <a:fontRef idx="minor">
-            <a:schemeClr val="lt1"/>
-          </a:fontRef>
-        </p:style>
-        <p:txBody>
-          <a:bodyPr rtlCol="0" anchor="ctr"/>
-          <a:lstStyle/>
-          <a:p/>
-        </p:txBody>
-      </p:sp>
-      <p:sp>
-        <p:nvSpPr>
-          <p:cNvPr id="9" name="TextBox 8"/>
-          <p:cNvSpPr txBox="1"/>
-          <p:nvPr/>
-        </p:nvSpPr>
-        <p:spPr>
-          <a:xfrm>
-            <a:off x="502920" y="1828800"/>
-            <a:ext cx="11185855" cy="548640"/>
-          </a:xfrm>
-          <a:prstGeom prst="rect">
-            <a:avLst/>
-          </a:prstGeom>
-          <a:noFill/>
-        </p:spPr>
-        <p:txBody>
-          <a:bodyPr wrap="square" lIns="128016" rIns="128016" tIns="76809" bIns="76809" anchor="ctr">
-            <a:spAutoFit/>
-          </a:bodyPr>
-          <a:lstStyle/>
-          <a:p>
-            <a:pPr algn="l">
-              <a:spcAft>
-                <a:spcPts val="500"/>
-              </a:spcAft>
-            </a:pPr>
-            <a:r>
-              <a:rPr sz="1650" b="1" i="0">
-                <a:solidFill>
-                  <a:srgbClr val="111111"/>
-                </a:solidFill>
-                <a:latin typeface="Meiryo"/>
-                <a:ea typeface="Meiryo"/>
-                <a:cs typeface="Meiryo"/>
-              </a:rPr>
-              <a:t>やったこと: 静的ライブラリを逆アセンブルして、仕様を実物から確定した</a:t>
-            </a:r>
-          </a:p>
-        </p:txBody>
-      </p:sp>
-      <p:graphicFrame>
-        <p:nvGraphicFramePr>
-          <p:cNvPr id="10" name="Table 9"/>
-          <p:cNvGraphicFramePr>
-            <a:graphicFrameLocks noGrp="1"/>
-          </p:cNvGraphicFramePr>
-          <p:nvPr/>
-        </p:nvGraphicFramePr>
-        <p:xfrm>
-          <a:off x="502920" y="2505456"/>
-          <a:ext cx="11185853" cy="1426464"/>
-        </p:xfrm>
-        <a:graphic>
-          <a:graphicData uri="http://schemas.openxmlformats.org/drawingml/2006/table">
-            <a:tbl>
-              <a:tblPr firstRow="0" bandRow="0">
-                <a:tableStyleId>{5940675A-B579-460E-94D1-54222C63F5DA}</a:tableStyleId>
-              </a:tblPr>
-              <a:tblGrid>
-                <a:gridCol w="2933994"/>
-                <a:gridCol w="2933994"/>
-                <a:gridCol w="5317865"/>
-              </a:tblGrid>
-              <a:tr h="475488">
-                <a:tc>
-                  <a:txBody>
-                    <a:bodyPr wrap="square"/>
-                    <a:lstStyle/>
-                    <a:p>
-                      <a:pPr algn="l"/>
-                      <a:r>
-                        <a:rPr sz="1450" b="1" i="0">
-                          <a:solidFill>
-                            <a:srgbClr val="111111"/>
-                          </a:solidFill>
-                          <a:latin typeface="Meiryo"/>
-                          <a:ea typeface="Meiryo"/>
-                          <a:cs typeface="Meiryo"/>
-                        </a:rPr>
-                        <a:t>調べたこと</a:t>
-                      </a:r>
-                    </a:p>
-                  </a:txBody>
-                  <a:tcPr marL="82296" marR="82296" marT="27432" marB="27432" anchor="ctr">
-                    <a:solidFill>
-                      <a:srgbClr val="E6E6E6"/>
-                    </a:solidFill>
-                  </a:tcPr>
-                </a:tc>
-                <a:tc>
-                  <a:txBody>
-                    <a:bodyPr wrap="square"/>
-                    <a:lstStyle/>
-                    <a:p>
-                      <a:pPr algn="l"/>
-                      <a:r>
-                        <a:rPr sz="1450" b="1" i="0">
-                          <a:solidFill>
-                            <a:srgbClr val="111111"/>
-                          </a:solidFill>
-                          <a:latin typeface="Meiryo"/>
-                          <a:ea typeface="Meiryo"/>
-                          <a:cs typeface="Meiryo"/>
-                        </a:rPr>
-                        <a:t>ヘッダの記述</a:t>
-                      </a:r>
-                    </a:p>
-                  </a:txBody>
-                  <a:tcPr marL="82296" marR="82296" marT="27432" marB="27432" anchor="ctr">
-                    <a:solidFill>
-                      <a:srgbClr val="E6E6E6"/>
-                    </a:solidFill>
-                  </a:tcPr>
-                </a:tc>
-                <a:tc>
-                  <a:txBody>
-                    <a:bodyPr wrap="square"/>
-                    <a:lstStyle/>
-                    <a:p>
-                      <a:pPr algn="l"/>
-                      <a:r>
-                        <a:rPr sz="1450" b="1" i="0">
-                          <a:solidFill>
-                            <a:srgbClr val="111111"/>
-                          </a:solidFill>
-                          <a:latin typeface="Meiryo"/>
-                          <a:ea typeface="Meiryo"/>
-                          <a:cs typeface="Meiryo"/>
-                        </a:rPr>
-                        <a:t>逆アセンブルした実体</a:t>
-                      </a:r>
-                    </a:p>
-                  </a:txBody>
-                  <a:tcPr marL="82296" marR="82296" marT="27432" marB="27432" anchor="ctr">
-                    <a:solidFill>
-                      <a:srgbClr val="E6E6E6"/>
-                    </a:solidFill>
-                  </a:tcPr>
-                </a:tc>
-              </a:tr>
-              <a:tr h="475488">
-                <a:tc>
-                  <a:txBody>
-                    <a:bodyPr wrap="square"/>
-                    <a:lstStyle/>
-                    <a:p>
-                      <a:pPr algn="l"/>
-                      <a:r>
-                        <a:rPr sz="1500" b="0" i="0">
-                          <a:solidFill>
-                            <a:srgbClr val="111111"/>
-                          </a:solidFill>
-                          <a:latin typeface="Meiryo"/>
-                          <a:ea typeface="Meiryo"/>
-                          <a:cs typeface="Meiryo"/>
-                        </a:rPr>
-                        <a:t>送信ペイロード上限</a:t>
-                      </a:r>
-                    </a:p>
-                  </a:txBody>
-                  <a:tcPr marL="82296" marR="82296" marT="27432" marB="27432" anchor="ctr">
-                    <a:solidFill>
-                      <a:srgbClr val="FFFFFF"/>
-                    </a:solidFill>
-                  </a:tcPr>
-                </a:tc>
-                <a:tc>
-                  <a:txBody>
-                    <a:bodyPr wrap="square"/>
-                    <a:lstStyle/>
-                    <a:p>
-                      <a:pPr algn="l"/>
-                      <a:r>
-                        <a:rPr sz="1500" b="0" i="0">
-                          <a:solidFill>
-                            <a:srgbClr val="111111"/>
-                          </a:solidFill>
-                          <a:latin typeface="Meiryo"/>
-                          <a:ea typeface="Meiryo"/>
-                          <a:cs typeface="Meiryo"/>
-                        </a:rPr>
-                        <a:t>300</a:t>
-                      </a:r>
-                    </a:p>
-                  </a:txBody>
-                  <a:tcPr marL="82296" marR="82296" marT="27432" marB="27432" anchor="ctr">
-                    <a:solidFill>
-                      <a:srgbClr val="FFFFFF"/>
-                    </a:solidFill>
-                  </a:tcPr>
-                </a:tc>
-                <a:tc>
-                  <a:txBody>
-                    <a:bodyPr wrap="square"/>
-                    <a:lstStyle/>
-                    <a:p>
-                      <a:pPr algn="l"/>
-                      <a:r>
-                        <a:rPr sz="1500" b="1" i="0">
-                          <a:solidFill>
-                            <a:srgbClr val="111111"/>
-                          </a:solidFill>
-                          <a:latin typeface="Meiryo"/>
-                          <a:ea typeface="Meiryo"/>
-                          <a:cs typeface="Meiryo"/>
-                        </a:rPr>
-                        <a:t>実行時 assert は 672</a:t>
-                      </a:r>
-                    </a:p>
-                  </a:txBody>
-                  <a:tcPr marL="82296" marR="82296" marT="27432" marB="27432" anchor="ctr">
-                    <a:solidFill>
-                      <a:srgbClr val="FFFFFF"/>
-                    </a:solidFill>
-                  </a:tcPr>
-                </a:tc>
-              </a:tr>
-              <a:tr h="475488">
-                <a:tc>
-                  <a:txBody>
-                    <a:bodyPr wrap="square"/>
-                    <a:lstStyle/>
-                    <a:p>
-                      <a:pPr algn="l"/>
-                      <a:r>
-                        <a:rPr sz="1500" b="0" i="0">
-                          <a:solidFill>
-                            <a:srgbClr val="111111"/>
-                          </a:solidFill>
-                          <a:latin typeface="Meiryo"/>
-                          <a:ea typeface="Meiryo"/>
-                          <a:cs typeface="Meiryo"/>
-                        </a:rPr>
-                        <a:t>RX ハンドラのスレッド</a:t>
-                      </a:r>
-                    </a:p>
-                  </a:txBody>
-                  <a:tcPr marL="82296" marR="82296" marT="27432" marB="27432" anchor="ctr">
-                    <a:solidFill>
-                      <a:srgbClr val="FFFFFF"/>
-                    </a:solidFill>
-                  </a:tcPr>
-                </a:tc>
-                <a:tc>
-                  <a:txBody>
-                    <a:bodyPr wrap="square"/>
-                    <a:lstStyle/>
-                    <a:p>
-                      <a:pPr algn="l"/>
-                      <a:r>
-                        <a:rPr sz="1500" b="0" i="0">
-                          <a:solidFill>
-                            <a:srgbClr val="111111"/>
-                          </a:solidFill>
-                          <a:latin typeface="Meiryo"/>
-                          <a:ea typeface="Meiryo"/>
-                          <a:cs typeface="Meiryo"/>
-                        </a:rPr>
-                        <a:t>記述なし</a:t>
-                      </a:r>
-                    </a:p>
-                  </a:txBody>
-                  <a:tcPr marL="82296" marR="82296" marT="27432" marB="27432" anchor="ctr">
-                    <a:solidFill>
-                      <a:srgbClr val="FFFFFF"/>
-                    </a:solidFill>
-                  </a:tcPr>
-                </a:tc>
-                <a:tc>
-                  <a:txBody>
-                    <a:bodyPr wrap="square"/>
-                    <a:lstStyle/>
-                    <a:p>
-                      <a:pPr algn="l"/>
-                      <a:r>
-                        <a:rPr sz="1500" b="1" i="0">
-                          <a:solidFill>
-                            <a:srgbClr val="111111"/>
-                          </a:solidFill>
-                          <a:latin typeface="Meiryo"/>
-                          <a:ea typeface="Meiryo"/>
-                          <a:cs typeface="Meiryo"/>
-                        </a:rPr>
-                        <a:t>BT スタック本体のループ (止めると全部止まる)</a:t>
-                      </a:r>
-                    </a:p>
-                  </a:txBody>
-                  <a:tcPr marL="82296" marR="82296" marT="27432" marB="27432" anchor="ctr">
-                    <a:solidFill>
-                      <a:srgbClr val="FFFFFF"/>
-                    </a:solidFill>
-                  </a:tcPr>
-                </a:tc>
-              </a:tr>
-            </a:tbl>
-          </a:graphicData>
-        </a:graphic>
-      </p:graphicFrame>
-      <p:sp>
-        <p:nvSpPr>
-          <p:cNvPr id="11" name="Rectangle 10"/>
-          <p:cNvSpPr/>
-          <p:nvPr/>
-        </p:nvSpPr>
-        <p:spPr>
-          <a:xfrm>
-            <a:off x="502920" y="4169663"/>
-            <a:ext cx="3545738" cy="1005840"/>
-          </a:xfrm>
-          <a:prstGeom prst="rect">
-            <a:avLst/>
-          </a:prstGeom>
-          <a:solidFill>
-            <a:srgbClr val="F4F4F4"/>
-          </a:solidFill>
-          <a:ln w="9525">
-            <a:solidFill>
-              <a:srgbClr val="9E9E9E"/>
-            </a:solidFill>
-          </a:ln>
-          <a:effectLst/>
-        </p:spPr>
-        <p:style>
-          <a:lnRef idx="1">
-            <a:schemeClr val="accent1"/>
-          </a:lnRef>
-          <a:fillRef idx="3">
-            <a:schemeClr val="accent1"/>
-          </a:fillRef>
-          <a:effectRef idx="2">
-            <a:schemeClr val="accent1"/>
-          </a:effectRef>
-          <a:fontRef idx="minor">
-            <a:schemeClr val="lt1"/>
-          </a:fontRef>
-        </p:style>
-        <p:txBody>
-          <a:bodyPr rtlCol="0" anchor="ctr"/>
-          <a:lstStyle/>
-          <a:p/>
-        </p:txBody>
-      </p:sp>
-      <p:sp>
-        <p:nvSpPr>
-          <p:cNvPr id="12" name="TextBox 11"/>
-          <p:cNvSpPr txBox="1"/>
-          <p:nvPr/>
-        </p:nvSpPr>
-        <p:spPr>
-          <a:xfrm>
-            <a:off x="502920" y="4224528"/>
-            <a:ext cx="3545738" cy="566928"/>
-          </a:xfrm>
-          <a:prstGeom prst="rect">
-            <a:avLst/>
-          </a:prstGeom>
-          <a:noFill/>
-        </p:spPr>
-        <p:txBody>
-          <a:bodyPr wrap="square" lIns="18288" rIns="18288" tIns="10972" bIns="10972" anchor="t">
-            <a:spAutoFit/>
-          </a:bodyPr>
-          <a:lstStyle/>
-          <a:p>
-            <a:pPr algn="ctr">
-              <a:spcAft>
-                <a:spcPts val="500"/>
-              </a:spcAft>
-            </a:pPr>
-            <a:r>
-              <a:rPr sz="3400" b="1" i="0">
-                <a:solidFill>
-                  <a:srgbClr val="111111"/>
-                </a:solidFill>
-                <a:latin typeface="Meiryo"/>
-                <a:ea typeface="Meiryo"/>
-                <a:cs typeface="Meiryo"/>
-              </a:rPr>
-              <a:t>300</a:t>
-            </a:r>
-          </a:p>
-        </p:txBody>
-      </p:sp>
-      <p:sp>
-        <p:nvSpPr>
-          <p:cNvPr id="13" name="TextBox 12"/>
-          <p:cNvSpPr txBox="1"/>
-          <p:nvPr/>
-        </p:nvSpPr>
-        <p:spPr>
-          <a:xfrm>
-            <a:off x="502920" y="4791456"/>
-            <a:ext cx="3545738" cy="310896"/>
-          </a:xfrm>
-          <a:prstGeom prst="rect">
-            <a:avLst/>
-          </a:prstGeom>
-          <a:noFill/>
-        </p:spPr>
-        <p:txBody>
-          <a:bodyPr wrap="square" lIns="18288" rIns="18288" tIns="10972" bIns="10972" anchor="t">
-            <a:spAutoFit/>
-          </a:bodyPr>
-          <a:lstStyle/>
-          <a:p>
-            <a:pPr algn="ctr">
-              <a:spcAft>
-                <a:spcPts val="500"/>
-              </a:spcAft>
-            </a:pPr>
-            <a:r>
-              <a:rPr sz="1350" b="0" i="0">
-                <a:solidFill>
-                  <a:srgbClr val="4A4A4A"/>
-                </a:solidFill>
-                <a:latin typeface="Meiryo"/>
-                <a:ea typeface="Meiryo"/>
-                <a:cs typeface="Meiryo"/>
-              </a:rPr>
-              <a:t>ヘッダの定数</a:t>
-            </a:r>
-          </a:p>
-        </p:txBody>
-      </p:sp>
-      <p:sp>
-        <p:nvSpPr>
-          <p:cNvPr id="14" name="Rectangle 13"/>
-          <p:cNvSpPr/>
-          <p:nvPr/>
-        </p:nvSpPr>
-        <p:spPr>
-          <a:xfrm>
-            <a:off x="4322978" y="4169663"/>
-            <a:ext cx="3545738" cy="1005840"/>
-          </a:xfrm>
-          <a:prstGeom prst="rect">
-            <a:avLst/>
-          </a:prstGeom>
-          <a:solidFill>
-            <a:srgbClr val="F4F4F4"/>
-          </a:solidFill>
-          <a:ln w="9525">
-            <a:solidFill>
-              <a:srgbClr val="9E9E9E"/>
-            </a:solidFill>
-          </a:ln>
-          <a:effectLst/>
-        </p:spPr>
-        <p:style>
-          <a:lnRef idx="1">
-            <a:schemeClr val="accent1"/>
-          </a:lnRef>
-          <a:fillRef idx="3">
-            <a:schemeClr val="accent1"/>
-          </a:fillRef>
-          <a:effectRef idx="2">
-            <a:schemeClr val="accent1"/>
-          </a:effectRef>
-          <a:fontRef idx="minor">
-            <a:schemeClr val="lt1"/>
-          </a:fontRef>
-        </p:style>
-        <p:txBody>
-          <a:bodyPr rtlCol="0" anchor="ctr"/>
-          <a:lstStyle/>
-          <a:p/>
-        </p:txBody>
-      </p:sp>
-      <p:sp>
-        <p:nvSpPr>
-          <p:cNvPr id="15" name="TextBox 14"/>
-          <p:cNvSpPr txBox="1"/>
-          <p:nvPr/>
-        </p:nvSpPr>
-        <p:spPr>
-          <a:xfrm>
-            <a:off x="4322978" y="4224528"/>
-            <a:ext cx="3545738" cy="566928"/>
-          </a:xfrm>
-          <a:prstGeom prst="rect">
-            <a:avLst/>
-          </a:prstGeom>
-          <a:noFill/>
-        </p:spPr>
-        <p:txBody>
-          <a:bodyPr wrap="square" lIns="18288" rIns="18288" tIns="10972" bIns="10972" anchor="t">
-            <a:spAutoFit/>
-          </a:bodyPr>
-          <a:lstStyle/>
-          <a:p>
-            <a:pPr algn="ctr">
-              <a:spcAft>
-                <a:spcPts val="500"/>
-              </a:spcAft>
-            </a:pPr>
-            <a:r>
-              <a:rPr sz="3400" b="1" i="0">
-                <a:solidFill>
-                  <a:srgbClr val="111111"/>
-                </a:solidFill>
-                <a:latin typeface="Meiryo"/>
-                <a:ea typeface="Meiryo"/>
-                <a:cs typeface="Meiryo"/>
-              </a:rPr>
-              <a:t>672</a:t>
-            </a:r>
-          </a:p>
-        </p:txBody>
-      </p:sp>
-      <p:sp>
-        <p:nvSpPr>
-          <p:cNvPr id="16" name="TextBox 15"/>
-          <p:cNvSpPr txBox="1"/>
-          <p:nvPr/>
-        </p:nvSpPr>
-        <p:spPr>
-          <a:xfrm>
-            <a:off x="4322978" y="4791456"/>
-            <a:ext cx="3545738" cy="310896"/>
-          </a:xfrm>
-          <a:prstGeom prst="rect">
-            <a:avLst/>
-          </a:prstGeom>
-          <a:noFill/>
-        </p:spPr>
-        <p:txBody>
-          <a:bodyPr wrap="square" lIns="18288" rIns="18288" tIns="10972" bIns="10972" anchor="t">
-            <a:spAutoFit/>
-          </a:bodyPr>
-          <a:lstStyle/>
-          <a:p>
-            <a:pPr algn="ctr">
-              <a:spcAft>
-                <a:spcPts val="500"/>
-              </a:spcAft>
-            </a:pPr>
-            <a:r>
-              <a:rPr sz="1350" b="0" i="0">
-                <a:solidFill>
-                  <a:srgbClr val="4A4A4A"/>
-                </a:solidFill>
-                <a:latin typeface="Meiryo"/>
-                <a:ea typeface="Meiryo"/>
-                <a:cs typeface="Meiryo"/>
-              </a:rPr>
-              <a:t>バイナリの assert</a:t>
-            </a:r>
-          </a:p>
-        </p:txBody>
-      </p:sp>
-      <p:sp>
-        <p:nvSpPr>
-          <p:cNvPr id="17" name="Rectangle 16"/>
-          <p:cNvSpPr/>
-          <p:nvPr/>
-        </p:nvSpPr>
-        <p:spPr>
-          <a:xfrm>
-            <a:off x="8143036" y="4169663"/>
-            <a:ext cx="3545738" cy="1005840"/>
-          </a:xfrm>
-          <a:prstGeom prst="rect">
-            <a:avLst/>
-          </a:prstGeom>
-          <a:solidFill>
-            <a:srgbClr val="E6E6E6"/>
-          </a:solidFill>
-          <a:ln w="9525">
-            <a:solidFill>
-              <a:srgbClr val="9E9E9E"/>
-            </a:solidFill>
-          </a:ln>
-          <a:effectLst/>
-        </p:spPr>
-        <p:style>
-          <a:lnRef idx="1">
-            <a:schemeClr val="accent1"/>
-          </a:lnRef>
-          <a:fillRef idx="3">
-            <a:schemeClr val="accent1"/>
-          </a:fillRef>
-          <a:effectRef idx="2">
-            <a:schemeClr val="accent1"/>
-          </a:effectRef>
-          <a:fontRef idx="minor">
-            <a:schemeClr val="lt1"/>
-          </a:fontRef>
-        </p:style>
-        <p:txBody>
-          <a:bodyPr rtlCol="0" anchor="ctr"/>
-          <a:lstStyle/>
-          <a:p/>
-        </p:txBody>
-      </p:sp>
-      <p:sp>
-        <p:nvSpPr>
-          <p:cNvPr id="18" name="TextBox 17"/>
-          <p:cNvSpPr txBox="1"/>
-          <p:nvPr/>
-        </p:nvSpPr>
-        <p:spPr>
-          <a:xfrm>
-            <a:off x="8143036" y="4224528"/>
-            <a:ext cx="3545738" cy="566928"/>
-          </a:xfrm>
-          <a:prstGeom prst="rect">
-            <a:avLst/>
-          </a:prstGeom>
-          <a:noFill/>
-        </p:spPr>
-        <p:txBody>
-          <a:bodyPr wrap="square" lIns="18288" rIns="18288" tIns="10972" bIns="10972" anchor="t">
-            <a:spAutoFit/>
-          </a:bodyPr>
-          <a:lstStyle/>
-          <a:p>
-            <a:pPr algn="ctr">
-              <a:spcAft>
-                <a:spcPts val="500"/>
-              </a:spcAft>
-            </a:pPr>
-            <a:r>
-              <a:rPr sz="3400" b="1" i="0">
-                <a:solidFill>
-                  <a:srgbClr val="111111"/>
-                </a:solidFill>
-                <a:latin typeface="Meiryo"/>
-                <a:ea typeface="Meiryo"/>
-                <a:cs typeface="Meiryo"/>
-              </a:rPr>
-              <a:t>512</a:t>
-            </a:r>
-          </a:p>
-        </p:txBody>
-      </p:sp>
-      <p:sp>
-        <p:nvSpPr>
-          <p:cNvPr id="19" name="TextBox 18"/>
-          <p:cNvSpPr txBox="1"/>
-          <p:nvPr/>
-        </p:nvSpPr>
-        <p:spPr>
-          <a:xfrm>
-            <a:off x="8143036" y="4791456"/>
-            <a:ext cx="3545738" cy="310896"/>
-          </a:xfrm>
-          <a:prstGeom prst="rect">
-            <a:avLst/>
-          </a:prstGeom>
-          <a:noFill/>
-        </p:spPr>
-        <p:txBody>
-          <a:bodyPr wrap="square" lIns="18288" rIns="18288" tIns="10972" bIns="10972" anchor="t">
-            <a:spAutoFit/>
-          </a:bodyPr>
-          <a:lstStyle/>
-          <a:p>
-            <a:pPr algn="ctr">
-              <a:spcAft>
-                <a:spcPts val="500"/>
-              </a:spcAft>
-            </a:pPr>
-            <a:r>
-              <a:rPr sz="1350" b="0" i="0">
-                <a:solidFill>
-                  <a:srgbClr val="4A4A4A"/>
-                </a:solidFill>
-                <a:latin typeface="Meiryo"/>
-                <a:ea typeface="Meiryo"/>
-                <a:cs typeface="Meiryo"/>
-              </a:rPr>
-              <a:t>実測値</a:t>
-            </a:r>
-          </a:p>
-        </p:txBody>
-      </p:sp>
-      <p:sp>
-        <p:nvSpPr>
-          <p:cNvPr id="20" name="TextBox 19"/>
-          <p:cNvSpPr txBox="1"/>
-          <p:nvPr/>
-        </p:nvSpPr>
-        <p:spPr>
-          <a:xfrm>
-            <a:off x="502920" y="5321808"/>
-            <a:ext cx="11185855" cy="402336"/>
-          </a:xfrm>
-          <a:prstGeom prst="rect">
-            <a:avLst/>
-          </a:prstGeom>
-          <a:noFill/>
-        </p:spPr>
-        <p:txBody>
-          <a:bodyPr wrap="square" lIns="0" rIns="0" tIns="0" bIns="0" anchor="t">
-            <a:spAutoFit/>
-          </a:bodyPr>
-          <a:lstStyle/>
-          <a:p>
-            <a:pPr algn="ctr">
-              <a:spcAft>
-                <a:spcPts val="500"/>
-              </a:spcAft>
-            </a:pPr>
-            <a:r>
-              <a:rPr sz="1400" b="0" i="0">
-                <a:solidFill>
-                  <a:srgbClr val="4A4A4A"/>
-                </a:solidFill>
-                <a:latin typeface="Meiryo"/>
-                <a:ea typeface="Meiryo"/>
-                <a:cs typeface="Meiryo"/>
-              </a:rPr>
-              <a:t>起動時に 4 → 64 → … → 668 B を掃引して上限を実測。256 B 超はフレームに分割し、in-flight を 536 B に抑える</a:t>
-            </a:r>
-          </a:p>
-        </p:txBody>
-      </p:sp>
-      <p:sp>
-        <p:nvSpPr>
-          <p:cNvPr id="21" name="Rectangle 20"/>
-          <p:cNvSpPr/>
-          <p:nvPr/>
-        </p:nvSpPr>
-        <p:spPr>
-          <a:xfrm>
-            <a:off x="502920" y="5797296"/>
-            <a:ext cx="11185855" cy="512064"/>
-          </a:xfrm>
-          <a:prstGeom prst="rect">
-            <a:avLst/>
-          </a:prstGeom>
-          <a:solidFill>
-            <a:srgbClr val="E6E6E6"/>
-          </a:solidFill>
-          <a:ln w="9525">
-            <a:solidFill>
-              <a:srgbClr val="9E9E9E"/>
-            </a:solidFill>
-          </a:ln>
-          <a:effectLst/>
-        </p:spPr>
-        <p:style>
-          <a:lnRef idx="1">
-            <a:schemeClr val="accent1"/>
-          </a:lnRef>
-          <a:fillRef idx="3">
-            <a:schemeClr val="accent1"/>
-          </a:fillRef>
-          <a:effectRef idx="2">
-            <a:schemeClr val="accent1"/>
-          </a:effectRef>
-          <a:fontRef idx="minor">
-            <a:schemeClr val="lt1"/>
-          </a:fontRef>
-        </p:style>
-        <p:txBody>
-          <a:bodyPr rtlCol="0" anchor="ctr"/>
-          <a:lstStyle/>
-          <a:p/>
-        </p:txBody>
-      </p:sp>
-      <p:sp>
-        <p:nvSpPr>
-          <p:cNvPr id="22" name="TextBox 21"/>
-          <p:cNvSpPr txBox="1"/>
-          <p:nvPr/>
-        </p:nvSpPr>
-        <p:spPr>
-          <a:xfrm>
-            <a:off x="502920" y="5797296"/>
-            <a:ext cx="11185855" cy="512064"/>
-          </a:xfrm>
-          <a:prstGeom prst="rect">
-            <a:avLst/>
-          </a:prstGeom>
-          <a:noFill/>
-        </p:spPr>
-        <p:txBody>
-          <a:bodyPr wrap="square" tIns="54864" bIns="54864" anchor="ctr">
-            <a:spAutoFit/>
-          </a:bodyPr>
-          <a:lstStyle/>
-          <a:p>
-            <a:pPr algn="ctr">
-              <a:spcAft>
-                <a:spcPts val="500"/>
-              </a:spcAft>
-            </a:pPr>
-            <a:r>
-              <a:rPr sz="1700" b="1" i="0">
-                <a:solidFill>
-                  <a:srgbClr val="111111"/>
-                </a:solidFill>
-                <a:latin typeface="Meiryo"/>
-                <a:ea typeface="Meiryo"/>
-                <a:cs typeface="Meiryo"/>
-              </a:rPr>
-              <a:t>ヘッダを信じるな。リンクされるバイナリを信じろ。</a:t>
             </a:r>
           </a:p>
         </p:txBody>
@@ -26193,7 +26726,7 @@
 </file>
 
 <file path=ppt/theme/theme2.xml><?xml version="1.0" encoding="utf-8"?>
-<a:theme xmlns:a="http://schemas.openxmlformats.org/drawingml/2006/main" name="Office Theme">
+<a:theme xmlns:a="http://schemas.openxmlformats.org/drawingml/2006/main" name="Office テーマ">
   <a:themeElements>
     <a:clrScheme name="Office">
       <a:dk1>
@@ -26203,44 +26736,44 @@
         <a:sysClr val="window" lastClr="FFFFFF"/>
       </a:lt1>
       <a:dk2>
-        <a:srgbClr val="1F497D"/>
+        <a:srgbClr val="0E2841"/>
       </a:dk2>
       <a:lt2>
-        <a:srgbClr val="EEECE1"/>
+        <a:srgbClr val="E8E8E8"/>
       </a:lt2>
       <a:accent1>
-        <a:srgbClr val="4F81BD"/>
+        <a:srgbClr val="156082"/>
       </a:accent1>
       <a:accent2>
-        <a:srgbClr val="C0504D"/>
+        <a:srgbClr val="E97132"/>
       </a:accent2>
       <a:accent3>
-        <a:srgbClr val="9BBB59"/>
+        <a:srgbClr val="196B24"/>
       </a:accent3>
       <a:accent4>
-        <a:srgbClr val="8064A2"/>
+        <a:srgbClr val="0F9ED5"/>
       </a:accent4>
       <a:accent5>
-        <a:srgbClr val="4BACC6"/>
+        <a:srgbClr val="A02B93"/>
       </a:accent5>
       <a:accent6>
-        <a:srgbClr val="F79646"/>
+        <a:srgbClr val="4EA72E"/>
       </a:accent6>
       <a:hlink>
-        <a:srgbClr val="0000FF"/>
+        <a:srgbClr val="467886"/>
       </a:hlink>
       <a:folHlink>
-        <a:srgbClr val="800080"/>
+        <a:srgbClr val="96607D"/>
       </a:folHlink>
     </a:clrScheme>
     <a:fontScheme name="Office">
       <a:majorFont>
-        <a:latin typeface="Calibri"/>
+        <a:latin typeface="游ゴシック Light" panose="02110004020202020204"/>
         <a:ea typeface=""/>
         <a:cs typeface=""/>
-        <a:font script="Jpan" typeface="ＭＳ Ｐゴシック"/>
+        <a:font script="Jpan" typeface="游ゴシック Light"/>
         <a:font script="Hang" typeface="맑은 고딕"/>
-        <a:font script="Hans" typeface="宋体"/>
+        <a:font script="Hans" typeface="等线 Light"/>
         <a:font script="Hant" typeface="新細明體"/>
         <a:font script="Arab" typeface="Times New Roman"/>
         <a:font script="Hebr" typeface="Times New Roman"/>
@@ -26268,14 +26801,31 @@
         <a:font script="Viet" typeface="Times New Roman"/>
         <a:font script="Uigh" typeface="Microsoft Uighur"/>
         <a:font script="Geor" typeface="Sylfaen"/>
+        <a:font script="Armn" typeface="Arial"/>
+        <a:font script="Bugi" typeface="Leelawadee UI"/>
+        <a:font script="Bopo" typeface="Microsoft JhengHei"/>
+        <a:font script="Java" typeface="Javanese Text"/>
+        <a:font script="Lisu" typeface="Segoe UI"/>
+        <a:font script="Mymr" typeface="Myanmar Text"/>
+        <a:font script="Nkoo" typeface="Ebrima"/>
+        <a:font script="Olck" typeface="Nirmala UI"/>
+        <a:font script="Osma" typeface="Ebrima"/>
+        <a:font script="Phag" typeface="Phagspa"/>
+        <a:font script="Syrn" typeface="Estrangelo Edessa"/>
+        <a:font script="Syrj" typeface="Estrangelo Edessa"/>
+        <a:font script="Syre" typeface="Estrangelo Edessa"/>
+        <a:font script="Sora" typeface="Nirmala UI"/>
+        <a:font script="Tale" typeface="Microsoft Tai Le"/>
+        <a:font script="Talu" typeface="Microsoft New Tai Lue"/>
+        <a:font script="Tfng" typeface="Ebrima"/>
       </a:majorFont>
       <a:minorFont>
-        <a:latin typeface="Calibri"/>
+        <a:latin typeface="游ゴシック" panose="02110004020202020204"/>
         <a:ea typeface=""/>
         <a:cs typeface=""/>
-        <a:font script="Jpan" typeface="ＭＳ Ｐゴシック"/>
+        <a:font script="Jpan" typeface="游ゴシック"/>
         <a:font script="Hang" typeface="맑은 고딕"/>
-        <a:font script="Hans" typeface="宋体"/>
+        <a:font script="Hans" typeface="等线"/>
         <a:font script="Hant" typeface="新細明體"/>
         <a:font script="Arab" typeface="Arial"/>
         <a:font script="Hebr" typeface="Arial"/>
@@ -26303,6 +26853,23 @@
         <a:font script="Viet" typeface="Arial"/>
         <a:font script="Uigh" typeface="Microsoft Uighur"/>
         <a:font script="Geor" typeface="Sylfaen"/>
+        <a:font script="Armn" typeface="Arial"/>
+        <a:font script="Bugi" typeface="Leelawadee UI"/>
+        <a:font script="Bopo" typeface="Microsoft JhengHei"/>
+        <a:font script="Java" typeface="Javanese Text"/>
+        <a:font script="Lisu" typeface="Segoe UI"/>
+        <a:font script="Mymr" typeface="Myanmar Text"/>
+        <a:font script="Nkoo" typeface="Ebrima"/>
+        <a:font script="Olck" typeface="Nirmala UI"/>
+        <a:font script="Osma" typeface="Ebrima"/>
+        <a:font script="Phag" typeface="Phagspa"/>
+        <a:font script="Syrn" typeface="Estrangelo Edessa"/>
+        <a:font script="Syrj" typeface="Estrangelo Edessa"/>
+        <a:font script="Syre" typeface="Estrangelo Edessa"/>
+        <a:font script="Sora" typeface="Nirmala UI"/>
+        <a:font script="Tale" typeface="Microsoft Tai Le"/>
+        <a:font script="Talu" typeface="Microsoft New Tai Lue"/>
+        <a:font script="Tfng" typeface="Ebrima"/>
       </a:minorFont>
     </a:fontScheme>
     <a:fmtScheme name="Office">
@@ -26314,180 +26881,136 @@
           <a:gsLst>
             <a:gs pos="0">
               <a:schemeClr val="phClr">
-                <a:tint val="50000"/>
-                <a:satMod val="300000"/>
+                <a:lumMod val="110000"/>
+                <a:satMod val="105000"/>
+                <a:tint val="67000"/>
               </a:schemeClr>
             </a:gs>
-            <a:gs pos="35000">
+            <a:gs pos="50000">
               <a:schemeClr val="phClr">
-                <a:tint val="37000"/>
-                <a:satMod val="300000"/>
+                <a:lumMod val="105000"/>
+                <a:satMod val="103000"/>
+                <a:tint val="73000"/>
               </a:schemeClr>
             </a:gs>
             <a:gs pos="100000">
               <a:schemeClr val="phClr">
-                <a:tint val="15000"/>
-                <a:satMod val="350000"/>
+                <a:lumMod val="105000"/>
+                <a:satMod val="109000"/>
+                <a:tint val="81000"/>
               </a:schemeClr>
             </a:gs>
           </a:gsLst>
-          <a:lin ang="16200000" scaled="1"/>
+          <a:lin ang="5400000" scaled="0"/>
         </a:gradFill>
         <a:gradFill rotWithShape="1">
           <a:gsLst>
             <a:gs pos="0">
               <a:schemeClr val="phClr">
-                <a:tint val="100000"/>
+                <a:satMod val="103000"/>
+                <a:lumMod val="102000"/>
+                <a:tint val="94000"/>
+              </a:schemeClr>
+            </a:gs>
+            <a:gs pos="50000">
+              <a:schemeClr val="phClr">
+                <a:satMod val="110000"/>
+                <a:lumMod val="100000"/>
                 <a:shade val="100000"/>
-                <a:satMod val="130000"/>
               </a:schemeClr>
             </a:gs>
             <a:gs pos="100000">
               <a:schemeClr val="phClr">
-                <a:tint val="50000"/>
-                <a:shade val="100000"/>
-                <a:satMod val="350000"/>
+                <a:lumMod val="99000"/>
+                <a:satMod val="120000"/>
+                <a:shade val="78000"/>
               </a:schemeClr>
             </a:gs>
           </a:gsLst>
-          <a:lin ang="16200000" scaled="0"/>
+          <a:lin ang="5400000" scaled="0"/>
         </a:gradFill>
       </a:fillStyleLst>
       <a:lnStyleLst>
-        <a:ln w="9525" cap="flat" cmpd="sng" algn="ctr">
+        <a:ln w="12700" cap="flat" cmpd="sng" algn="ctr">
           <a:solidFill>
-            <a:schemeClr val="phClr">
-              <a:shade val="95000"/>
-              <a:satMod val="105000"/>
-            </a:schemeClr>
+            <a:schemeClr val="phClr"/>
           </a:solidFill>
           <a:prstDash val="solid"/>
+          <a:miter lim="800000"/>
+        </a:ln>
+        <a:ln w="19050" cap="flat" cmpd="sng" algn="ctr">
+          <a:solidFill>
+            <a:schemeClr val="phClr"/>
+          </a:solidFill>
+          <a:prstDash val="solid"/>
+          <a:miter lim="800000"/>
         </a:ln>
         <a:ln w="25400" cap="flat" cmpd="sng" algn="ctr">
           <a:solidFill>
             <a:schemeClr val="phClr"/>
           </a:solidFill>
           <a:prstDash val="solid"/>
-        </a:ln>
-        <a:ln w="38100" cap="flat" cmpd="sng" algn="ctr">
-          <a:solidFill>
-            <a:schemeClr val="phClr"/>
-          </a:solidFill>
-          <a:prstDash val="solid"/>
+          <a:miter lim="800000"/>
         </a:ln>
       </a:lnStyleLst>
       <a:effectStyleLst>
         <a:effectStyle>
+          <a:effectLst/>
+        </a:effectStyle>
+        <a:effectStyle>
+          <a:effectLst/>
+        </a:effectStyle>
+        <a:effectStyle>
           <a:effectLst>
-            <a:outerShdw blurRad="40000" dist="20000" dir="5400000" rotWithShape="0">
+            <a:outerShdw blurRad="57150" dist="19050" dir="5400000" algn="ctr" rotWithShape="0">
               <a:srgbClr val="000000">
-                <a:alpha val="38000"/>
+                <a:alpha val="63000"/>
               </a:srgbClr>
             </a:outerShdw>
           </a:effectLst>
-        </a:effectStyle>
-        <a:effectStyle>
-          <a:effectLst>
-            <a:outerShdw blurRad="40000" dist="23000" dir="5400000" rotWithShape="0">
-              <a:srgbClr val="000000">
-                <a:alpha val="35000"/>
-              </a:srgbClr>
-            </a:outerShdw>
-          </a:effectLst>
-        </a:effectStyle>
-        <a:effectStyle>
-          <a:effectLst>
-            <a:outerShdw blurRad="40000" dist="23000" dir="5400000" rotWithShape="0">
-              <a:srgbClr val="000000">
-                <a:alpha val="35000"/>
-              </a:srgbClr>
-            </a:outerShdw>
-          </a:effectLst>
-          <a:scene3d>
-            <a:camera prst="orthographicFront">
-              <a:rot lat="0" lon="0" rev="0"/>
-            </a:camera>
-            <a:lightRig rig="threePt" dir="t">
-              <a:rot lat="0" lon="0" rev="1200000"/>
-            </a:lightRig>
-          </a:scene3d>
-          <a:sp3d>
-            <a:bevelT w="63500" h="25400"/>
-          </a:sp3d>
         </a:effectStyle>
       </a:effectStyleLst>
       <a:bgFillStyleLst>
         <a:solidFill>
           <a:schemeClr val="phClr"/>
         </a:solidFill>
+        <a:solidFill>
+          <a:schemeClr val="phClr">
+            <a:tint val="95000"/>
+            <a:satMod val="170000"/>
+          </a:schemeClr>
+        </a:solidFill>
         <a:gradFill rotWithShape="1">
           <a:gsLst>
             <a:gs pos="0">
               <a:schemeClr val="phClr">
-                <a:tint val="40000"/>
-                <a:satMod val="350000"/>
+                <a:tint val="93000"/>
+                <a:satMod val="150000"/>
+                <a:shade val="98000"/>
+                <a:lumMod val="102000"/>
               </a:schemeClr>
             </a:gs>
-            <a:gs pos="40000">
+            <a:gs pos="50000">
               <a:schemeClr val="phClr">
-                <a:tint val="45000"/>
-                <a:shade val="99000"/>
-                <a:satMod val="350000"/>
+                <a:tint val="98000"/>
+                <a:satMod val="130000"/>
+                <a:shade val="90000"/>
+                <a:lumMod val="103000"/>
               </a:schemeClr>
             </a:gs>
             <a:gs pos="100000">
               <a:schemeClr val="phClr">
-                <a:shade val="20000"/>
-                <a:satMod val="255000"/>
+                <a:shade val="63000"/>
+                <a:satMod val="120000"/>
               </a:schemeClr>
             </a:gs>
           </a:gsLst>
-          <a:path path="circle">
-            <a:fillToRect l="50000" t="-80000" r="50000" b="180000"/>
-          </a:path>
-        </a:gradFill>
-        <a:gradFill rotWithShape="1">
-          <a:gsLst>
-            <a:gs pos="0">
-              <a:schemeClr val="phClr">
-                <a:tint val="80000"/>
-                <a:satMod val="300000"/>
-              </a:schemeClr>
-            </a:gs>
-            <a:gs pos="100000">
-              <a:schemeClr val="phClr">
-                <a:shade val="30000"/>
-                <a:satMod val="200000"/>
-              </a:schemeClr>
-            </a:gs>
-          </a:gsLst>
-          <a:path path="circle">
-            <a:fillToRect l="50000" t="50000" r="50000" b="50000"/>
-          </a:path>
+          <a:lin ang="5400000" scaled="0"/>
         </a:gradFill>
       </a:bgFillStyleLst>
     </a:fmtScheme>
   </a:themeElements>
   <a:objectDefaults>
-    <a:spDef>
-      <a:spPr/>
-      <a:bodyPr/>
-      <a:lstStyle/>
-      <a:style>
-        <a:lnRef idx="1">
-          <a:schemeClr val="accent1"/>
-        </a:lnRef>
-        <a:fillRef idx="3">
-          <a:schemeClr val="accent1"/>
-        </a:fillRef>
-        <a:effectRef idx="2">
-          <a:schemeClr val="accent1"/>
-        </a:effectRef>
-        <a:fontRef idx="minor">
-          <a:schemeClr val="lt1"/>
-        </a:fontRef>
-      </a:style>
-    </a:spDef>
     <a:lnDef>
       <a:spPr/>
       <a:bodyPr/>
@@ -26509,5 +27032,10 @@
     </a:lnDef>
   </a:objectDefaults>
   <a:extraClrSchemeLst/>
+  <a:extLst>
+    <a:ext uri="{05A4C25C-085E-4340-85A3-A5531E510DB2}">
+      <thm15:themeFamily xmlns:thm15="http://schemas.microsoft.com/office/thememl/2012/main" name="Office Theme" id="{2E142A2C-CD16-42D6-873A-C26D2A0506FA}" vid="{1BDDFF52-6CD6-40A5-AB3C-68EB2F1E4D0A}"/>
+    </a:ext>
+  </a:extLst>
 </a:theme>
 </file>